--- a/docs/fmva/packs/day4-slides.pptx
+++ b/docs/fmva/packs/day4-slides.pptx
@@ -15,9 +15,15 @@
     <p:sldId id="263" r:id="rId9"/>
     <p:sldId id="264" r:id="rId10"/>
     <p:sldId id="265" r:id="rId11"/>
+    <p:sldId id="266" r:id="rId12"/>
+    <p:sldId id="267" r:id="rId13"/>
+    <p:sldId id="268" r:id="rId14"/>
+    <p:sldId id="269" r:id="rId15"/>
+    <p:sldId id="270" r:id="rId16"/>
+    <p:sldId id="271" r:id="rId17"/>
   </p:sldIdLst>
   <p:notesMasterIdLst>
-    <p:notesMasterId r:id="rId12"/>
+    <p:notesMasterId r:id="rId18"/>
   </p:notesMasterIdLst>
   <p:sldSz cx="9144000" cy="5148072"/>
   <p:notesSz cx="5148072" cy="9144000"/>
@@ -623,6 +629,534 @@
             <a:fld id="{F7021451-1387-4CA6-816F-3879F97B5CBC}" type="slidenum">
               <a:rPr lang="en-US"/>
               <a:t>10</a:t>
+            </a:fld>
+            <a:endParaRPr lang="en-US"/>
+          </a:p>
+        </p:txBody>
+      </p:sp>
+    </p:spTree>
+    <p:extLst>
+      <p:ext uri="{BB962C8B-B14F-4D97-AF65-F5344CB8AC3E}">
+        <p14:creationId xmlns:p14="http://schemas.microsoft.com/office/powerpoint/2010/main" val="1024086991"/>
+      </p:ext>
+    </p:extLst>
+  </p:cSld>
+  <p:clrMapOvr>
+    <a:masterClrMapping/>
+  </p:clrMapOvr>
+</p:notes>
+</file>
+
+<file path=ppt/notesSlides/notesSlide11.xml><?xml version="1.0" encoding="utf-8"?>
+<p:notes xmlns:a="http://schemas.openxmlformats.org/drawingml/2006/main" xmlns:r="http://schemas.openxmlformats.org/officeDocument/2006/relationships" xmlns:p="http://schemas.openxmlformats.org/presentationml/2006/main">
+  <p:cSld>
+    <p:spTree>
+      <p:nvGrpSpPr>
+        <p:cNvPr id="1" name=""/>
+        <p:cNvGrpSpPr/>
+        <p:nvPr/>
+      </p:nvGrpSpPr>
+      <p:grpSpPr>
+        <a:xfrm>
+          <a:off x="0" y="0"/>
+          <a:ext cx="0" cy="0"/>
+          <a:chOff x="0" y="0"/>
+          <a:chExt cx="0" cy="0"/>
+        </a:xfrm>
+      </p:grpSpPr>
+      <p:sp>
+        <p:nvSpPr>
+          <p:cNvPr id="2" name="Slide Image Placeholder 1"/>
+          <p:cNvSpPr>
+            <a:spLocks noGrp="1" noRot="1" noChangeAspect="1"/>
+          </p:cNvSpPr>
+          <p:nvPr>
+            <p:ph type="sldImg"/>
+          </p:nvPr>
+        </p:nvSpPr>
+        <p:spPr/>
+      </p:sp>
+      <p:sp>
+        <p:nvSpPr>
+          <p:cNvPr id="3" name="Notes Placeholder 2"/>
+          <p:cNvSpPr>
+            <a:spLocks noGrp="1"/>
+          </p:cNvSpPr>
+          <p:nvPr>
+            <p:ph type="body" idx="1"/>
+          </p:nvPr>
+        </p:nvSpPr>
+        <p:spPr/>
+        <p:txBody>
+          <a:bodyPr/>
+          <a:lstStyle/>
+          <a:p>
+            <a:r>
+              <a:rPr lang="en-US" dirty="0"/>
+              <a:t/>
+            </a:r>
+            <a:endParaRPr lang="en-US" dirty="0"/>
+          </a:p>
+        </p:txBody>
+      </p:sp>
+      <p:sp>
+        <p:nvSpPr>
+          <p:cNvPr id="4" name="Slide Number Placeholder 3"/>
+          <p:cNvSpPr>
+            <a:spLocks noGrp="1"/>
+          </p:cNvSpPr>
+          <p:nvPr>
+            <p:ph type="sldNum" sz="quarter" idx="10"/>
+          </p:nvPr>
+        </p:nvSpPr>
+        <p:spPr/>
+        <p:txBody>
+          <a:bodyPr/>
+          <a:lstStyle/>
+          <a:p>
+            <a:fld id="{F7021451-1387-4CA6-816F-3879F97B5CBC}" type="slidenum">
+              <a:rPr lang="en-US"/>
+              <a:t>11</a:t>
+            </a:fld>
+            <a:endParaRPr lang="en-US"/>
+          </a:p>
+        </p:txBody>
+      </p:sp>
+    </p:spTree>
+    <p:extLst>
+      <p:ext uri="{BB962C8B-B14F-4D97-AF65-F5344CB8AC3E}">
+        <p14:creationId xmlns:p14="http://schemas.microsoft.com/office/powerpoint/2010/main" val="1024086991"/>
+      </p:ext>
+    </p:extLst>
+  </p:cSld>
+  <p:clrMapOvr>
+    <a:masterClrMapping/>
+  </p:clrMapOvr>
+</p:notes>
+</file>
+
+<file path=ppt/notesSlides/notesSlide12.xml><?xml version="1.0" encoding="utf-8"?>
+<p:notes xmlns:a="http://schemas.openxmlformats.org/drawingml/2006/main" xmlns:r="http://schemas.openxmlformats.org/officeDocument/2006/relationships" xmlns:p="http://schemas.openxmlformats.org/presentationml/2006/main">
+  <p:cSld>
+    <p:spTree>
+      <p:nvGrpSpPr>
+        <p:cNvPr id="1" name=""/>
+        <p:cNvGrpSpPr/>
+        <p:nvPr/>
+      </p:nvGrpSpPr>
+      <p:grpSpPr>
+        <a:xfrm>
+          <a:off x="0" y="0"/>
+          <a:ext cx="0" cy="0"/>
+          <a:chOff x="0" y="0"/>
+          <a:chExt cx="0" cy="0"/>
+        </a:xfrm>
+      </p:grpSpPr>
+      <p:sp>
+        <p:nvSpPr>
+          <p:cNvPr id="2" name="Slide Image Placeholder 1"/>
+          <p:cNvSpPr>
+            <a:spLocks noGrp="1" noRot="1" noChangeAspect="1"/>
+          </p:cNvSpPr>
+          <p:nvPr>
+            <p:ph type="sldImg"/>
+          </p:nvPr>
+        </p:nvSpPr>
+        <p:spPr/>
+      </p:sp>
+      <p:sp>
+        <p:nvSpPr>
+          <p:cNvPr id="3" name="Notes Placeholder 2"/>
+          <p:cNvSpPr>
+            <a:spLocks noGrp="1"/>
+          </p:cNvSpPr>
+          <p:nvPr>
+            <p:ph type="body" idx="1"/>
+          </p:nvPr>
+        </p:nvSpPr>
+        <p:spPr/>
+        <p:txBody>
+          <a:bodyPr/>
+          <a:lstStyle/>
+          <a:p>
+            <a:r>
+              <a:rPr lang="en-US" dirty="0"/>
+              <a:t/>
+            </a:r>
+            <a:endParaRPr lang="en-US" dirty="0"/>
+          </a:p>
+        </p:txBody>
+      </p:sp>
+      <p:sp>
+        <p:nvSpPr>
+          <p:cNvPr id="4" name="Slide Number Placeholder 3"/>
+          <p:cNvSpPr>
+            <a:spLocks noGrp="1"/>
+          </p:cNvSpPr>
+          <p:nvPr>
+            <p:ph type="sldNum" sz="quarter" idx="10"/>
+          </p:nvPr>
+        </p:nvSpPr>
+        <p:spPr/>
+        <p:txBody>
+          <a:bodyPr/>
+          <a:lstStyle/>
+          <a:p>
+            <a:fld id="{F7021451-1387-4CA6-816F-3879F97B5CBC}" type="slidenum">
+              <a:rPr lang="en-US"/>
+              <a:t>12</a:t>
+            </a:fld>
+            <a:endParaRPr lang="en-US"/>
+          </a:p>
+        </p:txBody>
+      </p:sp>
+    </p:spTree>
+    <p:extLst>
+      <p:ext uri="{BB962C8B-B14F-4D97-AF65-F5344CB8AC3E}">
+        <p14:creationId xmlns:p14="http://schemas.microsoft.com/office/powerpoint/2010/main" val="1024086991"/>
+      </p:ext>
+    </p:extLst>
+  </p:cSld>
+  <p:clrMapOvr>
+    <a:masterClrMapping/>
+  </p:clrMapOvr>
+</p:notes>
+</file>
+
+<file path=ppt/notesSlides/notesSlide13.xml><?xml version="1.0" encoding="utf-8"?>
+<p:notes xmlns:a="http://schemas.openxmlformats.org/drawingml/2006/main" xmlns:r="http://schemas.openxmlformats.org/officeDocument/2006/relationships" xmlns:p="http://schemas.openxmlformats.org/presentationml/2006/main">
+  <p:cSld>
+    <p:spTree>
+      <p:nvGrpSpPr>
+        <p:cNvPr id="1" name=""/>
+        <p:cNvGrpSpPr/>
+        <p:nvPr/>
+      </p:nvGrpSpPr>
+      <p:grpSpPr>
+        <a:xfrm>
+          <a:off x="0" y="0"/>
+          <a:ext cx="0" cy="0"/>
+          <a:chOff x="0" y="0"/>
+          <a:chExt cx="0" cy="0"/>
+        </a:xfrm>
+      </p:grpSpPr>
+      <p:sp>
+        <p:nvSpPr>
+          <p:cNvPr id="2" name="Slide Image Placeholder 1"/>
+          <p:cNvSpPr>
+            <a:spLocks noGrp="1" noRot="1" noChangeAspect="1"/>
+          </p:cNvSpPr>
+          <p:nvPr>
+            <p:ph type="sldImg"/>
+          </p:nvPr>
+        </p:nvSpPr>
+        <p:spPr/>
+      </p:sp>
+      <p:sp>
+        <p:nvSpPr>
+          <p:cNvPr id="3" name="Notes Placeholder 2"/>
+          <p:cNvSpPr>
+            <a:spLocks noGrp="1"/>
+          </p:cNvSpPr>
+          <p:nvPr>
+            <p:ph type="body" idx="1"/>
+          </p:nvPr>
+        </p:nvSpPr>
+        <p:spPr/>
+        <p:txBody>
+          <a:bodyPr/>
+          <a:lstStyle/>
+          <a:p>
+            <a:r>
+              <a:rPr lang="en-US" dirty="0"/>
+              <a:t/>
+            </a:r>
+            <a:endParaRPr lang="en-US" dirty="0"/>
+          </a:p>
+        </p:txBody>
+      </p:sp>
+      <p:sp>
+        <p:nvSpPr>
+          <p:cNvPr id="4" name="Slide Number Placeholder 3"/>
+          <p:cNvSpPr>
+            <a:spLocks noGrp="1"/>
+          </p:cNvSpPr>
+          <p:nvPr>
+            <p:ph type="sldNum" sz="quarter" idx="10"/>
+          </p:nvPr>
+        </p:nvSpPr>
+        <p:spPr/>
+        <p:txBody>
+          <a:bodyPr/>
+          <a:lstStyle/>
+          <a:p>
+            <a:fld id="{F7021451-1387-4CA6-816F-3879F97B5CBC}" type="slidenum">
+              <a:rPr lang="en-US"/>
+              <a:t>13</a:t>
+            </a:fld>
+            <a:endParaRPr lang="en-US"/>
+          </a:p>
+        </p:txBody>
+      </p:sp>
+    </p:spTree>
+    <p:extLst>
+      <p:ext uri="{BB962C8B-B14F-4D97-AF65-F5344CB8AC3E}">
+        <p14:creationId xmlns:p14="http://schemas.microsoft.com/office/powerpoint/2010/main" val="1024086991"/>
+      </p:ext>
+    </p:extLst>
+  </p:cSld>
+  <p:clrMapOvr>
+    <a:masterClrMapping/>
+  </p:clrMapOvr>
+</p:notes>
+</file>
+
+<file path=ppt/notesSlides/notesSlide14.xml><?xml version="1.0" encoding="utf-8"?>
+<p:notes xmlns:a="http://schemas.openxmlformats.org/drawingml/2006/main" xmlns:r="http://schemas.openxmlformats.org/officeDocument/2006/relationships" xmlns:p="http://schemas.openxmlformats.org/presentationml/2006/main">
+  <p:cSld>
+    <p:spTree>
+      <p:nvGrpSpPr>
+        <p:cNvPr id="1" name=""/>
+        <p:cNvGrpSpPr/>
+        <p:nvPr/>
+      </p:nvGrpSpPr>
+      <p:grpSpPr>
+        <a:xfrm>
+          <a:off x="0" y="0"/>
+          <a:ext cx="0" cy="0"/>
+          <a:chOff x="0" y="0"/>
+          <a:chExt cx="0" cy="0"/>
+        </a:xfrm>
+      </p:grpSpPr>
+      <p:sp>
+        <p:nvSpPr>
+          <p:cNvPr id="2" name="Slide Image Placeholder 1"/>
+          <p:cNvSpPr>
+            <a:spLocks noGrp="1" noRot="1" noChangeAspect="1"/>
+          </p:cNvSpPr>
+          <p:nvPr>
+            <p:ph type="sldImg"/>
+          </p:nvPr>
+        </p:nvSpPr>
+        <p:spPr/>
+      </p:sp>
+      <p:sp>
+        <p:nvSpPr>
+          <p:cNvPr id="3" name="Notes Placeholder 2"/>
+          <p:cNvSpPr>
+            <a:spLocks noGrp="1"/>
+          </p:cNvSpPr>
+          <p:nvPr>
+            <p:ph type="body" idx="1"/>
+          </p:nvPr>
+        </p:nvSpPr>
+        <p:spPr/>
+        <p:txBody>
+          <a:bodyPr/>
+          <a:lstStyle/>
+          <a:p>
+            <a:r>
+              <a:rPr lang="en-US" dirty="0"/>
+              <a:t/>
+            </a:r>
+            <a:endParaRPr lang="en-US" dirty="0"/>
+          </a:p>
+        </p:txBody>
+      </p:sp>
+      <p:sp>
+        <p:nvSpPr>
+          <p:cNvPr id="4" name="Slide Number Placeholder 3"/>
+          <p:cNvSpPr>
+            <a:spLocks noGrp="1"/>
+          </p:cNvSpPr>
+          <p:nvPr>
+            <p:ph type="sldNum" sz="quarter" idx="10"/>
+          </p:nvPr>
+        </p:nvSpPr>
+        <p:spPr/>
+        <p:txBody>
+          <a:bodyPr/>
+          <a:lstStyle/>
+          <a:p>
+            <a:fld id="{F7021451-1387-4CA6-816F-3879F97B5CBC}" type="slidenum">
+              <a:rPr lang="en-US"/>
+              <a:t>14</a:t>
+            </a:fld>
+            <a:endParaRPr lang="en-US"/>
+          </a:p>
+        </p:txBody>
+      </p:sp>
+    </p:spTree>
+    <p:extLst>
+      <p:ext uri="{BB962C8B-B14F-4D97-AF65-F5344CB8AC3E}">
+        <p14:creationId xmlns:p14="http://schemas.microsoft.com/office/powerpoint/2010/main" val="1024086991"/>
+      </p:ext>
+    </p:extLst>
+  </p:cSld>
+  <p:clrMapOvr>
+    <a:masterClrMapping/>
+  </p:clrMapOvr>
+</p:notes>
+</file>
+
+<file path=ppt/notesSlides/notesSlide15.xml><?xml version="1.0" encoding="utf-8"?>
+<p:notes xmlns:a="http://schemas.openxmlformats.org/drawingml/2006/main" xmlns:r="http://schemas.openxmlformats.org/officeDocument/2006/relationships" xmlns:p="http://schemas.openxmlformats.org/presentationml/2006/main">
+  <p:cSld>
+    <p:spTree>
+      <p:nvGrpSpPr>
+        <p:cNvPr id="1" name=""/>
+        <p:cNvGrpSpPr/>
+        <p:nvPr/>
+      </p:nvGrpSpPr>
+      <p:grpSpPr>
+        <a:xfrm>
+          <a:off x="0" y="0"/>
+          <a:ext cx="0" cy="0"/>
+          <a:chOff x="0" y="0"/>
+          <a:chExt cx="0" cy="0"/>
+        </a:xfrm>
+      </p:grpSpPr>
+      <p:sp>
+        <p:nvSpPr>
+          <p:cNvPr id="2" name="Slide Image Placeholder 1"/>
+          <p:cNvSpPr>
+            <a:spLocks noGrp="1" noRot="1" noChangeAspect="1"/>
+          </p:cNvSpPr>
+          <p:nvPr>
+            <p:ph type="sldImg"/>
+          </p:nvPr>
+        </p:nvSpPr>
+        <p:spPr/>
+      </p:sp>
+      <p:sp>
+        <p:nvSpPr>
+          <p:cNvPr id="3" name="Notes Placeholder 2"/>
+          <p:cNvSpPr>
+            <a:spLocks noGrp="1"/>
+          </p:cNvSpPr>
+          <p:nvPr>
+            <p:ph type="body" idx="1"/>
+          </p:nvPr>
+        </p:nvSpPr>
+        <p:spPr/>
+        <p:txBody>
+          <a:bodyPr/>
+          <a:lstStyle/>
+          <a:p>
+            <a:r>
+              <a:rPr lang="en-US" dirty="0"/>
+              <a:t/>
+            </a:r>
+            <a:endParaRPr lang="en-US" dirty="0"/>
+          </a:p>
+        </p:txBody>
+      </p:sp>
+      <p:sp>
+        <p:nvSpPr>
+          <p:cNvPr id="4" name="Slide Number Placeholder 3"/>
+          <p:cNvSpPr>
+            <a:spLocks noGrp="1"/>
+          </p:cNvSpPr>
+          <p:nvPr>
+            <p:ph type="sldNum" sz="quarter" idx="10"/>
+          </p:nvPr>
+        </p:nvSpPr>
+        <p:spPr/>
+        <p:txBody>
+          <a:bodyPr/>
+          <a:lstStyle/>
+          <a:p>
+            <a:fld id="{F7021451-1387-4CA6-816F-3879F97B5CBC}" type="slidenum">
+              <a:rPr lang="en-US"/>
+              <a:t>15</a:t>
+            </a:fld>
+            <a:endParaRPr lang="en-US"/>
+          </a:p>
+        </p:txBody>
+      </p:sp>
+    </p:spTree>
+    <p:extLst>
+      <p:ext uri="{BB962C8B-B14F-4D97-AF65-F5344CB8AC3E}">
+        <p14:creationId xmlns:p14="http://schemas.microsoft.com/office/powerpoint/2010/main" val="1024086991"/>
+      </p:ext>
+    </p:extLst>
+  </p:cSld>
+  <p:clrMapOvr>
+    <a:masterClrMapping/>
+  </p:clrMapOvr>
+</p:notes>
+</file>
+
+<file path=ppt/notesSlides/notesSlide16.xml><?xml version="1.0" encoding="utf-8"?>
+<p:notes xmlns:a="http://schemas.openxmlformats.org/drawingml/2006/main" xmlns:r="http://schemas.openxmlformats.org/officeDocument/2006/relationships" xmlns:p="http://schemas.openxmlformats.org/presentationml/2006/main">
+  <p:cSld>
+    <p:spTree>
+      <p:nvGrpSpPr>
+        <p:cNvPr id="1" name=""/>
+        <p:cNvGrpSpPr/>
+        <p:nvPr/>
+      </p:nvGrpSpPr>
+      <p:grpSpPr>
+        <a:xfrm>
+          <a:off x="0" y="0"/>
+          <a:ext cx="0" cy="0"/>
+          <a:chOff x="0" y="0"/>
+          <a:chExt cx="0" cy="0"/>
+        </a:xfrm>
+      </p:grpSpPr>
+      <p:sp>
+        <p:nvSpPr>
+          <p:cNvPr id="2" name="Slide Image Placeholder 1"/>
+          <p:cNvSpPr>
+            <a:spLocks noGrp="1" noRot="1" noChangeAspect="1"/>
+          </p:cNvSpPr>
+          <p:nvPr>
+            <p:ph type="sldImg"/>
+          </p:nvPr>
+        </p:nvSpPr>
+        <p:spPr/>
+      </p:sp>
+      <p:sp>
+        <p:nvSpPr>
+          <p:cNvPr id="3" name="Notes Placeholder 2"/>
+          <p:cNvSpPr>
+            <a:spLocks noGrp="1"/>
+          </p:cNvSpPr>
+          <p:nvPr>
+            <p:ph type="body" idx="1"/>
+          </p:nvPr>
+        </p:nvSpPr>
+        <p:spPr/>
+        <p:txBody>
+          <a:bodyPr/>
+          <a:lstStyle/>
+          <a:p>
+            <a:r>
+              <a:rPr lang="en-US" dirty="0"/>
+              <a:t/>
+            </a:r>
+            <a:endParaRPr lang="en-US" dirty="0"/>
+          </a:p>
+        </p:txBody>
+      </p:sp>
+      <p:sp>
+        <p:nvSpPr>
+          <p:cNvPr id="4" name="Slide Number Placeholder 3"/>
+          <p:cNvSpPr>
+            <a:spLocks noGrp="1"/>
+          </p:cNvSpPr>
+          <p:nvPr>
+            <p:ph type="sldNum" sz="quarter" idx="10"/>
+          </p:nvPr>
+        </p:nvSpPr>
+        <p:spPr/>
+        <p:txBody>
+          <a:bodyPr/>
+          <a:lstStyle/>
+          <a:p>
+            <a:fld id="{F7021451-1387-4CA6-816F-3879F97B5CBC}" type="slidenum">
+              <a:rPr lang="en-US"/>
+              <a:t>16</a:t>
             </a:fld>
             <a:endParaRPr lang="en-US"/>
           </a:p>
@@ -1655,6 +2189,13 @@
 <file path=ppt/slides/slide1.xml><?xml version="1.0" encoding="utf-8"?>
 <p:sld xmlns:a="http://schemas.openxmlformats.org/drawingml/2006/main" xmlns:r="http://schemas.openxmlformats.org/officeDocument/2006/relationships" xmlns:p="http://schemas.openxmlformats.org/presentationml/2006/main">
   <p:cSld name="Slide 1">
+    <p:bg>
+      <p:bgPr>
+        <a:solidFill>
+          <a:srgbClr val="FFFFFF"/>
+        </a:solidFill>
+      </p:bgPr>
+    </p:bg>
     <p:spTree>
       <p:nvGrpSpPr>
         <p:cNvPr id="1" name=""/>
@@ -1671,14 +2212,56 @@
       </p:grpSpPr>
       <p:sp>
         <p:nvSpPr>
-          <p:cNvPr id="2" name="Text 0"/>
-          <p:cNvSpPr/>
-          <p:nvPr/>
-        </p:nvSpPr>
-        <p:spPr>
-          <a:xfrm>
-            <a:off x="548640" y="1828800"/>
-            <a:ext cx="8046720" cy="1097280"/>
+          <p:cNvPr id="2" name="Shape 0"/>
+          <p:cNvSpPr/>
+          <p:nvPr/>
+        </p:nvSpPr>
+        <p:spPr>
+          <a:xfrm>
+            <a:off x="0" y="0"/>
+            <a:ext cx="256032" cy="5148072"/>
+          </a:xfrm>
+          <a:prstGeom prst="rect">
+            <a:avLst/>
+          </a:prstGeom>
+          <a:solidFill>
+            <a:srgbClr val="B45309"/>
+          </a:solidFill>
+          <a:ln/>
+        </p:spPr>
+      </p:sp>
+      <p:sp>
+        <p:nvSpPr>
+          <p:cNvPr id="3" name="Shape 1"/>
+          <p:cNvSpPr/>
+          <p:nvPr/>
+        </p:nvSpPr>
+        <p:spPr>
+          <a:xfrm>
+            <a:off x="256032" y="0"/>
+            <a:ext cx="8887968" cy="109728"/>
+          </a:xfrm>
+          <a:prstGeom prst="rect">
+            <a:avLst/>
+          </a:prstGeom>
+          <a:solidFill>
+            <a:srgbClr val="B45309">
+              <a:alpha val="40000"/>
+            </a:srgbClr>
+          </a:solidFill>
+          <a:ln/>
+        </p:spPr>
+      </p:sp>
+      <p:sp>
+        <p:nvSpPr>
+          <p:cNvPr id="4" name="Text 2"/>
+          <p:cNvSpPr/>
+          <p:nvPr/>
+        </p:nvSpPr>
+        <p:spPr>
+          <a:xfrm>
+            <a:off x="685800" y="1051560"/>
+            <a:ext cx="7863840" cy="365760"/>
           </a:xfrm>
           <a:prstGeom prst="rect">
             <a:avLst/>
@@ -1694,27 +2277,69 @@
               <a:buNone/>
             </a:pPr>
             <a:r>
-              <a:rPr lang="en-US" sz="3200" b="1" dirty="0">
+              <a:rPr lang="en-US" sz="1300" b="1" spc="300" kern="0" dirty="0">
                 <a:solidFill>
                   <a:srgbClr val="B45309"/>
                 </a:solidFill>
+                <a:latin typeface="Arial" pitchFamily="34" charset="0"/>
+                <a:ea typeface="Arial" pitchFamily="34" charset="-122"/>
+                <a:cs typeface="Arial" pitchFamily="34" charset="-120"/>
+              </a:rPr>
+              <a:t>DAY 4</a:t>
+            </a:r>
+            <a:endParaRPr lang="en-US" sz="1300" dirty="0"/>
+          </a:p>
+        </p:txBody>
+      </p:sp>
+      <p:sp>
+        <p:nvSpPr>
+          <p:cNvPr id="5" name="Text 3"/>
+          <p:cNvSpPr/>
+          <p:nvPr/>
+        </p:nvSpPr>
+        <p:spPr>
+          <a:xfrm>
+            <a:off x="685800" y="1417320"/>
+            <a:ext cx="7863840" cy="1463040"/>
+          </a:xfrm>
+          <a:prstGeom prst="rect">
+            <a:avLst/>
+          </a:prstGeom>
+          <a:noFill/>
+          <a:ln/>
+        </p:spPr>
+        <p:txBody>
+          <a:bodyPr wrap="square" rtlCol="0" anchor="ctr"/>
+          <a:lstStyle/>
+          <a:p>
+            <a:pPr indent="0" marL="0">
+              <a:buNone/>
+            </a:pPr>
+            <a:r>
+              <a:rPr lang="en-US" sz="3300" b="1" dirty="0">
+                <a:solidFill>
+                  <a:srgbClr val="1C1917"/>
+                </a:solidFill>
+                <a:latin typeface="Arial" pitchFamily="34" charset="0"/>
+                <a:ea typeface="Arial" pitchFamily="34" charset="-122"/>
+                <a:cs typeface="Arial" pitchFamily="34" charset="-120"/>
               </a:rPr>
               <a:t>Scenario Planning and Sensitivity Analysis</a:t>
             </a:r>
-            <a:endParaRPr lang="en-US" sz="3200" dirty="0"/>
-          </a:p>
-        </p:txBody>
-      </p:sp>
-      <p:sp>
-        <p:nvSpPr>
-          <p:cNvPr id="3" name="Text 1"/>
-          <p:cNvSpPr/>
-          <p:nvPr/>
-        </p:nvSpPr>
-        <p:spPr>
-          <a:xfrm>
-            <a:off x="548640" y="3017520"/>
-            <a:ext cx="8046720" cy="457200"/>
+            <a:endParaRPr lang="en-US" sz="3300" dirty="0"/>
+          </a:p>
+        </p:txBody>
+      </p:sp>
+      <p:sp>
+        <p:nvSpPr>
+          <p:cNvPr id="6" name="Text 4"/>
+          <p:cNvSpPr/>
+          <p:nvPr/>
+        </p:nvSpPr>
+        <p:spPr>
+          <a:xfrm>
+            <a:off x="685800" y="2971800"/>
+            <a:ext cx="7863840" cy="411480"/>
           </a:xfrm>
           <a:prstGeom prst="rect">
             <a:avLst/>
@@ -1732,25 +2357,67 @@
             <a:r>
               <a:rPr lang="en-US" sz="1400" dirty="0">
                 <a:solidFill>
-                  <a:srgbClr val="666666"/>
-                </a:solidFill>
+                  <a:srgbClr val="78716C"/>
+                </a:solidFill>
+                <a:latin typeface="Arial" pitchFamily="34" charset="0"/>
+                <a:ea typeface="Arial" pitchFamily="34" charset="-122"/>
+                <a:cs typeface="Arial" pitchFamily="34" charset="-120"/>
+              </a:rPr>
+              <a:t>FMVA Certification Prep: Financial Modeling and Valuation Bootcamp</a:t>
+            </a:r>
+            <a:endParaRPr lang="en-US" sz="1400" dirty="0"/>
+          </a:p>
+        </p:txBody>
+      </p:sp>
+      <p:sp>
+        <p:nvSpPr>
+          <p:cNvPr id="7" name="Text 5"/>
+          <p:cNvSpPr/>
+          <p:nvPr/>
+        </p:nvSpPr>
+        <p:spPr>
+          <a:xfrm>
+            <a:off x="685800" y="4343400"/>
+            <a:ext cx="7863840" cy="365760"/>
+          </a:xfrm>
+          <a:prstGeom prst="rect">
+            <a:avLst/>
+          </a:prstGeom>
+          <a:noFill/>
+          <a:ln/>
+        </p:spPr>
+        <p:txBody>
+          <a:bodyPr wrap="square" rtlCol="0" anchor="ctr"/>
+          <a:lstStyle/>
+          <a:p>
+            <a:pPr indent="0" marL="0">
+              <a:buNone/>
+            </a:pPr>
+            <a:r>
+              <a:rPr lang="en-US" sz="1200" b="1" dirty="0">
+                <a:solidFill>
+                  <a:srgbClr val="B45309"/>
+                </a:solidFill>
+                <a:latin typeface="Arial" pitchFamily="34" charset="0"/>
+                <a:ea typeface="Arial" pitchFamily="34" charset="-122"/>
+                <a:cs typeface="Arial" pitchFamily="34" charset="-120"/>
               </a:rPr>
               <a:t>Lesson Forge Pro (owner)</a:t>
             </a:r>
-            <a:endParaRPr lang="en-US" sz="1400" dirty="0"/>
-          </a:p>
-        </p:txBody>
-      </p:sp>
-      <p:sp>
-        <p:nvSpPr>
-          <p:cNvPr id="4" name="Text 2"/>
-          <p:cNvSpPr/>
-          <p:nvPr/>
-        </p:nvSpPr>
-        <p:spPr>
-          <a:xfrm>
-            <a:off x="548640" y="4389120"/>
-            <a:ext cx="8046720" cy="548640"/>
+            <a:endParaRPr lang="en-US" sz="1200" dirty="0"/>
+          </a:p>
+        </p:txBody>
+      </p:sp>
+      <p:sp>
+        <p:nvSpPr>
+          <p:cNvPr id="8" name="Text 6"/>
+          <p:cNvSpPr/>
+          <p:nvPr/>
+        </p:nvSpPr>
+        <p:spPr>
+          <a:xfrm>
+            <a:off x="685800" y="4709160"/>
+            <a:ext cx="7863840" cy="320040"/>
           </a:xfrm>
           <a:prstGeom prst="rect">
             <a:avLst/>
@@ -1766,14 +2433,17 @@
               <a:buNone/>
             </a:pPr>
             <a:r>
-              <a:rPr lang="en-US" sz="1000" dirty="0">
-                <a:solidFill>
-                  <a:srgbClr val="888888"/>
-                </a:solidFill>
+              <a:rPr lang="en-US" sz="850" dirty="0">
+                <a:solidFill>
+                  <a:srgbClr val="AAAAAA"/>
+                </a:solidFill>
+                <a:latin typeface="Arial" pitchFamily="34" charset="0"/>
+                <a:ea typeface="Arial" pitchFamily="34" charset="-122"/>
+                <a:cs typeface="Arial" pitchFamily="34" charset="-120"/>
               </a:rPr>
               <a:t>This content is educational material only and does not constitute financial, investment, or trading advice.</a:t>
             </a:r>
-            <a:endParaRPr lang="en-US" sz="1000" dirty="0"/>
+            <a:endParaRPr lang="en-US" sz="850" dirty="0"/>
           </a:p>
         </p:txBody>
       </p:sp>
@@ -1788,6 +2458,13 @@
 <file path=ppt/slides/slide10.xml><?xml version="1.0" encoding="utf-8"?>
 <p:sld xmlns:a="http://schemas.openxmlformats.org/drawingml/2006/main" xmlns:r="http://schemas.openxmlformats.org/officeDocument/2006/relationships" xmlns:p="http://schemas.openxmlformats.org/presentationml/2006/main">
   <p:cSld name="Slide 10">
+    <p:bg>
+      <p:bgPr>
+        <a:solidFill>
+          <a:srgbClr val="FFFFFF"/>
+        </a:solidFill>
+      </p:bgPr>
+    </p:bg>
     <p:spTree>
       <p:nvGrpSpPr>
         <p:cNvPr id="1" name=""/>
@@ -1804,14 +2481,34 @@
       </p:grpSpPr>
       <p:sp>
         <p:nvSpPr>
-          <p:cNvPr id="2" name="Text 0"/>
-          <p:cNvSpPr/>
-          <p:nvPr/>
-        </p:nvSpPr>
-        <p:spPr>
-          <a:xfrm>
-            <a:off x="457200" y="320040"/>
-            <a:ext cx="8229600" cy="731520"/>
+          <p:cNvPr id="2" name="Shape 0"/>
+          <p:cNvSpPr/>
+          <p:nvPr/>
+        </p:nvSpPr>
+        <p:spPr>
+          <a:xfrm>
+            <a:off x="411480" y="384048"/>
+            <a:ext cx="82296" cy="310896"/>
+          </a:xfrm>
+          <a:prstGeom prst="rect">
+            <a:avLst/>
+          </a:prstGeom>
+          <a:solidFill>
+            <a:srgbClr val="B45309"/>
+          </a:solidFill>
+          <a:ln/>
+        </p:spPr>
+      </p:sp>
+      <p:sp>
+        <p:nvSpPr>
+          <p:cNvPr id="3" name="Text 1"/>
+          <p:cNvSpPr/>
+          <p:nvPr/>
+        </p:nvSpPr>
+        <p:spPr>
+          <a:xfrm>
+            <a:off x="566928" y="292608"/>
+            <a:ext cx="8138160" cy="502920"/>
           </a:xfrm>
           <a:prstGeom prst="rect">
             <a:avLst/>
@@ -1827,156 +2524,17 @@
               <a:buNone/>
             </a:pPr>
             <a:r>
-              <a:rPr lang="en-US" sz="2400" b="1" dirty="0">
-                <a:solidFill>
-                  <a:srgbClr val="B45309"/>
-                </a:solidFill>
-              </a:rPr>
-              <a:t>Conclusion and Q&amp;A (1:20 - 1:30)</a:t>
-            </a:r>
-            <a:endParaRPr lang="en-US" sz="2400" dirty="0"/>
-          </a:p>
-        </p:txBody>
-      </p:sp>
-      <p:sp>
-        <p:nvSpPr>
-          <p:cNvPr id="3" name="Text 1"/>
-          <p:cNvSpPr/>
-          <p:nvPr/>
-        </p:nvSpPr>
-        <p:spPr>
-          <a:xfrm>
-            <a:off x="640080" y="1188720"/>
-            <a:ext cx="7863840" cy="3291840"/>
-          </a:xfrm>
-          <a:prstGeom prst="rect">
-            <a:avLst/>
-          </a:prstGeom>
-          <a:noFill/>
-          <a:ln/>
-        </p:spPr>
-        <p:txBody>
-          <a:bodyPr wrap="square" rtlCol="0" anchor="t"/>
-          <a:lstStyle/>
-          <a:p>
-            <a:pPr marL="342900" indent="-342900">
-              <a:buSzPct val="100000"/>
-              <a:buChar char="•"/>
-            </a:pPr>
-            <a:r>
-              <a:rPr lang="en-US" sz="1600" dirty="0">
-                <a:solidFill>
-                  <a:srgbClr val="333333"/>
-                </a:solidFill>
-              </a:rPr>
-              <a:t>That's all the time we have for today's session. I hope you now have a better understanding of scenario planning and sensitivity analysis, and how they can be a</a:t>
-            </a:r>
-            <a:endParaRPr lang="en-US" sz="1600" dirty="0"/>
-          </a:p>
-          <a:p>
-            <a:pPr marL="342900" indent="-342900">
-              <a:buSzPct val="100000"/>
-              <a:buChar char="•"/>
-            </a:pPr>
-            <a:r>
-              <a:rPr lang="en-US" sz="1600" dirty="0">
-                <a:solidFill>
-                  <a:srgbClr val="333333"/>
-                </a:solidFill>
-              </a:rPr>
-              <a:t>Anticipated learner questions:</a:t>
-            </a:r>
-            <a:endParaRPr lang="en-US" sz="1600" dirty="0"/>
-          </a:p>
-          <a:p>
-            <a:pPr marL="342900" indent="-342900">
-              <a:buSzPct val="100000"/>
-              <a:buChar char="•"/>
-            </a:pPr>
-            <a:r>
-              <a:rPr lang="en-US" sz="1600" dirty="0">
-                <a:solidFill>
-                  <a:srgbClr val="333333"/>
-                </a:solidFill>
-              </a:rPr>
-              <a:t>Q: How do we identify key drivers of change in scenario planning?</a:t>
-            </a:r>
-            <a:endParaRPr lang="en-US" sz="1600" dirty="0"/>
-          </a:p>
-          <a:p>
-            <a:pPr marL="342900" indent="-342900">
-              <a:buSzPct val="100000"/>
-              <a:buChar char="•"/>
-            </a:pPr>
-            <a:r>
-              <a:rPr lang="en-US" sz="1600" dirty="0">
-                <a:solidFill>
-                  <a:srgbClr val="333333"/>
-                </a:solidFill>
-              </a:rPr>
-              <a:t>A: We can identify key drivers of change by analyzing market trends, competitor activity, and internal factors such as production capacity and supply chain risk</a:t>
-            </a:r>
-            <a:endParaRPr lang="en-US" sz="1600" dirty="0"/>
-          </a:p>
-          <a:p>
-            <a:pPr marL="342900" indent="-342900">
-              <a:buSzPct val="100000"/>
-              <a:buChar char="•"/>
-            </a:pPr>
-            <a:r>
-              <a:rPr lang="en-US" sz="1600" dirty="0">
-                <a:solidFill>
-                  <a:srgbClr val="333333"/>
-                </a:solidFill>
-              </a:rPr>
-              <a:t>Q: What is the difference between sensitivity analysis and scenario planning?</a:t>
-            </a:r>
-            <a:endParaRPr lang="en-US" sz="1600" dirty="0"/>
-          </a:p>
-          <a:p>
-            <a:pPr marL="342900" indent="-342900">
-              <a:buSzPct val="100000"/>
-              <a:buChar char="•"/>
-            </a:pPr>
-            <a:r>
-              <a:rPr lang="en-US" sz="1600" dirty="0">
-                <a:solidFill>
-                  <a:srgbClr val="333333"/>
-                </a:solidFill>
-              </a:rPr>
-              <a:t>A: Sensitivity analysis is a technique used to test the robustness of financial models, while scenario planning is a technique used to evaluate business outcome</a:t>
-            </a:r>
-            <a:endParaRPr lang="en-US" sz="1600" dirty="0"/>
-          </a:p>
-          <a:p>
-            <a:pPr marL="342900" indent="-342900">
-              <a:buSzPct val="100000"/>
-              <a:buChar char="•"/>
-            </a:pPr>
-            <a:r>
-              <a:rPr lang="en-US" sz="1600" dirty="0">
-                <a:solidFill>
-                  <a:srgbClr val="333333"/>
-                </a:solidFill>
-              </a:rPr>
-              <a:t>Q: How do we create interactive dashboards?</a:t>
-            </a:r>
-            <a:endParaRPr lang="en-US" sz="1600" dirty="0"/>
-          </a:p>
-          <a:p>
-            <a:pPr marL="342900" indent="-342900">
-              <a:buSzPct val="100000"/>
-              <a:buChar char="•"/>
-            </a:pPr>
-            <a:r>
-              <a:rPr lang="en-US" sz="1600" dirty="0">
-                <a:solidFill>
-                  <a:srgbClr val="333333"/>
-                </a:solidFill>
-              </a:rPr>
-              <a:t>A: We can create interactive dashboards using tools such as Excel, Tableau, or Power BI. The key is to identify the key inputs and outputs, and to design a user</a:t>
-            </a:r>
-            <a:endParaRPr lang="en-US" sz="1600" dirty="0"/>
+              <a:rPr lang="en-US" sz="2000" b="1" dirty="0">
+                <a:solidFill>
+                  <a:srgbClr val="1C1917"/>
+                </a:solidFill>
+                <a:latin typeface="Arial" pitchFamily="34" charset="0"/>
+                <a:ea typeface="Arial" pitchFamily="34" charset="-122"/>
+                <a:cs typeface="Arial" pitchFamily="34" charset="-120"/>
+              </a:rPr>
+              <a:t>Sensitivity: Price vs. Profit Impact</a:t>
+            </a:r>
+            <a:endParaRPr lang="en-US" sz="2000" dirty="0"/>
           </a:p>
         </p:txBody>
       </p:sp>
@@ -1988,8 +2546,8 @@
         </p:nvSpPr>
         <p:spPr>
           <a:xfrm>
-            <a:off x="457200" y="4709160"/>
-            <a:ext cx="8229600" cy="320040"/>
+            <a:off x="566928" y="4681728"/>
+            <a:ext cx="8138160" cy="320040"/>
           </a:xfrm>
           <a:prstGeom prst="rect">
             <a:avLst/>
@@ -2005,14 +2563,471 @@
               <a:buNone/>
             </a:pPr>
             <a:r>
-              <a:rPr lang="en-US" sz="800" dirty="0">
+              <a:rPr lang="en-US" sz="1000" i="1" dirty="0">
+                <a:solidFill>
+                  <a:srgbClr val="78716C"/>
+                </a:solidFill>
+                <a:latin typeface="Arial" pitchFamily="34" charset="0"/>
+                <a:ea typeface="Arial" pitchFamily="34" charset="-122"/>
+                <a:cs typeface="Arial" pitchFamily="34" charset="-120"/>
+              </a:rPr>
+              <a:t>Downside scenario cuts profit 63%; price sensitivity coefficient of 2.5 flags pricing as top risk</a:t>
+            </a:r>
+            <a:endParaRPr lang="en-US" sz="1000" dirty="0"/>
+          </a:p>
+        </p:txBody>
+      </p:sp>
+      <p:sp>
+        <p:nvSpPr>
+          <p:cNvPr id="5" name="Text 3"/>
+          <p:cNvSpPr/>
+          <p:nvPr/>
+        </p:nvSpPr>
+        <p:spPr>
+          <a:xfrm>
+            <a:off x="411480" y="4919472"/>
+            <a:ext cx="8321040" cy="219456"/>
+          </a:xfrm>
+          <a:prstGeom prst="rect">
+            <a:avLst/>
+          </a:prstGeom>
+          <a:noFill/>
+          <a:ln/>
+        </p:spPr>
+        <p:txBody>
+          <a:bodyPr wrap="square" rtlCol="0" anchor="ctr"/>
+          <a:lstStyle/>
+          <a:p>
+            <a:pPr indent="0" marL="0">
+              <a:buNone/>
+            </a:pPr>
+            <a:r>
+              <a:rPr lang="en-US" sz="750" dirty="0">
                 <a:solidFill>
                   <a:srgbClr val="AAAAAA"/>
                 </a:solidFill>
+                <a:latin typeface="Arial" pitchFamily="34" charset="0"/>
+                <a:ea typeface="Arial" pitchFamily="34" charset="-122"/>
+                <a:cs typeface="Arial" pitchFamily="34" charset="-120"/>
               </a:rPr>
               <a:t>Lesson Forge Pro (owner) — This content is educational material only and does not constitute financial, investment, or trading advice.</a:t>
             </a:r>
-            <a:endParaRPr lang="en-US" sz="800" dirty="0"/>
+            <a:endParaRPr lang="en-US" sz="750" dirty="0"/>
+          </a:p>
+        </p:txBody>
+      </p:sp>
+      <p:sp>
+        <p:nvSpPr>
+          <p:cNvPr id="6" name="Shape 4"/>
+          <p:cNvSpPr/>
+          <p:nvPr/>
+        </p:nvSpPr>
+        <p:spPr>
+          <a:xfrm>
+            <a:off x="685800" y="4206240"/>
+            <a:ext cx="7772400" cy="0"/>
+          </a:xfrm>
+          <a:prstGeom prst="line">
+            <a:avLst/>
+          </a:prstGeom>
+          <a:noFill/>
+          <a:ln w="12700">
+            <a:solidFill>
+              <a:srgbClr val="1C1917"/>
+            </a:solidFill>
+            <a:prstDash val="solid"/>
+          </a:ln>
+        </p:spPr>
+      </p:sp>
+      <p:sp>
+        <p:nvSpPr>
+          <p:cNvPr id="7" name="Shape 5"/>
+          <p:cNvSpPr/>
+          <p:nvPr/>
+        </p:nvSpPr>
+        <p:spPr>
+          <a:xfrm>
+            <a:off x="1371600" y="1280160"/>
+            <a:ext cx="777240" cy="2926080"/>
+          </a:xfrm>
+          <a:prstGeom prst="rect">
+            <a:avLst/>
+          </a:prstGeom>
+          <a:solidFill>
+            <a:srgbClr val="B45309"/>
+          </a:solidFill>
+          <a:ln/>
+        </p:spPr>
+      </p:sp>
+      <p:sp>
+        <p:nvSpPr>
+          <p:cNvPr id="8" name="Text 6"/>
+          <p:cNvSpPr/>
+          <p:nvPr/>
+        </p:nvSpPr>
+        <p:spPr>
+          <a:xfrm>
+            <a:off x="1188720" y="1005840"/>
+            <a:ext cx="1143000" cy="237744"/>
+          </a:xfrm>
+          <a:prstGeom prst="rect">
+            <a:avLst/>
+          </a:prstGeom>
+          <a:noFill/>
+          <a:ln/>
+        </p:spPr>
+        <p:txBody>
+          <a:bodyPr wrap="square" rtlCol="0" anchor="ctr"/>
+          <a:lstStyle/>
+          <a:p>
+            <a:pPr algn="ctr" indent="0" marL="0">
+              <a:buNone/>
+            </a:pPr>
+            <a:r>
+              <a:rPr lang="en-US" sz="950" b="1" dirty="0">
+                <a:solidFill>
+                  <a:srgbClr val="1C1917"/>
+                </a:solidFill>
+                <a:latin typeface="Arial" pitchFamily="34" charset="0"/>
+                <a:ea typeface="Arial" pitchFamily="34" charset="-122"/>
+                <a:cs typeface="Arial" pitchFamily="34" charset="-120"/>
+              </a:rPr>
+              <a:t>40000</a:t>
+            </a:r>
+            <a:endParaRPr lang="en-US" sz="950" dirty="0"/>
+          </a:p>
+        </p:txBody>
+      </p:sp>
+      <p:sp>
+        <p:nvSpPr>
+          <p:cNvPr id="9" name="Text 7"/>
+          <p:cNvSpPr/>
+          <p:nvPr/>
+        </p:nvSpPr>
+        <p:spPr>
+          <a:xfrm>
+            <a:off x="1143000" y="4315968"/>
+            <a:ext cx="1234440" cy="502920"/>
+          </a:xfrm>
+          <a:prstGeom prst="rect">
+            <a:avLst/>
+          </a:prstGeom>
+          <a:noFill/>
+          <a:ln/>
+        </p:spPr>
+        <p:txBody>
+          <a:bodyPr wrap="square" rtlCol="0" anchor="ctr"/>
+          <a:lstStyle/>
+          <a:p>
+            <a:pPr algn="ctr" indent="0" marL="0">
+              <a:buNone/>
+            </a:pPr>
+            <a:r>
+              <a:rPr lang="en-US" sz="850" dirty="0">
+                <a:solidFill>
+                  <a:srgbClr val="78716C"/>
+                </a:solidFill>
+                <a:latin typeface="Arial" pitchFamily="34" charset="0"/>
+                <a:ea typeface="Arial" pitchFamily="34" charset="-122"/>
+                <a:cs typeface="Arial" pitchFamily="34" charset="-120"/>
+              </a:rPr>
+              <a:t>Base Profit</a:t>
+            </a:r>
+            <a:endParaRPr lang="en-US" sz="850" dirty="0"/>
+          </a:p>
+        </p:txBody>
+      </p:sp>
+      <p:sp>
+        <p:nvSpPr>
+          <p:cNvPr id="10" name="Shape 8"/>
+          <p:cNvSpPr/>
+          <p:nvPr/>
+        </p:nvSpPr>
+        <p:spPr>
+          <a:xfrm>
+            <a:off x="3246120" y="3123590"/>
+            <a:ext cx="777240" cy="1082650"/>
+          </a:xfrm>
+          <a:prstGeom prst="rect">
+            <a:avLst/>
+          </a:prstGeom>
+          <a:solidFill>
+            <a:srgbClr val="B45309"/>
+          </a:solidFill>
+          <a:ln/>
+        </p:spPr>
+      </p:sp>
+      <p:sp>
+        <p:nvSpPr>
+          <p:cNvPr id="11" name="Text 9"/>
+          <p:cNvSpPr/>
+          <p:nvPr/>
+        </p:nvSpPr>
+        <p:spPr>
+          <a:xfrm>
+            <a:off x="3063240" y="2849270"/>
+            <a:ext cx="1143000" cy="237744"/>
+          </a:xfrm>
+          <a:prstGeom prst="rect">
+            <a:avLst/>
+          </a:prstGeom>
+          <a:noFill/>
+          <a:ln/>
+        </p:spPr>
+        <p:txBody>
+          <a:bodyPr wrap="square" rtlCol="0" anchor="ctr"/>
+          <a:lstStyle/>
+          <a:p>
+            <a:pPr algn="ctr" indent="0" marL="0">
+              <a:buNone/>
+            </a:pPr>
+            <a:r>
+              <a:rPr lang="en-US" sz="950" b="1" dirty="0">
+                <a:solidFill>
+                  <a:srgbClr val="1C1917"/>
+                </a:solidFill>
+                <a:latin typeface="Arial" pitchFamily="34" charset="0"/>
+                <a:ea typeface="Arial" pitchFamily="34" charset="-122"/>
+                <a:cs typeface="Arial" pitchFamily="34" charset="-120"/>
+              </a:rPr>
+              <a:t>14800</a:t>
+            </a:r>
+            <a:endParaRPr lang="en-US" sz="950" dirty="0"/>
+          </a:p>
+        </p:txBody>
+      </p:sp>
+      <p:sp>
+        <p:nvSpPr>
+          <p:cNvPr id="12" name="Text 10"/>
+          <p:cNvSpPr/>
+          <p:nvPr/>
+        </p:nvSpPr>
+        <p:spPr>
+          <a:xfrm>
+            <a:off x="3017520" y="4315968"/>
+            <a:ext cx="1234440" cy="502920"/>
+          </a:xfrm>
+          <a:prstGeom prst="rect">
+            <a:avLst/>
+          </a:prstGeom>
+          <a:noFill/>
+          <a:ln/>
+        </p:spPr>
+        <p:txBody>
+          <a:bodyPr wrap="square" rtlCol="0" anchor="ctr"/>
+          <a:lstStyle/>
+          <a:p>
+            <a:pPr algn="ctr" indent="0" marL="0">
+              <a:buNone/>
+            </a:pPr>
+            <a:r>
+              <a:rPr lang="en-US" sz="850" dirty="0">
+                <a:solidFill>
+                  <a:srgbClr val="78716C"/>
+                </a:solidFill>
+                <a:latin typeface="Arial" pitchFamily="34" charset="0"/>
+                <a:ea typeface="Arial" pitchFamily="34" charset="-122"/>
+                <a:cs typeface="Arial" pitchFamily="34" charset="-120"/>
+              </a:rPr>
+              <a:t>Downside Scenario</a:t>
+            </a:r>
+            <a:endParaRPr lang="en-US" sz="850" dirty="0"/>
+          </a:p>
+        </p:txBody>
+      </p:sp>
+      <p:sp>
+        <p:nvSpPr>
+          <p:cNvPr id="13" name="Shape 11"/>
+          <p:cNvSpPr/>
+          <p:nvPr/>
+        </p:nvSpPr>
+        <p:spPr>
+          <a:xfrm>
+            <a:off x="5120640" y="2011680"/>
+            <a:ext cx="777240" cy="2194560"/>
+          </a:xfrm>
+          <a:prstGeom prst="rect">
+            <a:avLst/>
+          </a:prstGeom>
+          <a:solidFill>
+            <a:srgbClr val="B45309"/>
+          </a:solidFill>
+          <a:ln/>
+        </p:spPr>
+      </p:sp>
+      <p:sp>
+        <p:nvSpPr>
+          <p:cNvPr id="14" name="Text 12"/>
+          <p:cNvSpPr/>
+          <p:nvPr/>
+        </p:nvSpPr>
+        <p:spPr>
+          <a:xfrm>
+            <a:off x="4937760" y="1737360"/>
+            <a:ext cx="1143000" cy="237744"/>
+          </a:xfrm>
+          <a:prstGeom prst="rect">
+            <a:avLst/>
+          </a:prstGeom>
+          <a:noFill/>
+          <a:ln/>
+        </p:spPr>
+        <p:txBody>
+          <a:bodyPr wrap="square" rtlCol="0" anchor="ctr"/>
+          <a:lstStyle/>
+          <a:p>
+            <a:pPr algn="ctr" indent="0" marL="0">
+              <a:buNone/>
+            </a:pPr>
+            <a:r>
+              <a:rPr lang="en-US" sz="950" b="1" dirty="0">
+                <a:solidFill>
+                  <a:srgbClr val="1C1917"/>
+                </a:solidFill>
+                <a:latin typeface="Arial" pitchFamily="34" charset="0"/>
+                <a:ea typeface="Arial" pitchFamily="34" charset="-122"/>
+                <a:cs typeface="Arial" pitchFamily="34" charset="-120"/>
+              </a:rPr>
+              <a:t>30000</a:t>
+            </a:r>
+            <a:endParaRPr lang="en-US" sz="950" dirty="0"/>
+          </a:p>
+        </p:txBody>
+      </p:sp>
+      <p:sp>
+        <p:nvSpPr>
+          <p:cNvPr id="15" name="Text 13"/>
+          <p:cNvSpPr/>
+          <p:nvPr/>
+        </p:nvSpPr>
+        <p:spPr>
+          <a:xfrm>
+            <a:off x="4892040" y="4315968"/>
+            <a:ext cx="1234440" cy="502920"/>
+          </a:xfrm>
+          <a:prstGeom prst="rect">
+            <a:avLst/>
+          </a:prstGeom>
+          <a:noFill/>
+          <a:ln/>
+        </p:spPr>
+        <p:txBody>
+          <a:bodyPr wrap="square" rtlCol="0" anchor="ctr"/>
+          <a:lstStyle/>
+          <a:p>
+            <a:pPr algn="ctr" indent="0" marL="0">
+              <a:buNone/>
+            </a:pPr>
+            <a:r>
+              <a:rPr lang="en-US" sz="850" dirty="0">
+                <a:solidFill>
+                  <a:srgbClr val="78716C"/>
+                </a:solidFill>
+                <a:latin typeface="Arial" pitchFamily="34" charset="0"/>
+                <a:ea typeface="Arial" pitchFamily="34" charset="-122"/>
+                <a:cs typeface="Arial" pitchFamily="34" charset="-120"/>
+              </a:rPr>
+              <a:t>Price −$5 Only</a:t>
+            </a:r>
+            <a:endParaRPr lang="en-US" sz="850" dirty="0"/>
+          </a:p>
+        </p:txBody>
+      </p:sp>
+      <p:sp>
+        <p:nvSpPr>
+          <p:cNvPr id="16" name="Shape 14"/>
+          <p:cNvSpPr/>
+          <p:nvPr/>
+        </p:nvSpPr>
+        <p:spPr>
+          <a:xfrm>
+            <a:off x="6995160" y="4187952"/>
+            <a:ext cx="777240" cy="27432"/>
+          </a:xfrm>
+          <a:prstGeom prst="rect">
+            <a:avLst/>
+          </a:prstGeom>
+          <a:solidFill>
+            <a:srgbClr val="B45309"/>
+          </a:solidFill>
+          <a:ln/>
+        </p:spPr>
+      </p:sp>
+      <p:sp>
+        <p:nvSpPr>
+          <p:cNvPr id="17" name="Text 15"/>
+          <p:cNvSpPr/>
+          <p:nvPr/>
+        </p:nvSpPr>
+        <p:spPr>
+          <a:xfrm>
+            <a:off x="6812280" y="3913632"/>
+            <a:ext cx="1143000" cy="237744"/>
+          </a:xfrm>
+          <a:prstGeom prst="rect">
+            <a:avLst/>
+          </a:prstGeom>
+          <a:noFill/>
+          <a:ln/>
+        </p:spPr>
+        <p:txBody>
+          <a:bodyPr wrap="square" rtlCol="0" anchor="ctr"/>
+          <a:lstStyle/>
+          <a:p>
+            <a:pPr algn="ctr" indent="0" marL="0">
+              <a:buNone/>
+            </a:pPr>
+            <a:r>
+              <a:rPr lang="en-US" sz="950" b="1" dirty="0">
+                <a:solidFill>
+                  <a:srgbClr val="1C1917"/>
+                </a:solidFill>
+                <a:latin typeface="Arial" pitchFamily="34" charset="0"/>
+                <a:ea typeface="Arial" pitchFamily="34" charset="-122"/>
+                <a:cs typeface="Arial" pitchFamily="34" charset="-120"/>
+              </a:rPr>
+              <a:t>250</a:t>
+            </a:r>
+            <a:endParaRPr lang="en-US" sz="950" dirty="0"/>
+          </a:p>
+        </p:txBody>
+      </p:sp>
+      <p:sp>
+        <p:nvSpPr>
+          <p:cNvPr id="18" name="Text 16"/>
+          <p:cNvSpPr/>
+          <p:nvPr/>
+        </p:nvSpPr>
+        <p:spPr>
+          <a:xfrm>
+            <a:off x="6766560" y="4315968"/>
+            <a:ext cx="1234440" cy="502920"/>
+          </a:xfrm>
+          <a:prstGeom prst="rect">
+            <a:avLst/>
+          </a:prstGeom>
+          <a:noFill/>
+          <a:ln/>
+        </p:spPr>
+        <p:txBody>
+          <a:bodyPr wrap="square" rtlCol="0" anchor="ctr"/>
+          <a:lstStyle/>
+          <a:p>
+            <a:pPr algn="ctr" indent="0" marL="0">
+              <a:buNone/>
+            </a:pPr>
+            <a:r>
+              <a:rPr lang="en-US" sz="850" dirty="0">
+                <a:solidFill>
+                  <a:srgbClr val="78716C"/>
+                </a:solidFill>
+                <a:latin typeface="Arial" pitchFamily="34" charset="0"/>
+                <a:ea typeface="Arial" pitchFamily="34" charset="-122"/>
+                <a:cs typeface="Arial" pitchFamily="34" charset="-120"/>
+              </a:rPr>
+              <a:t>Price Sensitivity Coeff</a:t>
+            </a:r>
+            <a:endParaRPr lang="en-US" sz="850" dirty="0"/>
           </a:p>
         </p:txBody>
       </p:sp>
@@ -2024,9 +3039,16 @@
 </p:sld>
 </file>
 
-<file path=ppt/slides/slide2.xml><?xml version="1.0" encoding="utf-8"?>
+<file path=ppt/slides/slide11.xml><?xml version="1.0" encoding="utf-8"?>
 <p:sld xmlns:a="http://schemas.openxmlformats.org/drawingml/2006/main" xmlns:r="http://schemas.openxmlformats.org/officeDocument/2006/relationships" xmlns:p="http://schemas.openxmlformats.org/presentationml/2006/main">
-  <p:cSld name="Slide 2">
+  <p:cSld name="Slide 11">
+    <p:bg>
+      <p:bgPr>
+        <a:solidFill>
+          <a:srgbClr val="FFFFFF"/>
+        </a:solidFill>
+      </p:bgPr>
+    </p:bg>
     <p:spTree>
       <p:nvGrpSpPr>
         <p:cNvPr id="1" name=""/>
@@ -2043,14 +3065,34 @@
       </p:grpSpPr>
       <p:sp>
         <p:nvSpPr>
-          <p:cNvPr id="2" name="Text 0"/>
-          <p:cNvSpPr/>
-          <p:nvPr/>
-        </p:nvSpPr>
-        <p:spPr>
-          <a:xfrm>
-            <a:off x="457200" y="320040"/>
-            <a:ext cx="8229600" cy="731520"/>
+          <p:cNvPr id="2" name="Shape 0"/>
+          <p:cNvSpPr/>
+          <p:nvPr/>
+        </p:nvSpPr>
+        <p:spPr>
+          <a:xfrm>
+            <a:off x="411480" y="402336"/>
+            <a:ext cx="82296" cy="329184"/>
+          </a:xfrm>
+          <a:prstGeom prst="rect">
+            <a:avLst/>
+          </a:prstGeom>
+          <a:solidFill>
+            <a:srgbClr val="B45309"/>
+          </a:solidFill>
+          <a:ln/>
+        </p:spPr>
+      </p:sp>
+      <p:sp>
+        <p:nvSpPr>
+          <p:cNvPr id="3" name="Text 1"/>
+          <p:cNvSpPr/>
+          <p:nvPr/>
+        </p:nvSpPr>
+        <p:spPr>
+          <a:xfrm>
+            <a:off x="566928" y="292608"/>
+            <a:ext cx="8138160" cy="548640"/>
           </a:xfrm>
           <a:prstGeom prst="rect">
             <a:avLst/>
@@ -2066,50 +3108,267 @@
               <a:buNone/>
             </a:pPr>
             <a:r>
-              <a:rPr lang="en-US" sz="2400" b="1" dirty="0">
+              <a:rPr lang="en-US" sz="2100" b="1" dirty="0">
+                <a:solidFill>
+                  <a:srgbClr val="1C1917"/>
+                </a:solidFill>
+                <a:latin typeface="Arial" pitchFamily="34" charset="0"/>
+                <a:ea typeface="Arial" pitchFamily="34" charset="-122"/>
+                <a:cs typeface="Arial" pitchFamily="34" charset="-120"/>
+              </a:rPr>
+              <a:t>Applications and Pitfalls</a:t>
+            </a:r>
+            <a:endParaRPr lang="en-US" sz="2100" dirty="0"/>
+          </a:p>
+        </p:txBody>
+      </p:sp>
+      <p:sp>
+        <p:nvSpPr>
+          <p:cNvPr id="4" name="Shape 2"/>
+          <p:cNvSpPr/>
+          <p:nvPr/>
+        </p:nvSpPr>
+        <p:spPr>
+          <a:xfrm>
+            <a:off x="411480" y="960120"/>
+            <a:ext cx="8321040" cy="0"/>
+          </a:xfrm>
+          <a:prstGeom prst="line">
+            <a:avLst/>
+          </a:prstGeom>
+          <a:noFill/>
+          <a:ln w="12700">
+            <a:solidFill>
+              <a:srgbClr val="E7E5E4"/>
+            </a:solidFill>
+            <a:prstDash val="solid"/>
+          </a:ln>
+        </p:spPr>
+      </p:sp>
+      <p:sp>
+        <p:nvSpPr>
+          <p:cNvPr id="5" name="Text 3"/>
+          <p:cNvSpPr/>
+          <p:nvPr/>
+        </p:nvSpPr>
+        <p:spPr>
+          <a:xfrm>
+            <a:off x="411480" y="4864608"/>
+            <a:ext cx="8321040" cy="237744"/>
+          </a:xfrm>
+          <a:prstGeom prst="rect">
+            <a:avLst/>
+          </a:prstGeom>
+          <a:noFill/>
+          <a:ln/>
+        </p:spPr>
+        <p:txBody>
+          <a:bodyPr wrap="square" rtlCol="0" anchor="ctr"/>
+          <a:lstStyle/>
+          <a:p>
+            <a:pPr indent="0" marL="0">
+              <a:buNone/>
+            </a:pPr>
+            <a:r>
+              <a:rPr lang="en-US" sz="750" dirty="0">
+                <a:solidFill>
+                  <a:srgbClr val="AAAAAA"/>
+                </a:solidFill>
+                <a:latin typeface="Arial" pitchFamily="34" charset="0"/>
+                <a:ea typeface="Arial" pitchFamily="34" charset="-122"/>
+                <a:cs typeface="Arial" pitchFamily="34" charset="-120"/>
+              </a:rPr>
+              <a:t>Lesson Forge Pro (owner) — This content is educational material only and does not constitute financial, investment, or trading advice.</a:t>
+            </a:r>
+            <a:endParaRPr lang="en-US" sz="750" dirty="0"/>
+          </a:p>
+        </p:txBody>
+      </p:sp>
+      <p:sp>
+        <p:nvSpPr>
+          <p:cNvPr id="6" name="Text 4"/>
+          <p:cNvSpPr/>
+          <p:nvPr/>
+        </p:nvSpPr>
+        <p:spPr>
+          <a:xfrm>
+            <a:off x="731520" y="1188720"/>
+            <a:ext cx="7680960" cy="2743200"/>
+          </a:xfrm>
+          <a:prstGeom prst="rect">
+            <a:avLst/>
+          </a:prstGeom>
+          <a:noFill/>
+          <a:ln/>
+        </p:spPr>
+        <p:txBody>
+          <a:bodyPr wrap="square" rtlCol="0" anchor="t"/>
+          <a:lstStyle/>
+          <a:p>
+            <a:pPr marL="152400" indent="-152400">
+              <a:spcAft>
+                <a:spcPts val="800"/>
+              </a:spcAft>
+              <a:buSzPct val="100000"/>
+              <a:buChar char="•"/>
+            </a:pPr>
+            <a:r>
+              <a:rPr lang="en-US" sz="1500" dirty="0">
+                <a:solidFill>
+                  <a:srgbClr val="1C1917"/>
+                </a:solidFill>
+                <a:latin typeface="Arial" pitchFamily="34" charset="0"/>
+                <a:ea typeface="Arial" pitchFamily="34" charset="-122"/>
+                <a:cs typeface="Arial" pitchFamily="34" charset="-120"/>
+              </a:rPr>
+              <a:t>Scenario and sensitivity analysis apply wherever uncertainty is high and stakes are significant.</a:t>
+            </a:r>
+            <a:endParaRPr lang="en-US" sz="1500" dirty="0"/>
+          </a:p>
+          <a:p>
+            <a:pPr marL="152400" indent="-152400">
+              <a:spcAft>
+                <a:spcPts val="800"/>
+              </a:spcAft>
+              <a:buSzPct val="100000"/>
+              <a:buChar char="•"/>
+            </a:pPr>
+            <a:r>
+              <a:rPr lang="en-US" sz="1500" dirty="0">
+                <a:solidFill>
+                  <a:srgbClr val="1C1917"/>
+                </a:solidFill>
+                <a:latin typeface="Arial" pitchFamily="34" charset="0"/>
+                <a:ea typeface="Arial" pitchFamily="34" charset="-122"/>
+                <a:cs typeface="Arial" pitchFamily="34" charset="-120"/>
+              </a:rPr>
+              <a:t>Common uses: DCF valuation, FP&amp;A budgeting, capital budgeting, credit stress-testing, M&amp;A modeling.</a:t>
+            </a:r>
+            <a:endParaRPr lang="en-US" sz="1500" dirty="0"/>
+          </a:p>
+          <a:p>
+            <a:pPr marL="152400" indent="-152400">
+              <a:spcAft>
+                <a:spcPts val="800"/>
+              </a:spcAft>
+              <a:buSzPct val="100000"/>
+              <a:buChar char="•"/>
+            </a:pPr>
+            <a:r>
+              <a:rPr lang="en-US" sz="1500" dirty="0">
+                <a:solidFill>
+                  <a:srgbClr val="1C1917"/>
+                </a:solidFill>
+                <a:latin typeface="Arial" pitchFamily="34" charset="0"/>
+                <a:ea typeface="Arial" pitchFamily="34" charset="-122"/>
+                <a:cs typeface="Arial" pitchFamily="34" charset="-120"/>
+              </a:rPr>
+              <a:t>Mechanics alone are insufficient—knowing where to apply them distinguishes excellent analysts.</a:t>
+            </a:r>
+            <a:endParaRPr lang="en-US" sz="1500" dirty="0"/>
+          </a:p>
+          <a:p>
+            <a:pPr marL="152400" indent="-152400">
+              <a:spcAft>
+                <a:spcPts val="800"/>
+              </a:spcAft>
+              <a:buSzPct val="100000"/>
+              <a:buChar char="•"/>
+            </a:pPr>
+            <a:r>
+              <a:rPr lang="en-US" sz="1500" dirty="0">
+                <a:solidFill>
+                  <a:srgbClr val="1C1917"/>
+                </a:solidFill>
+                <a:latin typeface="Arial" pitchFamily="34" charset="0"/>
+                <a:ea typeface="Arial" pitchFamily="34" charset="-122"/>
+                <a:cs typeface="Arial" pitchFamily="34" charset="-120"/>
+              </a:rPr>
+              <a:t>Pitfalls emerge when tools are misapplied or results are presented without context.</a:t>
+            </a:r>
+            <a:endParaRPr lang="en-US" sz="1500" dirty="0"/>
+          </a:p>
+        </p:txBody>
+      </p:sp>
+      <p:sp>
+        <p:nvSpPr>
+          <p:cNvPr id="7" name="Shape 5"/>
+          <p:cNvSpPr/>
+          <p:nvPr/>
+        </p:nvSpPr>
+        <p:spPr>
+          <a:xfrm>
+            <a:off x="731520" y="4041648"/>
+            <a:ext cx="7680960" cy="566928"/>
+          </a:xfrm>
+          <a:prstGeom prst="roundRect">
+            <a:avLst>
+              <a:gd name="adj" fmla="val 12903"/>
+            </a:avLst>
+          </a:prstGeom>
+          <a:solidFill>
+            <a:srgbClr val="B45309">
+              <a:alpha val="12000"/>
+            </a:srgbClr>
+          </a:solidFill>
+          <a:ln w="12700">
+            <a:solidFill>
+              <a:srgbClr val="B45309"/>
+            </a:solidFill>
+            <a:prstDash val="solid"/>
+          </a:ln>
+        </p:spPr>
+      </p:sp>
+      <p:sp>
+        <p:nvSpPr>
+          <p:cNvPr id="8" name="Text 6"/>
+          <p:cNvSpPr/>
+          <p:nvPr/>
+        </p:nvSpPr>
+        <p:spPr>
+          <a:xfrm>
+            <a:off x="868680" y="4087368"/>
+            <a:ext cx="7406640" cy="475488"/>
+          </a:xfrm>
+          <a:prstGeom prst="rect">
+            <a:avLst/>
+          </a:prstGeom>
+          <a:noFill/>
+          <a:ln/>
+        </p:spPr>
+        <p:txBody>
+          <a:bodyPr wrap="square" rtlCol="0" anchor="ctr"/>
+          <a:lstStyle/>
+          <a:p>
+            <a:pPr indent="0" marL="0">
+              <a:buNone/>
+            </a:pPr>
+            <a:r>
+              <a:rPr lang="en-US" sz="1100" b="1" dirty="0">
                 <a:solidFill>
                   <a:srgbClr val="B45309"/>
                 </a:solidFill>
-              </a:rPr>
-              <a:t>Scenario Planning and Sensitivity Analysis</a:t>
-            </a:r>
-            <a:endParaRPr lang="en-US" sz="2400" dirty="0"/>
-          </a:p>
-        </p:txBody>
-      </p:sp>
-      <p:sp>
-        <p:nvSpPr>
-          <p:cNvPr id="3" name="Text 1"/>
-          <p:cNvSpPr/>
-          <p:nvPr/>
-        </p:nvSpPr>
-        <p:spPr>
-          <a:xfrm>
-            <a:off x="457200" y="4709160"/>
-            <a:ext cx="8229600" cy="320040"/>
-          </a:xfrm>
-          <a:prstGeom prst="rect">
-            <a:avLst/>
-          </a:prstGeom>
-          <a:noFill/>
-          <a:ln/>
-        </p:spPr>
-        <p:txBody>
-          <a:bodyPr wrap="square" rtlCol="0" anchor="ctr"/>
-          <a:lstStyle/>
-          <a:p>
+                <a:latin typeface="Arial" pitchFamily="34" charset="0"/>
+                <a:ea typeface="Arial" pitchFamily="34" charset="-122"/>
+                <a:cs typeface="Arial" pitchFamily="34" charset="-120"/>
+              </a:rPr>
+              <a:t>Takeaway  </a:t>
+            </a:r>
             <a:pPr indent="0" marL="0">
               <a:buNone/>
             </a:pPr>
             <a:r>
-              <a:rPr lang="en-US" sz="800" dirty="0">
-                <a:solidFill>
-                  <a:srgbClr val="AAAAAA"/>
-                </a:solidFill>
-              </a:rPr>
-              <a:t>Lesson Forge Pro (owner) — This content is educational material only and does not constitute financial, investment, or trading advice.</a:t>
-            </a:r>
-            <a:endParaRPr lang="en-US" sz="800" dirty="0"/>
+              <a:rPr lang="en-US" sz="1150" dirty="0">
+                <a:solidFill>
+                  <a:srgbClr val="1C1917"/>
+                </a:solidFill>
+                <a:latin typeface="Arial" pitchFamily="34" charset="0"/>
+                <a:ea typeface="Arial" pitchFamily="34" charset="-122"/>
+                <a:cs typeface="Arial" pitchFamily="34" charset="-120"/>
+              </a:rPr>
+              <a:t>Broad applicability makes these tools essential, but context determines whether they drive real decisions.</a:t>
+            </a:r>
+            <a:endParaRPr lang="en-US" sz="1100" dirty="0"/>
           </a:p>
         </p:txBody>
       </p:sp>
@@ -2121,9 +3380,16 @@
 </p:sld>
 </file>
 
-<file path=ppt/slides/slide3.xml><?xml version="1.0" encoding="utf-8"?>
+<file path=ppt/slides/slide12.xml><?xml version="1.0" encoding="utf-8"?>
 <p:sld xmlns:a="http://schemas.openxmlformats.org/drawingml/2006/main" xmlns:r="http://schemas.openxmlformats.org/officeDocument/2006/relationships" xmlns:p="http://schemas.openxmlformats.org/presentationml/2006/main">
-  <p:cSld name="Slide 3">
+  <p:cSld name="Slide 12">
+    <p:bg>
+      <p:bgPr>
+        <a:solidFill>
+          <a:srgbClr val="FFFFFF"/>
+        </a:solidFill>
+      </p:bgPr>
+    </p:bg>
     <p:spTree>
       <p:nvGrpSpPr>
         <p:cNvPr id="1" name=""/>
@@ -2140,14 +3406,34 @@
       </p:grpSpPr>
       <p:sp>
         <p:nvSpPr>
-          <p:cNvPr id="2" name="Text 0"/>
-          <p:cNvSpPr/>
-          <p:nvPr/>
-        </p:nvSpPr>
-        <p:spPr>
-          <a:xfrm>
-            <a:off x="457200" y="320040"/>
-            <a:ext cx="8229600" cy="731520"/>
+          <p:cNvPr id="2" name="Shape 0"/>
+          <p:cNvSpPr/>
+          <p:nvPr/>
+        </p:nvSpPr>
+        <p:spPr>
+          <a:xfrm>
+            <a:off x="411480" y="402336"/>
+            <a:ext cx="82296" cy="329184"/>
+          </a:xfrm>
+          <a:prstGeom prst="rect">
+            <a:avLst/>
+          </a:prstGeom>
+          <a:solidFill>
+            <a:srgbClr val="B45309"/>
+          </a:solidFill>
+          <a:ln/>
+        </p:spPr>
+      </p:sp>
+      <p:sp>
+        <p:nvSpPr>
+          <p:cNvPr id="3" name="Text 1"/>
+          <p:cNvSpPr/>
+          <p:nvPr/>
+        </p:nvSpPr>
+        <p:spPr>
+          <a:xfrm>
+            <a:off x="566928" y="292608"/>
+            <a:ext cx="8138160" cy="548640"/>
           </a:xfrm>
           <a:prstGeom prst="rect">
             <a:avLst/>
@@ -2163,27 +3449,92 @@
               <a:buNone/>
             </a:pPr>
             <a:r>
-              <a:rPr lang="en-US" sz="2400" b="1" dirty="0">
-                <a:solidFill>
-                  <a:srgbClr val="B45309"/>
-                </a:solidFill>
-              </a:rPr>
-              <a:t>Session Overview</a:t>
-            </a:r>
-            <a:endParaRPr lang="en-US" sz="2400" dirty="0"/>
-          </a:p>
-        </p:txBody>
-      </p:sp>
-      <p:sp>
-        <p:nvSpPr>
-          <p:cNvPr id="3" name="Text 1"/>
-          <p:cNvSpPr/>
-          <p:nvPr/>
-        </p:nvSpPr>
-        <p:spPr>
-          <a:xfrm>
-            <a:off x="640080" y="1188720"/>
-            <a:ext cx="7863840" cy="3291840"/>
+              <a:rPr lang="en-US" sz="2100" b="1" dirty="0">
+                <a:solidFill>
+                  <a:srgbClr val="1C1917"/>
+                </a:solidFill>
+                <a:latin typeface="Arial" pitchFamily="34" charset="0"/>
+                <a:ea typeface="Arial" pitchFamily="34" charset="-122"/>
+                <a:cs typeface="Arial" pitchFamily="34" charset="-120"/>
+              </a:rPr>
+              <a:t>Common Mistakes</a:t>
+            </a:r>
+            <a:endParaRPr lang="en-US" sz="2100" dirty="0"/>
+          </a:p>
+        </p:txBody>
+      </p:sp>
+      <p:sp>
+        <p:nvSpPr>
+          <p:cNvPr id="4" name="Shape 2"/>
+          <p:cNvSpPr/>
+          <p:nvPr/>
+        </p:nvSpPr>
+        <p:spPr>
+          <a:xfrm>
+            <a:off x="411480" y="960120"/>
+            <a:ext cx="8321040" cy="0"/>
+          </a:xfrm>
+          <a:prstGeom prst="line">
+            <a:avLst/>
+          </a:prstGeom>
+          <a:noFill/>
+          <a:ln w="12700">
+            <a:solidFill>
+              <a:srgbClr val="E7E5E4"/>
+            </a:solidFill>
+            <a:prstDash val="solid"/>
+          </a:ln>
+        </p:spPr>
+      </p:sp>
+      <p:sp>
+        <p:nvSpPr>
+          <p:cNvPr id="5" name="Text 3"/>
+          <p:cNvSpPr/>
+          <p:nvPr/>
+        </p:nvSpPr>
+        <p:spPr>
+          <a:xfrm>
+            <a:off x="411480" y="4864608"/>
+            <a:ext cx="8321040" cy="237744"/>
+          </a:xfrm>
+          <a:prstGeom prst="rect">
+            <a:avLst/>
+          </a:prstGeom>
+          <a:noFill/>
+          <a:ln/>
+        </p:spPr>
+        <p:txBody>
+          <a:bodyPr wrap="square" rtlCol="0" anchor="ctr"/>
+          <a:lstStyle/>
+          <a:p>
+            <a:pPr indent="0" marL="0">
+              <a:buNone/>
+            </a:pPr>
+            <a:r>
+              <a:rPr lang="en-US" sz="750" dirty="0">
+                <a:solidFill>
+                  <a:srgbClr val="AAAAAA"/>
+                </a:solidFill>
+                <a:latin typeface="Arial" pitchFamily="34" charset="0"/>
+                <a:ea typeface="Arial" pitchFamily="34" charset="-122"/>
+                <a:cs typeface="Arial" pitchFamily="34" charset="-120"/>
+              </a:rPr>
+              <a:t>Lesson Forge Pro (owner) — This content is educational material only and does not constitute financial, investment, or trading advice.</a:t>
+            </a:r>
+            <a:endParaRPr lang="en-US" sz="750" dirty="0"/>
+          </a:p>
+        </p:txBody>
+      </p:sp>
+      <p:sp>
+        <p:nvSpPr>
+          <p:cNvPr id="6" name="Text 4"/>
+          <p:cNvSpPr/>
+          <p:nvPr/>
+        </p:nvSpPr>
+        <p:spPr>
+          <a:xfrm>
+            <a:off x="731520" y="1188720"/>
+            <a:ext cx="7680960" cy="2743200"/>
           </a:xfrm>
           <a:prstGeom prst="rect">
             <a:avLst/>
@@ -2195,32 +3546,130 @@
           <a:bodyPr wrap="square" rtlCol="0" anchor="t"/>
           <a:lstStyle/>
           <a:p>
-            <a:pPr marL="342900" indent="-342900">
+            <a:pPr marL="152400" indent="-152400">
+              <a:spcAft>
+                <a:spcPts val="800"/>
+              </a:spcAft>
               <a:buSzPct val="100000"/>
               <a:buChar char="•"/>
             </a:pPr>
             <a:r>
-              <a:rPr lang="en-US" sz="1600" dirty="0">
-                <a:solidFill>
-                  <a:srgbClr val="333333"/>
-                </a:solidFill>
-              </a:rPr>
-              <a:t>In this 90-minute session, we will explore the concepts of scenario planning and sensitivity analysis, and how they can be applied to evaluate business outcomes</a:t>
-            </a:r>
-            <a:endParaRPr lang="en-US" sz="1600" dirty="0"/>
-          </a:p>
-        </p:txBody>
-      </p:sp>
-      <p:sp>
-        <p:nvSpPr>
-          <p:cNvPr id="4" name="Text 2"/>
-          <p:cNvSpPr/>
-          <p:nvPr/>
-        </p:nvSpPr>
-        <p:spPr>
-          <a:xfrm>
-            <a:off x="457200" y="4709160"/>
-            <a:ext cx="8229600" cy="320040"/>
+              <a:rPr lang="en-US" sz="1500" dirty="0">
+                <a:solidFill>
+                  <a:srgbClr val="1C1917"/>
+                </a:solidFill>
+                <a:latin typeface="Arial" pitchFamily="34" charset="0"/>
+                <a:ea typeface="Arial" pitchFamily="34" charset="-122"/>
+                <a:cs typeface="Arial" pitchFamily="34" charset="-120"/>
+              </a:rPr>
+              <a:t>Flexing revenue without adjusting correlated variable costs inflates margins unrealistically.</a:t>
+            </a:r>
+            <a:endParaRPr lang="en-US" sz="1500" dirty="0"/>
+          </a:p>
+          <a:p>
+            <a:pPr marL="152400" indent="-152400">
+              <a:spcAft>
+                <a:spcPts val="800"/>
+              </a:spcAft>
+              <a:buSzPct val="100000"/>
+              <a:buChar char="•"/>
+            </a:pPr>
+            <a:r>
+              <a:rPr lang="en-US" sz="1500" dirty="0">
+                <a:solidFill>
+                  <a:srgbClr val="1C1917"/>
+                </a:solidFill>
+                <a:latin typeface="Arial" pitchFamily="34" charset="0"/>
+                <a:ea typeface="Arial" pitchFamily="34" charset="-122"/>
+                <a:cs typeface="Arial" pitchFamily="34" charset="-120"/>
+              </a:rPr>
+              <a:t>Arbitrary ±10% shocks ignore historical volatility, guidance ranges, and contractual bounds.</a:t>
+            </a:r>
+            <a:endParaRPr lang="en-US" sz="1500" dirty="0"/>
+          </a:p>
+          <a:p>
+            <a:pPr marL="152400" indent="-152400">
+              <a:spcAft>
+                <a:spcPts val="800"/>
+              </a:spcAft>
+              <a:buSzPct val="100000"/>
+              <a:buChar char="•"/>
+            </a:pPr>
+            <a:r>
+              <a:rPr lang="en-US" sz="1500" dirty="0">
+                <a:solidFill>
+                  <a:srgbClr val="1C1917"/>
+                </a:solidFill>
+                <a:latin typeface="Arial" pitchFamily="34" charset="0"/>
+                <a:ea typeface="Arial" pitchFamily="34" charset="-122"/>
+                <a:cs typeface="Arial" pitchFamily="34" charset="-120"/>
+              </a:rPr>
+              <a:t>Mixing sensitivity and scenario analysis produces outputs that are hard to interpret.</a:t>
+            </a:r>
+            <a:endParaRPr lang="en-US" sz="1500" dirty="0"/>
+          </a:p>
+          <a:p>
+            <a:pPr marL="152400" indent="-152400">
+              <a:spcAft>
+                <a:spcPts val="800"/>
+              </a:spcAft>
+              <a:buSzPct val="100000"/>
+              <a:buChar char="•"/>
+            </a:pPr>
+            <a:r>
+              <a:rPr lang="en-US" sz="1500" dirty="0">
+                <a:solidFill>
+                  <a:srgbClr val="1C1917"/>
+                </a:solidFill>
+                <a:latin typeface="Arial" pitchFamily="34" charset="0"/>
+                <a:ea typeface="Arial" pitchFamily="34" charset="-122"/>
+                <a:cs typeface="Arial" pitchFamily="34" charset="-120"/>
+              </a:rPr>
+              <a:t>Anchoring on the base case without seriously questioning its assumptions distorts conclusions.</a:t>
+            </a:r>
+            <a:endParaRPr lang="en-US" sz="1500" dirty="0"/>
+          </a:p>
+        </p:txBody>
+      </p:sp>
+      <p:sp>
+        <p:nvSpPr>
+          <p:cNvPr id="7" name="Shape 5"/>
+          <p:cNvSpPr/>
+          <p:nvPr/>
+        </p:nvSpPr>
+        <p:spPr>
+          <a:xfrm>
+            <a:off x="731520" y="4041648"/>
+            <a:ext cx="7680960" cy="566928"/>
+          </a:xfrm>
+          <a:prstGeom prst="roundRect">
+            <a:avLst>
+              <a:gd name="adj" fmla="val 12903"/>
+            </a:avLst>
+          </a:prstGeom>
+          <a:solidFill>
+            <a:srgbClr val="B45309">
+              <a:alpha val="12000"/>
+            </a:srgbClr>
+          </a:solidFill>
+          <a:ln w="12700">
+            <a:solidFill>
+              <a:srgbClr val="B45309"/>
+            </a:solidFill>
+            <a:prstDash val="solid"/>
+          </a:ln>
+        </p:spPr>
+      </p:sp>
+      <p:sp>
+        <p:nvSpPr>
+          <p:cNvPr id="8" name="Text 6"/>
+          <p:cNvSpPr/>
+          <p:nvPr/>
+        </p:nvSpPr>
+        <p:spPr>
+          <a:xfrm>
+            <a:off x="868680" y="4087368"/>
+            <a:ext cx="7406640" cy="475488"/>
           </a:xfrm>
           <a:prstGeom prst="rect">
             <a:avLst/>
@@ -2236,14 +3685,31 @@
               <a:buNone/>
             </a:pPr>
             <a:r>
-              <a:rPr lang="en-US" sz="800" dirty="0">
-                <a:solidFill>
-                  <a:srgbClr val="AAAAAA"/>
-                </a:solidFill>
-              </a:rPr>
-              <a:t>Lesson Forge Pro (owner) — This content is educational material only and does not constitute financial, investment, or trading advice.</a:t>
-            </a:r>
-            <a:endParaRPr lang="en-US" sz="800" dirty="0"/>
+              <a:rPr lang="en-US" sz="1100" b="1" dirty="0">
+                <a:solidFill>
+                  <a:srgbClr val="B45309"/>
+                </a:solidFill>
+                <a:latin typeface="Arial" pitchFamily="34" charset="0"/>
+                <a:ea typeface="Arial" pitchFamily="34" charset="-122"/>
+                <a:cs typeface="Arial" pitchFamily="34" charset="-120"/>
+              </a:rPr>
+              <a:t>Takeaway  </a:t>
+            </a:r>
+            <a:pPr indent="0" marL="0">
+              <a:buNone/>
+            </a:pPr>
+            <a:r>
+              <a:rPr lang="en-US" sz="1150" dirty="0">
+                <a:solidFill>
+                  <a:srgbClr val="1C1917"/>
+                </a:solidFill>
+                <a:latin typeface="Arial" pitchFamily="34" charset="0"/>
+                <a:ea typeface="Arial" pitchFamily="34" charset="-122"/>
+                <a:cs typeface="Arial" pitchFamily="34" charset="-120"/>
+              </a:rPr>
+              <a:t>The most dangerous errors come from ignoring input correlations and conflating two distinct analytical methods.</a:t>
+            </a:r>
+            <a:endParaRPr lang="en-US" sz="1100" dirty="0"/>
           </a:p>
         </p:txBody>
       </p:sp>
@@ -2255,9 +3721,16 @@
 </p:sld>
 </file>
 
-<file path=ppt/slides/slide4.xml><?xml version="1.0" encoding="utf-8"?>
+<file path=ppt/slides/slide13.xml><?xml version="1.0" encoding="utf-8"?>
 <p:sld xmlns:a="http://schemas.openxmlformats.org/drawingml/2006/main" xmlns:r="http://schemas.openxmlformats.org/officeDocument/2006/relationships" xmlns:p="http://schemas.openxmlformats.org/presentationml/2006/main">
-  <p:cSld name="Slide 4">
+  <p:cSld name="Slide 13">
+    <p:bg>
+      <p:bgPr>
+        <a:solidFill>
+          <a:srgbClr val="FFFFFF"/>
+        </a:solidFill>
+      </p:bgPr>
+    </p:bg>
     <p:spTree>
       <p:nvGrpSpPr>
         <p:cNvPr id="1" name=""/>
@@ -2274,14 +3747,34 @@
       </p:grpSpPr>
       <p:sp>
         <p:nvSpPr>
-          <p:cNvPr id="2" name="Text 0"/>
-          <p:cNvSpPr/>
-          <p:nvPr/>
-        </p:nvSpPr>
-        <p:spPr>
-          <a:xfrm>
-            <a:off x="457200" y="320040"/>
-            <a:ext cx="8229600" cy="731520"/>
+          <p:cNvPr id="2" name="Shape 0"/>
+          <p:cNvSpPr/>
+          <p:nvPr/>
+        </p:nvSpPr>
+        <p:spPr>
+          <a:xfrm>
+            <a:off x="411480" y="384048"/>
+            <a:ext cx="82296" cy="310896"/>
+          </a:xfrm>
+          <a:prstGeom prst="rect">
+            <a:avLst/>
+          </a:prstGeom>
+          <a:solidFill>
+            <a:srgbClr val="B45309"/>
+          </a:solidFill>
+          <a:ln/>
+        </p:spPr>
+      </p:sp>
+      <p:sp>
+        <p:nvSpPr>
+          <p:cNvPr id="3" name="Text 1"/>
+          <p:cNvSpPr/>
+          <p:nvPr/>
+        </p:nvSpPr>
+        <p:spPr>
+          <a:xfrm>
+            <a:off x="566928" y="292608"/>
+            <a:ext cx="8138160" cy="502920"/>
           </a:xfrm>
           <a:prstGeom prst="rect">
             <a:avLst/>
@@ -2297,156 +3790,17 @@
               <a:buNone/>
             </a:pPr>
             <a:r>
-              <a:rPr lang="en-US" sz="2400" b="1" dirty="0">
-                <a:solidFill>
-                  <a:srgbClr val="B45309"/>
-                </a:solidFill>
-              </a:rPr>
-              <a:t>Timed Agenda</a:t>
-            </a:r>
-            <a:endParaRPr lang="en-US" sz="2400" dirty="0"/>
-          </a:p>
-        </p:txBody>
-      </p:sp>
-      <p:sp>
-        <p:nvSpPr>
-          <p:cNvPr id="3" name="Text 1"/>
-          <p:cNvSpPr/>
-          <p:nvPr/>
-        </p:nvSpPr>
-        <p:spPr>
-          <a:xfrm>
-            <a:off x="640080" y="1188720"/>
-            <a:ext cx="7863840" cy="3291840"/>
-          </a:xfrm>
-          <a:prstGeom prst="rect">
-            <a:avLst/>
-          </a:prstGeom>
-          <a:noFill/>
-          <a:ln/>
-        </p:spPr>
-        <p:txBody>
-          <a:bodyPr wrap="square" rtlCol="0" anchor="t"/>
-          <a:lstStyle/>
-          <a:p>
-            <a:pPr marL="342900" indent="-342900">
-              <a:buSzPct val="100000"/>
-              <a:buChar char="•"/>
-            </a:pPr>
-            <a:r>
-              <a:rPr lang="en-US" sz="1600" dirty="0">
-                <a:solidFill>
-                  <a:srgbClr val="333333"/>
-                </a:solidFill>
-              </a:rPr>
-              <a:t>| Time | Topic | Duration |</a:t>
-            </a:r>
-            <a:endParaRPr lang="en-US" sz="1600" dirty="0"/>
-          </a:p>
-          <a:p>
-            <a:pPr marL="342900" indent="-342900">
-              <a:buSzPct val="100000"/>
-              <a:buChar char="•"/>
-            </a:pPr>
-            <a:r>
-              <a:rPr lang="en-US" sz="1600" dirty="0">
-                <a:solidFill>
-                  <a:srgbClr val="333333"/>
-                </a:solidFill>
-              </a:rPr>
-              <a:t>| --- | --- | --- |</a:t>
-            </a:r>
-            <a:endParaRPr lang="en-US" sz="1600" dirty="0"/>
-          </a:p>
-          <a:p>
-            <a:pPr marL="342900" indent="-342900">
-              <a:buSzPct val="100000"/>
-              <a:buChar char="•"/>
-            </a:pPr>
-            <a:r>
-              <a:rPr lang="en-US" sz="1600" dirty="0">
-                <a:solidFill>
-                  <a:srgbClr val="333333"/>
-                </a:solidFill>
-              </a:rPr>
-              <a:t>| 0:00 | Introduction and Objectives | 5 minutes |</a:t>
-            </a:r>
-            <a:endParaRPr lang="en-US" sz="1600" dirty="0"/>
-          </a:p>
-          <a:p>
-            <a:pPr marL="342900" indent="-342900">
-              <a:buSzPct val="100000"/>
-              <a:buChar char="•"/>
-            </a:pPr>
-            <a:r>
-              <a:rPr lang="en-US" sz="1600" dirty="0">
-                <a:solidFill>
-                  <a:srgbClr val="333333"/>
-                </a:solidFill>
-              </a:rPr>
-              <a:t>| 0:05 | Scenario Planning | 20 minutes |</a:t>
-            </a:r>
-            <a:endParaRPr lang="en-US" sz="1600" dirty="0"/>
-          </a:p>
-          <a:p>
-            <a:pPr marL="342900" indent="-342900">
-              <a:buSzPct val="100000"/>
-              <a:buChar char="•"/>
-            </a:pPr>
-            <a:r>
-              <a:rPr lang="en-US" sz="1600" dirty="0">
-                <a:solidFill>
-                  <a:srgbClr val="333333"/>
-                </a:solidFill>
-              </a:rPr>
-              <a:t>| 0:25 | Energizer/Break | 5 minutes |</a:t>
-            </a:r>
-            <a:endParaRPr lang="en-US" sz="1600" dirty="0"/>
-          </a:p>
-          <a:p>
-            <a:pPr marL="342900" indent="-342900">
-              <a:buSzPct val="100000"/>
-              <a:buChar char="•"/>
-            </a:pPr>
-            <a:r>
-              <a:rPr lang="en-US" sz="1600" dirty="0">
-                <a:solidFill>
-                  <a:srgbClr val="333333"/>
-                </a:solidFill>
-              </a:rPr>
-              <a:t>| 0:30 | Sensitivity Analysis | 30 minutes |</a:t>
-            </a:r>
-            <a:endParaRPr lang="en-US" sz="1600" dirty="0"/>
-          </a:p>
-          <a:p>
-            <a:pPr marL="342900" indent="-342900">
-              <a:buSzPct val="100000"/>
-              <a:buChar char="•"/>
-            </a:pPr>
-            <a:r>
-              <a:rPr lang="en-US" sz="1600" dirty="0">
-                <a:solidFill>
-                  <a:srgbClr val="333333"/>
-                </a:solidFill>
-              </a:rPr>
-              <a:t>| 1:00 | Creating Interactive Dashboards | 20 minutes |</a:t>
-            </a:r>
-            <a:endParaRPr lang="en-US" sz="1600" dirty="0"/>
-          </a:p>
-          <a:p>
-            <a:pPr marL="342900" indent="-342900">
-              <a:buSzPct val="100000"/>
-              <a:buChar char="•"/>
-            </a:pPr>
-            <a:r>
-              <a:rPr lang="en-US" sz="1600" dirty="0">
-                <a:solidFill>
-                  <a:srgbClr val="333333"/>
-                </a:solidFill>
-              </a:rPr>
-              <a:t>| 1:20 | Conclusion and Q&amp;A | 10 minutes |</a:t>
-            </a:r>
-            <a:endParaRPr lang="en-US" sz="1600" dirty="0"/>
+              <a:rPr lang="en-US" sz="2000" b="1" dirty="0">
+                <a:solidFill>
+                  <a:srgbClr val="1C1917"/>
+                </a:solidFill>
+                <a:latin typeface="Arial" pitchFamily="34" charset="0"/>
+                <a:ea typeface="Arial" pitchFamily="34" charset="-122"/>
+                <a:cs typeface="Arial" pitchFamily="34" charset="-120"/>
+              </a:rPr>
+              <a:t>Scenario vs. Sensitivity: When to Use</a:t>
+            </a:r>
+            <a:endParaRPr lang="en-US" sz="2000" dirty="0"/>
           </a:p>
         </p:txBody>
       </p:sp>
@@ -2458,8 +3812,8 @@
         </p:nvSpPr>
         <p:spPr>
           <a:xfrm>
-            <a:off x="457200" y="4709160"/>
-            <a:ext cx="8229600" cy="320040"/>
+            <a:off x="566928" y="4681728"/>
+            <a:ext cx="8138160" cy="320040"/>
           </a:xfrm>
           <a:prstGeom prst="rect">
             <a:avLst/>
@@ -2475,14 +3829,603 @@
               <a:buNone/>
             </a:pPr>
             <a:r>
-              <a:rPr lang="en-US" sz="800" dirty="0">
+              <a:rPr lang="en-US" sz="1000" i="1" dirty="0">
+                <a:solidFill>
+                  <a:srgbClr val="78716C"/>
+                </a:solidFill>
+                <a:latin typeface="Arial" pitchFamily="34" charset="0"/>
+                <a:ea typeface="Arial" pitchFamily="34" charset="-122"/>
+                <a:cs typeface="Arial" pitchFamily="34" charset="-120"/>
+              </a:rPr>
+              <a:t>Choose technique based on whether you need driver isolation or a consistent narrative</a:t>
+            </a:r>
+            <a:endParaRPr lang="en-US" sz="1000" dirty="0"/>
+          </a:p>
+        </p:txBody>
+      </p:sp>
+      <p:sp>
+        <p:nvSpPr>
+          <p:cNvPr id="5" name="Text 3"/>
+          <p:cNvSpPr/>
+          <p:nvPr/>
+        </p:nvSpPr>
+        <p:spPr>
+          <a:xfrm>
+            <a:off x="411480" y="4919472"/>
+            <a:ext cx="8321040" cy="219456"/>
+          </a:xfrm>
+          <a:prstGeom prst="rect">
+            <a:avLst/>
+          </a:prstGeom>
+          <a:noFill/>
+          <a:ln/>
+        </p:spPr>
+        <p:txBody>
+          <a:bodyPr wrap="square" rtlCol="0" anchor="ctr"/>
+          <a:lstStyle/>
+          <a:p>
+            <a:pPr indent="0" marL="0">
+              <a:buNone/>
+            </a:pPr>
+            <a:r>
+              <a:rPr lang="en-US" sz="750" dirty="0">
                 <a:solidFill>
                   <a:srgbClr val="AAAAAA"/>
                 </a:solidFill>
+                <a:latin typeface="Arial" pitchFamily="34" charset="0"/>
+                <a:ea typeface="Arial" pitchFamily="34" charset="-122"/>
+                <a:cs typeface="Arial" pitchFamily="34" charset="-120"/>
               </a:rPr>
               <a:t>Lesson Forge Pro (owner) — This content is educational material only and does not constitute financial, investment, or trading advice.</a:t>
             </a:r>
-            <a:endParaRPr lang="en-US" sz="800" dirty="0"/>
+            <a:endParaRPr lang="en-US" sz="750" dirty="0"/>
+          </a:p>
+        </p:txBody>
+      </p:sp>
+      <p:sp>
+        <p:nvSpPr>
+          <p:cNvPr id="6" name="Shape 4"/>
+          <p:cNvSpPr/>
+          <p:nvPr/>
+        </p:nvSpPr>
+        <p:spPr>
+          <a:xfrm>
+            <a:off x="2011680" y="1234440"/>
+            <a:ext cx="5120640" cy="3108960"/>
+          </a:xfrm>
+          <a:prstGeom prst="rect">
+            <a:avLst/>
+          </a:prstGeom>
+          <a:solidFill>
+            <a:srgbClr val="FFFFFF"/>
+          </a:solidFill>
+          <a:ln w="15240">
+            <a:solidFill>
+              <a:srgbClr val="1C1917"/>
+            </a:solidFill>
+            <a:prstDash val="solid"/>
+          </a:ln>
+        </p:spPr>
+      </p:sp>
+      <p:sp>
+        <p:nvSpPr>
+          <p:cNvPr id="7" name="Shape 5"/>
+          <p:cNvSpPr/>
+          <p:nvPr/>
+        </p:nvSpPr>
+        <p:spPr>
+          <a:xfrm>
+            <a:off x="4572000" y="1234440"/>
+            <a:ext cx="0" cy="3108960"/>
+          </a:xfrm>
+          <a:prstGeom prst="line">
+            <a:avLst/>
+          </a:prstGeom>
+          <a:noFill/>
+          <a:ln w="11430">
+            <a:solidFill>
+              <a:srgbClr val="1C1917"/>
+            </a:solidFill>
+            <a:prstDash val="solid"/>
+          </a:ln>
+        </p:spPr>
+      </p:sp>
+      <p:sp>
+        <p:nvSpPr>
+          <p:cNvPr id="8" name="Shape 6"/>
+          <p:cNvSpPr/>
+          <p:nvPr/>
+        </p:nvSpPr>
+        <p:spPr>
+          <a:xfrm>
+            <a:off x="2011680" y="2788920"/>
+            <a:ext cx="5120640" cy="0"/>
+          </a:xfrm>
+          <a:prstGeom prst="line">
+            <a:avLst/>
+          </a:prstGeom>
+          <a:noFill/>
+          <a:ln w="11430">
+            <a:solidFill>
+              <a:srgbClr val="1C1917"/>
+            </a:solidFill>
+            <a:prstDash val="solid"/>
+          </a:ln>
+        </p:spPr>
+      </p:sp>
+      <p:sp>
+        <p:nvSpPr>
+          <p:cNvPr id="9" name="Shape 7"/>
+          <p:cNvSpPr/>
+          <p:nvPr/>
+        </p:nvSpPr>
+        <p:spPr>
+          <a:xfrm>
+            <a:off x="2240280" y="1600200"/>
+            <a:ext cx="2103120" cy="822960"/>
+          </a:xfrm>
+          <a:prstGeom prst="roundRect">
+            <a:avLst>
+              <a:gd name="adj" fmla="val 11111"/>
+            </a:avLst>
+          </a:prstGeom>
+          <a:solidFill>
+            <a:srgbClr val="B45309">
+              <a:alpha val="15000"/>
+            </a:srgbClr>
+          </a:solidFill>
+          <a:ln/>
+        </p:spPr>
+      </p:sp>
+      <p:sp>
+        <p:nvSpPr>
+          <p:cNvPr id="10" name="Text 8"/>
+          <p:cNvSpPr/>
+          <p:nvPr/>
+        </p:nvSpPr>
+        <p:spPr>
+          <a:xfrm>
+            <a:off x="2240280" y="1600200"/>
+            <a:ext cx="2103120" cy="822960"/>
+          </a:xfrm>
+          <a:prstGeom prst="rect">
+            <a:avLst/>
+          </a:prstGeom>
+          <a:noFill/>
+          <a:ln/>
+        </p:spPr>
+        <p:txBody>
+          <a:bodyPr wrap="square" rtlCol="0" anchor="ctr"/>
+          <a:lstStyle/>
+          <a:p>
+            <a:pPr algn="ctr" indent="0" marL="0">
+              <a:buNone/>
+            </a:pPr>
+            <a:r>
+              <a:rPr lang="en-US" sz="1200" b="1" dirty="0">
+                <a:solidFill>
+                  <a:srgbClr val="1C1917"/>
+                </a:solidFill>
+                <a:latin typeface="Arial" pitchFamily="34" charset="0"/>
+                <a:ea typeface="Arial" pitchFamily="34" charset="-122"/>
+                <a:cs typeface="Arial" pitchFamily="34" charset="-120"/>
+              </a:rPr>
+              <a:t>Scenario Planning</a:t>
+            </a:r>
+            <a:endParaRPr lang="en-US" sz="1200" dirty="0"/>
+          </a:p>
+          <a:p>
+            <a:pPr algn="ctr" indent="0" marL="0">
+              <a:buNone/>
+            </a:pPr>
+            <a:r>
+              <a:rPr lang="en-US" sz="900" dirty="0">
+                <a:solidFill>
+                  <a:srgbClr val="78716C"/>
+                </a:solidFill>
+                <a:latin typeface="Arial" pitchFamily="34" charset="0"/>
+                <a:ea typeface="Arial" pitchFamily="34" charset="-122"/>
+                <a:cs typeface="Arial" pitchFamily="34" charset="-120"/>
+              </a:rPr>
+              <a:t>Multiple inputs change in one coherent story</a:t>
+            </a:r>
+            <a:endParaRPr lang="en-US" sz="1200" dirty="0"/>
+          </a:p>
+        </p:txBody>
+      </p:sp>
+      <p:sp>
+        <p:nvSpPr>
+          <p:cNvPr id="11" name="Shape 9"/>
+          <p:cNvSpPr/>
+          <p:nvPr/>
+        </p:nvSpPr>
+        <p:spPr>
+          <a:xfrm>
+            <a:off x="4800600" y="1600200"/>
+            <a:ext cx="2103120" cy="822960"/>
+          </a:xfrm>
+          <a:prstGeom prst="roundRect">
+            <a:avLst>
+              <a:gd name="adj" fmla="val 11111"/>
+            </a:avLst>
+          </a:prstGeom>
+          <a:solidFill>
+            <a:srgbClr val="B45309">
+              <a:alpha val="15000"/>
+            </a:srgbClr>
+          </a:solidFill>
+          <a:ln/>
+        </p:spPr>
+      </p:sp>
+      <p:sp>
+        <p:nvSpPr>
+          <p:cNvPr id="12" name="Text 10"/>
+          <p:cNvSpPr/>
+          <p:nvPr/>
+        </p:nvSpPr>
+        <p:spPr>
+          <a:xfrm>
+            <a:off x="4800600" y="1600200"/>
+            <a:ext cx="2103120" cy="822960"/>
+          </a:xfrm>
+          <a:prstGeom prst="rect">
+            <a:avLst/>
+          </a:prstGeom>
+          <a:noFill/>
+          <a:ln/>
+        </p:spPr>
+        <p:txBody>
+          <a:bodyPr wrap="square" rtlCol="0" anchor="ctr"/>
+          <a:lstStyle/>
+          <a:p>
+            <a:pPr algn="ctr" indent="0" marL="0">
+              <a:buNone/>
+            </a:pPr>
+            <a:r>
+              <a:rPr lang="en-US" sz="1200" b="1" dirty="0">
+                <a:solidFill>
+                  <a:srgbClr val="1C1917"/>
+                </a:solidFill>
+                <a:latin typeface="Arial" pitchFamily="34" charset="0"/>
+                <a:ea typeface="Arial" pitchFamily="34" charset="-122"/>
+                <a:cs typeface="Arial" pitchFamily="34" charset="-120"/>
+              </a:rPr>
+              <a:t>Sensitivity Analysis</a:t>
+            </a:r>
+            <a:endParaRPr lang="en-US" sz="1200" dirty="0"/>
+          </a:p>
+          <a:p>
+            <a:pPr algn="ctr" indent="0" marL="0">
+              <a:buNone/>
+            </a:pPr>
+            <a:r>
+              <a:rPr lang="en-US" sz="900" dirty="0">
+                <a:solidFill>
+                  <a:srgbClr val="78716C"/>
+                </a:solidFill>
+                <a:latin typeface="Arial" pitchFamily="34" charset="0"/>
+                <a:ea typeface="Arial" pitchFamily="34" charset="-122"/>
+                <a:cs typeface="Arial" pitchFamily="34" charset="-120"/>
+              </a:rPr>
+              <a:t>One input moves; all others held constant</a:t>
+            </a:r>
+            <a:endParaRPr lang="en-US" sz="1200" dirty="0"/>
+          </a:p>
+        </p:txBody>
+      </p:sp>
+      <p:sp>
+        <p:nvSpPr>
+          <p:cNvPr id="13" name="Shape 11"/>
+          <p:cNvSpPr/>
+          <p:nvPr/>
+        </p:nvSpPr>
+        <p:spPr>
+          <a:xfrm>
+            <a:off x="2240280" y="3154680"/>
+            <a:ext cx="2103120" cy="822960"/>
+          </a:xfrm>
+          <a:prstGeom prst="roundRect">
+            <a:avLst>
+              <a:gd name="adj" fmla="val 11111"/>
+            </a:avLst>
+          </a:prstGeom>
+          <a:solidFill>
+            <a:srgbClr val="B45309">
+              <a:alpha val="15000"/>
+            </a:srgbClr>
+          </a:solidFill>
+          <a:ln/>
+        </p:spPr>
+      </p:sp>
+      <p:sp>
+        <p:nvSpPr>
+          <p:cNvPr id="14" name="Text 12"/>
+          <p:cNvSpPr/>
+          <p:nvPr/>
+        </p:nvSpPr>
+        <p:spPr>
+          <a:xfrm>
+            <a:off x="2240280" y="3154680"/>
+            <a:ext cx="2103120" cy="822960"/>
+          </a:xfrm>
+          <a:prstGeom prst="rect">
+            <a:avLst/>
+          </a:prstGeom>
+          <a:noFill/>
+          <a:ln/>
+        </p:spPr>
+        <p:txBody>
+          <a:bodyPr wrap="square" rtlCol="0" anchor="ctr"/>
+          <a:lstStyle/>
+          <a:p>
+            <a:pPr algn="ctr" indent="0" marL="0">
+              <a:buNone/>
+            </a:pPr>
+            <a:r>
+              <a:rPr lang="en-US" sz="1200" b="1" dirty="0">
+                <a:solidFill>
+                  <a:srgbClr val="1C1917"/>
+                </a:solidFill>
+                <a:latin typeface="Arial" pitchFamily="34" charset="0"/>
+                <a:ea typeface="Arial" pitchFamily="34" charset="-122"/>
+                <a:cs typeface="Arial" pitchFamily="34" charset="-120"/>
+              </a:rPr>
+              <a:t>High Coherence Need</a:t>
+            </a:r>
+            <a:endParaRPr lang="en-US" sz="1200" dirty="0"/>
+          </a:p>
+          <a:p>
+            <a:pPr algn="ctr" indent="0" marL="0">
+              <a:buNone/>
+            </a:pPr>
+            <a:r>
+              <a:rPr lang="en-US" sz="900" dirty="0">
+                <a:solidFill>
+                  <a:srgbClr val="78716C"/>
+                </a:solidFill>
+                <a:latin typeface="Arial" pitchFamily="34" charset="0"/>
+                <a:ea typeface="Arial" pitchFamily="34" charset="-122"/>
+                <a:cs typeface="Arial" pitchFamily="34" charset="-120"/>
+              </a:rPr>
+              <a:t>Use scenario when drivers are logically linked</a:t>
+            </a:r>
+            <a:endParaRPr lang="en-US" sz="1200" dirty="0"/>
+          </a:p>
+        </p:txBody>
+      </p:sp>
+      <p:sp>
+        <p:nvSpPr>
+          <p:cNvPr id="15" name="Shape 13"/>
+          <p:cNvSpPr/>
+          <p:nvPr/>
+        </p:nvSpPr>
+        <p:spPr>
+          <a:xfrm>
+            <a:off x="4800600" y="3154680"/>
+            <a:ext cx="2103120" cy="822960"/>
+          </a:xfrm>
+          <a:prstGeom prst="roundRect">
+            <a:avLst>
+              <a:gd name="adj" fmla="val 11111"/>
+            </a:avLst>
+          </a:prstGeom>
+          <a:solidFill>
+            <a:srgbClr val="B45309">
+              <a:alpha val="15000"/>
+            </a:srgbClr>
+          </a:solidFill>
+          <a:ln/>
+        </p:spPr>
+      </p:sp>
+      <p:sp>
+        <p:nvSpPr>
+          <p:cNvPr id="16" name="Text 14"/>
+          <p:cNvSpPr/>
+          <p:nvPr/>
+        </p:nvSpPr>
+        <p:spPr>
+          <a:xfrm>
+            <a:off x="4800600" y="3154680"/>
+            <a:ext cx="2103120" cy="822960"/>
+          </a:xfrm>
+          <a:prstGeom prst="rect">
+            <a:avLst/>
+          </a:prstGeom>
+          <a:noFill/>
+          <a:ln/>
+        </p:spPr>
+        <p:txBody>
+          <a:bodyPr wrap="square" rtlCol="0" anchor="ctr"/>
+          <a:lstStyle/>
+          <a:p>
+            <a:pPr algn="ctr" indent="0" marL="0">
+              <a:buNone/>
+            </a:pPr>
+            <a:r>
+              <a:rPr lang="en-US" sz="1200" b="1" dirty="0">
+                <a:solidFill>
+                  <a:srgbClr val="1C1917"/>
+                </a:solidFill>
+                <a:latin typeface="Arial" pitchFamily="34" charset="0"/>
+                <a:ea typeface="Arial" pitchFamily="34" charset="-122"/>
+                <a:cs typeface="Arial" pitchFamily="34" charset="-120"/>
+              </a:rPr>
+              <a:t>Driver Isolation Need</a:t>
+            </a:r>
+            <a:endParaRPr lang="en-US" sz="1200" dirty="0"/>
+          </a:p>
+          <a:p>
+            <a:pPr algn="ctr" indent="0" marL="0">
+              <a:buNone/>
+            </a:pPr>
+            <a:r>
+              <a:rPr lang="en-US" sz="900" dirty="0">
+                <a:solidFill>
+                  <a:srgbClr val="78716C"/>
+                </a:solidFill>
+                <a:latin typeface="Arial" pitchFamily="34" charset="0"/>
+                <a:ea typeface="Arial" pitchFamily="34" charset="-122"/>
+                <a:cs typeface="Arial" pitchFamily="34" charset="-120"/>
+              </a:rPr>
+              <a:t>Use sensitivity to rank individual driver impact</a:t>
+            </a:r>
+            <a:endParaRPr lang="en-US" sz="1200" dirty="0"/>
+          </a:p>
+        </p:txBody>
+      </p:sp>
+      <p:sp>
+        <p:nvSpPr>
+          <p:cNvPr id="17" name="Text 15"/>
+          <p:cNvSpPr/>
+          <p:nvPr/>
+        </p:nvSpPr>
+        <p:spPr>
+          <a:xfrm>
+            <a:off x="1920240" y="4398264"/>
+            <a:ext cx="2194560" cy="274320"/>
+          </a:xfrm>
+          <a:prstGeom prst="rect">
+            <a:avLst/>
+          </a:prstGeom>
+          <a:noFill/>
+          <a:ln/>
+        </p:spPr>
+        <p:txBody>
+          <a:bodyPr wrap="square" rtlCol="0" anchor="ctr"/>
+          <a:lstStyle/>
+          <a:p>
+            <a:pPr indent="0" marL="0">
+              <a:buNone/>
+            </a:pPr>
+            <a:r>
+              <a:rPr lang="en-US" sz="950" dirty="0">
+                <a:solidFill>
+                  <a:srgbClr val="78716C"/>
+                </a:solidFill>
+                <a:latin typeface="Arial" pitchFamily="34" charset="0"/>
+                <a:ea typeface="Arial" pitchFamily="34" charset="-122"/>
+                <a:cs typeface="Arial" pitchFamily="34" charset="-120"/>
+              </a:rPr>
+              <a:t>Single Driver</a:t>
+            </a:r>
+            <a:endParaRPr lang="en-US" sz="950" dirty="0"/>
+          </a:p>
+        </p:txBody>
+      </p:sp>
+      <p:sp>
+        <p:nvSpPr>
+          <p:cNvPr id="18" name="Text 16"/>
+          <p:cNvSpPr/>
+          <p:nvPr/>
+        </p:nvSpPr>
+        <p:spPr>
+          <a:xfrm>
+            <a:off x="5029200" y="4398264"/>
+            <a:ext cx="2194560" cy="274320"/>
+          </a:xfrm>
+          <a:prstGeom prst="rect">
+            <a:avLst/>
+          </a:prstGeom>
+          <a:noFill/>
+          <a:ln/>
+        </p:spPr>
+        <p:txBody>
+          <a:bodyPr wrap="square" rtlCol="0" anchor="ctr"/>
+          <a:lstStyle/>
+          <a:p>
+            <a:pPr algn="r" indent="0" marL="0">
+              <a:buNone/>
+            </a:pPr>
+            <a:r>
+              <a:rPr lang="en-US" sz="950" dirty="0">
+                <a:solidFill>
+                  <a:srgbClr val="78716C"/>
+                </a:solidFill>
+                <a:latin typeface="Arial" pitchFamily="34" charset="0"/>
+                <a:ea typeface="Arial" pitchFamily="34" charset="-122"/>
+                <a:cs typeface="Arial" pitchFamily="34" charset="-120"/>
+              </a:rPr>
+              <a:t>Multiple Drivers</a:t>
+            </a:r>
+            <a:endParaRPr lang="en-US" sz="950" dirty="0"/>
+          </a:p>
+        </p:txBody>
+      </p:sp>
+      <p:sp>
+        <p:nvSpPr>
+          <p:cNvPr id="19" name="Text 17"/>
+          <p:cNvSpPr/>
+          <p:nvPr/>
+        </p:nvSpPr>
+        <p:spPr>
+          <a:xfrm>
+            <a:off x="45720" y="1280160"/>
+            <a:ext cx="1828800" cy="274320"/>
+          </a:xfrm>
+          <a:prstGeom prst="rect">
+            <a:avLst/>
+          </a:prstGeom>
+          <a:noFill/>
+          <a:ln/>
+        </p:spPr>
+        <p:txBody>
+          <a:bodyPr wrap="square" rtlCol="0" anchor="ctr"/>
+          <a:lstStyle/>
+          <a:p>
+            <a:pPr algn="r" indent="0" marL="0">
+              <a:buNone/>
+            </a:pPr>
+            <a:r>
+              <a:rPr lang="en-US" sz="950" dirty="0">
+                <a:solidFill>
+                  <a:srgbClr val="78716C"/>
+                </a:solidFill>
+                <a:latin typeface="Arial" pitchFamily="34" charset="0"/>
+                <a:ea typeface="Arial" pitchFamily="34" charset="-122"/>
+                <a:cs typeface="Arial" pitchFamily="34" charset="-120"/>
+              </a:rPr>
+              <a:t>Coherent Story</a:t>
+            </a:r>
+            <a:endParaRPr lang="en-US" sz="950" dirty="0"/>
+          </a:p>
+        </p:txBody>
+      </p:sp>
+      <p:sp>
+        <p:nvSpPr>
+          <p:cNvPr id="20" name="Text 18"/>
+          <p:cNvSpPr/>
+          <p:nvPr/>
+        </p:nvSpPr>
+        <p:spPr>
+          <a:xfrm>
+            <a:off x="45720" y="4023360"/>
+            <a:ext cx="1828800" cy="274320"/>
+          </a:xfrm>
+          <a:prstGeom prst="rect">
+            <a:avLst/>
+          </a:prstGeom>
+          <a:noFill/>
+          <a:ln/>
+        </p:spPr>
+        <p:txBody>
+          <a:bodyPr wrap="square" rtlCol="0" anchor="ctr"/>
+          <a:lstStyle/>
+          <a:p>
+            <a:pPr algn="r" indent="0" marL="0">
+              <a:buNone/>
+            </a:pPr>
+            <a:r>
+              <a:rPr lang="en-US" sz="950" dirty="0">
+                <a:solidFill>
+                  <a:srgbClr val="78716C"/>
+                </a:solidFill>
+                <a:latin typeface="Arial" pitchFamily="34" charset="0"/>
+                <a:ea typeface="Arial" pitchFamily="34" charset="-122"/>
+                <a:cs typeface="Arial" pitchFamily="34" charset="-120"/>
+              </a:rPr>
+              <a:t>Isolated Effect</a:t>
+            </a:r>
+            <a:endParaRPr lang="en-US" sz="950" dirty="0"/>
           </a:p>
         </p:txBody>
       </p:sp>
@@ -2494,9 +4437,16 @@
 </p:sld>
 </file>
 
-<file path=ppt/slides/slide5.xml><?xml version="1.0" encoding="utf-8"?>
+<file path=ppt/slides/slide14.xml><?xml version="1.0" encoding="utf-8"?>
 <p:sld xmlns:a="http://schemas.openxmlformats.org/drawingml/2006/main" xmlns:r="http://schemas.openxmlformats.org/officeDocument/2006/relationships" xmlns:p="http://schemas.openxmlformats.org/presentationml/2006/main">
-  <p:cSld name="Slide 5">
+  <p:cSld name="Slide 14">
+    <p:bg>
+      <p:bgPr>
+        <a:solidFill>
+          <a:srgbClr val="FFFFFF"/>
+        </a:solidFill>
+      </p:bgPr>
+    </p:bg>
     <p:spTree>
       <p:nvGrpSpPr>
         <p:cNvPr id="1" name=""/>
@@ -2513,14 +4463,34 @@
       </p:grpSpPr>
       <p:sp>
         <p:nvSpPr>
-          <p:cNvPr id="2" name="Text 0"/>
-          <p:cNvSpPr/>
-          <p:nvPr/>
-        </p:nvSpPr>
-        <p:spPr>
-          <a:xfrm>
-            <a:off x="457200" y="320040"/>
-            <a:ext cx="8229600" cy="731520"/>
+          <p:cNvPr id="2" name="Shape 0"/>
+          <p:cNvSpPr/>
+          <p:nvPr/>
+        </p:nvSpPr>
+        <p:spPr>
+          <a:xfrm>
+            <a:off x="411480" y="402336"/>
+            <a:ext cx="82296" cy="329184"/>
+          </a:xfrm>
+          <a:prstGeom prst="rect">
+            <a:avLst/>
+          </a:prstGeom>
+          <a:solidFill>
+            <a:srgbClr val="B45309"/>
+          </a:solidFill>
+          <a:ln/>
+        </p:spPr>
+      </p:sp>
+      <p:sp>
+        <p:nvSpPr>
+          <p:cNvPr id="3" name="Text 1"/>
+          <p:cNvSpPr/>
+          <p:nvPr/>
+        </p:nvSpPr>
+        <p:spPr>
+          <a:xfrm>
+            <a:off x="566928" y="292608"/>
+            <a:ext cx="8138160" cy="548640"/>
           </a:xfrm>
           <a:prstGeom prst="rect">
             <a:avLst/>
@@ -2536,27 +4506,92 @@
               <a:buNone/>
             </a:pPr>
             <a:r>
-              <a:rPr lang="en-US" sz="2400" b="1" dirty="0">
-                <a:solidFill>
-                  <a:srgbClr val="B45309"/>
-                </a:solidFill>
-              </a:rPr>
-              <a:t>Introduction and Objectives (0:00 - 0:05)</a:t>
-            </a:r>
-            <a:endParaRPr lang="en-US" sz="2400" dirty="0"/>
-          </a:p>
-        </p:txBody>
-      </p:sp>
-      <p:sp>
-        <p:nvSpPr>
-          <p:cNvPr id="3" name="Text 1"/>
-          <p:cNvSpPr/>
-          <p:nvPr/>
-        </p:nvSpPr>
-        <p:spPr>
-          <a:xfrm>
-            <a:off x="640080" y="1188720"/>
-            <a:ext cx="7863840" cy="3291840"/>
+              <a:rPr lang="en-US" sz="2100" b="1" dirty="0">
+                <a:solidFill>
+                  <a:srgbClr val="1C1917"/>
+                </a:solidFill>
+                <a:latin typeface="Arial" pitchFamily="34" charset="0"/>
+                <a:ea typeface="Arial" pitchFamily="34" charset="-122"/>
+                <a:cs typeface="Arial" pitchFamily="34" charset="-120"/>
+              </a:rPr>
+              <a:t>Sanity Checks</a:t>
+            </a:r>
+            <a:endParaRPr lang="en-US" sz="2100" dirty="0"/>
+          </a:p>
+        </p:txBody>
+      </p:sp>
+      <p:sp>
+        <p:nvSpPr>
+          <p:cNvPr id="4" name="Shape 2"/>
+          <p:cNvSpPr/>
+          <p:nvPr/>
+        </p:nvSpPr>
+        <p:spPr>
+          <a:xfrm>
+            <a:off x="411480" y="960120"/>
+            <a:ext cx="8321040" cy="0"/>
+          </a:xfrm>
+          <a:prstGeom prst="line">
+            <a:avLst/>
+          </a:prstGeom>
+          <a:noFill/>
+          <a:ln w="12700">
+            <a:solidFill>
+              <a:srgbClr val="E7E5E4"/>
+            </a:solidFill>
+            <a:prstDash val="solid"/>
+          </a:ln>
+        </p:spPr>
+      </p:sp>
+      <p:sp>
+        <p:nvSpPr>
+          <p:cNvPr id="5" name="Text 3"/>
+          <p:cNvSpPr/>
+          <p:nvPr/>
+        </p:nvSpPr>
+        <p:spPr>
+          <a:xfrm>
+            <a:off x="411480" y="4864608"/>
+            <a:ext cx="8321040" cy="237744"/>
+          </a:xfrm>
+          <a:prstGeom prst="rect">
+            <a:avLst/>
+          </a:prstGeom>
+          <a:noFill/>
+          <a:ln/>
+        </p:spPr>
+        <p:txBody>
+          <a:bodyPr wrap="square" rtlCol="0" anchor="ctr"/>
+          <a:lstStyle/>
+          <a:p>
+            <a:pPr indent="0" marL="0">
+              <a:buNone/>
+            </a:pPr>
+            <a:r>
+              <a:rPr lang="en-US" sz="750" dirty="0">
+                <a:solidFill>
+                  <a:srgbClr val="AAAAAA"/>
+                </a:solidFill>
+                <a:latin typeface="Arial" pitchFamily="34" charset="0"/>
+                <a:ea typeface="Arial" pitchFamily="34" charset="-122"/>
+                <a:cs typeface="Arial" pitchFamily="34" charset="-120"/>
+              </a:rPr>
+              <a:t>Lesson Forge Pro (owner) — This content is educational material only and does not constitute financial, investment, or trading advice.</a:t>
+            </a:r>
+            <a:endParaRPr lang="en-US" sz="750" dirty="0"/>
+          </a:p>
+        </p:txBody>
+      </p:sp>
+      <p:sp>
+        <p:nvSpPr>
+          <p:cNvPr id="6" name="Text 4"/>
+          <p:cNvSpPr/>
+          <p:nvPr/>
+        </p:nvSpPr>
+        <p:spPr>
+          <a:xfrm>
+            <a:off x="731520" y="1188720"/>
+            <a:ext cx="7680960" cy="2743200"/>
           </a:xfrm>
           <a:prstGeom prst="rect">
             <a:avLst/>
@@ -2568,92 +4603,130 @@
           <a:bodyPr wrap="square" rtlCol="0" anchor="t"/>
           <a:lstStyle/>
           <a:p>
-            <a:pPr marL="342900" indent="-342900">
+            <a:pPr marL="152400" indent="-152400">
+              <a:spcAft>
+                <a:spcPts val="800"/>
+              </a:spcAft>
               <a:buSzPct val="100000"/>
               <a:buChar char="•"/>
             </a:pPr>
             <a:r>
-              <a:rPr lang="en-US" sz="1600" dirty="0">
-                <a:solidFill>
-                  <a:srgbClr val="333333"/>
-                </a:solidFill>
-              </a:rPr>
-              <a:t>Welcome to the session on Scenario Planning and Sensitivity Analysis! My name is [Your Name], and I will be your guide through this journey. Before we begin, le</a:t>
-            </a:r>
-            <a:endParaRPr lang="en-US" sz="1600" dirty="0"/>
-          </a:p>
-          <a:p>
-            <a:pPr marL="342900" indent="-342900">
+              <a:rPr lang="en-US" sz="1500" dirty="0">
+                <a:solidFill>
+                  <a:srgbClr val="1C1917"/>
+                </a:solidFill>
+                <a:latin typeface="Arial" pitchFamily="34" charset="0"/>
+                <a:ea typeface="Arial" pitchFamily="34" charset="-122"/>
+                <a:cs typeface="Arial" pitchFamily="34" charset="-120"/>
+              </a:rPr>
+              <a:t>Direction test: NPV must fall when discount rate rises—flag any reversal immediately.</a:t>
+            </a:r>
+            <a:endParaRPr lang="en-US" sz="1500" dirty="0"/>
+          </a:p>
+          <a:p>
+            <a:pPr marL="152400" indent="-152400">
+              <a:spcAft>
+                <a:spcPts val="800"/>
+              </a:spcAft>
               <a:buSzPct val="100000"/>
               <a:buChar char="•"/>
             </a:pPr>
             <a:r>
-              <a:rPr lang="en-US" sz="1600" dirty="0">
-                <a:solidFill>
-                  <a:srgbClr val="333333"/>
-                </a:solidFill>
-              </a:rPr>
-              <a:t>Develop scenario plans to evaluate business outcomes under different assumptions</a:t>
-            </a:r>
-            <a:endParaRPr lang="en-US" sz="1600" dirty="0"/>
-          </a:p>
-          <a:p>
-            <a:pPr marL="342900" indent="-342900">
+              <a:rPr lang="en-US" sz="1500" dirty="0">
+                <a:solidFill>
+                  <a:srgbClr val="1C1917"/>
+                </a:solidFill>
+                <a:latin typeface="Arial" pitchFamily="34" charset="0"/>
+                <a:ea typeface="Arial" pitchFamily="34" charset="-122"/>
+                <a:cs typeface="Arial" pitchFamily="34" charset="-120"/>
+              </a:rPr>
+              <a:t>Magnitude test: a ±1% revenue change should not swing NPV by 300%.</a:t>
+            </a:r>
+            <a:endParaRPr lang="en-US" sz="1500" dirty="0"/>
+          </a:p>
+          <a:p>
+            <a:pPr marL="152400" indent="-152400">
+              <a:spcAft>
+                <a:spcPts val="800"/>
+              </a:spcAft>
               <a:buSzPct val="100000"/>
               <a:buChar char="•"/>
             </a:pPr>
             <a:r>
-              <a:rPr lang="en-US" sz="1600" dirty="0">
-                <a:solidFill>
-                  <a:srgbClr val="333333"/>
-                </a:solidFill>
-              </a:rPr>
-              <a:t>Apply sensitivity analysis to test the robustness of financial models</a:t>
-            </a:r>
-            <a:endParaRPr lang="en-US" sz="1600" dirty="0"/>
-          </a:p>
-          <a:p>
-            <a:pPr marL="342900" indent="-342900">
+              <a:rPr lang="en-US" sz="1500" dirty="0">
+                <a:solidFill>
+                  <a:srgbClr val="1C1917"/>
+                </a:solidFill>
+                <a:latin typeface="Arial" pitchFamily="34" charset="0"/>
+                <a:ea typeface="Arial" pitchFamily="34" charset="-122"/>
+                <a:cs typeface="Arial" pitchFamily="34" charset="-120"/>
+              </a:rPr>
+              <a:t>Limiting case test: zero revenue must produce a large negative NPV, not a positive one.</a:t>
+            </a:r>
+            <a:endParaRPr lang="en-US" sz="1500" dirty="0"/>
+          </a:p>
+          <a:p>
+            <a:pPr marL="152400" indent="-152400">
+              <a:spcAft>
+                <a:spcPts val="800"/>
+              </a:spcAft>
               <a:buSzPct val="100000"/>
               <a:buChar char="•"/>
             </a:pPr>
             <a:r>
-              <a:rPr lang="en-US" sz="1600" dirty="0">
-                <a:solidFill>
-                  <a:srgbClr val="333333"/>
-                </a:solidFill>
-              </a:rPr>
-              <a:t>Create interactive dashboards to visualize scenario results</a:t>
-            </a:r>
-            <a:endParaRPr lang="en-US" sz="1600" dirty="0"/>
-          </a:p>
-          <a:p>
-            <a:pPr marL="342900" indent="-342900">
-              <a:buSzPct val="100000"/>
-              <a:buChar char="•"/>
-            </a:pPr>
-            <a:r>
-              <a:rPr lang="en-US" sz="1600" dirty="0">
-                <a:solidFill>
-                  <a:srgbClr val="333333"/>
-                </a:solidFill>
-              </a:rPr>
-              <a:t>These objectives are aligned with Bloom's levels of Apply and Create, which means we will be applying theoretical concepts to real-world scenarios and creating </a:t>
-            </a:r>
-            <a:endParaRPr lang="en-US" sz="1600" dirty="0"/>
-          </a:p>
-        </p:txBody>
-      </p:sp>
-      <p:sp>
-        <p:nvSpPr>
-          <p:cNvPr id="4" name="Text 2"/>
-          <p:cNvSpPr/>
-          <p:nvPr/>
-        </p:nvSpPr>
-        <p:spPr>
-          <a:xfrm>
-            <a:off x="457200" y="4709160"/>
-            <a:ext cx="8229600" cy="320040"/>
+              <a:rPr lang="en-US" sz="1500" dirty="0">
+                <a:solidFill>
+                  <a:srgbClr val="1C1917"/>
+                </a:solidFill>
+                <a:latin typeface="Arial" pitchFamily="34" charset="0"/>
+                <a:ea typeface="Arial" pitchFamily="34" charset="-122"/>
+                <a:cs typeface="Arial" pitchFamily="34" charset="-120"/>
+              </a:rPr>
+              <a:t>Sum-of-parts check: individual sensitivity swings should roughly explain total scenario variance.</a:t>
+            </a:r>
+            <a:endParaRPr lang="en-US" sz="1500" dirty="0"/>
+          </a:p>
+        </p:txBody>
+      </p:sp>
+      <p:sp>
+        <p:nvSpPr>
+          <p:cNvPr id="7" name="Shape 5"/>
+          <p:cNvSpPr/>
+          <p:nvPr/>
+        </p:nvSpPr>
+        <p:spPr>
+          <a:xfrm>
+            <a:off x="731520" y="4041648"/>
+            <a:ext cx="7680960" cy="566928"/>
+          </a:xfrm>
+          <a:prstGeom prst="roundRect">
+            <a:avLst>
+              <a:gd name="adj" fmla="val 12903"/>
+            </a:avLst>
+          </a:prstGeom>
+          <a:solidFill>
+            <a:srgbClr val="B45309">
+              <a:alpha val="12000"/>
+            </a:srgbClr>
+          </a:solidFill>
+          <a:ln w="12700">
+            <a:solidFill>
+              <a:srgbClr val="B45309"/>
+            </a:solidFill>
+            <a:prstDash val="solid"/>
+          </a:ln>
+        </p:spPr>
+      </p:sp>
+      <p:sp>
+        <p:nvSpPr>
+          <p:cNvPr id="8" name="Text 6"/>
+          <p:cNvSpPr/>
+          <p:nvPr/>
+        </p:nvSpPr>
+        <p:spPr>
+          <a:xfrm>
+            <a:off x="868680" y="4087368"/>
+            <a:ext cx="7406640" cy="475488"/>
           </a:xfrm>
           <a:prstGeom prst="rect">
             <a:avLst/>
@@ -2669,14 +4742,31 @@
               <a:buNone/>
             </a:pPr>
             <a:r>
-              <a:rPr lang="en-US" sz="800" dirty="0">
-                <a:solidFill>
-                  <a:srgbClr val="AAAAAA"/>
-                </a:solidFill>
-              </a:rPr>
-              <a:t>Lesson Forge Pro (owner) — This content is educational material only and does not constitute financial, investment, or trading advice.</a:t>
-            </a:r>
-            <a:endParaRPr lang="en-US" sz="800" dirty="0"/>
+              <a:rPr lang="en-US" sz="1100" b="1" dirty="0">
+                <a:solidFill>
+                  <a:srgbClr val="B45309"/>
+                </a:solidFill>
+                <a:latin typeface="Arial" pitchFamily="34" charset="0"/>
+                <a:ea typeface="Arial" pitchFamily="34" charset="-122"/>
+                <a:cs typeface="Arial" pitchFamily="34" charset="-120"/>
+              </a:rPr>
+              <a:t>Takeaway  </a:t>
+            </a:r>
+            <a:pPr indent="0" marL="0">
+              <a:buNone/>
+            </a:pPr>
+            <a:r>
+              <a:rPr lang="en-US" sz="1150" dirty="0">
+                <a:solidFill>
+                  <a:srgbClr val="1C1917"/>
+                </a:solidFill>
+                <a:latin typeface="Arial" pitchFamily="34" charset="0"/>
+                <a:ea typeface="Arial" pitchFamily="34" charset="-122"/>
+                <a:cs typeface="Arial" pitchFamily="34" charset="-120"/>
+              </a:rPr>
+              <a:t>Four targeted sanity checks catch formula errors before flawed results reach decision-makers.</a:t>
+            </a:r>
+            <a:endParaRPr lang="en-US" sz="1100" dirty="0"/>
           </a:p>
         </p:txBody>
       </p:sp>
@@ -2688,9 +4778,16 @@
 </p:sld>
 </file>
 
-<file path=ppt/slides/slide6.xml><?xml version="1.0" encoding="utf-8"?>
+<file path=ppt/slides/slide15.xml><?xml version="1.0" encoding="utf-8"?>
 <p:sld xmlns:a="http://schemas.openxmlformats.org/drawingml/2006/main" xmlns:r="http://schemas.openxmlformats.org/officeDocument/2006/relationships" xmlns:p="http://schemas.openxmlformats.org/presentationml/2006/main">
-  <p:cSld name="Slide 6">
+  <p:cSld name="Slide 15">
+    <p:bg>
+      <p:bgPr>
+        <a:solidFill>
+          <a:srgbClr val="FFFFFF"/>
+        </a:solidFill>
+      </p:bgPr>
+    </p:bg>
     <p:spTree>
       <p:nvGrpSpPr>
         <p:cNvPr id="1" name=""/>
@@ -2707,14 +4804,34 @@
       </p:grpSpPr>
       <p:sp>
         <p:nvSpPr>
-          <p:cNvPr id="2" name="Text 0"/>
-          <p:cNvSpPr/>
-          <p:nvPr/>
-        </p:nvSpPr>
-        <p:spPr>
-          <a:xfrm>
-            <a:off x="457200" y="320040"/>
-            <a:ext cx="8229600" cy="731520"/>
+          <p:cNvPr id="2" name="Shape 0"/>
+          <p:cNvSpPr/>
+          <p:nvPr/>
+        </p:nvSpPr>
+        <p:spPr>
+          <a:xfrm>
+            <a:off x="411480" y="402336"/>
+            <a:ext cx="82296" cy="329184"/>
+          </a:xfrm>
+          <a:prstGeom prst="rect">
+            <a:avLst/>
+          </a:prstGeom>
+          <a:solidFill>
+            <a:srgbClr val="B45309"/>
+          </a:solidFill>
+          <a:ln/>
+        </p:spPr>
+      </p:sp>
+      <p:sp>
+        <p:nvSpPr>
+          <p:cNvPr id="3" name="Text 1"/>
+          <p:cNvSpPr/>
+          <p:nvPr/>
+        </p:nvSpPr>
+        <p:spPr>
+          <a:xfrm>
+            <a:off x="566928" y="292608"/>
+            <a:ext cx="8138160" cy="548640"/>
           </a:xfrm>
           <a:prstGeom prst="rect">
             <a:avLst/>
@@ -2730,27 +4847,92 @@
               <a:buNone/>
             </a:pPr>
             <a:r>
-              <a:rPr lang="en-US" sz="2400" b="1" dirty="0">
-                <a:solidFill>
-                  <a:srgbClr val="B45309"/>
-                </a:solidFill>
-              </a:rPr>
-              <a:t>Scenario Planning (0:05 - 0:25)</a:t>
-            </a:r>
-            <a:endParaRPr lang="en-US" sz="2400" dirty="0"/>
-          </a:p>
-        </p:txBody>
-      </p:sp>
-      <p:sp>
-        <p:nvSpPr>
-          <p:cNvPr id="3" name="Text 1"/>
-          <p:cNvSpPr/>
-          <p:nvPr/>
-        </p:nvSpPr>
-        <p:spPr>
-          <a:xfrm>
-            <a:off x="640080" y="1188720"/>
-            <a:ext cx="7863840" cy="3291840"/>
+              <a:rPr lang="en-US" sz="2100" b="1" dirty="0">
+                <a:solidFill>
+                  <a:srgbClr val="1C1917"/>
+                </a:solidFill>
+                <a:latin typeface="Arial" pitchFamily="34" charset="0"/>
+                <a:ea typeface="Arial" pitchFamily="34" charset="-122"/>
+                <a:cs typeface="Arial" pitchFamily="34" charset="-120"/>
+              </a:rPr>
+              <a:t>Worked Example: A Flawed Attempt, Corrected</a:t>
+            </a:r>
+            <a:endParaRPr lang="en-US" sz="2100" dirty="0"/>
+          </a:p>
+        </p:txBody>
+      </p:sp>
+      <p:sp>
+        <p:nvSpPr>
+          <p:cNvPr id="4" name="Shape 2"/>
+          <p:cNvSpPr/>
+          <p:nvPr/>
+        </p:nvSpPr>
+        <p:spPr>
+          <a:xfrm>
+            <a:off x="411480" y="960120"/>
+            <a:ext cx="8321040" cy="0"/>
+          </a:xfrm>
+          <a:prstGeom prst="line">
+            <a:avLst/>
+          </a:prstGeom>
+          <a:noFill/>
+          <a:ln w="12700">
+            <a:solidFill>
+              <a:srgbClr val="E7E5E4"/>
+            </a:solidFill>
+            <a:prstDash val="solid"/>
+          </a:ln>
+        </p:spPr>
+      </p:sp>
+      <p:sp>
+        <p:nvSpPr>
+          <p:cNvPr id="5" name="Text 3"/>
+          <p:cNvSpPr/>
+          <p:nvPr/>
+        </p:nvSpPr>
+        <p:spPr>
+          <a:xfrm>
+            <a:off x="411480" y="4864608"/>
+            <a:ext cx="8321040" cy="237744"/>
+          </a:xfrm>
+          <a:prstGeom prst="rect">
+            <a:avLst/>
+          </a:prstGeom>
+          <a:noFill/>
+          <a:ln/>
+        </p:spPr>
+        <p:txBody>
+          <a:bodyPr wrap="square" rtlCol="0" anchor="ctr"/>
+          <a:lstStyle/>
+          <a:p>
+            <a:pPr indent="0" marL="0">
+              <a:buNone/>
+            </a:pPr>
+            <a:r>
+              <a:rPr lang="en-US" sz="750" dirty="0">
+                <a:solidFill>
+                  <a:srgbClr val="AAAAAA"/>
+                </a:solidFill>
+                <a:latin typeface="Arial" pitchFamily="34" charset="0"/>
+                <a:ea typeface="Arial" pitchFamily="34" charset="-122"/>
+                <a:cs typeface="Arial" pitchFamily="34" charset="-120"/>
+              </a:rPr>
+              <a:t>Lesson Forge Pro (owner) — This content is educational material only and does not constitute financial, investment, or trading advice.</a:t>
+            </a:r>
+            <a:endParaRPr lang="en-US" sz="750" dirty="0"/>
+          </a:p>
+        </p:txBody>
+      </p:sp>
+      <p:sp>
+        <p:nvSpPr>
+          <p:cNvPr id="6" name="Text 4"/>
+          <p:cNvSpPr/>
+          <p:nvPr/>
+        </p:nvSpPr>
+        <p:spPr>
+          <a:xfrm>
+            <a:off x="731520" y="1188720"/>
+            <a:ext cx="7680960" cy="2743200"/>
           </a:xfrm>
           <a:prstGeom prst="rect">
             <a:avLst/>
@@ -2762,107 +4944,130 @@
           <a:bodyPr wrap="square" rtlCol="0" anchor="t"/>
           <a:lstStyle/>
           <a:p>
-            <a:pPr marL="342900" indent="-342900">
+            <a:pPr marL="152400" indent="-152400">
+              <a:spcAft>
+                <a:spcPts val="800"/>
+              </a:spcAft>
               <a:buSzPct val="100000"/>
               <a:buChar char="•"/>
             </a:pPr>
             <a:r>
-              <a:rPr lang="en-US" sz="1600" dirty="0">
-                <a:solidFill>
-                  <a:srgbClr val="333333"/>
-                </a:solidFill>
-              </a:rPr>
-              <a:t>Scenario planning is a technique used to evaluate business outcomes under different assumptions. It's like playing a game of "what if" - what if the market grow</a:t>
-            </a:r>
-            <a:endParaRPr lang="en-US" sz="1600" dirty="0"/>
-          </a:p>
-          <a:p>
-            <a:pPr marL="342900" indent="-342900">
+              <a:rPr lang="en-US" sz="1500" dirty="0">
+                <a:solidFill>
+                  <a:srgbClr val="1C1917"/>
+                </a:solidFill>
+                <a:latin typeface="Arial" pitchFamily="34" charset="0"/>
+                <a:ea typeface="Arial" pitchFamily="34" charset="-122"/>
+                <a:cs typeface="Arial" pitchFamily="34" charset="-120"/>
+              </a:rPr>
+              <a:t>Base-case NPV: –$600k outlay plus three discounted cash flows equals +$13.82k.</a:t>
+            </a:r>
+            <a:endParaRPr lang="en-US" sz="1500" dirty="0"/>
+          </a:p>
+          <a:p>
+            <a:pPr marL="152400" indent="-152400">
+              <a:spcAft>
+                <a:spcPts val="800"/>
+              </a:spcAft>
               <a:buSzPct val="100000"/>
               <a:buChar char="•"/>
             </a:pPr>
             <a:r>
-              <a:rPr lang="en-US" sz="1600" dirty="0">
-                <a:solidFill>
-                  <a:srgbClr val="333333"/>
-                </a:solidFill>
-              </a:rPr>
-              <a:t>Let's consider an analogy. Imagine you're planning a road trip from New York to Los Angeles. You can take different routes, such as the Northern route, the Sout</a:t>
-            </a:r>
-            <a:endParaRPr lang="en-US" sz="1600" dirty="0"/>
-          </a:p>
-          <a:p>
-            <a:pPr marL="342900" indent="-342900">
+              <a:rPr lang="en-US" sz="1500" dirty="0">
+                <a:solidFill>
+                  <a:srgbClr val="1C1917"/>
+                </a:solidFill>
+                <a:latin typeface="Arial" pitchFamily="34" charset="0"/>
+                <a:ea typeface="Arial" pitchFamily="34" charset="-122"/>
+                <a:cs typeface="Arial" pitchFamily="34" charset="-120"/>
+              </a:rPr>
+              <a:t>Flaw: analyst varied discount rate and Year 3 cash flow simultaneously, calling it sensitivity analysis.</a:t>
+            </a:r>
+            <a:endParaRPr lang="en-US" sz="1500" dirty="0"/>
+          </a:p>
+          <a:p>
+            <a:pPr marL="152400" indent="-152400">
+              <a:spcAft>
+                <a:spcPts val="800"/>
+              </a:spcAft>
               <a:buSzPct val="100000"/>
               <a:buChar char="•"/>
             </a:pPr>
             <a:r>
-              <a:rPr lang="en-US" sz="1600" dirty="0">
-                <a:solidFill>
-                  <a:srgbClr val="333333"/>
-                </a:solidFill>
-              </a:rPr>
-              <a:t>Some key concepts in scenario planning include:</a:t>
-            </a:r>
-            <a:endParaRPr lang="en-US" sz="1600" dirty="0"/>
-          </a:p>
-          <a:p>
-            <a:pPr marL="342900" indent="-342900">
+              <a:rPr lang="en-US" sz="1500" dirty="0">
+                <a:solidFill>
+                  <a:srgbClr val="1C1917"/>
+                </a:solidFill>
+                <a:latin typeface="Arial" pitchFamily="34" charset="0"/>
+                <a:ea typeface="Arial" pitchFamily="34" charset="-122"/>
+                <a:cs typeface="Arial" pitchFamily="34" charset="-120"/>
+              </a:rPr>
+              <a:t>Correct approach: isolate each variable separately to measure its true marginal impact.</a:t>
+            </a:r>
+            <a:endParaRPr lang="en-US" sz="1500" dirty="0"/>
+          </a:p>
+          <a:p>
+            <a:pPr marL="152400" indent="-152400">
+              <a:spcAft>
+                <a:spcPts val="800"/>
+              </a:spcAft>
               <a:buSzPct val="100000"/>
               <a:buChar char="•"/>
             </a:pPr>
             <a:r>
-              <a:rPr lang="en-US" sz="1600" dirty="0">
-                <a:solidFill>
-                  <a:srgbClr val="333333"/>
-                </a:solidFill>
-              </a:rPr>
-              <a:t>Identifying key drivers of change</a:t>
-            </a:r>
-            <a:endParaRPr lang="en-US" sz="1600" dirty="0"/>
-          </a:p>
-          <a:p>
-            <a:pPr marL="342900" indent="-342900">
-              <a:buSzPct val="100000"/>
-              <a:buChar char="•"/>
-            </a:pPr>
-            <a:r>
-              <a:rPr lang="en-US" sz="1600" dirty="0">
-                <a:solidFill>
-                  <a:srgbClr val="333333"/>
-                </a:solidFill>
-              </a:rPr>
-              <a:t>Developing plausible and relevant scenarios</a:t>
-            </a:r>
-            <a:endParaRPr lang="en-US" sz="1600" dirty="0"/>
-          </a:p>
-          <a:p>
-            <a:pPr marL="342900" indent="-342900">
-              <a:buSzPct val="100000"/>
-              <a:buChar char="•"/>
-            </a:pPr>
-            <a:r>
-              <a:rPr lang="en-US" sz="1600" dirty="0">
-                <a:solidFill>
-                  <a:srgbClr val="333333"/>
-                </a:solidFill>
-              </a:rPr>
-              <a:t>Evaluating the impact of each scenario on business outcomes</a:t>
-            </a:r>
-            <a:endParaRPr lang="en-US" sz="1600" dirty="0"/>
-          </a:p>
-        </p:txBody>
-      </p:sp>
-      <p:sp>
-        <p:nvSpPr>
-          <p:cNvPr id="4" name="Text 2"/>
-          <p:cNvSpPr/>
-          <p:nvPr/>
-        </p:nvSpPr>
-        <p:spPr>
-          <a:xfrm>
-            <a:off x="457200" y="4709160"/>
-            <a:ext cx="8229600" cy="320040"/>
+              <a:rPr lang="en-US" sz="1500" dirty="0">
+                <a:solidFill>
+                  <a:srgbClr val="1C1917"/>
+                </a:solidFill>
+                <a:latin typeface="Arial" pitchFamily="34" charset="0"/>
+                <a:ea typeface="Arial" pitchFamily="34" charset="-122"/>
+                <a:cs typeface="Arial" pitchFamily="34" charset="-120"/>
+              </a:rPr>
+              <a:t>Two-variable grids are valid scenario tools but must never be labeled one-way sensitivity.</a:t>
+            </a:r>
+            <a:endParaRPr lang="en-US" sz="1500" dirty="0"/>
+          </a:p>
+        </p:txBody>
+      </p:sp>
+      <p:sp>
+        <p:nvSpPr>
+          <p:cNvPr id="7" name="Shape 5"/>
+          <p:cNvSpPr/>
+          <p:nvPr/>
+        </p:nvSpPr>
+        <p:spPr>
+          <a:xfrm>
+            <a:off x="731520" y="4041648"/>
+            <a:ext cx="7680960" cy="566928"/>
+          </a:xfrm>
+          <a:prstGeom prst="roundRect">
+            <a:avLst>
+              <a:gd name="adj" fmla="val 12903"/>
+            </a:avLst>
+          </a:prstGeom>
+          <a:solidFill>
+            <a:srgbClr val="B45309">
+              <a:alpha val="12000"/>
+            </a:srgbClr>
+          </a:solidFill>
+          <a:ln w="12700">
+            <a:solidFill>
+              <a:srgbClr val="B45309"/>
+            </a:solidFill>
+            <a:prstDash val="solid"/>
+          </a:ln>
+        </p:spPr>
+      </p:sp>
+      <p:sp>
+        <p:nvSpPr>
+          <p:cNvPr id="8" name="Text 6"/>
+          <p:cNvSpPr/>
+          <p:nvPr/>
+        </p:nvSpPr>
+        <p:spPr>
+          <a:xfrm>
+            <a:off x="868680" y="4087368"/>
+            <a:ext cx="7406640" cy="475488"/>
           </a:xfrm>
           <a:prstGeom prst="rect">
             <a:avLst/>
@@ -2878,14 +5083,31 @@
               <a:buNone/>
             </a:pPr>
             <a:r>
-              <a:rPr lang="en-US" sz="800" dirty="0">
-                <a:solidFill>
-                  <a:srgbClr val="AAAAAA"/>
-                </a:solidFill>
-              </a:rPr>
-              <a:t>Lesson Forge Pro (owner) — This content is educational material only and does not constitute financial, investment, or trading advice.</a:t>
-            </a:r>
-            <a:endParaRPr lang="en-US" sz="800" dirty="0"/>
+              <a:rPr lang="en-US" sz="1100" b="1" dirty="0">
+                <a:solidFill>
+                  <a:srgbClr val="B45309"/>
+                </a:solidFill>
+                <a:latin typeface="Arial" pitchFamily="34" charset="0"/>
+                <a:ea typeface="Arial" pitchFamily="34" charset="-122"/>
+                <a:cs typeface="Arial" pitchFamily="34" charset="-120"/>
+              </a:rPr>
+              <a:t>Takeaway  </a:t>
+            </a:r>
+            <a:pPr indent="0" marL="0">
+              <a:buNone/>
+            </a:pPr>
+            <a:r>
+              <a:rPr lang="en-US" sz="1150" dirty="0">
+                <a:solidFill>
+                  <a:srgbClr val="1C1917"/>
+                </a:solidFill>
+                <a:latin typeface="Arial" pitchFamily="34" charset="0"/>
+                <a:ea typeface="Arial" pitchFamily="34" charset="-122"/>
+                <a:cs typeface="Arial" pitchFamily="34" charset="-120"/>
+              </a:rPr>
+              <a:t>Isolating one variable at a time is the defining discipline that makes sensitivity analysis interpretable.</a:t>
+            </a:r>
+            <a:endParaRPr lang="en-US" sz="1100" dirty="0"/>
           </a:p>
         </p:txBody>
       </p:sp>
@@ -2897,9 +5119,16 @@
 </p:sld>
 </file>
 
-<file path=ppt/slides/slide7.xml><?xml version="1.0" encoding="utf-8"?>
+<file path=ppt/slides/slide16.xml><?xml version="1.0" encoding="utf-8"?>
 <p:sld xmlns:a="http://schemas.openxmlformats.org/drawingml/2006/main" xmlns:r="http://schemas.openxmlformats.org/officeDocument/2006/relationships" xmlns:p="http://schemas.openxmlformats.org/presentationml/2006/main">
-  <p:cSld name="Slide 7">
+  <p:cSld name="Slide 16">
+    <p:bg>
+      <p:bgPr>
+        <a:solidFill>
+          <a:srgbClr val="FFFFFF"/>
+        </a:solidFill>
+      </p:bgPr>
+    </p:bg>
     <p:spTree>
       <p:nvGrpSpPr>
         <p:cNvPr id="1" name=""/>
@@ -2916,14 +5145,34 @@
       </p:grpSpPr>
       <p:sp>
         <p:nvSpPr>
-          <p:cNvPr id="2" name="Text 0"/>
-          <p:cNvSpPr/>
-          <p:nvPr/>
-        </p:nvSpPr>
-        <p:spPr>
-          <a:xfrm>
-            <a:off x="457200" y="320040"/>
-            <a:ext cx="8229600" cy="731520"/>
+          <p:cNvPr id="2" name="Shape 0"/>
+          <p:cNvSpPr/>
+          <p:nvPr/>
+        </p:nvSpPr>
+        <p:spPr>
+          <a:xfrm>
+            <a:off x="0" y="4480560"/>
+            <a:ext cx="9144000" cy="667512"/>
+          </a:xfrm>
+          <a:prstGeom prst="rect">
+            <a:avLst/>
+          </a:prstGeom>
+          <a:solidFill>
+            <a:srgbClr val="B45309"/>
+          </a:solidFill>
+          <a:ln/>
+        </p:spPr>
+      </p:sp>
+      <p:sp>
+        <p:nvSpPr>
+          <p:cNvPr id="3" name="Text 1"/>
+          <p:cNvSpPr/>
+          <p:nvPr/>
+        </p:nvSpPr>
+        <p:spPr>
+          <a:xfrm>
+            <a:off x="685800" y="2148840"/>
+            <a:ext cx="7863840" cy="548640"/>
           </a:xfrm>
           <a:prstGeom prst="rect">
             <a:avLst/>
@@ -2939,51 +5188,17 @@
               <a:buNone/>
             </a:pPr>
             <a:r>
-              <a:rPr lang="en-US" sz="2400" b="1" dirty="0">
-                <a:solidFill>
-                  <a:srgbClr val="B45309"/>
-                </a:solidFill>
-              </a:rPr>
-              <a:t>Energizer/Break (0:25 - 0:30)</a:t>
-            </a:r>
-            <a:endParaRPr lang="en-US" sz="2400" dirty="0"/>
-          </a:p>
-        </p:txBody>
-      </p:sp>
-      <p:sp>
-        <p:nvSpPr>
-          <p:cNvPr id="3" name="Text 1"/>
-          <p:cNvSpPr/>
-          <p:nvPr/>
-        </p:nvSpPr>
-        <p:spPr>
-          <a:xfrm>
-            <a:off x="640080" y="1188720"/>
-            <a:ext cx="7863840" cy="3291840"/>
-          </a:xfrm>
-          <a:prstGeom prst="rect">
-            <a:avLst/>
-          </a:prstGeom>
-          <a:noFill/>
-          <a:ln/>
-        </p:spPr>
-        <p:txBody>
-          <a:bodyPr wrap="square" rtlCol="0" anchor="t"/>
-          <a:lstStyle/>
-          <a:p>
-            <a:pPr marL="342900" indent="-342900">
-              <a:buSzPct val="100000"/>
-              <a:buChar char="•"/>
-            </a:pPr>
-            <a:r>
-              <a:rPr lang="en-US" sz="1600" dirty="0">
-                <a:solidFill>
-                  <a:srgbClr val="333333"/>
-                </a:solidFill>
-              </a:rPr>
-              <a:t>Let's take a short break to stretch our legs and refresh our minds. Can you think of a time when you had to make a decision under uncertainty? How did you appro</a:t>
-            </a:r>
-            <a:endParaRPr lang="en-US" sz="1600" dirty="0"/>
+              <a:rPr lang="en-US" sz="2000" b="1" dirty="0">
+                <a:solidFill>
+                  <a:srgbClr val="1C1917"/>
+                </a:solidFill>
+                <a:latin typeface="Arial" pitchFamily="34" charset="0"/>
+                <a:ea typeface="Arial" pitchFamily="34" charset="-122"/>
+                <a:cs typeface="Arial" pitchFamily="34" charset="-120"/>
+              </a:rPr>
+              <a:t>Next: practice problems in your textbook chapter</a:t>
+            </a:r>
+            <a:endParaRPr lang="en-US" sz="2000" dirty="0"/>
           </a:p>
         </p:txBody>
       </p:sp>
@@ -2995,8 +5210,8 @@
         </p:nvSpPr>
         <p:spPr>
           <a:xfrm>
-            <a:off x="457200" y="4709160"/>
-            <a:ext cx="8229600" cy="320040"/>
+            <a:off x="685800" y="4599432"/>
+            <a:ext cx="7863840" cy="411480"/>
           </a:xfrm>
           <a:prstGeom prst="rect">
             <a:avLst/>
@@ -3012,14 +5227,17 @@
               <a:buNone/>
             </a:pPr>
             <a:r>
-              <a:rPr lang="en-US" sz="800" dirty="0">
-                <a:solidFill>
-                  <a:srgbClr val="AAAAAA"/>
-                </a:solidFill>
+              <a:rPr lang="en-US" sz="1100" dirty="0">
+                <a:solidFill>
+                  <a:srgbClr val="FFFFFF"/>
+                </a:solidFill>
+                <a:latin typeface="Arial" pitchFamily="34" charset="0"/>
+                <a:ea typeface="Arial" pitchFamily="34" charset="-122"/>
+                <a:cs typeface="Arial" pitchFamily="34" charset="-120"/>
               </a:rPr>
               <a:t>Lesson Forge Pro (owner) — This content is educational material only and does not constitute financial, investment, or trading advice.</a:t>
             </a:r>
-            <a:endParaRPr lang="en-US" sz="800" dirty="0"/>
+            <a:endParaRPr lang="en-US" sz="1100" dirty="0"/>
           </a:p>
         </p:txBody>
       </p:sp>
@@ -3031,9 +5249,16 @@
 </p:sld>
 </file>
 
-<file path=ppt/slides/slide8.xml><?xml version="1.0" encoding="utf-8"?>
+<file path=ppt/slides/slide2.xml><?xml version="1.0" encoding="utf-8"?>
 <p:sld xmlns:a="http://schemas.openxmlformats.org/drawingml/2006/main" xmlns:r="http://schemas.openxmlformats.org/officeDocument/2006/relationships" xmlns:p="http://schemas.openxmlformats.org/presentationml/2006/main">
-  <p:cSld name="Slide 8">
+  <p:cSld name="Slide 2">
+    <p:bg>
+      <p:bgPr>
+        <a:solidFill>
+          <a:srgbClr val="FFFFFF"/>
+        </a:solidFill>
+      </p:bgPr>
+    </p:bg>
     <p:spTree>
       <p:nvGrpSpPr>
         <p:cNvPr id="1" name=""/>
@@ -3050,14 +5275,34 @@
       </p:grpSpPr>
       <p:sp>
         <p:nvSpPr>
-          <p:cNvPr id="2" name="Text 0"/>
-          <p:cNvSpPr/>
-          <p:nvPr/>
-        </p:nvSpPr>
-        <p:spPr>
-          <a:xfrm>
-            <a:off x="457200" y="320040"/>
-            <a:ext cx="8229600" cy="731520"/>
+          <p:cNvPr id="2" name="Shape 0"/>
+          <p:cNvSpPr/>
+          <p:nvPr/>
+        </p:nvSpPr>
+        <p:spPr>
+          <a:xfrm>
+            <a:off x="411480" y="402336"/>
+            <a:ext cx="82296" cy="329184"/>
+          </a:xfrm>
+          <a:prstGeom prst="rect">
+            <a:avLst/>
+          </a:prstGeom>
+          <a:solidFill>
+            <a:srgbClr val="B45309"/>
+          </a:solidFill>
+          <a:ln/>
+        </p:spPr>
+      </p:sp>
+      <p:sp>
+        <p:nvSpPr>
+          <p:cNvPr id="3" name="Text 1"/>
+          <p:cNvSpPr/>
+          <p:nvPr/>
+        </p:nvSpPr>
+        <p:spPr>
+          <a:xfrm>
+            <a:off x="566928" y="292608"/>
+            <a:ext cx="8138160" cy="548640"/>
           </a:xfrm>
           <a:prstGeom prst="rect">
             <a:avLst/>
@@ -3073,27 +5318,92 @@
               <a:buNone/>
             </a:pPr>
             <a:r>
-              <a:rPr lang="en-US" sz="2400" b="1" dirty="0">
-                <a:solidFill>
-                  <a:srgbClr val="B45309"/>
-                </a:solidFill>
-              </a:rPr>
-              <a:t>Sensitivity Analysis (0:30 - 1:00)</a:t>
-            </a:r>
-            <a:endParaRPr lang="en-US" sz="2400" dirty="0"/>
-          </a:p>
-        </p:txBody>
-      </p:sp>
-      <p:sp>
-        <p:nvSpPr>
-          <p:cNvPr id="3" name="Text 1"/>
-          <p:cNvSpPr/>
-          <p:nvPr/>
-        </p:nvSpPr>
-        <p:spPr>
-          <a:xfrm>
-            <a:off x="640080" y="1188720"/>
-            <a:ext cx="7863840" cy="3291840"/>
+              <a:rPr lang="en-US" sz="2100" b="1" dirty="0">
+                <a:solidFill>
+                  <a:srgbClr val="1C1917"/>
+                </a:solidFill>
+                <a:latin typeface="Arial" pitchFamily="34" charset="0"/>
+                <a:ea typeface="Arial" pitchFamily="34" charset="-122"/>
+                <a:cs typeface="Arial" pitchFamily="34" charset="-120"/>
+              </a:rPr>
+              <a:t>Today's agenda</a:t>
+            </a:r>
+            <a:endParaRPr lang="en-US" sz="2100" dirty="0"/>
+          </a:p>
+        </p:txBody>
+      </p:sp>
+      <p:sp>
+        <p:nvSpPr>
+          <p:cNvPr id="4" name="Shape 2"/>
+          <p:cNvSpPr/>
+          <p:nvPr/>
+        </p:nvSpPr>
+        <p:spPr>
+          <a:xfrm>
+            <a:off x="411480" y="960120"/>
+            <a:ext cx="8321040" cy="0"/>
+          </a:xfrm>
+          <a:prstGeom prst="line">
+            <a:avLst/>
+          </a:prstGeom>
+          <a:noFill/>
+          <a:ln w="12700">
+            <a:solidFill>
+              <a:srgbClr val="E7E5E4"/>
+            </a:solidFill>
+            <a:prstDash val="solid"/>
+          </a:ln>
+        </p:spPr>
+      </p:sp>
+      <p:sp>
+        <p:nvSpPr>
+          <p:cNvPr id="5" name="Text 3"/>
+          <p:cNvSpPr/>
+          <p:nvPr/>
+        </p:nvSpPr>
+        <p:spPr>
+          <a:xfrm>
+            <a:off x="411480" y="4864608"/>
+            <a:ext cx="8321040" cy="237744"/>
+          </a:xfrm>
+          <a:prstGeom prst="rect">
+            <a:avLst/>
+          </a:prstGeom>
+          <a:noFill/>
+          <a:ln/>
+        </p:spPr>
+        <p:txBody>
+          <a:bodyPr wrap="square" rtlCol="0" anchor="ctr"/>
+          <a:lstStyle/>
+          <a:p>
+            <a:pPr indent="0" marL="0">
+              <a:buNone/>
+            </a:pPr>
+            <a:r>
+              <a:rPr lang="en-US" sz="750" dirty="0">
+                <a:solidFill>
+                  <a:srgbClr val="AAAAAA"/>
+                </a:solidFill>
+                <a:latin typeface="Arial" pitchFamily="34" charset="0"/>
+                <a:ea typeface="Arial" pitchFamily="34" charset="-122"/>
+                <a:cs typeface="Arial" pitchFamily="34" charset="-120"/>
+              </a:rPr>
+              <a:t>Lesson Forge Pro (owner) — This content is educational material only and does not constitute financial, investment, or trading advice.</a:t>
+            </a:r>
+            <a:endParaRPr lang="en-US" sz="750" dirty="0"/>
+          </a:p>
+        </p:txBody>
+      </p:sp>
+      <p:sp>
+        <p:nvSpPr>
+          <p:cNvPr id="6" name="Text 4"/>
+          <p:cNvSpPr/>
+          <p:nvPr/>
+        </p:nvSpPr>
+        <p:spPr>
+          <a:xfrm>
+            <a:off x="731520" y="1234440"/>
+            <a:ext cx="7680960" cy="3383280"/>
           </a:xfrm>
           <a:prstGeom prst="rect">
             <a:avLst/>
@@ -3105,130 +5415,214 @@
           <a:bodyPr wrap="square" rtlCol="0" anchor="t"/>
           <a:lstStyle/>
           <a:p>
-            <a:pPr marL="342900" indent="-342900">
+            <a:pPr marL="177800" indent="-177800">
+              <a:spcAft>
+                <a:spcPts val="1000"/>
+              </a:spcAft>
               <a:buSzPct val="100000"/>
-              <a:buChar char="•"/>
+              <a:buChar char="▪"/>
             </a:pPr>
             <a:r>
               <a:rPr lang="en-US" sz="1600" dirty="0">
                 <a:solidFill>
-                  <a:srgbClr val="333333"/>
-                </a:solidFill>
-              </a:rPr>
-              <a:t>Sensitivity analysis is a technique used to test the robustness of financial models. It's like asking the question - what if our assumptions are wrong? What if </a:t>
+                  <a:srgbClr val="1C1917"/>
+                </a:solidFill>
+                <a:latin typeface="Arial" pitchFamily="34" charset="0"/>
+                <a:ea typeface="Arial" pitchFamily="34" charset="-122"/>
+                <a:cs typeface="Arial" pitchFamily="34" charset="-120"/>
+              </a:rPr>
+              <a:t>Concepts and Vocabulary</a:t>
             </a:r>
             <a:endParaRPr lang="en-US" sz="1600" dirty="0"/>
           </a:p>
           <a:p>
-            <a:pPr marL="342900" indent="-342900">
+            <a:pPr marL="177800" indent="-177800">
+              <a:spcAft>
+                <a:spcPts val="1000"/>
+              </a:spcAft>
               <a:buSzPct val="100000"/>
-              <a:buChar char="•"/>
+              <a:buChar char="▪"/>
             </a:pPr>
             <a:r>
               <a:rPr lang="en-US" sz="1600" dirty="0">
                 <a:solidFill>
-                  <a:srgbClr val="333333"/>
-                </a:solidFill>
-              </a:rPr>
-              <a:t>Let's consider another analogy. Imagine you're building a house, and you're using a blueprint to guide the construction process. The blueprint is like a financi</a:t>
+                  <a:srgbClr val="1C1917"/>
+                </a:solidFill>
+                <a:latin typeface="Arial" pitchFamily="34" charset="0"/>
+                <a:ea typeface="Arial" pitchFamily="34" charset="-122"/>
+                <a:cs typeface="Arial" pitchFamily="34" charset="-120"/>
+              </a:rPr>
+              <a:t>The Standard Procedure</a:t>
             </a:r>
             <a:endParaRPr lang="en-US" sz="1600" dirty="0"/>
           </a:p>
           <a:p>
-            <a:pPr marL="342900" indent="-342900">
+            <a:pPr marL="177800" indent="-177800">
+              <a:spcAft>
+                <a:spcPts val="1000"/>
+              </a:spcAft>
               <a:buSzPct val="100000"/>
-              <a:buChar char="•"/>
+              <a:buChar char="▪"/>
             </a:pPr>
             <a:r>
               <a:rPr lang="en-US" sz="1600" dirty="0">
                 <a:solidFill>
-                  <a:srgbClr val="333333"/>
-                </a:solidFill>
-              </a:rPr>
-              <a:t>Some key concepts in sensitivity analysis include:</a:t>
+                  <a:srgbClr val="1C1917"/>
+                </a:solidFill>
+                <a:latin typeface="Arial" pitchFamily="34" charset="0"/>
+                <a:ea typeface="Arial" pitchFamily="34" charset="-122"/>
+                <a:cs typeface="Arial" pitchFamily="34" charset="-120"/>
+              </a:rPr>
+              <a:t>Inputs</a:t>
             </a:r>
             <a:endParaRPr lang="en-US" sz="1600" dirty="0"/>
           </a:p>
           <a:p>
-            <a:pPr marL="342900" indent="-342900">
+            <a:pPr marL="177800" indent="-177800">
+              <a:spcAft>
+                <a:spcPts val="1000"/>
+              </a:spcAft>
               <a:buSzPct val="100000"/>
-              <a:buChar char="•"/>
+              <a:buChar char="▪"/>
             </a:pPr>
             <a:r>
               <a:rPr lang="en-US" sz="1600" dirty="0">
                 <a:solidFill>
-                  <a:srgbClr val="333333"/>
-                </a:solidFill>
-              </a:rPr>
-              <a:t>Identifying key inputs and outputs</a:t>
+                  <a:srgbClr val="1C1917"/>
+                </a:solidFill>
+                <a:latin typeface="Arial" pitchFamily="34" charset="0"/>
+                <a:ea typeface="Arial" pitchFamily="34" charset="-122"/>
+                <a:cs typeface="Arial" pitchFamily="34" charset="-120"/>
+              </a:rPr>
+              <a:t>The Step-by-Step Procedure</a:t>
             </a:r>
             <a:endParaRPr lang="en-US" sz="1600" dirty="0"/>
           </a:p>
           <a:p>
-            <a:pPr marL="342900" indent="-342900">
+            <a:pPr marL="177800" indent="-177800">
+              <a:spcAft>
+                <a:spcPts val="1000"/>
+              </a:spcAft>
               <a:buSzPct val="100000"/>
-              <a:buChar char="•"/>
+              <a:buChar char="▪"/>
             </a:pPr>
             <a:r>
               <a:rPr lang="en-US" sz="1600" dirty="0">
                 <a:solidFill>
-                  <a:srgbClr val="333333"/>
-                </a:solidFill>
-              </a:rPr>
-              <a:t>Analyzing the sensitivity of outputs to changes in inputs</a:t>
+                  <a:srgbClr val="1C1917"/>
+                </a:solidFill>
+                <a:latin typeface="Arial" pitchFamily="34" charset="0"/>
+                <a:ea typeface="Arial" pitchFamily="34" charset="-122"/>
+                <a:cs typeface="Arial" pitchFamily="34" charset="-120"/>
+              </a:rPr>
+              <a:t>Worked Example</a:t>
             </a:r>
             <a:endParaRPr lang="en-US" sz="1600" dirty="0"/>
           </a:p>
           <a:p>
-            <a:pPr marL="342900" indent="-342900">
+            <a:pPr marL="177800" indent="-177800">
+              <a:spcAft>
+                <a:spcPts val="1000"/>
+              </a:spcAft>
               <a:buSzPct val="100000"/>
-              <a:buChar char="•"/>
+              <a:buChar char="▪"/>
             </a:pPr>
             <a:r>
               <a:rPr lang="en-US" sz="1600" dirty="0">
                 <a:solidFill>
-                  <a:srgbClr val="333333"/>
-                </a:solidFill>
-              </a:rPr>
-              <a:t>Evaluating the robustness of the model to different scenarios</a:t>
+                  <a:srgbClr val="1C1917"/>
+                </a:solidFill>
+                <a:latin typeface="Arial" pitchFamily="34" charset="0"/>
+                <a:ea typeface="Arial" pitchFamily="34" charset="-122"/>
+                <a:cs typeface="Arial" pitchFamily="34" charset="-120"/>
+              </a:rPr>
+              <a:t>Outputs and Checks</a:t>
             </a:r>
             <a:endParaRPr lang="en-US" sz="1600" dirty="0"/>
           </a:p>
-        </p:txBody>
-      </p:sp>
-      <p:sp>
-        <p:nvSpPr>
-          <p:cNvPr id="4" name="Text 2"/>
-          <p:cNvSpPr/>
-          <p:nvPr/>
-        </p:nvSpPr>
-        <p:spPr>
-          <a:xfrm>
-            <a:off x="457200" y="4709160"/>
-            <a:ext cx="8229600" cy="320040"/>
-          </a:xfrm>
-          <a:prstGeom prst="rect">
-            <a:avLst/>
-          </a:prstGeom>
-          <a:noFill/>
-          <a:ln/>
-        </p:spPr>
-        <p:txBody>
-          <a:bodyPr wrap="square" rtlCol="0" anchor="ctr"/>
-          <a:lstStyle/>
-          <a:p>
-            <a:pPr indent="0" marL="0">
-              <a:buNone/>
-            </a:pPr>
-            <a:r>
-              <a:rPr lang="en-US" sz="800" dirty="0">
-                <a:solidFill>
-                  <a:srgbClr val="AAAAAA"/>
-                </a:solidFill>
-              </a:rPr>
-              <a:t>Lesson Forge Pro (owner) — This content is educational material only and does not constitute financial, investment, or trading advice.</a:t>
-            </a:r>
-            <a:endParaRPr lang="en-US" sz="800" dirty="0"/>
+          <a:p>
+            <a:pPr marL="177800" indent="-177800">
+              <a:spcAft>
+                <a:spcPts val="1000"/>
+              </a:spcAft>
+              <a:buSzPct val="100000"/>
+              <a:buChar char="▪"/>
+            </a:pPr>
+            <a:r>
+              <a:rPr lang="en-US" sz="1600" dirty="0">
+                <a:solidFill>
+                  <a:srgbClr val="1C1917"/>
+                </a:solidFill>
+                <a:latin typeface="Arial" pitchFamily="34" charset="0"/>
+                <a:ea typeface="Arial" pitchFamily="34" charset="-122"/>
+                <a:cs typeface="Arial" pitchFamily="34" charset="-120"/>
+              </a:rPr>
+              <a:t>Applications and Pitfalls</a:t>
+            </a:r>
+            <a:endParaRPr lang="en-US" sz="1600" dirty="0"/>
+          </a:p>
+          <a:p>
+            <a:pPr marL="177800" indent="-177800">
+              <a:spcAft>
+                <a:spcPts val="1000"/>
+              </a:spcAft>
+              <a:buSzPct val="100000"/>
+              <a:buChar char="▪"/>
+            </a:pPr>
+            <a:r>
+              <a:rPr lang="en-US" sz="1600" dirty="0">
+                <a:solidFill>
+                  <a:srgbClr val="1C1917"/>
+                </a:solidFill>
+                <a:latin typeface="Arial" pitchFamily="34" charset="0"/>
+                <a:ea typeface="Arial" pitchFamily="34" charset="-122"/>
+                <a:cs typeface="Arial" pitchFamily="34" charset="-120"/>
+              </a:rPr>
+              <a:t>Common Mistakes</a:t>
+            </a:r>
+            <a:endParaRPr lang="en-US" sz="1600" dirty="0"/>
+          </a:p>
+          <a:p>
+            <a:pPr marL="177800" indent="-177800">
+              <a:spcAft>
+                <a:spcPts val="1000"/>
+              </a:spcAft>
+              <a:buSzPct val="100000"/>
+              <a:buChar char="▪"/>
+            </a:pPr>
+            <a:r>
+              <a:rPr lang="en-US" sz="1600" dirty="0">
+                <a:solidFill>
+                  <a:srgbClr val="1C1917"/>
+                </a:solidFill>
+                <a:latin typeface="Arial" pitchFamily="34" charset="0"/>
+                <a:ea typeface="Arial" pitchFamily="34" charset="-122"/>
+                <a:cs typeface="Arial" pitchFamily="34" charset="-120"/>
+              </a:rPr>
+              <a:t>Sanity Checks</a:t>
+            </a:r>
+            <a:endParaRPr lang="en-US" sz="1600" dirty="0"/>
+          </a:p>
+          <a:p>
+            <a:pPr marL="177800" indent="-177800">
+              <a:spcAft>
+                <a:spcPts val="1000"/>
+              </a:spcAft>
+              <a:buSzPct val="100000"/>
+              <a:buChar char="▪"/>
+            </a:pPr>
+            <a:r>
+              <a:rPr lang="en-US" sz="1600" dirty="0">
+                <a:solidFill>
+                  <a:srgbClr val="1C1917"/>
+                </a:solidFill>
+                <a:latin typeface="Arial" pitchFamily="34" charset="0"/>
+                <a:ea typeface="Arial" pitchFamily="34" charset="-122"/>
+                <a:cs typeface="Arial" pitchFamily="34" charset="-120"/>
+              </a:rPr>
+              <a:t>Worked Example: A Flawed Attempt, Corrected</a:t>
+            </a:r>
+            <a:endParaRPr lang="en-US" sz="1600" dirty="0"/>
           </a:p>
         </p:txBody>
       </p:sp>
@@ -3240,9 +5634,16 @@
 </p:sld>
 </file>
 
-<file path=ppt/slides/slide9.xml><?xml version="1.0" encoding="utf-8"?>
+<file path=ppt/slides/slide3.xml><?xml version="1.0" encoding="utf-8"?>
 <p:sld xmlns:a="http://schemas.openxmlformats.org/drawingml/2006/main" xmlns:r="http://schemas.openxmlformats.org/officeDocument/2006/relationships" xmlns:p="http://schemas.openxmlformats.org/presentationml/2006/main">
-  <p:cSld name="Slide 9">
+  <p:cSld name="Slide 3">
+    <p:bg>
+      <p:bgPr>
+        <a:solidFill>
+          <a:srgbClr val="FFFFFF"/>
+        </a:solidFill>
+      </p:bgPr>
+    </p:bg>
     <p:spTree>
       <p:nvGrpSpPr>
         <p:cNvPr id="1" name=""/>
@@ -3259,14 +5660,34 @@
       </p:grpSpPr>
       <p:sp>
         <p:nvSpPr>
-          <p:cNvPr id="2" name="Text 0"/>
-          <p:cNvSpPr/>
-          <p:nvPr/>
-        </p:nvSpPr>
-        <p:spPr>
-          <a:xfrm>
-            <a:off x="457200" y="320040"/>
-            <a:ext cx="8229600" cy="731520"/>
+          <p:cNvPr id="2" name="Shape 0"/>
+          <p:cNvSpPr/>
+          <p:nvPr/>
+        </p:nvSpPr>
+        <p:spPr>
+          <a:xfrm>
+            <a:off x="411480" y="402336"/>
+            <a:ext cx="82296" cy="329184"/>
+          </a:xfrm>
+          <a:prstGeom prst="rect">
+            <a:avLst/>
+          </a:prstGeom>
+          <a:solidFill>
+            <a:srgbClr val="B45309"/>
+          </a:solidFill>
+          <a:ln/>
+        </p:spPr>
+      </p:sp>
+      <p:sp>
+        <p:nvSpPr>
+          <p:cNvPr id="3" name="Text 1"/>
+          <p:cNvSpPr/>
+          <p:nvPr/>
+        </p:nvSpPr>
+        <p:spPr>
+          <a:xfrm>
+            <a:off x="566928" y="292608"/>
+            <a:ext cx="8138160" cy="548640"/>
           </a:xfrm>
           <a:prstGeom prst="rect">
             <a:avLst/>
@@ -3282,27 +5703,92 @@
               <a:buNone/>
             </a:pPr>
             <a:r>
-              <a:rPr lang="en-US" sz="2400" b="1" dirty="0">
-                <a:solidFill>
-                  <a:srgbClr val="B45309"/>
-                </a:solidFill>
-              </a:rPr>
-              <a:t>Creating Interactive Dashboards (1:00 - 1:20)</a:t>
-            </a:r>
-            <a:endParaRPr lang="en-US" sz="2400" dirty="0"/>
-          </a:p>
-        </p:txBody>
-      </p:sp>
-      <p:sp>
-        <p:nvSpPr>
-          <p:cNvPr id="3" name="Text 1"/>
-          <p:cNvSpPr/>
-          <p:nvPr/>
-        </p:nvSpPr>
-        <p:spPr>
-          <a:xfrm>
-            <a:off x="640080" y="1188720"/>
-            <a:ext cx="7863840" cy="3291840"/>
+              <a:rPr lang="en-US" sz="2100" b="1" dirty="0">
+                <a:solidFill>
+                  <a:srgbClr val="1C1917"/>
+                </a:solidFill>
+                <a:latin typeface="Arial" pitchFamily="34" charset="0"/>
+                <a:ea typeface="Arial" pitchFamily="34" charset="-122"/>
+                <a:cs typeface="Arial" pitchFamily="34" charset="-120"/>
+              </a:rPr>
+              <a:t>Concepts and Vocabulary</a:t>
+            </a:r>
+            <a:endParaRPr lang="en-US" sz="2100" dirty="0"/>
+          </a:p>
+        </p:txBody>
+      </p:sp>
+      <p:sp>
+        <p:nvSpPr>
+          <p:cNvPr id="4" name="Shape 2"/>
+          <p:cNvSpPr/>
+          <p:nvPr/>
+        </p:nvSpPr>
+        <p:spPr>
+          <a:xfrm>
+            <a:off x="411480" y="960120"/>
+            <a:ext cx="8321040" cy="0"/>
+          </a:xfrm>
+          <a:prstGeom prst="line">
+            <a:avLst/>
+          </a:prstGeom>
+          <a:noFill/>
+          <a:ln w="12700">
+            <a:solidFill>
+              <a:srgbClr val="E7E5E4"/>
+            </a:solidFill>
+            <a:prstDash val="solid"/>
+          </a:ln>
+        </p:spPr>
+      </p:sp>
+      <p:sp>
+        <p:nvSpPr>
+          <p:cNvPr id="5" name="Text 3"/>
+          <p:cNvSpPr/>
+          <p:nvPr/>
+        </p:nvSpPr>
+        <p:spPr>
+          <a:xfrm>
+            <a:off x="411480" y="4864608"/>
+            <a:ext cx="8321040" cy="237744"/>
+          </a:xfrm>
+          <a:prstGeom prst="rect">
+            <a:avLst/>
+          </a:prstGeom>
+          <a:noFill/>
+          <a:ln/>
+        </p:spPr>
+        <p:txBody>
+          <a:bodyPr wrap="square" rtlCol="0" anchor="ctr"/>
+          <a:lstStyle/>
+          <a:p>
+            <a:pPr indent="0" marL="0">
+              <a:buNone/>
+            </a:pPr>
+            <a:r>
+              <a:rPr lang="en-US" sz="750" dirty="0">
+                <a:solidFill>
+                  <a:srgbClr val="AAAAAA"/>
+                </a:solidFill>
+                <a:latin typeface="Arial" pitchFamily="34" charset="0"/>
+                <a:ea typeface="Arial" pitchFamily="34" charset="-122"/>
+                <a:cs typeface="Arial" pitchFamily="34" charset="-120"/>
+              </a:rPr>
+              <a:t>Lesson Forge Pro (owner) — This content is educational material only and does not constitute financial, investment, or trading advice.</a:t>
+            </a:r>
+            <a:endParaRPr lang="en-US" sz="750" dirty="0"/>
+          </a:p>
+        </p:txBody>
+      </p:sp>
+      <p:sp>
+        <p:nvSpPr>
+          <p:cNvPr id="6" name="Text 4"/>
+          <p:cNvSpPr/>
+          <p:nvPr/>
+        </p:nvSpPr>
+        <p:spPr>
+          <a:xfrm>
+            <a:off x="731520" y="1188720"/>
+            <a:ext cx="7680960" cy="2743200"/>
           </a:xfrm>
           <a:prstGeom prst="rect">
             <a:avLst/>
@@ -3314,34 +5800,943 @@
           <a:bodyPr wrap="square" rtlCol="0" anchor="t"/>
           <a:lstStyle/>
           <a:p>
-            <a:pPr marL="342900" indent="-342900">
+            <a:pPr marL="152400" indent="-152400">
+              <a:spcAft>
+                <a:spcPts val="800"/>
+              </a:spcAft>
               <a:buSzPct val="100000"/>
               <a:buChar char="•"/>
             </a:pPr>
             <a:r>
-              <a:rPr lang="en-US" sz="1600" dirty="0">
-                <a:solidFill>
-                  <a:srgbClr val="333333"/>
-                </a:solidFill>
-              </a:rPr>
-              <a:t>Interactive dashboards are a powerful tool for visualizing scenario results. They allow us to explore different scenarios and see the impact on business outcome</a:t>
-            </a:r>
-            <a:endParaRPr lang="en-US" sz="1600" dirty="0"/>
-          </a:p>
-          <a:p>
-            <a:pPr marL="342900" indent="-342900">
+              <a:rPr lang="en-US" sz="1500" dirty="0">
+                <a:solidFill>
+                  <a:srgbClr val="1C1917"/>
+                </a:solidFill>
+                <a:latin typeface="Arial" pitchFamily="34" charset="0"/>
+                <a:ea typeface="Arial" pitchFamily="34" charset="-122"/>
+                <a:cs typeface="Arial" pitchFamily="34" charset="-120"/>
+              </a:rPr>
+              <a:t>A model maps inputs through relationships to a decision-relevant output.</a:t>
+            </a:r>
+            <a:endParaRPr lang="en-US" sz="1500" dirty="0"/>
+          </a:p>
+          <a:p>
+            <a:pPr marL="152400" indent="-152400">
+              <a:spcAft>
+                <a:spcPts val="800"/>
+              </a:spcAft>
               <a:buSzPct val="100000"/>
               <a:buChar char="•"/>
             </a:pPr>
             <a:r>
-              <a:rPr lang="en-US" sz="1600" dirty="0">
-                <a:solidFill>
-                  <a:srgbClr val="333333"/>
-                </a:solidFill>
-              </a:rPr>
-              <a:t>Let's consider an example. Suppose we're evaluating the potential impact of a new product launch on our revenue. We can create an interactive dashboard that sho</a:t>
-            </a:r>
-            <a:endParaRPr lang="en-US" sz="1600" dirty="0"/>
+              <a:rPr lang="en-US" sz="1500" dirty="0">
+                <a:solidFill>
+                  <a:srgbClr val="1C1917"/>
+                </a:solidFill>
+                <a:latin typeface="Arial" pitchFamily="34" charset="0"/>
+                <a:ea typeface="Arial" pitchFamily="34" charset="-122"/>
+                <a:cs typeface="Arial" pitchFamily="34" charset="-120"/>
+              </a:rPr>
+              <a:t>Input variables (drivers) include growth rate, margin, and discount rate.</a:t>
+            </a:r>
+            <a:endParaRPr lang="en-US" sz="1500" dirty="0"/>
+          </a:p>
+          <a:p>
+            <a:pPr marL="152400" indent="-152400">
+              <a:spcAft>
+                <a:spcPts val="800"/>
+              </a:spcAft>
+              <a:buSzPct val="100000"/>
+              <a:buChar char="•"/>
+            </a:pPr>
+            <a:r>
+              <a:rPr lang="en-US" sz="1500" dirty="0">
+                <a:solidFill>
+                  <a:srgbClr val="1C1917"/>
+                </a:solidFill>
+                <a:latin typeface="Arial" pitchFamily="34" charset="0"/>
+                <a:ea typeface="Arial" pitchFamily="34" charset="-122"/>
+                <a:cs typeface="Arial" pitchFamily="34" charset="-120"/>
+              </a:rPr>
+              <a:t>Output variables are metrics like NPV, EPS, or free cash flow.</a:t>
+            </a:r>
+            <a:endParaRPr lang="en-US" sz="1500" dirty="0"/>
+          </a:p>
+          <a:p>
+            <a:pPr marL="152400" indent="-152400">
+              <a:spcAft>
+                <a:spcPts val="800"/>
+              </a:spcAft>
+              <a:buSzPct val="100000"/>
+              <a:buChar char="•"/>
+            </a:pPr>
+            <a:r>
+              <a:rPr lang="en-US" sz="1500" dirty="0">
+                <a:solidFill>
+                  <a:srgbClr val="1C1917"/>
+                </a:solidFill>
+                <a:latin typeface="Arial" pitchFamily="34" charset="0"/>
+                <a:ea typeface="Arial" pitchFamily="34" charset="-122"/>
+                <a:cs typeface="Arial" pitchFamily="34" charset="-120"/>
+              </a:rPr>
+              <a:t>Precise vocabulary is essential for client, colleague, and examiner credibility.</a:t>
+            </a:r>
+            <a:endParaRPr lang="en-US" sz="1500" dirty="0"/>
+          </a:p>
+        </p:txBody>
+      </p:sp>
+      <p:sp>
+        <p:nvSpPr>
+          <p:cNvPr id="7" name="Shape 5"/>
+          <p:cNvSpPr/>
+          <p:nvPr/>
+        </p:nvSpPr>
+        <p:spPr>
+          <a:xfrm>
+            <a:off x="731520" y="4041648"/>
+            <a:ext cx="7680960" cy="566928"/>
+          </a:xfrm>
+          <a:prstGeom prst="roundRect">
+            <a:avLst>
+              <a:gd name="adj" fmla="val 12903"/>
+            </a:avLst>
+          </a:prstGeom>
+          <a:solidFill>
+            <a:srgbClr val="B45309">
+              <a:alpha val="12000"/>
+            </a:srgbClr>
+          </a:solidFill>
+          <a:ln w="12700">
+            <a:solidFill>
+              <a:srgbClr val="B45309"/>
+            </a:solidFill>
+            <a:prstDash val="solid"/>
+          </a:ln>
+        </p:spPr>
+      </p:sp>
+      <p:sp>
+        <p:nvSpPr>
+          <p:cNvPr id="8" name="Text 6"/>
+          <p:cNvSpPr/>
+          <p:nvPr/>
+        </p:nvSpPr>
+        <p:spPr>
+          <a:xfrm>
+            <a:off x="868680" y="4087368"/>
+            <a:ext cx="7406640" cy="475488"/>
+          </a:xfrm>
+          <a:prstGeom prst="rect">
+            <a:avLst/>
+          </a:prstGeom>
+          <a:noFill/>
+          <a:ln/>
+        </p:spPr>
+        <p:txBody>
+          <a:bodyPr wrap="square" rtlCol="0" anchor="ctr"/>
+          <a:lstStyle/>
+          <a:p>
+            <a:pPr indent="0" marL="0">
+              <a:buNone/>
+            </a:pPr>
+            <a:r>
+              <a:rPr lang="en-US" sz="1100" b="1" dirty="0">
+                <a:solidFill>
+                  <a:srgbClr val="B45309"/>
+                </a:solidFill>
+                <a:latin typeface="Arial" pitchFamily="34" charset="0"/>
+                <a:ea typeface="Arial" pitchFamily="34" charset="-122"/>
+                <a:cs typeface="Arial" pitchFamily="34" charset="-120"/>
+              </a:rPr>
+              <a:t>Takeaway  </a:t>
+            </a:r>
+            <a:pPr indent="0" marL="0">
+              <a:buNone/>
+            </a:pPr>
+            <a:r>
+              <a:rPr lang="en-US" sz="1150" dirty="0">
+                <a:solidFill>
+                  <a:srgbClr val="1C1917"/>
+                </a:solidFill>
+                <a:latin typeface="Arial" pitchFamily="34" charset="0"/>
+                <a:ea typeface="Arial" pitchFamily="34" charset="-122"/>
+                <a:cs typeface="Arial" pitchFamily="34" charset="-120"/>
+              </a:rPr>
+              <a:t>Mastering core definitions is the prerequisite for every scenario and sensitivity conversation.</a:t>
+            </a:r>
+            <a:endParaRPr lang="en-US" sz="1100" dirty="0"/>
+          </a:p>
+        </p:txBody>
+      </p:sp>
+    </p:spTree>
+  </p:cSld>
+  <p:clrMapOvr>
+    <a:masterClrMapping/>
+  </p:clrMapOvr>
+</p:sld>
+</file>
+
+<file path=ppt/slides/slide4.xml><?xml version="1.0" encoding="utf-8"?>
+<p:sld xmlns:a="http://schemas.openxmlformats.org/drawingml/2006/main" xmlns:r="http://schemas.openxmlformats.org/officeDocument/2006/relationships" xmlns:p="http://schemas.openxmlformats.org/presentationml/2006/main">
+  <p:cSld name="Slide 4">
+    <p:bg>
+      <p:bgPr>
+        <a:solidFill>
+          <a:srgbClr val="FFFFFF"/>
+        </a:solidFill>
+      </p:bgPr>
+    </p:bg>
+    <p:spTree>
+      <p:nvGrpSpPr>
+        <p:cNvPr id="1" name=""/>
+        <p:cNvGrpSpPr/>
+        <p:nvPr/>
+      </p:nvGrpSpPr>
+      <p:grpSpPr>
+        <a:xfrm>
+          <a:off x="0" y="0"/>
+          <a:ext cx="0" cy="0"/>
+          <a:chOff x="0" y="0"/>
+          <a:chExt cx="0" cy="0"/>
+        </a:xfrm>
+      </p:grpSpPr>
+      <p:sp>
+        <p:nvSpPr>
+          <p:cNvPr id="2" name="Shape 0"/>
+          <p:cNvSpPr/>
+          <p:nvPr/>
+        </p:nvSpPr>
+        <p:spPr>
+          <a:xfrm>
+            <a:off x="411480" y="402336"/>
+            <a:ext cx="82296" cy="329184"/>
+          </a:xfrm>
+          <a:prstGeom prst="rect">
+            <a:avLst/>
+          </a:prstGeom>
+          <a:solidFill>
+            <a:srgbClr val="B45309"/>
+          </a:solidFill>
+          <a:ln/>
+        </p:spPr>
+      </p:sp>
+      <p:sp>
+        <p:nvSpPr>
+          <p:cNvPr id="3" name="Text 1"/>
+          <p:cNvSpPr/>
+          <p:nvPr/>
+        </p:nvSpPr>
+        <p:spPr>
+          <a:xfrm>
+            <a:off x="566928" y="292608"/>
+            <a:ext cx="8138160" cy="548640"/>
+          </a:xfrm>
+          <a:prstGeom prst="rect">
+            <a:avLst/>
+          </a:prstGeom>
+          <a:noFill/>
+          <a:ln/>
+        </p:spPr>
+        <p:txBody>
+          <a:bodyPr wrap="square" rtlCol="0" anchor="ctr"/>
+          <a:lstStyle/>
+          <a:p>
+            <a:pPr indent="0" marL="0">
+              <a:buNone/>
+            </a:pPr>
+            <a:r>
+              <a:rPr lang="en-US" sz="2100" b="1" dirty="0">
+                <a:solidFill>
+                  <a:srgbClr val="1C1917"/>
+                </a:solidFill>
+                <a:latin typeface="Arial" pitchFamily="34" charset="0"/>
+                <a:ea typeface="Arial" pitchFamily="34" charset="-122"/>
+                <a:cs typeface="Arial" pitchFamily="34" charset="-120"/>
+              </a:rPr>
+              <a:t>The Standard Procedure</a:t>
+            </a:r>
+            <a:endParaRPr lang="en-US" sz="2100" dirty="0"/>
+          </a:p>
+        </p:txBody>
+      </p:sp>
+      <p:sp>
+        <p:nvSpPr>
+          <p:cNvPr id="4" name="Shape 2"/>
+          <p:cNvSpPr/>
+          <p:nvPr/>
+        </p:nvSpPr>
+        <p:spPr>
+          <a:xfrm>
+            <a:off x="411480" y="960120"/>
+            <a:ext cx="8321040" cy="0"/>
+          </a:xfrm>
+          <a:prstGeom prst="line">
+            <a:avLst/>
+          </a:prstGeom>
+          <a:noFill/>
+          <a:ln w="12700">
+            <a:solidFill>
+              <a:srgbClr val="E7E5E4"/>
+            </a:solidFill>
+            <a:prstDash val="solid"/>
+          </a:ln>
+        </p:spPr>
+      </p:sp>
+      <p:sp>
+        <p:nvSpPr>
+          <p:cNvPr id="5" name="Text 3"/>
+          <p:cNvSpPr/>
+          <p:nvPr/>
+        </p:nvSpPr>
+        <p:spPr>
+          <a:xfrm>
+            <a:off x="411480" y="4864608"/>
+            <a:ext cx="8321040" cy="237744"/>
+          </a:xfrm>
+          <a:prstGeom prst="rect">
+            <a:avLst/>
+          </a:prstGeom>
+          <a:noFill/>
+          <a:ln/>
+        </p:spPr>
+        <p:txBody>
+          <a:bodyPr wrap="square" rtlCol="0" anchor="ctr"/>
+          <a:lstStyle/>
+          <a:p>
+            <a:pPr indent="0" marL="0">
+              <a:buNone/>
+            </a:pPr>
+            <a:r>
+              <a:rPr lang="en-US" sz="750" dirty="0">
+                <a:solidFill>
+                  <a:srgbClr val="AAAAAA"/>
+                </a:solidFill>
+                <a:latin typeface="Arial" pitchFamily="34" charset="0"/>
+                <a:ea typeface="Arial" pitchFamily="34" charset="-122"/>
+                <a:cs typeface="Arial" pitchFamily="34" charset="-120"/>
+              </a:rPr>
+              <a:t>Lesson Forge Pro (owner) — This content is educational material only and does not constitute financial, investment, or trading advice.</a:t>
+            </a:r>
+            <a:endParaRPr lang="en-US" sz="750" dirty="0"/>
+          </a:p>
+        </p:txBody>
+      </p:sp>
+      <p:sp>
+        <p:nvSpPr>
+          <p:cNvPr id="6" name="Text 4"/>
+          <p:cNvSpPr/>
+          <p:nvPr/>
+        </p:nvSpPr>
+        <p:spPr>
+          <a:xfrm>
+            <a:off x="731520" y="1188720"/>
+            <a:ext cx="7680960" cy="2743200"/>
+          </a:xfrm>
+          <a:prstGeom prst="rect">
+            <a:avLst/>
+          </a:prstGeom>
+          <a:noFill/>
+          <a:ln/>
+        </p:spPr>
+        <p:txBody>
+          <a:bodyPr wrap="square" rtlCol="0" anchor="t"/>
+          <a:lstStyle/>
+          <a:p>
+            <a:pPr marL="152400" indent="-152400">
+              <a:spcAft>
+                <a:spcPts val="800"/>
+              </a:spcAft>
+              <a:buSzPct val="100000"/>
+              <a:buChar char="•"/>
+            </a:pPr>
+            <a:r>
+              <a:rPr lang="en-US" sz="1500" dirty="0">
+                <a:solidFill>
+                  <a:srgbClr val="1C1917"/>
+                </a:solidFill>
+                <a:latin typeface="Arial" pitchFamily="34" charset="0"/>
+                <a:ea typeface="Arial" pitchFamily="34" charset="-122"/>
+                <a:cs typeface="Arial" pitchFamily="34" charset="-120"/>
+              </a:rPr>
+              <a:t>A structured, repeatable procedure converts assumptions into trustworthy outputs.</a:t>
+            </a:r>
+            <a:endParaRPr lang="en-US" sz="1500" dirty="0"/>
+          </a:p>
+          <a:p>
+            <a:pPr marL="152400" indent="-152400">
+              <a:spcAft>
+                <a:spcPts val="800"/>
+              </a:spcAft>
+              <a:buSzPct val="100000"/>
+              <a:buChar char="•"/>
+            </a:pPr>
+            <a:r>
+              <a:rPr lang="en-US" sz="1500" dirty="0">
+                <a:solidFill>
+                  <a:srgbClr val="1C1917"/>
+                </a:solidFill>
+                <a:latin typeface="Arial" pitchFamily="34" charset="0"/>
+                <a:ea typeface="Arial" pitchFamily="34" charset="-122"/>
+                <a:cs typeface="Arial" pitchFamily="34" charset="-120"/>
+              </a:rPr>
+              <a:t>Actionable insight requires discipline—not just impressive-looking spreadsheets.</a:t>
+            </a:r>
+            <a:endParaRPr lang="en-US" sz="1500" dirty="0"/>
+          </a:p>
+          <a:p>
+            <a:pPr marL="152400" indent="-152400">
+              <a:spcAft>
+                <a:spcPts val="800"/>
+              </a:spcAft>
+              <a:buSzPct val="100000"/>
+              <a:buChar char="•"/>
+            </a:pPr>
+            <a:r>
+              <a:rPr lang="en-US" sz="1500" dirty="0">
+                <a:solidFill>
+                  <a:srgbClr val="1C1917"/>
+                </a:solidFill>
+                <a:latin typeface="Arial" pitchFamily="34" charset="0"/>
+                <a:ea typeface="Arial" pitchFamily="34" charset="-122"/>
+                <a:cs typeface="Arial" pitchFamily="34" charset="-120"/>
+              </a:rPr>
+              <a:t>Every step moves from clearly defined inputs through the model to interrogable results.</a:t>
+            </a:r>
+            <a:endParaRPr lang="en-US" sz="1500" dirty="0"/>
+          </a:p>
+          <a:p>
+            <a:pPr marL="152400" indent="-152400">
+              <a:spcAft>
+                <a:spcPts val="800"/>
+              </a:spcAft>
+              <a:buSzPct val="100000"/>
+              <a:buChar char="•"/>
+            </a:pPr>
+            <a:r>
+              <a:rPr lang="en-US" sz="1500" dirty="0">
+                <a:solidFill>
+                  <a:srgbClr val="1C1917"/>
+                </a:solidFill>
+                <a:latin typeface="Arial" pitchFamily="34" charset="0"/>
+                <a:ea typeface="Arial" pitchFamily="34" charset="-122"/>
+                <a:cs typeface="Arial" pitchFamily="34" charset="-120"/>
+              </a:rPr>
+              <a:t>Repeatability ensures results can be audited, challenged, and updated.</a:t>
+            </a:r>
+            <a:endParaRPr lang="en-US" sz="1500" dirty="0"/>
+          </a:p>
+        </p:txBody>
+      </p:sp>
+      <p:sp>
+        <p:nvSpPr>
+          <p:cNvPr id="7" name="Shape 5"/>
+          <p:cNvSpPr/>
+          <p:nvPr/>
+        </p:nvSpPr>
+        <p:spPr>
+          <a:xfrm>
+            <a:off x="731520" y="4041648"/>
+            <a:ext cx="7680960" cy="566928"/>
+          </a:xfrm>
+          <a:prstGeom prst="roundRect">
+            <a:avLst>
+              <a:gd name="adj" fmla="val 12903"/>
+            </a:avLst>
+          </a:prstGeom>
+          <a:solidFill>
+            <a:srgbClr val="B45309">
+              <a:alpha val="12000"/>
+            </a:srgbClr>
+          </a:solidFill>
+          <a:ln w="12700">
+            <a:solidFill>
+              <a:srgbClr val="B45309"/>
+            </a:solidFill>
+            <a:prstDash val="solid"/>
+          </a:ln>
+        </p:spPr>
+      </p:sp>
+      <p:sp>
+        <p:nvSpPr>
+          <p:cNvPr id="8" name="Text 6"/>
+          <p:cNvSpPr/>
+          <p:nvPr/>
+        </p:nvSpPr>
+        <p:spPr>
+          <a:xfrm>
+            <a:off x="868680" y="4087368"/>
+            <a:ext cx="7406640" cy="475488"/>
+          </a:xfrm>
+          <a:prstGeom prst="rect">
+            <a:avLst/>
+          </a:prstGeom>
+          <a:noFill/>
+          <a:ln/>
+        </p:spPr>
+        <p:txBody>
+          <a:bodyPr wrap="square" rtlCol="0" anchor="ctr"/>
+          <a:lstStyle/>
+          <a:p>
+            <a:pPr indent="0" marL="0">
+              <a:buNone/>
+            </a:pPr>
+            <a:r>
+              <a:rPr lang="en-US" sz="1100" b="1" dirty="0">
+                <a:solidFill>
+                  <a:srgbClr val="B45309"/>
+                </a:solidFill>
+                <a:latin typeface="Arial" pitchFamily="34" charset="0"/>
+                <a:ea typeface="Arial" pitchFamily="34" charset="-122"/>
+                <a:cs typeface="Arial" pitchFamily="34" charset="-120"/>
+              </a:rPr>
+              <a:t>Takeaway  </a:t>
+            </a:r>
+            <a:pPr indent="0" marL="0">
+              <a:buNone/>
+            </a:pPr>
+            <a:r>
+              <a:rPr lang="en-US" sz="1150" dirty="0">
+                <a:solidFill>
+                  <a:srgbClr val="1C1917"/>
+                </a:solidFill>
+                <a:latin typeface="Arial" pitchFamily="34" charset="0"/>
+                <a:ea typeface="Arial" pitchFamily="34" charset="-122"/>
+                <a:cs typeface="Arial" pitchFamily="34" charset="-120"/>
+              </a:rPr>
+              <a:t>A rigorous shared procedure separates analysts who drive decisions from those who produce noise.</a:t>
+            </a:r>
+            <a:endParaRPr lang="en-US" sz="1100" dirty="0"/>
+          </a:p>
+        </p:txBody>
+      </p:sp>
+    </p:spTree>
+  </p:cSld>
+  <p:clrMapOvr>
+    <a:masterClrMapping/>
+  </p:clrMapOvr>
+</p:sld>
+</file>
+
+<file path=ppt/slides/slide5.xml><?xml version="1.0" encoding="utf-8"?>
+<p:sld xmlns:a="http://schemas.openxmlformats.org/drawingml/2006/main" xmlns:r="http://schemas.openxmlformats.org/officeDocument/2006/relationships" xmlns:p="http://schemas.openxmlformats.org/presentationml/2006/main">
+  <p:cSld name="Slide 5">
+    <p:bg>
+      <p:bgPr>
+        <a:solidFill>
+          <a:srgbClr val="FFFFFF"/>
+        </a:solidFill>
+      </p:bgPr>
+    </p:bg>
+    <p:spTree>
+      <p:nvGrpSpPr>
+        <p:cNvPr id="1" name=""/>
+        <p:cNvGrpSpPr/>
+        <p:nvPr/>
+      </p:nvGrpSpPr>
+      <p:grpSpPr>
+        <a:xfrm>
+          <a:off x="0" y="0"/>
+          <a:ext cx="0" cy="0"/>
+          <a:chOff x="0" y="0"/>
+          <a:chExt cx="0" cy="0"/>
+        </a:xfrm>
+      </p:grpSpPr>
+      <p:sp>
+        <p:nvSpPr>
+          <p:cNvPr id="2" name="Shape 0"/>
+          <p:cNvSpPr/>
+          <p:nvPr/>
+        </p:nvSpPr>
+        <p:spPr>
+          <a:xfrm>
+            <a:off x="411480" y="402336"/>
+            <a:ext cx="82296" cy="329184"/>
+          </a:xfrm>
+          <a:prstGeom prst="rect">
+            <a:avLst/>
+          </a:prstGeom>
+          <a:solidFill>
+            <a:srgbClr val="B45309"/>
+          </a:solidFill>
+          <a:ln/>
+        </p:spPr>
+      </p:sp>
+      <p:sp>
+        <p:nvSpPr>
+          <p:cNvPr id="3" name="Text 1"/>
+          <p:cNvSpPr/>
+          <p:nvPr/>
+        </p:nvSpPr>
+        <p:spPr>
+          <a:xfrm>
+            <a:off x="566928" y="292608"/>
+            <a:ext cx="8138160" cy="548640"/>
+          </a:xfrm>
+          <a:prstGeom prst="rect">
+            <a:avLst/>
+          </a:prstGeom>
+          <a:noFill/>
+          <a:ln/>
+        </p:spPr>
+        <p:txBody>
+          <a:bodyPr wrap="square" rtlCol="0" anchor="ctr"/>
+          <a:lstStyle/>
+          <a:p>
+            <a:pPr indent="0" marL="0">
+              <a:buNone/>
+            </a:pPr>
+            <a:r>
+              <a:rPr lang="en-US" sz="2100" b="1" dirty="0">
+                <a:solidFill>
+                  <a:srgbClr val="1C1917"/>
+                </a:solidFill>
+                <a:latin typeface="Arial" pitchFamily="34" charset="0"/>
+                <a:ea typeface="Arial" pitchFamily="34" charset="-122"/>
+                <a:cs typeface="Arial" pitchFamily="34" charset="-120"/>
+              </a:rPr>
+              <a:t>Inputs</a:t>
+            </a:r>
+            <a:endParaRPr lang="en-US" sz="2100" dirty="0"/>
+          </a:p>
+        </p:txBody>
+      </p:sp>
+      <p:sp>
+        <p:nvSpPr>
+          <p:cNvPr id="4" name="Shape 2"/>
+          <p:cNvSpPr/>
+          <p:nvPr/>
+        </p:nvSpPr>
+        <p:spPr>
+          <a:xfrm>
+            <a:off x="411480" y="960120"/>
+            <a:ext cx="8321040" cy="0"/>
+          </a:xfrm>
+          <a:prstGeom prst="line">
+            <a:avLst/>
+          </a:prstGeom>
+          <a:noFill/>
+          <a:ln w="12700">
+            <a:solidFill>
+              <a:srgbClr val="E7E5E4"/>
+            </a:solidFill>
+            <a:prstDash val="solid"/>
+          </a:ln>
+        </p:spPr>
+      </p:sp>
+      <p:sp>
+        <p:nvSpPr>
+          <p:cNvPr id="5" name="Text 3"/>
+          <p:cNvSpPr/>
+          <p:nvPr/>
+        </p:nvSpPr>
+        <p:spPr>
+          <a:xfrm>
+            <a:off x="411480" y="4864608"/>
+            <a:ext cx="8321040" cy="237744"/>
+          </a:xfrm>
+          <a:prstGeom prst="rect">
+            <a:avLst/>
+          </a:prstGeom>
+          <a:noFill/>
+          <a:ln/>
+        </p:spPr>
+        <p:txBody>
+          <a:bodyPr wrap="square" rtlCol="0" anchor="ctr"/>
+          <a:lstStyle/>
+          <a:p>
+            <a:pPr indent="0" marL="0">
+              <a:buNone/>
+            </a:pPr>
+            <a:r>
+              <a:rPr lang="en-US" sz="750" dirty="0">
+                <a:solidFill>
+                  <a:srgbClr val="AAAAAA"/>
+                </a:solidFill>
+                <a:latin typeface="Arial" pitchFamily="34" charset="0"/>
+                <a:ea typeface="Arial" pitchFamily="34" charset="-122"/>
+                <a:cs typeface="Arial" pitchFamily="34" charset="-120"/>
+              </a:rPr>
+              <a:t>Lesson Forge Pro (owner) — This content is educational material only and does not constitute financial, investment, or trading advice.</a:t>
+            </a:r>
+            <a:endParaRPr lang="en-US" sz="750" dirty="0"/>
+          </a:p>
+        </p:txBody>
+      </p:sp>
+      <p:sp>
+        <p:nvSpPr>
+          <p:cNvPr id="6" name="Text 4"/>
+          <p:cNvSpPr/>
+          <p:nvPr/>
+        </p:nvSpPr>
+        <p:spPr>
+          <a:xfrm>
+            <a:off x="731520" y="1188720"/>
+            <a:ext cx="7680960" cy="2743200"/>
+          </a:xfrm>
+          <a:prstGeom prst="rect">
+            <a:avLst/>
+          </a:prstGeom>
+          <a:noFill/>
+          <a:ln/>
+        </p:spPr>
+        <p:txBody>
+          <a:bodyPr wrap="square" rtlCol="0" anchor="t"/>
+          <a:lstStyle/>
+          <a:p>
+            <a:pPr marL="152400" indent="-152400">
+              <a:spcAft>
+                <a:spcPts val="800"/>
+              </a:spcAft>
+              <a:buSzPct val="100000"/>
+              <a:buChar char="•"/>
+            </a:pPr>
+            <a:r>
+              <a:rPr lang="en-US" sz="1500" dirty="0">
+                <a:solidFill>
+                  <a:srgbClr val="1C1917"/>
+                </a:solidFill>
+                <a:latin typeface="Arial" pitchFamily="34" charset="0"/>
+                <a:ea typeface="Arial" pitchFamily="34" charset="-122"/>
+                <a:cs typeface="Arial" pitchFamily="34" charset="-120"/>
+              </a:rPr>
+              <a:t>Document base-case assumptions: the single most-likely value per driver.</a:t>
+            </a:r>
+            <a:endParaRPr lang="en-US" sz="1500" dirty="0"/>
+          </a:p>
+          <a:p>
+            <a:pPr marL="152400" indent="-152400">
+              <a:spcAft>
+                <a:spcPts val="800"/>
+              </a:spcAft>
+              <a:buSzPct val="100000"/>
+              <a:buChar char="•"/>
+            </a:pPr>
+            <a:r>
+              <a:rPr lang="en-US" sz="1500" dirty="0">
+                <a:solidFill>
+                  <a:srgbClr val="1C1917"/>
+                </a:solidFill>
+                <a:latin typeface="Arial" pitchFamily="34" charset="0"/>
+                <a:ea typeface="Arial" pitchFamily="34" charset="-122"/>
+                <a:cs typeface="Arial" pitchFamily="34" charset="-120"/>
+              </a:rPr>
+              <a:t>Define driver ranges using historical data, benchmarks, or expert judgment.</a:t>
+            </a:r>
+            <a:endParaRPr lang="en-US" sz="1500" dirty="0"/>
+          </a:p>
+          <a:p>
+            <a:pPr marL="152400" indent="-152400">
+              <a:spcAft>
+                <a:spcPts val="800"/>
+              </a:spcAft>
+              <a:buSzPct val="100000"/>
+              <a:buChar char="•"/>
+            </a:pPr>
+            <a:r>
+              <a:rPr lang="en-US" sz="1500" dirty="0">
+                <a:solidFill>
+                  <a:srgbClr val="1C1917"/>
+                </a:solidFill>
+                <a:latin typeface="Arial" pitchFamily="34" charset="0"/>
+                <a:ea typeface="Arial" pitchFamily="34" charset="-122"/>
+                <a:cs typeface="Arial" pitchFamily="34" charset="-120"/>
+              </a:rPr>
+              <a:t>Use a working model with explicit, auditable formulas linking inputs to outputs.</a:t>
+            </a:r>
+            <a:endParaRPr lang="en-US" sz="1500" dirty="0"/>
+          </a:p>
+          <a:p>
+            <a:pPr marL="152400" indent="-152400">
+              <a:spcAft>
+                <a:spcPts val="800"/>
+              </a:spcAft>
+              <a:buSzPct val="100000"/>
+              <a:buChar char="•"/>
+            </a:pPr>
+            <a:r>
+              <a:rPr lang="en-US" sz="1500" dirty="0">
+                <a:solidFill>
+                  <a:srgbClr val="1C1917"/>
+                </a:solidFill>
+                <a:latin typeface="Arial" pitchFamily="34" charset="0"/>
+                <a:ea typeface="Arial" pitchFamily="34" charset="-122"/>
+                <a:cs typeface="Arial" pitchFamily="34" charset="-120"/>
+              </a:rPr>
+              <a:t>Select decision-relevant output metrics: NPV, EBITDA, or free cash flow.</a:t>
+            </a:r>
+            <a:endParaRPr lang="en-US" sz="1500" dirty="0"/>
+          </a:p>
+        </p:txBody>
+      </p:sp>
+      <p:sp>
+        <p:nvSpPr>
+          <p:cNvPr id="7" name="Shape 5"/>
+          <p:cNvSpPr/>
+          <p:nvPr/>
+        </p:nvSpPr>
+        <p:spPr>
+          <a:xfrm>
+            <a:off x="731520" y="4041648"/>
+            <a:ext cx="7680960" cy="566928"/>
+          </a:xfrm>
+          <a:prstGeom prst="roundRect">
+            <a:avLst>
+              <a:gd name="adj" fmla="val 12903"/>
+            </a:avLst>
+          </a:prstGeom>
+          <a:solidFill>
+            <a:srgbClr val="B45309">
+              <a:alpha val="12000"/>
+            </a:srgbClr>
+          </a:solidFill>
+          <a:ln w="12700">
+            <a:solidFill>
+              <a:srgbClr val="B45309"/>
+            </a:solidFill>
+            <a:prstDash val="solid"/>
+          </a:ln>
+        </p:spPr>
+      </p:sp>
+      <p:sp>
+        <p:nvSpPr>
+          <p:cNvPr id="8" name="Text 6"/>
+          <p:cNvSpPr/>
+          <p:nvPr/>
+        </p:nvSpPr>
+        <p:spPr>
+          <a:xfrm>
+            <a:off x="868680" y="4087368"/>
+            <a:ext cx="7406640" cy="475488"/>
+          </a:xfrm>
+          <a:prstGeom prst="rect">
+            <a:avLst/>
+          </a:prstGeom>
+          <a:noFill/>
+          <a:ln/>
+        </p:spPr>
+        <p:txBody>
+          <a:bodyPr wrap="square" rtlCol="0" anchor="ctr"/>
+          <a:lstStyle/>
+          <a:p>
+            <a:pPr indent="0" marL="0">
+              <a:buNone/>
+            </a:pPr>
+            <a:r>
+              <a:rPr lang="en-US" sz="1100" b="1" dirty="0">
+                <a:solidFill>
+                  <a:srgbClr val="B45309"/>
+                </a:solidFill>
+                <a:latin typeface="Arial" pitchFamily="34" charset="0"/>
+                <a:ea typeface="Arial" pitchFamily="34" charset="-122"/>
+                <a:cs typeface="Arial" pitchFamily="34" charset="-120"/>
+              </a:rPr>
+              <a:t>Takeaway  </a:t>
+            </a:r>
+            <a:pPr indent="0" marL="0">
+              <a:buNone/>
+            </a:pPr>
+            <a:r>
+              <a:rPr lang="en-US" sz="1150" dirty="0">
+                <a:solidFill>
+                  <a:srgbClr val="1C1917"/>
+                </a:solidFill>
+                <a:latin typeface="Arial" pitchFamily="34" charset="0"/>
+                <a:ea typeface="Arial" pitchFamily="34" charset="-122"/>
+                <a:cs typeface="Arial" pitchFamily="34" charset="-120"/>
+              </a:rPr>
+              <a:t>Gathering and documenting all four input categories before modeling prevents downstream errors.</a:t>
+            </a:r>
+            <a:endParaRPr lang="en-US" sz="1100" dirty="0"/>
+          </a:p>
+        </p:txBody>
+      </p:sp>
+    </p:spTree>
+  </p:cSld>
+  <p:clrMapOvr>
+    <a:masterClrMapping/>
+  </p:clrMapOvr>
+</p:sld>
+</file>
+
+<file path=ppt/slides/slide6.xml><?xml version="1.0" encoding="utf-8"?>
+<p:sld xmlns:a="http://schemas.openxmlformats.org/drawingml/2006/main" xmlns:r="http://schemas.openxmlformats.org/officeDocument/2006/relationships" xmlns:p="http://schemas.openxmlformats.org/presentationml/2006/main">
+  <p:cSld name="Slide 6">
+    <p:bg>
+      <p:bgPr>
+        <a:solidFill>
+          <a:srgbClr val="FFFFFF"/>
+        </a:solidFill>
+      </p:bgPr>
+    </p:bg>
+    <p:spTree>
+      <p:nvGrpSpPr>
+        <p:cNvPr id="1" name=""/>
+        <p:cNvGrpSpPr/>
+        <p:nvPr/>
+      </p:nvGrpSpPr>
+      <p:grpSpPr>
+        <a:xfrm>
+          <a:off x="0" y="0"/>
+          <a:ext cx="0" cy="0"/>
+          <a:chOff x="0" y="0"/>
+          <a:chExt cx="0" cy="0"/>
+        </a:xfrm>
+      </p:grpSpPr>
+      <p:sp>
+        <p:nvSpPr>
+          <p:cNvPr id="2" name="Shape 0"/>
+          <p:cNvSpPr/>
+          <p:nvPr/>
+        </p:nvSpPr>
+        <p:spPr>
+          <a:xfrm>
+            <a:off x="411480" y="384048"/>
+            <a:ext cx="82296" cy="310896"/>
+          </a:xfrm>
+          <a:prstGeom prst="rect">
+            <a:avLst/>
+          </a:prstGeom>
+          <a:solidFill>
+            <a:srgbClr val="B45309"/>
+          </a:solidFill>
+          <a:ln/>
+        </p:spPr>
+      </p:sp>
+      <p:sp>
+        <p:nvSpPr>
+          <p:cNvPr id="3" name="Text 1"/>
+          <p:cNvSpPr/>
+          <p:nvPr/>
+        </p:nvSpPr>
+        <p:spPr>
+          <a:xfrm>
+            <a:off x="566928" y="292608"/>
+            <a:ext cx="8138160" cy="502920"/>
+          </a:xfrm>
+          <a:prstGeom prst="rect">
+            <a:avLst/>
+          </a:prstGeom>
+          <a:noFill/>
+          <a:ln/>
+        </p:spPr>
+        <p:txBody>
+          <a:bodyPr wrap="square" rtlCol="0" anchor="ctr"/>
+          <a:lstStyle/>
+          <a:p>
+            <a:pPr indent="0" marL="0">
+              <a:buNone/>
+            </a:pPr>
+            <a:r>
+              <a:rPr lang="en-US" sz="2000" b="1" dirty="0">
+                <a:solidFill>
+                  <a:srgbClr val="1C1917"/>
+                </a:solidFill>
+                <a:latin typeface="Arial" pitchFamily="34" charset="0"/>
+                <a:ea typeface="Arial" pitchFamily="34" charset="-122"/>
+                <a:cs typeface="Arial" pitchFamily="34" charset="-120"/>
+              </a:rPr>
+              <a:t>Standard Scenario &amp; Sensitivity Procedure</a:t>
+            </a:r>
+            <a:endParaRPr lang="en-US" sz="2000" dirty="0"/>
           </a:p>
         </p:txBody>
       </p:sp>
@@ -3353,8 +6748,8 @@
         </p:nvSpPr>
         <p:spPr>
           <a:xfrm>
-            <a:off x="457200" y="4709160"/>
-            <a:ext cx="8229600" cy="320040"/>
+            <a:off x="566928" y="4681728"/>
+            <a:ext cx="8138160" cy="320040"/>
           </a:xfrm>
           <a:prstGeom prst="rect">
             <a:avLst/>
@@ -3370,14 +6765,2076 @@
               <a:buNone/>
             </a:pPr>
             <a:r>
-              <a:rPr lang="en-US" sz="800" dirty="0">
+              <a:rPr lang="en-US" sz="1000" i="1" dirty="0">
+                <a:solidFill>
+                  <a:srgbClr val="78716C"/>
+                </a:solidFill>
+                <a:latin typeface="Arial" pitchFamily="34" charset="0"/>
+                <a:ea typeface="Arial" pitchFamily="34" charset="-122"/>
+                <a:cs typeface="Arial" pitchFamily="34" charset="-120"/>
+              </a:rPr>
+              <a:t>Six repeatable steps from assumption gathering to actionable scenario output</a:t>
+            </a:r>
+            <a:endParaRPr lang="en-US" sz="1000" dirty="0"/>
+          </a:p>
+        </p:txBody>
+      </p:sp>
+      <p:sp>
+        <p:nvSpPr>
+          <p:cNvPr id="5" name="Text 3"/>
+          <p:cNvSpPr/>
+          <p:nvPr/>
+        </p:nvSpPr>
+        <p:spPr>
+          <a:xfrm>
+            <a:off x="411480" y="4919472"/>
+            <a:ext cx="8321040" cy="219456"/>
+          </a:xfrm>
+          <a:prstGeom prst="rect">
+            <a:avLst/>
+          </a:prstGeom>
+          <a:noFill/>
+          <a:ln/>
+        </p:spPr>
+        <p:txBody>
+          <a:bodyPr wrap="square" rtlCol="0" anchor="ctr"/>
+          <a:lstStyle/>
+          <a:p>
+            <a:pPr indent="0" marL="0">
+              <a:buNone/>
+            </a:pPr>
+            <a:r>
+              <a:rPr lang="en-US" sz="750" dirty="0">
                 <a:solidFill>
                   <a:srgbClr val="AAAAAA"/>
                 </a:solidFill>
+                <a:latin typeface="Arial" pitchFamily="34" charset="0"/>
+                <a:ea typeface="Arial" pitchFamily="34" charset="-122"/>
+                <a:cs typeface="Arial" pitchFamily="34" charset="-120"/>
               </a:rPr>
               <a:t>Lesson Forge Pro (owner) — This content is educational material only and does not constitute financial, investment, or trading advice.</a:t>
             </a:r>
-            <a:endParaRPr lang="en-US" sz="800" dirty="0"/>
+            <a:endParaRPr lang="en-US" sz="750" dirty="0"/>
+          </a:p>
+        </p:txBody>
+      </p:sp>
+      <p:sp>
+        <p:nvSpPr>
+          <p:cNvPr id="6" name="Shape 4"/>
+          <p:cNvSpPr/>
+          <p:nvPr/>
+        </p:nvSpPr>
+        <p:spPr>
+          <a:xfrm>
+            <a:off x="411480" y="1463040"/>
+            <a:ext cx="2011680" cy="960120"/>
+          </a:xfrm>
+          <a:prstGeom prst="roundRect">
+            <a:avLst>
+              <a:gd name="adj" fmla="val 7619"/>
+            </a:avLst>
+          </a:prstGeom>
+          <a:solidFill>
+            <a:srgbClr val="F5F5F4"/>
+          </a:solidFill>
+          <a:ln w="15240">
+            <a:solidFill>
+              <a:srgbClr val="B45309"/>
+            </a:solidFill>
+            <a:prstDash val="solid"/>
+          </a:ln>
+        </p:spPr>
+      </p:sp>
+      <p:sp>
+        <p:nvSpPr>
+          <p:cNvPr id="7" name="Text 5"/>
+          <p:cNvSpPr/>
+          <p:nvPr/>
+        </p:nvSpPr>
+        <p:spPr>
+          <a:xfrm>
+            <a:off x="484632" y="1536192"/>
+            <a:ext cx="310896" cy="274320"/>
+          </a:xfrm>
+          <a:prstGeom prst="rect">
+            <a:avLst/>
+          </a:prstGeom>
+          <a:solidFill>
+            <a:srgbClr val="B45309"/>
+          </a:solidFill>
+          <a:ln/>
+        </p:spPr>
+        <p:txBody>
+          <a:bodyPr wrap="square" rtlCol="0" anchor="ctr"/>
+          <a:lstStyle/>
+          <a:p>
+            <a:pPr algn="ctr" indent="0" marL="0">
+              <a:buNone/>
+            </a:pPr>
+            <a:r>
+              <a:rPr lang="en-US" sz="1000" b="1" dirty="0">
+                <a:solidFill>
+                  <a:srgbClr val="FFFFFF"/>
+                </a:solidFill>
+                <a:latin typeface="Arial" pitchFamily="34" charset="0"/>
+                <a:ea typeface="Arial" pitchFamily="34" charset="-122"/>
+                <a:cs typeface="Arial" pitchFamily="34" charset="-120"/>
+              </a:rPr>
+              <a:t>1</a:t>
+            </a:r>
+            <a:endParaRPr lang="en-US" sz="1000" dirty="0"/>
+          </a:p>
+        </p:txBody>
+      </p:sp>
+      <p:sp>
+        <p:nvSpPr>
+          <p:cNvPr id="8" name="Text 6"/>
+          <p:cNvSpPr/>
+          <p:nvPr/>
+        </p:nvSpPr>
+        <p:spPr>
+          <a:xfrm>
+            <a:off x="411480" y="1737360"/>
+            <a:ext cx="2011680" cy="384048"/>
+          </a:xfrm>
+          <a:prstGeom prst="rect">
+            <a:avLst/>
+          </a:prstGeom>
+          <a:noFill/>
+          <a:ln/>
+        </p:spPr>
+        <p:txBody>
+          <a:bodyPr wrap="square" rtlCol="0" anchor="ctr"/>
+          <a:lstStyle/>
+          <a:p>
+            <a:pPr algn="ctr" indent="0" marL="0">
+              <a:buNone/>
+            </a:pPr>
+            <a:r>
+              <a:rPr lang="en-US" sz="1200" b="1" dirty="0">
+                <a:solidFill>
+                  <a:srgbClr val="1C1917"/>
+                </a:solidFill>
+                <a:latin typeface="Arial" pitchFamily="34" charset="0"/>
+                <a:ea typeface="Arial" pitchFamily="34" charset="-122"/>
+                <a:cs typeface="Arial" pitchFamily="34" charset="-120"/>
+              </a:rPr>
+              <a:t>Base Case</a:t>
+            </a:r>
+            <a:endParaRPr lang="en-US" sz="1200" dirty="0"/>
+          </a:p>
+        </p:txBody>
+      </p:sp>
+      <p:sp>
+        <p:nvSpPr>
+          <p:cNvPr id="9" name="Text 7"/>
+          <p:cNvSpPr/>
+          <p:nvPr/>
+        </p:nvSpPr>
+        <p:spPr>
+          <a:xfrm>
+            <a:off x="411480" y="2084832"/>
+            <a:ext cx="2011680" cy="310896"/>
+          </a:xfrm>
+          <a:prstGeom prst="rect">
+            <a:avLst/>
+          </a:prstGeom>
+          <a:noFill/>
+          <a:ln/>
+        </p:spPr>
+        <p:txBody>
+          <a:bodyPr wrap="square" rtlCol="0" anchor="ctr"/>
+          <a:lstStyle/>
+          <a:p>
+            <a:pPr algn="ctr" indent="0" marL="0">
+              <a:buNone/>
+            </a:pPr>
+            <a:r>
+              <a:rPr lang="en-US" sz="900" dirty="0">
+                <a:solidFill>
+                  <a:srgbClr val="78716C"/>
+                </a:solidFill>
+                <a:latin typeface="Arial" pitchFamily="34" charset="0"/>
+                <a:ea typeface="Arial" pitchFamily="34" charset="-122"/>
+                <a:cs typeface="Arial" pitchFamily="34" charset="-120"/>
+              </a:rPr>
+              <a:t>Record anchor output with all base assumptions</a:t>
+            </a:r>
+            <a:endParaRPr lang="en-US" sz="900" dirty="0"/>
+          </a:p>
+        </p:txBody>
+      </p:sp>
+      <p:sp>
+        <p:nvSpPr>
+          <p:cNvPr id="10" name="Shape 8"/>
+          <p:cNvSpPr/>
+          <p:nvPr/>
+        </p:nvSpPr>
+        <p:spPr>
+          <a:xfrm>
+            <a:off x="2478024" y="1842516"/>
+            <a:ext cx="301752" cy="201168"/>
+          </a:xfrm>
+          <a:prstGeom prst="rightArrow">
+            <a:avLst/>
+          </a:prstGeom>
+          <a:solidFill>
+            <a:srgbClr val="B45309"/>
+          </a:solidFill>
+          <a:ln/>
+        </p:spPr>
+      </p:sp>
+      <p:sp>
+        <p:nvSpPr>
+          <p:cNvPr id="11" name="Shape 9"/>
+          <p:cNvSpPr/>
+          <p:nvPr/>
+        </p:nvSpPr>
+        <p:spPr>
+          <a:xfrm>
+            <a:off x="2834640" y="1463040"/>
+            <a:ext cx="2011680" cy="960120"/>
+          </a:xfrm>
+          <a:prstGeom prst="roundRect">
+            <a:avLst>
+              <a:gd name="adj" fmla="val 7619"/>
+            </a:avLst>
+          </a:prstGeom>
+          <a:solidFill>
+            <a:srgbClr val="F5F5F4"/>
+          </a:solidFill>
+          <a:ln w="15240">
+            <a:solidFill>
+              <a:srgbClr val="B45309"/>
+            </a:solidFill>
+            <a:prstDash val="solid"/>
+          </a:ln>
+        </p:spPr>
+      </p:sp>
+      <p:sp>
+        <p:nvSpPr>
+          <p:cNvPr id="12" name="Text 10"/>
+          <p:cNvSpPr/>
+          <p:nvPr/>
+        </p:nvSpPr>
+        <p:spPr>
+          <a:xfrm>
+            <a:off x="2907792" y="1536192"/>
+            <a:ext cx="310896" cy="274320"/>
+          </a:xfrm>
+          <a:prstGeom prst="rect">
+            <a:avLst/>
+          </a:prstGeom>
+          <a:solidFill>
+            <a:srgbClr val="B45309"/>
+          </a:solidFill>
+          <a:ln/>
+        </p:spPr>
+        <p:txBody>
+          <a:bodyPr wrap="square" rtlCol="0" anchor="ctr"/>
+          <a:lstStyle/>
+          <a:p>
+            <a:pPr algn="ctr" indent="0" marL="0">
+              <a:buNone/>
+            </a:pPr>
+            <a:r>
+              <a:rPr lang="en-US" sz="1000" b="1" dirty="0">
+                <a:solidFill>
+                  <a:srgbClr val="FFFFFF"/>
+                </a:solidFill>
+                <a:latin typeface="Arial" pitchFamily="34" charset="0"/>
+                <a:ea typeface="Arial" pitchFamily="34" charset="-122"/>
+                <a:cs typeface="Arial" pitchFamily="34" charset="-120"/>
+              </a:rPr>
+              <a:t>2</a:t>
+            </a:r>
+            <a:endParaRPr lang="en-US" sz="1000" dirty="0"/>
+          </a:p>
+        </p:txBody>
+      </p:sp>
+      <p:sp>
+        <p:nvSpPr>
+          <p:cNvPr id="13" name="Text 11"/>
+          <p:cNvSpPr/>
+          <p:nvPr/>
+        </p:nvSpPr>
+        <p:spPr>
+          <a:xfrm>
+            <a:off x="2834640" y="1737360"/>
+            <a:ext cx="2011680" cy="384048"/>
+          </a:xfrm>
+          <a:prstGeom prst="rect">
+            <a:avLst/>
+          </a:prstGeom>
+          <a:noFill/>
+          <a:ln/>
+        </p:spPr>
+        <p:txBody>
+          <a:bodyPr wrap="square" rtlCol="0" anchor="ctr"/>
+          <a:lstStyle/>
+          <a:p>
+            <a:pPr algn="ctr" indent="0" marL="0">
+              <a:buNone/>
+            </a:pPr>
+            <a:r>
+              <a:rPr lang="en-US" sz="1200" b="1" dirty="0">
+                <a:solidFill>
+                  <a:srgbClr val="1C1917"/>
+                </a:solidFill>
+                <a:latin typeface="Arial" pitchFamily="34" charset="0"/>
+                <a:ea typeface="Arial" pitchFamily="34" charset="-122"/>
+                <a:cs typeface="Arial" pitchFamily="34" charset="-120"/>
+              </a:rPr>
+              <a:t>Identify Drivers</a:t>
+            </a:r>
+            <a:endParaRPr lang="en-US" sz="1200" dirty="0"/>
+          </a:p>
+        </p:txBody>
+      </p:sp>
+      <p:sp>
+        <p:nvSpPr>
+          <p:cNvPr id="14" name="Text 12"/>
+          <p:cNvSpPr/>
+          <p:nvPr/>
+        </p:nvSpPr>
+        <p:spPr>
+          <a:xfrm>
+            <a:off x="2834640" y="2084832"/>
+            <a:ext cx="2011680" cy="310896"/>
+          </a:xfrm>
+          <a:prstGeom prst="rect">
+            <a:avLst/>
+          </a:prstGeom>
+          <a:noFill/>
+          <a:ln/>
+        </p:spPr>
+        <p:txBody>
+          <a:bodyPr wrap="square" rtlCol="0" anchor="ctr"/>
+          <a:lstStyle/>
+          <a:p>
+            <a:pPr algn="ctr" indent="0" marL="0">
+              <a:buNone/>
+            </a:pPr>
+            <a:r>
+              <a:rPr lang="en-US" sz="900" dirty="0">
+                <a:solidFill>
+                  <a:srgbClr val="78716C"/>
+                </a:solidFill>
+                <a:latin typeface="Arial" pitchFamily="34" charset="0"/>
+                <a:ea typeface="Arial" pitchFamily="34" charset="-122"/>
+                <a:cs typeface="Arial" pitchFamily="34" charset="-120"/>
+              </a:rPr>
+              <a:t>List and rank all input assumptions by importance</a:t>
+            </a:r>
+            <a:endParaRPr lang="en-US" sz="900" dirty="0"/>
+          </a:p>
+        </p:txBody>
+      </p:sp>
+      <p:sp>
+        <p:nvSpPr>
+          <p:cNvPr id="15" name="Shape 13"/>
+          <p:cNvSpPr/>
+          <p:nvPr/>
+        </p:nvSpPr>
+        <p:spPr>
+          <a:xfrm>
+            <a:off x="4901184" y="1842516"/>
+            <a:ext cx="301752" cy="201168"/>
+          </a:xfrm>
+          <a:prstGeom prst="rightArrow">
+            <a:avLst/>
+          </a:prstGeom>
+          <a:solidFill>
+            <a:srgbClr val="B45309"/>
+          </a:solidFill>
+          <a:ln/>
+        </p:spPr>
+      </p:sp>
+      <p:sp>
+        <p:nvSpPr>
+          <p:cNvPr id="16" name="Shape 14"/>
+          <p:cNvSpPr/>
+          <p:nvPr/>
+        </p:nvSpPr>
+        <p:spPr>
+          <a:xfrm>
+            <a:off x="5257800" y="1463040"/>
+            <a:ext cx="2011680" cy="960120"/>
+          </a:xfrm>
+          <a:prstGeom prst="roundRect">
+            <a:avLst>
+              <a:gd name="adj" fmla="val 7619"/>
+            </a:avLst>
+          </a:prstGeom>
+          <a:solidFill>
+            <a:srgbClr val="F5F5F4"/>
+          </a:solidFill>
+          <a:ln w="15240">
+            <a:solidFill>
+              <a:srgbClr val="B45309"/>
+            </a:solidFill>
+            <a:prstDash val="solid"/>
+          </a:ln>
+        </p:spPr>
+      </p:sp>
+      <p:sp>
+        <p:nvSpPr>
+          <p:cNvPr id="17" name="Text 15"/>
+          <p:cNvSpPr/>
+          <p:nvPr/>
+        </p:nvSpPr>
+        <p:spPr>
+          <a:xfrm>
+            <a:off x="5330952" y="1536192"/>
+            <a:ext cx="310896" cy="274320"/>
+          </a:xfrm>
+          <a:prstGeom prst="rect">
+            <a:avLst/>
+          </a:prstGeom>
+          <a:solidFill>
+            <a:srgbClr val="B45309"/>
+          </a:solidFill>
+          <a:ln/>
+        </p:spPr>
+        <p:txBody>
+          <a:bodyPr wrap="square" rtlCol="0" anchor="ctr"/>
+          <a:lstStyle/>
+          <a:p>
+            <a:pPr algn="ctr" indent="0" marL="0">
+              <a:buNone/>
+            </a:pPr>
+            <a:r>
+              <a:rPr lang="en-US" sz="1000" b="1" dirty="0">
+                <a:solidFill>
+                  <a:srgbClr val="FFFFFF"/>
+                </a:solidFill>
+                <a:latin typeface="Arial" pitchFamily="34" charset="0"/>
+                <a:ea typeface="Arial" pitchFamily="34" charset="-122"/>
+                <a:cs typeface="Arial" pitchFamily="34" charset="-120"/>
+              </a:rPr>
+              <a:t>3</a:t>
+            </a:r>
+            <a:endParaRPr lang="en-US" sz="1000" dirty="0"/>
+          </a:p>
+        </p:txBody>
+      </p:sp>
+      <p:sp>
+        <p:nvSpPr>
+          <p:cNvPr id="18" name="Text 16"/>
+          <p:cNvSpPr/>
+          <p:nvPr/>
+        </p:nvSpPr>
+        <p:spPr>
+          <a:xfrm>
+            <a:off x="5257800" y="1737360"/>
+            <a:ext cx="2011680" cy="384048"/>
+          </a:xfrm>
+          <a:prstGeom prst="rect">
+            <a:avLst/>
+          </a:prstGeom>
+          <a:noFill/>
+          <a:ln/>
+        </p:spPr>
+        <p:txBody>
+          <a:bodyPr wrap="square" rtlCol="0" anchor="ctr"/>
+          <a:lstStyle/>
+          <a:p>
+            <a:pPr algn="ctr" indent="0" marL="0">
+              <a:buNone/>
+            </a:pPr>
+            <a:r>
+              <a:rPr lang="en-US" sz="1200" b="1" dirty="0">
+                <a:solidFill>
+                  <a:srgbClr val="1C1917"/>
+                </a:solidFill>
+                <a:latin typeface="Arial" pitchFamily="34" charset="0"/>
+                <a:ea typeface="Arial" pitchFamily="34" charset="-122"/>
+                <a:cs typeface="Arial" pitchFamily="34" charset="-120"/>
+              </a:rPr>
+              <a:t>Define Scenarios</a:t>
+            </a:r>
+            <a:endParaRPr lang="en-US" sz="1200" dirty="0"/>
+          </a:p>
+        </p:txBody>
+      </p:sp>
+      <p:sp>
+        <p:nvSpPr>
+          <p:cNvPr id="19" name="Text 17"/>
+          <p:cNvSpPr/>
+          <p:nvPr/>
+        </p:nvSpPr>
+        <p:spPr>
+          <a:xfrm>
+            <a:off x="5257800" y="2084832"/>
+            <a:ext cx="2011680" cy="310896"/>
+          </a:xfrm>
+          <a:prstGeom prst="rect">
+            <a:avLst/>
+          </a:prstGeom>
+          <a:noFill/>
+          <a:ln/>
+        </p:spPr>
+        <p:txBody>
+          <a:bodyPr wrap="square" rtlCol="0" anchor="ctr"/>
+          <a:lstStyle/>
+          <a:p>
+            <a:pPr algn="ctr" indent="0" marL="0">
+              <a:buNone/>
+            </a:pPr>
+            <a:r>
+              <a:rPr lang="en-US" sz="900" dirty="0">
+                <a:solidFill>
+                  <a:srgbClr val="78716C"/>
+                </a:solidFill>
+                <a:latin typeface="Arial" pitchFamily="34" charset="0"/>
+                <a:ea typeface="Arial" pitchFamily="34" charset="-122"/>
+                <a:cs typeface="Arial" pitchFamily="34" charset="-120"/>
+              </a:rPr>
+              <a:t>Assign coherent input sets to Base, Up, Down</a:t>
+            </a:r>
+            <a:endParaRPr lang="en-US" sz="900" dirty="0"/>
+          </a:p>
+        </p:txBody>
+      </p:sp>
+      <p:sp>
+        <p:nvSpPr>
+          <p:cNvPr id="20" name="Shape 18"/>
+          <p:cNvSpPr/>
+          <p:nvPr/>
+        </p:nvSpPr>
+        <p:spPr>
+          <a:xfrm>
+            <a:off x="6163056" y="2496312"/>
+            <a:ext cx="201168" cy="548640"/>
+          </a:xfrm>
+          <a:prstGeom prst="downArrow">
+            <a:avLst/>
+          </a:prstGeom>
+          <a:solidFill>
+            <a:srgbClr val="B45309"/>
+          </a:solidFill>
+          <a:ln/>
+        </p:spPr>
+      </p:sp>
+      <p:sp>
+        <p:nvSpPr>
+          <p:cNvPr id="21" name="Shape 19"/>
+          <p:cNvSpPr/>
+          <p:nvPr/>
+        </p:nvSpPr>
+        <p:spPr>
+          <a:xfrm>
+            <a:off x="5257800" y="3108960"/>
+            <a:ext cx="2011680" cy="960120"/>
+          </a:xfrm>
+          <a:prstGeom prst="roundRect">
+            <a:avLst>
+              <a:gd name="adj" fmla="val 7619"/>
+            </a:avLst>
+          </a:prstGeom>
+          <a:solidFill>
+            <a:srgbClr val="F5F5F4"/>
+          </a:solidFill>
+          <a:ln w="15240">
+            <a:solidFill>
+              <a:srgbClr val="B45309"/>
+            </a:solidFill>
+            <a:prstDash val="solid"/>
+          </a:ln>
+        </p:spPr>
+      </p:sp>
+      <p:sp>
+        <p:nvSpPr>
+          <p:cNvPr id="22" name="Text 20"/>
+          <p:cNvSpPr/>
+          <p:nvPr/>
+        </p:nvSpPr>
+        <p:spPr>
+          <a:xfrm>
+            <a:off x="5330952" y="3182112"/>
+            <a:ext cx="310896" cy="274320"/>
+          </a:xfrm>
+          <a:prstGeom prst="rect">
+            <a:avLst/>
+          </a:prstGeom>
+          <a:solidFill>
+            <a:srgbClr val="B45309"/>
+          </a:solidFill>
+          <a:ln/>
+        </p:spPr>
+        <p:txBody>
+          <a:bodyPr wrap="square" rtlCol="0" anchor="ctr"/>
+          <a:lstStyle/>
+          <a:p>
+            <a:pPr algn="ctr" indent="0" marL="0">
+              <a:buNone/>
+            </a:pPr>
+            <a:r>
+              <a:rPr lang="en-US" sz="1000" b="1" dirty="0">
+                <a:solidFill>
+                  <a:srgbClr val="FFFFFF"/>
+                </a:solidFill>
+                <a:latin typeface="Arial" pitchFamily="34" charset="0"/>
+                <a:ea typeface="Arial" pitchFamily="34" charset="-122"/>
+                <a:cs typeface="Arial" pitchFamily="34" charset="-120"/>
+              </a:rPr>
+              <a:t>4</a:t>
+            </a:r>
+            <a:endParaRPr lang="en-US" sz="1000" dirty="0"/>
+          </a:p>
+        </p:txBody>
+      </p:sp>
+      <p:sp>
+        <p:nvSpPr>
+          <p:cNvPr id="23" name="Text 21"/>
+          <p:cNvSpPr/>
+          <p:nvPr/>
+        </p:nvSpPr>
+        <p:spPr>
+          <a:xfrm>
+            <a:off x="5257800" y="3383280"/>
+            <a:ext cx="2011680" cy="384048"/>
+          </a:xfrm>
+          <a:prstGeom prst="rect">
+            <a:avLst/>
+          </a:prstGeom>
+          <a:noFill/>
+          <a:ln/>
+        </p:spPr>
+        <p:txBody>
+          <a:bodyPr wrap="square" rtlCol="0" anchor="ctr"/>
+          <a:lstStyle/>
+          <a:p>
+            <a:pPr algn="ctr" indent="0" marL="0">
+              <a:buNone/>
+            </a:pPr>
+            <a:r>
+              <a:rPr lang="en-US" sz="1200" b="1" dirty="0">
+                <a:solidFill>
+                  <a:srgbClr val="1C1917"/>
+                </a:solidFill>
+                <a:latin typeface="Arial" pitchFamily="34" charset="0"/>
+                <a:ea typeface="Arial" pitchFamily="34" charset="-122"/>
+                <a:cs typeface="Arial" pitchFamily="34" charset="-120"/>
+              </a:rPr>
+              <a:t>One-Way Sensitivity</a:t>
+            </a:r>
+            <a:endParaRPr lang="en-US" sz="1200" dirty="0"/>
+          </a:p>
+        </p:txBody>
+      </p:sp>
+      <p:sp>
+        <p:nvSpPr>
+          <p:cNvPr id="24" name="Text 22"/>
+          <p:cNvSpPr/>
+          <p:nvPr/>
+        </p:nvSpPr>
+        <p:spPr>
+          <a:xfrm>
+            <a:off x="5257800" y="3730752"/>
+            <a:ext cx="2011680" cy="310896"/>
+          </a:xfrm>
+          <a:prstGeom prst="rect">
+            <a:avLst/>
+          </a:prstGeom>
+          <a:noFill/>
+          <a:ln/>
+        </p:spPr>
+        <p:txBody>
+          <a:bodyPr wrap="square" rtlCol="0" anchor="ctr"/>
+          <a:lstStyle/>
+          <a:p>
+            <a:pPr algn="ctr" indent="0" marL="0">
+              <a:buNone/>
+            </a:pPr>
+            <a:r>
+              <a:rPr lang="en-US" sz="900" dirty="0">
+                <a:solidFill>
+                  <a:srgbClr val="78716C"/>
+                </a:solidFill>
+                <a:latin typeface="Arial" pitchFamily="34" charset="0"/>
+                <a:ea typeface="Arial" pitchFamily="34" charset="-122"/>
+                <a:cs typeface="Arial" pitchFamily="34" charset="-120"/>
+              </a:rPr>
+              <a:t>Move one driver at a time, hold others constant</a:t>
+            </a:r>
+            <a:endParaRPr lang="en-US" sz="900" dirty="0"/>
+          </a:p>
+        </p:txBody>
+      </p:sp>
+      <p:sp>
+        <p:nvSpPr>
+          <p:cNvPr id="25" name="Shape 23"/>
+          <p:cNvSpPr/>
+          <p:nvPr/>
+        </p:nvSpPr>
+        <p:spPr>
+          <a:xfrm>
+            <a:off x="4901184" y="3488436"/>
+            <a:ext cx="301752" cy="201168"/>
+          </a:xfrm>
+          <a:prstGeom prst="leftArrow">
+            <a:avLst/>
+          </a:prstGeom>
+          <a:solidFill>
+            <a:srgbClr val="B45309"/>
+          </a:solidFill>
+          <a:ln/>
+        </p:spPr>
+      </p:sp>
+      <p:sp>
+        <p:nvSpPr>
+          <p:cNvPr id="26" name="Shape 24"/>
+          <p:cNvSpPr/>
+          <p:nvPr/>
+        </p:nvSpPr>
+        <p:spPr>
+          <a:xfrm>
+            <a:off x="2834640" y="3108960"/>
+            <a:ext cx="2011680" cy="960120"/>
+          </a:xfrm>
+          <a:prstGeom prst="roundRect">
+            <a:avLst>
+              <a:gd name="adj" fmla="val 7619"/>
+            </a:avLst>
+          </a:prstGeom>
+          <a:solidFill>
+            <a:srgbClr val="F5F5F4"/>
+          </a:solidFill>
+          <a:ln w="15240">
+            <a:solidFill>
+              <a:srgbClr val="B45309"/>
+            </a:solidFill>
+            <a:prstDash val="solid"/>
+          </a:ln>
+        </p:spPr>
+      </p:sp>
+      <p:sp>
+        <p:nvSpPr>
+          <p:cNvPr id="27" name="Text 25"/>
+          <p:cNvSpPr/>
+          <p:nvPr/>
+        </p:nvSpPr>
+        <p:spPr>
+          <a:xfrm>
+            <a:off x="2907792" y="3182112"/>
+            <a:ext cx="310896" cy="274320"/>
+          </a:xfrm>
+          <a:prstGeom prst="rect">
+            <a:avLst/>
+          </a:prstGeom>
+          <a:solidFill>
+            <a:srgbClr val="B45309"/>
+          </a:solidFill>
+          <a:ln/>
+        </p:spPr>
+        <p:txBody>
+          <a:bodyPr wrap="square" rtlCol="0" anchor="ctr"/>
+          <a:lstStyle/>
+          <a:p>
+            <a:pPr algn="ctr" indent="0" marL="0">
+              <a:buNone/>
+            </a:pPr>
+            <a:r>
+              <a:rPr lang="en-US" sz="1000" b="1" dirty="0">
+                <a:solidFill>
+                  <a:srgbClr val="FFFFFF"/>
+                </a:solidFill>
+                <a:latin typeface="Arial" pitchFamily="34" charset="0"/>
+                <a:ea typeface="Arial" pitchFamily="34" charset="-122"/>
+                <a:cs typeface="Arial" pitchFamily="34" charset="-120"/>
+              </a:rPr>
+              <a:t>5</a:t>
+            </a:r>
+            <a:endParaRPr lang="en-US" sz="1000" dirty="0"/>
+          </a:p>
+        </p:txBody>
+      </p:sp>
+      <p:sp>
+        <p:nvSpPr>
+          <p:cNvPr id="28" name="Text 26"/>
+          <p:cNvSpPr/>
+          <p:nvPr/>
+        </p:nvSpPr>
+        <p:spPr>
+          <a:xfrm>
+            <a:off x="2834640" y="3383280"/>
+            <a:ext cx="2011680" cy="384048"/>
+          </a:xfrm>
+          <a:prstGeom prst="rect">
+            <a:avLst/>
+          </a:prstGeom>
+          <a:noFill/>
+          <a:ln/>
+        </p:spPr>
+        <p:txBody>
+          <a:bodyPr wrap="square" rtlCol="0" anchor="ctr"/>
+          <a:lstStyle/>
+          <a:p>
+            <a:pPr algn="ctr" indent="0" marL="0">
+              <a:buNone/>
+            </a:pPr>
+            <a:r>
+              <a:rPr lang="en-US" sz="1200" b="1" dirty="0">
+                <a:solidFill>
+                  <a:srgbClr val="1C1917"/>
+                </a:solidFill>
+                <a:latin typeface="Arial" pitchFamily="34" charset="0"/>
+                <a:ea typeface="Arial" pitchFamily="34" charset="-122"/>
+                <a:cs typeface="Arial" pitchFamily="34" charset="-120"/>
+              </a:rPr>
+              <a:t>Tornado Chart</a:t>
+            </a:r>
+            <a:endParaRPr lang="en-US" sz="1200" dirty="0"/>
+          </a:p>
+        </p:txBody>
+      </p:sp>
+      <p:sp>
+        <p:nvSpPr>
+          <p:cNvPr id="29" name="Text 27"/>
+          <p:cNvSpPr/>
+          <p:nvPr/>
+        </p:nvSpPr>
+        <p:spPr>
+          <a:xfrm>
+            <a:off x="2834640" y="3730752"/>
+            <a:ext cx="2011680" cy="310896"/>
+          </a:xfrm>
+          <a:prstGeom prst="rect">
+            <a:avLst/>
+          </a:prstGeom>
+          <a:noFill/>
+          <a:ln/>
+        </p:spPr>
+        <p:txBody>
+          <a:bodyPr wrap="square" rtlCol="0" anchor="ctr"/>
+          <a:lstStyle/>
+          <a:p>
+            <a:pPr algn="ctr" indent="0" marL="0">
+              <a:buNone/>
+            </a:pPr>
+            <a:r>
+              <a:rPr lang="en-US" sz="900" dirty="0">
+                <a:solidFill>
+                  <a:srgbClr val="78716C"/>
+                </a:solidFill>
+                <a:latin typeface="Arial" pitchFamily="34" charset="0"/>
+                <a:ea typeface="Arial" pitchFamily="34" charset="-122"/>
+                <a:cs typeface="Arial" pitchFamily="34" charset="-120"/>
+              </a:rPr>
+              <a:t>Rank drivers by largest to smallest output swing</a:t>
+            </a:r>
+            <a:endParaRPr lang="en-US" sz="900" dirty="0"/>
+          </a:p>
+        </p:txBody>
+      </p:sp>
+      <p:sp>
+        <p:nvSpPr>
+          <p:cNvPr id="30" name="Shape 28"/>
+          <p:cNvSpPr/>
+          <p:nvPr/>
+        </p:nvSpPr>
+        <p:spPr>
+          <a:xfrm>
+            <a:off x="2478024" y="3488436"/>
+            <a:ext cx="301752" cy="201168"/>
+          </a:xfrm>
+          <a:prstGeom prst="leftArrow">
+            <a:avLst/>
+          </a:prstGeom>
+          <a:solidFill>
+            <a:srgbClr val="B45309"/>
+          </a:solidFill>
+          <a:ln/>
+        </p:spPr>
+      </p:sp>
+      <p:sp>
+        <p:nvSpPr>
+          <p:cNvPr id="31" name="Shape 29"/>
+          <p:cNvSpPr/>
+          <p:nvPr/>
+        </p:nvSpPr>
+        <p:spPr>
+          <a:xfrm>
+            <a:off x="411480" y="3108960"/>
+            <a:ext cx="2011680" cy="960120"/>
+          </a:xfrm>
+          <a:prstGeom prst="roundRect">
+            <a:avLst>
+              <a:gd name="adj" fmla="val 7619"/>
+            </a:avLst>
+          </a:prstGeom>
+          <a:solidFill>
+            <a:srgbClr val="F5F5F4"/>
+          </a:solidFill>
+          <a:ln w="15240">
+            <a:solidFill>
+              <a:srgbClr val="B45309"/>
+            </a:solidFill>
+            <a:prstDash val="solid"/>
+          </a:ln>
+        </p:spPr>
+      </p:sp>
+      <p:sp>
+        <p:nvSpPr>
+          <p:cNvPr id="32" name="Text 30"/>
+          <p:cNvSpPr/>
+          <p:nvPr/>
+        </p:nvSpPr>
+        <p:spPr>
+          <a:xfrm>
+            <a:off x="484632" y="3182112"/>
+            <a:ext cx="310896" cy="274320"/>
+          </a:xfrm>
+          <a:prstGeom prst="rect">
+            <a:avLst/>
+          </a:prstGeom>
+          <a:solidFill>
+            <a:srgbClr val="B45309"/>
+          </a:solidFill>
+          <a:ln/>
+        </p:spPr>
+        <p:txBody>
+          <a:bodyPr wrap="square" rtlCol="0" anchor="ctr"/>
+          <a:lstStyle/>
+          <a:p>
+            <a:pPr algn="ctr" indent="0" marL="0">
+              <a:buNone/>
+            </a:pPr>
+            <a:r>
+              <a:rPr lang="en-US" sz="1000" b="1" dirty="0">
+                <a:solidFill>
+                  <a:srgbClr val="FFFFFF"/>
+                </a:solidFill>
+                <a:latin typeface="Arial" pitchFamily="34" charset="0"/>
+                <a:ea typeface="Arial" pitchFamily="34" charset="-122"/>
+                <a:cs typeface="Arial" pitchFamily="34" charset="-120"/>
+              </a:rPr>
+              <a:t>6</a:t>
+            </a:r>
+            <a:endParaRPr lang="en-US" sz="1000" dirty="0"/>
+          </a:p>
+        </p:txBody>
+      </p:sp>
+      <p:sp>
+        <p:nvSpPr>
+          <p:cNvPr id="33" name="Text 31"/>
+          <p:cNvSpPr/>
+          <p:nvPr/>
+        </p:nvSpPr>
+        <p:spPr>
+          <a:xfrm>
+            <a:off x="411480" y="3383280"/>
+            <a:ext cx="2011680" cy="384048"/>
+          </a:xfrm>
+          <a:prstGeom prst="rect">
+            <a:avLst/>
+          </a:prstGeom>
+          <a:noFill/>
+          <a:ln/>
+        </p:spPr>
+        <p:txBody>
+          <a:bodyPr wrap="square" rtlCol="0" anchor="ctr"/>
+          <a:lstStyle/>
+          <a:p>
+            <a:pPr algn="ctr" indent="0" marL="0">
+              <a:buNone/>
+            </a:pPr>
+            <a:r>
+              <a:rPr lang="en-US" sz="1200" b="1" dirty="0">
+                <a:solidFill>
+                  <a:srgbClr val="1C1917"/>
+                </a:solidFill>
+                <a:latin typeface="Arial" pitchFamily="34" charset="0"/>
+                <a:ea typeface="Arial" pitchFamily="34" charset="-122"/>
+                <a:cs typeface="Arial" pitchFamily="34" charset="-120"/>
+              </a:rPr>
+              <a:t>Full Scenario Run</a:t>
+            </a:r>
+            <a:endParaRPr lang="en-US" sz="1200" dirty="0"/>
+          </a:p>
+        </p:txBody>
+      </p:sp>
+      <p:sp>
+        <p:nvSpPr>
+          <p:cNvPr id="34" name="Text 32"/>
+          <p:cNvSpPr/>
+          <p:nvPr/>
+        </p:nvSpPr>
+        <p:spPr>
+          <a:xfrm>
+            <a:off x="411480" y="3730752"/>
+            <a:ext cx="2011680" cy="310896"/>
+          </a:xfrm>
+          <a:prstGeom prst="rect">
+            <a:avLst/>
+          </a:prstGeom>
+          <a:noFill/>
+          <a:ln/>
+        </p:spPr>
+        <p:txBody>
+          <a:bodyPr wrap="square" rtlCol="0" anchor="ctr"/>
+          <a:lstStyle/>
+          <a:p>
+            <a:pPr algn="ctr" indent="0" marL="0">
+              <a:buNone/>
+            </a:pPr>
+            <a:r>
+              <a:rPr lang="en-US" sz="900" dirty="0">
+                <a:solidFill>
+                  <a:srgbClr val="78716C"/>
+                </a:solidFill>
+                <a:latin typeface="Arial" pitchFamily="34" charset="0"/>
+                <a:ea typeface="Arial" pitchFamily="34" charset="-122"/>
+                <a:cs typeface="Arial" pitchFamily="34" charset="-120"/>
+              </a:rPr>
+              <a:t>Apply all scenario sets, compare output results</a:t>
+            </a:r>
+            <a:endParaRPr lang="en-US" sz="900" dirty="0"/>
+          </a:p>
+        </p:txBody>
+      </p:sp>
+    </p:spTree>
+  </p:cSld>
+  <p:clrMapOvr>
+    <a:masterClrMapping/>
+  </p:clrMapOvr>
+</p:sld>
+</file>
+
+<file path=ppt/slides/slide7.xml><?xml version="1.0" encoding="utf-8"?>
+<p:sld xmlns:a="http://schemas.openxmlformats.org/drawingml/2006/main" xmlns:r="http://schemas.openxmlformats.org/officeDocument/2006/relationships" xmlns:p="http://schemas.openxmlformats.org/presentationml/2006/main">
+  <p:cSld name="Slide 7">
+    <p:bg>
+      <p:bgPr>
+        <a:solidFill>
+          <a:srgbClr val="FFFFFF"/>
+        </a:solidFill>
+      </p:bgPr>
+    </p:bg>
+    <p:spTree>
+      <p:nvGrpSpPr>
+        <p:cNvPr id="1" name=""/>
+        <p:cNvGrpSpPr/>
+        <p:nvPr/>
+      </p:nvGrpSpPr>
+      <p:grpSpPr>
+        <a:xfrm>
+          <a:off x="0" y="0"/>
+          <a:ext cx="0" cy="0"/>
+          <a:chOff x="0" y="0"/>
+          <a:chExt cx="0" cy="0"/>
+        </a:xfrm>
+      </p:grpSpPr>
+      <p:sp>
+        <p:nvSpPr>
+          <p:cNvPr id="2" name="Shape 0"/>
+          <p:cNvSpPr/>
+          <p:nvPr/>
+        </p:nvSpPr>
+        <p:spPr>
+          <a:xfrm>
+            <a:off x="411480" y="402336"/>
+            <a:ext cx="82296" cy="329184"/>
+          </a:xfrm>
+          <a:prstGeom prst="rect">
+            <a:avLst/>
+          </a:prstGeom>
+          <a:solidFill>
+            <a:srgbClr val="B45309"/>
+          </a:solidFill>
+          <a:ln/>
+        </p:spPr>
+      </p:sp>
+      <p:sp>
+        <p:nvSpPr>
+          <p:cNvPr id="3" name="Text 1"/>
+          <p:cNvSpPr/>
+          <p:nvPr/>
+        </p:nvSpPr>
+        <p:spPr>
+          <a:xfrm>
+            <a:off x="566928" y="292608"/>
+            <a:ext cx="8138160" cy="548640"/>
+          </a:xfrm>
+          <a:prstGeom prst="rect">
+            <a:avLst/>
+          </a:prstGeom>
+          <a:noFill/>
+          <a:ln/>
+        </p:spPr>
+        <p:txBody>
+          <a:bodyPr wrap="square" rtlCol="0" anchor="ctr"/>
+          <a:lstStyle/>
+          <a:p>
+            <a:pPr indent="0" marL="0">
+              <a:buNone/>
+            </a:pPr>
+            <a:r>
+              <a:rPr lang="en-US" sz="2100" b="1" dirty="0">
+                <a:solidFill>
+                  <a:srgbClr val="1C1917"/>
+                </a:solidFill>
+                <a:latin typeface="Arial" pitchFamily="34" charset="0"/>
+                <a:ea typeface="Arial" pitchFamily="34" charset="-122"/>
+                <a:cs typeface="Arial" pitchFamily="34" charset="-120"/>
+              </a:rPr>
+              <a:t>The Step-by-Step Procedure</a:t>
+            </a:r>
+            <a:endParaRPr lang="en-US" sz="2100" dirty="0"/>
+          </a:p>
+        </p:txBody>
+      </p:sp>
+      <p:sp>
+        <p:nvSpPr>
+          <p:cNvPr id="4" name="Shape 2"/>
+          <p:cNvSpPr/>
+          <p:nvPr/>
+        </p:nvSpPr>
+        <p:spPr>
+          <a:xfrm>
+            <a:off x="411480" y="960120"/>
+            <a:ext cx="8321040" cy="0"/>
+          </a:xfrm>
+          <a:prstGeom prst="line">
+            <a:avLst/>
+          </a:prstGeom>
+          <a:noFill/>
+          <a:ln w="12700">
+            <a:solidFill>
+              <a:srgbClr val="E7E5E4"/>
+            </a:solidFill>
+            <a:prstDash val="solid"/>
+          </a:ln>
+        </p:spPr>
+      </p:sp>
+      <p:sp>
+        <p:nvSpPr>
+          <p:cNvPr id="5" name="Text 3"/>
+          <p:cNvSpPr/>
+          <p:nvPr/>
+        </p:nvSpPr>
+        <p:spPr>
+          <a:xfrm>
+            <a:off x="411480" y="4864608"/>
+            <a:ext cx="8321040" cy="237744"/>
+          </a:xfrm>
+          <a:prstGeom prst="rect">
+            <a:avLst/>
+          </a:prstGeom>
+          <a:noFill/>
+          <a:ln/>
+        </p:spPr>
+        <p:txBody>
+          <a:bodyPr wrap="square" rtlCol="0" anchor="ctr"/>
+          <a:lstStyle/>
+          <a:p>
+            <a:pPr indent="0" marL="0">
+              <a:buNone/>
+            </a:pPr>
+            <a:r>
+              <a:rPr lang="en-US" sz="750" dirty="0">
+                <a:solidFill>
+                  <a:srgbClr val="AAAAAA"/>
+                </a:solidFill>
+                <a:latin typeface="Arial" pitchFamily="34" charset="0"/>
+                <a:ea typeface="Arial" pitchFamily="34" charset="-122"/>
+                <a:cs typeface="Arial" pitchFamily="34" charset="-120"/>
+              </a:rPr>
+              <a:t>Lesson Forge Pro (owner) — This content is educational material only and does not constitute financial, investment, or trading advice.</a:t>
+            </a:r>
+            <a:endParaRPr lang="en-US" sz="750" dirty="0"/>
+          </a:p>
+        </p:txBody>
+      </p:sp>
+      <p:sp>
+        <p:nvSpPr>
+          <p:cNvPr id="6" name="Text 4"/>
+          <p:cNvSpPr/>
+          <p:nvPr/>
+        </p:nvSpPr>
+        <p:spPr>
+          <a:xfrm>
+            <a:off x="731520" y="1188720"/>
+            <a:ext cx="7680960" cy="2743200"/>
+          </a:xfrm>
+          <a:prstGeom prst="rect">
+            <a:avLst/>
+          </a:prstGeom>
+          <a:noFill/>
+          <a:ln/>
+        </p:spPr>
+        <p:txBody>
+          <a:bodyPr wrap="square" rtlCol="0" anchor="t"/>
+          <a:lstStyle/>
+          <a:p>
+            <a:pPr marL="152400" indent="-152400">
+              <a:spcAft>
+                <a:spcPts val="800"/>
+              </a:spcAft>
+              <a:buSzPct val="100000"/>
+              <a:buChar char="•"/>
+            </a:pPr>
+            <a:r>
+              <a:rPr lang="en-US" sz="1500" dirty="0">
+                <a:solidFill>
+                  <a:srgbClr val="1C1917"/>
+                </a:solidFill>
+                <a:latin typeface="Arial" pitchFamily="34" charset="0"/>
+                <a:ea typeface="Arial" pitchFamily="34" charset="-122"/>
+                <a:cs typeface="Arial" pitchFamily="34" charset="-120"/>
+              </a:rPr>
+              <a:t>Step 1: Run the base case to establish your anchor output.</a:t>
+            </a:r>
+            <a:endParaRPr lang="en-US" sz="1500" dirty="0"/>
+          </a:p>
+          <a:p>
+            <a:pPr marL="152400" indent="-152400">
+              <a:spcAft>
+                <a:spcPts val="800"/>
+              </a:spcAft>
+              <a:buSzPct val="100000"/>
+              <a:buChar char="•"/>
+            </a:pPr>
+            <a:r>
+              <a:rPr lang="en-US" sz="1500" dirty="0">
+                <a:solidFill>
+                  <a:srgbClr val="1C1917"/>
+                </a:solidFill>
+                <a:latin typeface="Arial" pitchFamily="34" charset="0"/>
+                <a:ea typeface="Arial" pitchFamily="34" charset="-122"/>
+                <a:cs typeface="Arial" pitchFamily="34" charset="-120"/>
+              </a:rPr>
+              <a:t>Step 2: List and rank all drivers; focus narrative on the top three to five.</a:t>
+            </a:r>
+            <a:endParaRPr lang="en-US" sz="1500" dirty="0"/>
+          </a:p>
+          <a:p>
+            <a:pPr marL="152400" indent="-152400">
+              <a:spcAft>
+                <a:spcPts val="800"/>
+              </a:spcAft>
+              <a:buSzPct val="100000"/>
+              <a:buChar char="•"/>
+            </a:pPr>
+            <a:r>
+              <a:rPr lang="en-US" sz="1500" dirty="0">
+                <a:solidFill>
+                  <a:srgbClr val="1C1917"/>
+                </a:solidFill>
+                <a:latin typeface="Arial" pitchFamily="34" charset="0"/>
+                <a:ea typeface="Arial" pitchFamily="34" charset="-122"/>
+                <a:cs typeface="Arial" pitchFamily="34" charset="-120"/>
+              </a:rPr>
+              <a:t>Step 3: Build coherent named scenarios—Base, Upside, Downside—with consistent driver sets.</a:t>
+            </a:r>
+            <a:endParaRPr lang="en-US" sz="1500" dirty="0"/>
+          </a:p>
+          <a:p>
+            <a:pPr marL="152400" indent="-152400">
+              <a:spcAft>
+                <a:spcPts val="800"/>
+              </a:spcAft>
+              <a:buSzPct val="100000"/>
+              <a:buChar char="•"/>
+            </a:pPr>
+            <a:r>
+              <a:rPr lang="en-US" sz="1500" dirty="0">
+                <a:solidFill>
+                  <a:srgbClr val="1C1917"/>
+                </a:solidFill>
+                <a:latin typeface="Arial" pitchFamily="34" charset="0"/>
+                <a:ea typeface="Arial" pitchFamily="34" charset="-122"/>
+                <a:cs typeface="Arial" pitchFamily="34" charset="-120"/>
+              </a:rPr>
+              <a:t>Step 4: Run one-way sensitivity, isolating each driver while holding others at base.</a:t>
+            </a:r>
+            <a:endParaRPr lang="en-US" sz="1500" dirty="0"/>
+          </a:p>
+          <a:p>
+            <a:pPr marL="152400" indent="-152400">
+              <a:spcAft>
+                <a:spcPts val="800"/>
+              </a:spcAft>
+              <a:buSzPct val="100000"/>
+              <a:buChar char="•"/>
+            </a:pPr>
+            <a:r>
+              <a:rPr lang="en-US" sz="1500" dirty="0">
+                <a:solidFill>
+                  <a:srgbClr val="1C1917"/>
+                </a:solidFill>
+                <a:latin typeface="Arial" pitchFamily="34" charset="0"/>
+                <a:ea typeface="Arial" pitchFamily="34" charset="-122"/>
+                <a:cs typeface="Arial" pitchFamily="34" charset="-120"/>
+              </a:rPr>
+              <a:t>Step 5: Rank drivers by output swing to build a tornado chart.</a:t>
+            </a:r>
+            <a:endParaRPr lang="en-US" sz="1500" dirty="0"/>
+          </a:p>
+        </p:txBody>
+      </p:sp>
+      <p:sp>
+        <p:nvSpPr>
+          <p:cNvPr id="7" name="Shape 5"/>
+          <p:cNvSpPr/>
+          <p:nvPr/>
+        </p:nvSpPr>
+        <p:spPr>
+          <a:xfrm>
+            <a:off x="731520" y="4041648"/>
+            <a:ext cx="7680960" cy="566928"/>
+          </a:xfrm>
+          <a:prstGeom prst="roundRect">
+            <a:avLst>
+              <a:gd name="adj" fmla="val 12903"/>
+            </a:avLst>
+          </a:prstGeom>
+          <a:solidFill>
+            <a:srgbClr val="B45309">
+              <a:alpha val="12000"/>
+            </a:srgbClr>
+          </a:solidFill>
+          <a:ln w="12700">
+            <a:solidFill>
+              <a:srgbClr val="B45309"/>
+            </a:solidFill>
+            <a:prstDash val="solid"/>
+          </a:ln>
+        </p:spPr>
+      </p:sp>
+      <p:sp>
+        <p:nvSpPr>
+          <p:cNvPr id="8" name="Text 6"/>
+          <p:cNvSpPr/>
+          <p:nvPr/>
+        </p:nvSpPr>
+        <p:spPr>
+          <a:xfrm>
+            <a:off x="868680" y="4087368"/>
+            <a:ext cx="7406640" cy="475488"/>
+          </a:xfrm>
+          <a:prstGeom prst="rect">
+            <a:avLst/>
+          </a:prstGeom>
+          <a:noFill/>
+          <a:ln/>
+        </p:spPr>
+        <p:txBody>
+          <a:bodyPr wrap="square" rtlCol="0" anchor="ctr"/>
+          <a:lstStyle/>
+          <a:p>
+            <a:pPr indent="0" marL="0">
+              <a:buNone/>
+            </a:pPr>
+            <a:r>
+              <a:rPr lang="en-US" sz="1100" b="1" dirty="0">
+                <a:solidFill>
+                  <a:srgbClr val="B45309"/>
+                </a:solidFill>
+                <a:latin typeface="Arial" pitchFamily="34" charset="0"/>
+                <a:ea typeface="Arial" pitchFamily="34" charset="-122"/>
+                <a:cs typeface="Arial" pitchFamily="34" charset="-120"/>
+              </a:rPr>
+              <a:t>Takeaway  </a:t>
+            </a:r>
+            <a:pPr indent="0" marL="0">
+              <a:buNone/>
+            </a:pPr>
+            <a:r>
+              <a:rPr lang="en-US" sz="1150" dirty="0">
+                <a:solidFill>
+                  <a:srgbClr val="1C1917"/>
+                </a:solidFill>
+                <a:latin typeface="Arial" pitchFamily="34" charset="0"/>
+                <a:ea typeface="Arial" pitchFamily="34" charset="-122"/>
+                <a:cs typeface="Arial" pitchFamily="34" charset="-120"/>
+              </a:rPr>
+              <a:t>Following each step in sequence ensures every driver's impact is isolated and comparable.</a:t>
+            </a:r>
+            <a:endParaRPr lang="en-US" sz="1100" dirty="0"/>
+          </a:p>
+        </p:txBody>
+      </p:sp>
+    </p:spTree>
+  </p:cSld>
+  <p:clrMapOvr>
+    <a:masterClrMapping/>
+  </p:clrMapOvr>
+</p:sld>
+</file>
+
+<file path=ppt/slides/slide8.xml><?xml version="1.0" encoding="utf-8"?>
+<p:sld xmlns:a="http://schemas.openxmlformats.org/drawingml/2006/main" xmlns:r="http://schemas.openxmlformats.org/officeDocument/2006/relationships" xmlns:p="http://schemas.openxmlformats.org/presentationml/2006/main">
+  <p:cSld name="Slide 8">
+    <p:bg>
+      <p:bgPr>
+        <a:solidFill>
+          <a:srgbClr val="FFFFFF"/>
+        </a:solidFill>
+      </p:bgPr>
+    </p:bg>
+    <p:spTree>
+      <p:nvGrpSpPr>
+        <p:cNvPr id="1" name=""/>
+        <p:cNvGrpSpPr/>
+        <p:nvPr/>
+      </p:nvGrpSpPr>
+      <p:grpSpPr>
+        <a:xfrm>
+          <a:off x="0" y="0"/>
+          <a:ext cx="0" cy="0"/>
+          <a:chOff x="0" y="0"/>
+          <a:chExt cx="0" cy="0"/>
+        </a:xfrm>
+      </p:grpSpPr>
+      <p:sp>
+        <p:nvSpPr>
+          <p:cNvPr id="2" name="Shape 0"/>
+          <p:cNvSpPr/>
+          <p:nvPr/>
+        </p:nvSpPr>
+        <p:spPr>
+          <a:xfrm>
+            <a:off x="411480" y="402336"/>
+            <a:ext cx="82296" cy="329184"/>
+          </a:xfrm>
+          <a:prstGeom prst="rect">
+            <a:avLst/>
+          </a:prstGeom>
+          <a:solidFill>
+            <a:srgbClr val="B45309"/>
+          </a:solidFill>
+          <a:ln/>
+        </p:spPr>
+      </p:sp>
+      <p:sp>
+        <p:nvSpPr>
+          <p:cNvPr id="3" name="Text 1"/>
+          <p:cNvSpPr/>
+          <p:nvPr/>
+        </p:nvSpPr>
+        <p:spPr>
+          <a:xfrm>
+            <a:off x="566928" y="292608"/>
+            <a:ext cx="8138160" cy="548640"/>
+          </a:xfrm>
+          <a:prstGeom prst="rect">
+            <a:avLst/>
+          </a:prstGeom>
+          <a:noFill/>
+          <a:ln/>
+        </p:spPr>
+        <p:txBody>
+          <a:bodyPr wrap="square" rtlCol="0" anchor="ctr"/>
+          <a:lstStyle/>
+          <a:p>
+            <a:pPr indent="0" marL="0">
+              <a:buNone/>
+            </a:pPr>
+            <a:r>
+              <a:rPr lang="en-US" sz="2100" b="1" dirty="0">
+                <a:solidFill>
+                  <a:srgbClr val="1C1917"/>
+                </a:solidFill>
+                <a:latin typeface="Arial" pitchFamily="34" charset="0"/>
+                <a:ea typeface="Arial" pitchFamily="34" charset="-122"/>
+                <a:cs typeface="Arial" pitchFamily="34" charset="-120"/>
+              </a:rPr>
+              <a:t>Worked Example</a:t>
+            </a:r>
+            <a:endParaRPr lang="en-US" sz="2100" dirty="0"/>
+          </a:p>
+        </p:txBody>
+      </p:sp>
+      <p:sp>
+        <p:nvSpPr>
+          <p:cNvPr id="4" name="Shape 2"/>
+          <p:cNvSpPr/>
+          <p:nvPr/>
+        </p:nvSpPr>
+        <p:spPr>
+          <a:xfrm>
+            <a:off x="411480" y="960120"/>
+            <a:ext cx="8321040" cy="0"/>
+          </a:xfrm>
+          <a:prstGeom prst="line">
+            <a:avLst/>
+          </a:prstGeom>
+          <a:noFill/>
+          <a:ln w="12700">
+            <a:solidFill>
+              <a:srgbClr val="E7E5E4"/>
+            </a:solidFill>
+            <a:prstDash val="solid"/>
+          </a:ln>
+        </p:spPr>
+      </p:sp>
+      <p:sp>
+        <p:nvSpPr>
+          <p:cNvPr id="5" name="Text 3"/>
+          <p:cNvSpPr/>
+          <p:nvPr/>
+        </p:nvSpPr>
+        <p:spPr>
+          <a:xfrm>
+            <a:off x="411480" y="4864608"/>
+            <a:ext cx="8321040" cy="237744"/>
+          </a:xfrm>
+          <a:prstGeom prst="rect">
+            <a:avLst/>
+          </a:prstGeom>
+          <a:noFill/>
+          <a:ln/>
+        </p:spPr>
+        <p:txBody>
+          <a:bodyPr wrap="square" rtlCol="0" anchor="ctr"/>
+          <a:lstStyle/>
+          <a:p>
+            <a:pPr indent="0" marL="0">
+              <a:buNone/>
+            </a:pPr>
+            <a:r>
+              <a:rPr lang="en-US" sz="750" dirty="0">
+                <a:solidFill>
+                  <a:srgbClr val="AAAAAA"/>
+                </a:solidFill>
+                <a:latin typeface="Arial" pitchFamily="34" charset="0"/>
+                <a:ea typeface="Arial" pitchFamily="34" charset="-122"/>
+                <a:cs typeface="Arial" pitchFamily="34" charset="-120"/>
+              </a:rPr>
+              <a:t>Lesson Forge Pro (owner) — This content is educational material only and does not constitute financial, investment, or trading advice.</a:t>
+            </a:r>
+            <a:endParaRPr lang="en-US" sz="750" dirty="0"/>
+          </a:p>
+        </p:txBody>
+      </p:sp>
+      <p:sp>
+        <p:nvSpPr>
+          <p:cNvPr id="6" name="Text 4"/>
+          <p:cNvSpPr/>
+          <p:nvPr/>
+        </p:nvSpPr>
+        <p:spPr>
+          <a:xfrm>
+            <a:off x="731520" y="1188720"/>
+            <a:ext cx="7680960" cy="2743200"/>
+          </a:xfrm>
+          <a:prstGeom prst="rect">
+            <a:avLst/>
+          </a:prstGeom>
+          <a:noFill/>
+          <a:ln/>
+        </p:spPr>
+        <p:txBody>
+          <a:bodyPr wrap="square" rtlCol="0" anchor="t"/>
+          <a:lstStyle/>
+          <a:p>
+            <a:pPr marL="152400" indent="-152400">
+              <a:spcAft>
+                <a:spcPts val="800"/>
+              </a:spcAft>
+              <a:buSzPct val="100000"/>
+              <a:buChar char="•"/>
+            </a:pPr>
+            <a:r>
+              <a:rPr lang="en-US" sz="1500" dirty="0">
+                <a:solidFill>
+                  <a:srgbClr val="1C1917"/>
+                </a:solidFill>
+                <a:latin typeface="Arial" pitchFamily="34" charset="0"/>
+                <a:ea typeface="Arial" pitchFamily="34" charset="-122"/>
+                <a:cs typeface="Arial" pitchFamily="34" charset="-120"/>
+              </a:rPr>
+              <a:t>Base-case NPV: $10M revenue × 22% margin, 10% discount rate = $0.818M.</a:t>
+            </a:r>
+            <a:endParaRPr lang="en-US" sz="1500" dirty="0"/>
+          </a:p>
+          <a:p>
+            <a:pPr marL="152400" indent="-152400">
+              <a:spcAft>
+                <a:spcPts val="800"/>
+              </a:spcAft>
+              <a:buSzPct val="100000"/>
+              <a:buChar char="•"/>
+            </a:pPr>
+            <a:r>
+              <a:rPr lang="en-US" sz="1500" dirty="0">
+                <a:solidFill>
+                  <a:srgbClr val="1C1917"/>
+                </a:solidFill>
+                <a:latin typeface="Arial" pitchFamily="34" charset="0"/>
+                <a:ea typeface="Arial" pitchFamily="34" charset="-122"/>
+                <a:cs typeface="Arial" pitchFamily="34" charset="-120"/>
+              </a:rPr>
+              <a:t>Revenue swing (low to high): NPV moves from $0.055M to $1.582M—a $1.527M range.</a:t>
+            </a:r>
+            <a:endParaRPr lang="en-US" sz="1500" dirty="0"/>
+          </a:p>
+          <a:p>
+            <a:pPr marL="152400" indent="-152400">
+              <a:spcAft>
+                <a:spcPts val="800"/>
+              </a:spcAft>
+              <a:buSzPct val="100000"/>
+              <a:buChar char="•"/>
+            </a:pPr>
+            <a:r>
+              <a:rPr lang="en-US" sz="1500" dirty="0">
+                <a:solidFill>
+                  <a:srgbClr val="1C1917"/>
+                </a:solidFill>
+                <a:latin typeface="Arial" pitchFamily="34" charset="0"/>
+                <a:ea typeface="Arial" pitchFamily="34" charset="-122"/>
+                <a:cs typeface="Arial" pitchFamily="34" charset="-120"/>
+              </a:rPr>
+              <a:t>Discount rate swing (8% to 12%) also shifts NPV, isolating rate's independent impact.</a:t>
+            </a:r>
+            <a:endParaRPr lang="en-US" sz="1500" dirty="0"/>
+          </a:p>
+          <a:p>
+            <a:pPr marL="152400" indent="-152400">
+              <a:spcAft>
+                <a:spcPts val="800"/>
+              </a:spcAft>
+              <a:buSzPct val="100000"/>
+              <a:buChar char="•"/>
+            </a:pPr>
+            <a:r>
+              <a:rPr lang="en-US" sz="1500" dirty="0">
+                <a:solidFill>
+                  <a:srgbClr val="1C1917"/>
+                </a:solidFill>
+                <a:latin typeface="Arial" pitchFamily="34" charset="0"/>
+                <a:ea typeface="Arial" pitchFamily="34" charset="-122"/>
+                <a:cs typeface="Arial" pitchFamily="34" charset="-120"/>
+              </a:rPr>
+              <a:t>Each driver is tested separately; results feed directly into the tornado ranking.</a:t>
+            </a:r>
+            <a:endParaRPr lang="en-US" sz="1500" dirty="0"/>
+          </a:p>
+        </p:txBody>
+      </p:sp>
+      <p:sp>
+        <p:nvSpPr>
+          <p:cNvPr id="7" name="Shape 5"/>
+          <p:cNvSpPr/>
+          <p:nvPr/>
+        </p:nvSpPr>
+        <p:spPr>
+          <a:xfrm>
+            <a:off x="731520" y="4041648"/>
+            <a:ext cx="7680960" cy="566928"/>
+          </a:xfrm>
+          <a:prstGeom prst="roundRect">
+            <a:avLst>
+              <a:gd name="adj" fmla="val 12903"/>
+            </a:avLst>
+          </a:prstGeom>
+          <a:solidFill>
+            <a:srgbClr val="B45309">
+              <a:alpha val="12000"/>
+            </a:srgbClr>
+          </a:solidFill>
+          <a:ln w="12700">
+            <a:solidFill>
+              <a:srgbClr val="B45309"/>
+            </a:solidFill>
+            <a:prstDash val="solid"/>
+          </a:ln>
+        </p:spPr>
+      </p:sp>
+      <p:sp>
+        <p:nvSpPr>
+          <p:cNvPr id="8" name="Text 6"/>
+          <p:cNvSpPr/>
+          <p:nvPr/>
+        </p:nvSpPr>
+        <p:spPr>
+          <a:xfrm>
+            <a:off x="868680" y="4087368"/>
+            <a:ext cx="7406640" cy="475488"/>
+          </a:xfrm>
+          <a:prstGeom prst="rect">
+            <a:avLst/>
+          </a:prstGeom>
+          <a:noFill/>
+          <a:ln/>
+        </p:spPr>
+        <p:txBody>
+          <a:bodyPr wrap="square" rtlCol="0" anchor="ctr"/>
+          <a:lstStyle/>
+          <a:p>
+            <a:pPr indent="0" marL="0">
+              <a:buNone/>
+            </a:pPr>
+            <a:r>
+              <a:rPr lang="en-US" sz="1100" b="1" dirty="0">
+                <a:solidFill>
+                  <a:srgbClr val="B45309"/>
+                </a:solidFill>
+                <a:latin typeface="Arial" pitchFamily="34" charset="0"/>
+                <a:ea typeface="Arial" pitchFamily="34" charset="-122"/>
+                <a:cs typeface="Arial" pitchFamily="34" charset="-120"/>
+              </a:rPr>
+              <a:t>Takeaway  </a:t>
+            </a:r>
+            <a:pPr indent="0" marL="0">
+              <a:buNone/>
+            </a:pPr>
+            <a:r>
+              <a:rPr lang="en-US" sz="1150" dirty="0">
+                <a:solidFill>
+                  <a:srgbClr val="1C1917"/>
+                </a:solidFill>
+                <a:latin typeface="Arial" pitchFamily="34" charset="0"/>
+                <a:ea typeface="Arial" pitchFamily="34" charset="-122"/>
+                <a:cs typeface="Arial" pitchFamily="34" charset="-120"/>
+              </a:rPr>
+              <a:t>A concrete two-year example shows exactly how one-way sensitivity quantifies each driver's leverage.</a:t>
+            </a:r>
+            <a:endParaRPr lang="en-US" sz="1100" dirty="0"/>
+          </a:p>
+        </p:txBody>
+      </p:sp>
+    </p:spTree>
+  </p:cSld>
+  <p:clrMapOvr>
+    <a:masterClrMapping/>
+  </p:clrMapOvr>
+</p:sld>
+</file>
+
+<file path=ppt/slides/slide9.xml><?xml version="1.0" encoding="utf-8"?>
+<p:sld xmlns:a="http://schemas.openxmlformats.org/drawingml/2006/main" xmlns:r="http://schemas.openxmlformats.org/officeDocument/2006/relationships" xmlns:p="http://schemas.openxmlformats.org/presentationml/2006/main">
+  <p:cSld name="Slide 9">
+    <p:bg>
+      <p:bgPr>
+        <a:solidFill>
+          <a:srgbClr val="FFFFFF"/>
+        </a:solidFill>
+      </p:bgPr>
+    </p:bg>
+    <p:spTree>
+      <p:nvGrpSpPr>
+        <p:cNvPr id="1" name=""/>
+        <p:cNvGrpSpPr/>
+        <p:nvPr/>
+      </p:nvGrpSpPr>
+      <p:grpSpPr>
+        <a:xfrm>
+          <a:off x="0" y="0"/>
+          <a:ext cx="0" cy="0"/>
+          <a:chOff x="0" y="0"/>
+          <a:chExt cx="0" cy="0"/>
+        </a:xfrm>
+      </p:grpSpPr>
+      <p:sp>
+        <p:nvSpPr>
+          <p:cNvPr id="2" name="Shape 0"/>
+          <p:cNvSpPr/>
+          <p:nvPr/>
+        </p:nvSpPr>
+        <p:spPr>
+          <a:xfrm>
+            <a:off x="411480" y="402336"/>
+            <a:ext cx="82296" cy="329184"/>
+          </a:xfrm>
+          <a:prstGeom prst="rect">
+            <a:avLst/>
+          </a:prstGeom>
+          <a:solidFill>
+            <a:srgbClr val="B45309"/>
+          </a:solidFill>
+          <a:ln/>
+        </p:spPr>
+      </p:sp>
+      <p:sp>
+        <p:nvSpPr>
+          <p:cNvPr id="3" name="Text 1"/>
+          <p:cNvSpPr/>
+          <p:nvPr/>
+        </p:nvSpPr>
+        <p:spPr>
+          <a:xfrm>
+            <a:off x="566928" y="292608"/>
+            <a:ext cx="8138160" cy="548640"/>
+          </a:xfrm>
+          <a:prstGeom prst="rect">
+            <a:avLst/>
+          </a:prstGeom>
+          <a:noFill/>
+          <a:ln/>
+        </p:spPr>
+        <p:txBody>
+          <a:bodyPr wrap="square" rtlCol="0" anchor="ctr"/>
+          <a:lstStyle/>
+          <a:p>
+            <a:pPr indent="0" marL="0">
+              <a:buNone/>
+            </a:pPr>
+            <a:r>
+              <a:rPr lang="en-US" sz="2100" b="1" dirty="0">
+                <a:solidFill>
+                  <a:srgbClr val="1C1917"/>
+                </a:solidFill>
+                <a:latin typeface="Arial" pitchFamily="34" charset="0"/>
+                <a:ea typeface="Arial" pitchFamily="34" charset="-122"/>
+                <a:cs typeface="Arial" pitchFamily="34" charset="-120"/>
+              </a:rPr>
+              <a:t>Outputs and Checks</a:t>
+            </a:r>
+            <a:endParaRPr lang="en-US" sz="2100" dirty="0"/>
+          </a:p>
+        </p:txBody>
+      </p:sp>
+      <p:sp>
+        <p:nvSpPr>
+          <p:cNvPr id="4" name="Shape 2"/>
+          <p:cNvSpPr/>
+          <p:nvPr/>
+        </p:nvSpPr>
+        <p:spPr>
+          <a:xfrm>
+            <a:off x="411480" y="960120"/>
+            <a:ext cx="8321040" cy="0"/>
+          </a:xfrm>
+          <a:prstGeom prst="line">
+            <a:avLst/>
+          </a:prstGeom>
+          <a:noFill/>
+          <a:ln w="12700">
+            <a:solidFill>
+              <a:srgbClr val="E7E5E4"/>
+            </a:solidFill>
+            <a:prstDash val="solid"/>
+          </a:ln>
+        </p:spPr>
+      </p:sp>
+      <p:sp>
+        <p:nvSpPr>
+          <p:cNvPr id="5" name="Text 3"/>
+          <p:cNvSpPr/>
+          <p:nvPr/>
+        </p:nvSpPr>
+        <p:spPr>
+          <a:xfrm>
+            <a:off x="411480" y="4864608"/>
+            <a:ext cx="8321040" cy="237744"/>
+          </a:xfrm>
+          <a:prstGeom prst="rect">
+            <a:avLst/>
+          </a:prstGeom>
+          <a:noFill/>
+          <a:ln/>
+        </p:spPr>
+        <p:txBody>
+          <a:bodyPr wrap="square" rtlCol="0" anchor="ctr"/>
+          <a:lstStyle/>
+          <a:p>
+            <a:pPr indent="0" marL="0">
+              <a:buNone/>
+            </a:pPr>
+            <a:r>
+              <a:rPr lang="en-US" sz="750" dirty="0">
+                <a:solidFill>
+                  <a:srgbClr val="AAAAAA"/>
+                </a:solidFill>
+                <a:latin typeface="Arial" pitchFamily="34" charset="0"/>
+                <a:ea typeface="Arial" pitchFamily="34" charset="-122"/>
+                <a:cs typeface="Arial" pitchFamily="34" charset="-120"/>
+              </a:rPr>
+              <a:t>Lesson Forge Pro (owner) — This content is educational material only and does not constitute financial, investment, or trading advice.</a:t>
+            </a:r>
+            <a:endParaRPr lang="en-US" sz="750" dirty="0"/>
+          </a:p>
+        </p:txBody>
+      </p:sp>
+      <p:sp>
+        <p:nvSpPr>
+          <p:cNvPr id="6" name="Text 4"/>
+          <p:cNvSpPr/>
+          <p:nvPr/>
+        </p:nvSpPr>
+        <p:spPr>
+          <a:xfrm>
+            <a:off x="731520" y="1188720"/>
+            <a:ext cx="7680960" cy="2743200"/>
+          </a:xfrm>
+          <a:prstGeom prst="rect">
+            <a:avLst/>
+          </a:prstGeom>
+          <a:noFill/>
+          <a:ln/>
+        </p:spPr>
+        <p:txBody>
+          <a:bodyPr wrap="square" rtlCol="0" anchor="t"/>
+          <a:lstStyle/>
+          <a:p>
+            <a:pPr marL="152400" indent="-152400">
+              <a:spcAft>
+                <a:spcPts val="800"/>
+              </a:spcAft>
+              <a:buSzPct val="100000"/>
+              <a:buChar char="•"/>
+            </a:pPr>
+            <a:r>
+              <a:rPr lang="en-US" sz="1500" dirty="0">
+                <a:solidFill>
+                  <a:srgbClr val="1C1917"/>
+                </a:solidFill>
+                <a:latin typeface="Arial" pitchFamily="34" charset="0"/>
+                <a:ea typeface="Arial" pitchFamily="34" charset="-122"/>
+                <a:cs typeface="Arial" pitchFamily="34" charset="-120"/>
+              </a:rPr>
+              <a:t>Deliverables: base-case output, tornado table, and named-scenario summary table.</a:t>
+            </a:r>
+            <a:endParaRPr lang="en-US" sz="1500" dirty="0"/>
+          </a:p>
+          <a:p>
+            <a:pPr marL="152400" indent="-152400">
+              <a:spcAft>
+                <a:spcPts val="800"/>
+              </a:spcAft>
+              <a:buSzPct val="100000"/>
+              <a:buChar char="•"/>
+            </a:pPr>
+            <a:r>
+              <a:rPr lang="en-US" sz="1500" dirty="0">
+                <a:solidFill>
+                  <a:srgbClr val="1C1917"/>
+                </a:solidFill>
+                <a:latin typeface="Arial" pitchFamily="34" charset="0"/>
+                <a:ea typeface="Arial" pitchFamily="34" charset="-122"/>
+                <a:cs typeface="Arial" pitchFamily="34" charset="-120"/>
+              </a:rPr>
+              <a:t>Sign check: confirm each driver moves output in the expected direction.</a:t>
+            </a:r>
+            <a:endParaRPr lang="en-US" sz="1500" dirty="0"/>
+          </a:p>
+          <a:p>
+            <a:pPr marL="152400" indent="-152400">
+              <a:spcAft>
+                <a:spcPts val="800"/>
+              </a:spcAft>
+              <a:buSzPct val="100000"/>
+              <a:buChar char="•"/>
+            </a:pPr>
+            <a:r>
+              <a:rPr lang="en-US" sz="1500" dirty="0">
+                <a:solidFill>
+                  <a:srgbClr val="1C1917"/>
+                </a:solidFill>
+                <a:latin typeface="Arial" pitchFamily="34" charset="0"/>
+                <a:ea typeface="Arial" pitchFamily="34" charset="-122"/>
+                <a:cs typeface="Arial" pitchFamily="34" charset="-120"/>
+              </a:rPr>
+              <a:t>Consistency check: base case must sit between downside and upside outputs.</a:t>
+            </a:r>
+            <a:endParaRPr lang="en-US" sz="1500" dirty="0"/>
+          </a:p>
+          <a:p>
+            <a:pPr marL="152400" indent="-152400">
+              <a:spcAft>
+                <a:spcPts val="800"/>
+              </a:spcAft>
+              <a:buSzPct val="100000"/>
+              <a:buChar char="•"/>
+            </a:pPr>
+            <a:r>
+              <a:rPr lang="en-US" sz="1500" dirty="0">
+                <a:solidFill>
+                  <a:srgbClr val="1C1917"/>
+                </a:solidFill>
+                <a:latin typeface="Arial" pitchFamily="34" charset="0"/>
+                <a:ea typeface="Arial" pitchFamily="34" charset="-122"/>
+                <a:cs typeface="Arial" pitchFamily="34" charset="-120"/>
+              </a:rPr>
+              <a:t>Limit tornado charts to top three to five drivers—more rows add noise, not insight.</a:t>
+            </a:r>
+            <a:endParaRPr lang="en-US" sz="1500" dirty="0"/>
+          </a:p>
+        </p:txBody>
+      </p:sp>
+      <p:sp>
+        <p:nvSpPr>
+          <p:cNvPr id="7" name="Shape 5"/>
+          <p:cNvSpPr/>
+          <p:nvPr/>
+        </p:nvSpPr>
+        <p:spPr>
+          <a:xfrm>
+            <a:off x="731520" y="4041648"/>
+            <a:ext cx="7680960" cy="566928"/>
+          </a:xfrm>
+          <a:prstGeom prst="roundRect">
+            <a:avLst>
+              <a:gd name="adj" fmla="val 12903"/>
+            </a:avLst>
+          </a:prstGeom>
+          <a:solidFill>
+            <a:srgbClr val="B45309">
+              <a:alpha val="12000"/>
+            </a:srgbClr>
+          </a:solidFill>
+          <a:ln w="12700">
+            <a:solidFill>
+              <a:srgbClr val="B45309"/>
+            </a:solidFill>
+            <a:prstDash val="solid"/>
+          </a:ln>
+        </p:spPr>
+      </p:sp>
+      <p:sp>
+        <p:nvSpPr>
+          <p:cNvPr id="8" name="Text 6"/>
+          <p:cNvSpPr/>
+          <p:nvPr/>
+        </p:nvSpPr>
+        <p:spPr>
+          <a:xfrm>
+            <a:off x="868680" y="4087368"/>
+            <a:ext cx="7406640" cy="475488"/>
+          </a:xfrm>
+          <a:prstGeom prst="rect">
+            <a:avLst/>
+          </a:prstGeom>
+          <a:noFill/>
+          <a:ln/>
+        </p:spPr>
+        <p:txBody>
+          <a:bodyPr wrap="square" rtlCol="0" anchor="ctr"/>
+          <a:lstStyle/>
+          <a:p>
+            <a:pPr indent="0" marL="0">
+              <a:buNone/>
+            </a:pPr>
+            <a:r>
+              <a:rPr lang="en-US" sz="1100" b="1" dirty="0">
+                <a:solidFill>
+                  <a:srgbClr val="B45309"/>
+                </a:solidFill>
+                <a:latin typeface="Arial" pitchFamily="34" charset="0"/>
+                <a:ea typeface="Arial" pitchFamily="34" charset="-122"/>
+                <a:cs typeface="Arial" pitchFamily="34" charset="-120"/>
+              </a:rPr>
+              <a:t>Takeaway  </a:t>
+            </a:r>
+            <a:pPr indent="0" marL="0">
+              <a:buNone/>
+            </a:pPr>
+            <a:r>
+              <a:rPr lang="en-US" sz="1150" dirty="0">
+                <a:solidFill>
+                  <a:srgbClr val="1C1917"/>
+                </a:solidFill>
+                <a:latin typeface="Arial" pitchFamily="34" charset="0"/>
+                <a:ea typeface="Arial" pitchFamily="34" charset="-122"/>
+                <a:cs typeface="Arial" pitchFamily="34" charset="-120"/>
+              </a:rPr>
+              <a:t>Running systematic checks before presenting catches formula errors and keeps the narrative focused.</a:t>
+            </a:r>
+            <a:endParaRPr lang="en-US" sz="1100" dirty="0"/>
           </a:p>
         </p:txBody>
       </p:sp>

--- a/docs/fmva/packs/day4-slides.pptx
+++ b/docs/fmva/packs/day4-slides.pptx
@@ -17,13 +17,9 @@
     <p:sldId id="265" r:id="rId11"/>
     <p:sldId id="266" r:id="rId12"/>
     <p:sldId id="267" r:id="rId13"/>
-    <p:sldId id="268" r:id="rId14"/>
-    <p:sldId id="269" r:id="rId15"/>
-    <p:sldId id="270" r:id="rId16"/>
-    <p:sldId id="271" r:id="rId17"/>
   </p:sldIdLst>
   <p:notesMasterIdLst>
-    <p:notesMasterId r:id="rId18"/>
+    <p:notesMasterId r:id="rId14"/>
   </p:notesMasterIdLst>
   <p:sldSz cx="9144000" cy="5148072"/>
   <p:notesSz cx="5148072" cy="9144000"/>
@@ -805,358 +801,6 @@
             <a:fld id="{F7021451-1387-4CA6-816F-3879F97B5CBC}" type="slidenum">
               <a:rPr lang="en-US"/>
               <a:t>12</a:t>
-            </a:fld>
-            <a:endParaRPr lang="en-US"/>
-          </a:p>
-        </p:txBody>
-      </p:sp>
-    </p:spTree>
-    <p:extLst>
-      <p:ext uri="{BB962C8B-B14F-4D97-AF65-F5344CB8AC3E}">
-        <p14:creationId xmlns:p14="http://schemas.microsoft.com/office/powerpoint/2010/main" val="1024086991"/>
-      </p:ext>
-    </p:extLst>
-  </p:cSld>
-  <p:clrMapOvr>
-    <a:masterClrMapping/>
-  </p:clrMapOvr>
-</p:notes>
-</file>
-
-<file path=ppt/notesSlides/notesSlide13.xml><?xml version="1.0" encoding="utf-8"?>
-<p:notes xmlns:a="http://schemas.openxmlformats.org/drawingml/2006/main" xmlns:r="http://schemas.openxmlformats.org/officeDocument/2006/relationships" xmlns:p="http://schemas.openxmlformats.org/presentationml/2006/main">
-  <p:cSld>
-    <p:spTree>
-      <p:nvGrpSpPr>
-        <p:cNvPr id="1" name=""/>
-        <p:cNvGrpSpPr/>
-        <p:nvPr/>
-      </p:nvGrpSpPr>
-      <p:grpSpPr>
-        <a:xfrm>
-          <a:off x="0" y="0"/>
-          <a:ext cx="0" cy="0"/>
-          <a:chOff x="0" y="0"/>
-          <a:chExt cx="0" cy="0"/>
-        </a:xfrm>
-      </p:grpSpPr>
-      <p:sp>
-        <p:nvSpPr>
-          <p:cNvPr id="2" name="Slide Image Placeholder 1"/>
-          <p:cNvSpPr>
-            <a:spLocks noGrp="1" noRot="1" noChangeAspect="1"/>
-          </p:cNvSpPr>
-          <p:nvPr>
-            <p:ph type="sldImg"/>
-          </p:nvPr>
-        </p:nvSpPr>
-        <p:spPr/>
-      </p:sp>
-      <p:sp>
-        <p:nvSpPr>
-          <p:cNvPr id="3" name="Notes Placeholder 2"/>
-          <p:cNvSpPr>
-            <a:spLocks noGrp="1"/>
-          </p:cNvSpPr>
-          <p:nvPr>
-            <p:ph type="body" idx="1"/>
-          </p:nvPr>
-        </p:nvSpPr>
-        <p:spPr/>
-        <p:txBody>
-          <a:bodyPr/>
-          <a:lstStyle/>
-          <a:p>
-            <a:r>
-              <a:rPr lang="en-US" dirty="0"/>
-              <a:t/>
-            </a:r>
-            <a:endParaRPr lang="en-US" dirty="0"/>
-          </a:p>
-        </p:txBody>
-      </p:sp>
-      <p:sp>
-        <p:nvSpPr>
-          <p:cNvPr id="4" name="Slide Number Placeholder 3"/>
-          <p:cNvSpPr>
-            <a:spLocks noGrp="1"/>
-          </p:cNvSpPr>
-          <p:nvPr>
-            <p:ph type="sldNum" sz="quarter" idx="10"/>
-          </p:nvPr>
-        </p:nvSpPr>
-        <p:spPr/>
-        <p:txBody>
-          <a:bodyPr/>
-          <a:lstStyle/>
-          <a:p>
-            <a:fld id="{F7021451-1387-4CA6-816F-3879F97B5CBC}" type="slidenum">
-              <a:rPr lang="en-US"/>
-              <a:t>13</a:t>
-            </a:fld>
-            <a:endParaRPr lang="en-US"/>
-          </a:p>
-        </p:txBody>
-      </p:sp>
-    </p:spTree>
-    <p:extLst>
-      <p:ext uri="{BB962C8B-B14F-4D97-AF65-F5344CB8AC3E}">
-        <p14:creationId xmlns:p14="http://schemas.microsoft.com/office/powerpoint/2010/main" val="1024086991"/>
-      </p:ext>
-    </p:extLst>
-  </p:cSld>
-  <p:clrMapOvr>
-    <a:masterClrMapping/>
-  </p:clrMapOvr>
-</p:notes>
-</file>
-
-<file path=ppt/notesSlides/notesSlide14.xml><?xml version="1.0" encoding="utf-8"?>
-<p:notes xmlns:a="http://schemas.openxmlformats.org/drawingml/2006/main" xmlns:r="http://schemas.openxmlformats.org/officeDocument/2006/relationships" xmlns:p="http://schemas.openxmlformats.org/presentationml/2006/main">
-  <p:cSld>
-    <p:spTree>
-      <p:nvGrpSpPr>
-        <p:cNvPr id="1" name=""/>
-        <p:cNvGrpSpPr/>
-        <p:nvPr/>
-      </p:nvGrpSpPr>
-      <p:grpSpPr>
-        <a:xfrm>
-          <a:off x="0" y="0"/>
-          <a:ext cx="0" cy="0"/>
-          <a:chOff x="0" y="0"/>
-          <a:chExt cx="0" cy="0"/>
-        </a:xfrm>
-      </p:grpSpPr>
-      <p:sp>
-        <p:nvSpPr>
-          <p:cNvPr id="2" name="Slide Image Placeholder 1"/>
-          <p:cNvSpPr>
-            <a:spLocks noGrp="1" noRot="1" noChangeAspect="1"/>
-          </p:cNvSpPr>
-          <p:nvPr>
-            <p:ph type="sldImg"/>
-          </p:nvPr>
-        </p:nvSpPr>
-        <p:spPr/>
-      </p:sp>
-      <p:sp>
-        <p:nvSpPr>
-          <p:cNvPr id="3" name="Notes Placeholder 2"/>
-          <p:cNvSpPr>
-            <a:spLocks noGrp="1"/>
-          </p:cNvSpPr>
-          <p:nvPr>
-            <p:ph type="body" idx="1"/>
-          </p:nvPr>
-        </p:nvSpPr>
-        <p:spPr/>
-        <p:txBody>
-          <a:bodyPr/>
-          <a:lstStyle/>
-          <a:p>
-            <a:r>
-              <a:rPr lang="en-US" dirty="0"/>
-              <a:t/>
-            </a:r>
-            <a:endParaRPr lang="en-US" dirty="0"/>
-          </a:p>
-        </p:txBody>
-      </p:sp>
-      <p:sp>
-        <p:nvSpPr>
-          <p:cNvPr id="4" name="Slide Number Placeholder 3"/>
-          <p:cNvSpPr>
-            <a:spLocks noGrp="1"/>
-          </p:cNvSpPr>
-          <p:nvPr>
-            <p:ph type="sldNum" sz="quarter" idx="10"/>
-          </p:nvPr>
-        </p:nvSpPr>
-        <p:spPr/>
-        <p:txBody>
-          <a:bodyPr/>
-          <a:lstStyle/>
-          <a:p>
-            <a:fld id="{F7021451-1387-4CA6-816F-3879F97B5CBC}" type="slidenum">
-              <a:rPr lang="en-US"/>
-              <a:t>14</a:t>
-            </a:fld>
-            <a:endParaRPr lang="en-US"/>
-          </a:p>
-        </p:txBody>
-      </p:sp>
-    </p:spTree>
-    <p:extLst>
-      <p:ext uri="{BB962C8B-B14F-4D97-AF65-F5344CB8AC3E}">
-        <p14:creationId xmlns:p14="http://schemas.microsoft.com/office/powerpoint/2010/main" val="1024086991"/>
-      </p:ext>
-    </p:extLst>
-  </p:cSld>
-  <p:clrMapOvr>
-    <a:masterClrMapping/>
-  </p:clrMapOvr>
-</p:notes>
-</file>
-
-<file path=ppt/notesSlides/notesSlide15.xml><?xml version="1.0" encoding="utf-8"?>
-<p:notes xmlns:a="http://schemas.openxmlformats.org/drawingml/2006/main" xmlns:r="http://schemas.openxmlformats.org/officeDocument/2006/relationships" xmlns:p="http://schemas.openxmlformats.org/presentationml/2006/main">
-  <p:cSld>
-    <p:spTree>
-      <p:nvGrpSpPr>
-        <p:cNvPr id="1" name=""/>
-        <p:cNvGrpSpPr/>
-        <p:nvPr/>
-      </p:nvGrpSpPr>
-      <p:grpSpPr>
-        <a:xfrm>
-          <a:off x="0" y="0"/>
-          <a:ext cx="0" cy="0"/>
-          <a:chOff x="0" y="0"/>
-          <a:chExt cx="0" cy="0"/>
-        </a:xfrm>
-      </p:grpSpPr>
-      <p:sp>
-        <p:nvSpPr>
-          <p:cNvPr id="2" name="Slide Image Placeholder 1"/>
-          <p:cNvSpPr>
-            <a:spLocks noGrp="1" noRot="1" noChangeAspect="1"/>
-          </p:cNvSpPr>
-          <p:nvPr>
-            <p:ph type="sldImg"/>
-          </p:nvPr>
-        </p:nvSpPr>
-        <p:spPr/>
-      </p:sp>
-      <p:sp>
-        <p:nvSpPr>
-          <p:cNvPr id="3" name="Notes Placeholder 2"/>
-          <p:cNvSpPr>
-            <a:spLocks noGrp="1"/>
-          </p:cNvSpPr>
-          <p:nvPr>
-            <p:ph type="body" idx="1"/>
-          </p:nvPr>
-        </p:nvSpPr>
-        <p:spPr/>
-        <p:txBody>
-          <a:bodyPr/>
-          <a:lstStyle/>
-          <a:p>
-            <a:r>
-              <a:rPr lang="en-US" dirty="0"/>
-              <a:t/>
-            </a:r>
-            <a:endParaRPr lang="en-US" dirty="0"/>
-          </a:p>
-        </p:txBody>
-      </p:sp>
-      <p:sp>
-        <p:nvSpPr>
-          <p:cNvPr id="4" name="Slide Number Placeholder 3"/>
-          <p:cNvSpPr>
-            <a:spLocks noGrp="1"/>
-          </p:cNvSpPr>
-          <p:nvPr>
-            <p:ph type="sldNum" sz="quarter" idx="10"/>
-          </p:nvPr>
-        </p:nvSpPr>
-        <p:spPr/>
-        <p:txBody>
-          <a:bodyPr/>
-          <a:lstStyle/>
-          <a:p>
-            <a:fld id="{F7021451-1387-4CA6-816F-3879F97B5CBC}" type="slidenum">
-              <a:rPr lang="en-US"/>
-              <a:t>15</a:t>
-            </a:fld>
-            <a:endParaRPr lang="en-US"/>
-          </a:p>
-        </p:txBody>
-      </p:sp>
-    </p:spTree>
-    <p:extLst>
-      <p:ext uri="{BB962C8B-B14F-4D97-AF65-F5344CB8AC3E}">
-        <p14:creationId xmlns:p14="http://schemas.microsoft.com/office/powerpoint/2010/main" val="1024086991"/>
-      </p:ext>
-    </p:extLst>
-  </p:cSld>
-  <p:clrMapOvr>
-    <a:masterClrMapping/>
-  </p:clrMapOvr>
-</p:notes>
-</file>
-
-<file path=ppt/notesSlides/notesSlide16.xml><?xml version="1.0" encoding="utf-8"?>
-<p:notes xmlns:a="http://schemas.openxmlformats.org/drawingml/2006/main" xmlns:r="http://schemas.openxmlformats.org/officeDocument/2006/relationships" xmlns:p="http://schemas.openxmlformats.org/presentationml/2006/main">
-  <p:cSld>
-    <p:spTree>
-      <p:nvGrpSpPr>
-        <p:cNvPr id="1" name=""/>
-        <p:cNvGrpSpPr/>
-        <p:nvPr/>
-      </p:nvGrpSpPr>
-      <p:grpSpPr>
-        <a:xfrm>
-          <a:off x="0" y="0"/>
-          <a:ext cx="0" cy="0"/>
-          <a:chOff x="0" y="0"/>
-          <a:chExt cx="0" cy="0"/>
-        </a:xfrm>
-      </p:grpSpPr>
-      <p:sp>
-        <p:nvSpPr>
-          <p:cNvPr id="2" name="Slide Image Placeholder 1"/>
-          <p:cNvSpPr>
-            <a:spLocks noGrp="1" noRot="1" noChangeAspect="1"/>
-          </p:cNvSpPr>
-          <p:nvPr>
-            <p:ph type="sldImg"/>
-          </p:nvPr>
-        </p:nvSpPr>
-        <p:spPr/>
-      </p:sp>
-      <p:sp>
-        <p:nvSpPr>
-          <p:cNvPr id="3" name="Notes Placeholder 2"/>
-          <p:cNvSpPr>
-            <a:spLocks noGrp="1"/>
-          </p:cNvSpPr>
-          <p:nvPr>
-            <p:ph type="body" idx="1"/>
-          </p:nvPr>
-        </p:nvSpPr>
-        <p:spPr/>
-        <p:txBody>
-          <a:bodyPr/>
-          <a:lstStyle/>
-          <a:p>
-            <a:r>
-              <a:rPr lang="en-US" dirty="0"/>
-              <a:t/>
-            </a:r>
-            <a:endParaRPr lang="en-US" dirty="0"/>
-          </a:p>
-        </p:txBody>
-      </p:sp>
-      <p:sp>
-        <p:nvSpPr>
-          <p:cNvPr id="4" name="Slide Number Placeholder 3"/>
-          <p:cNvSpPr>
-            <a:spLocks noGrp="1"/>
-          </p:cNvSpPr>
-          <p:nvPr>
-            <p:ph type="sldNum" sz="quarter" idx="10"/>
-          </p:nvPr>
-        </p:nvSpPr>
-        <p:spPr/>
-        <p:txBody>
-          <a:bodyPr/>
-          <a:lstStyle/>
-          <a:p>
-            <a:fld id="{F7021451-1387-4CA6-816F-3879F97B5CBC}" type="slidenum">
-              <a:rPr lang="en-US"/>
-              <a:t>16</a:t>
             </a:fld>
             <a:endParaRPr lang="en-US"/>
           </a:p>
@@ -2532,7 +2176,7 @@
                 <a:ea typeface="Arial" pitchFamily="34" charset="-122"/>
                 <a:cs typeface="Arial" pitchFamily="34" charset="-120"/>
               </a:rPr>
-              <a:t>Sensitivity: Price vs. Profit Impact</a:t>
+              <a:t>Scenario Assumption Trade-offs</a:t>
             </a:r>
             <a:endParaRPr lang="en-US" sz="2000" dirty="0"/>
           </a:p>
@@ -2571,7 +2215,7 @@
                 <a:ea typeface="Arial" pitchFamily="34" charset="-122"/>
                 <a:cs typeface="Arial" pitchFamily="34" charset="-120"/>
               </a:rPr>
-              <a:t>Downside scenario cuts profit 63%; price sensitivity coefficient of 2.5 flags pricing as top risk</a:t>
+              <a:t>Growth and investment intensity must move together for internally consistent scenarios</a:t>
             </a:r>
             <a:endParaRPr lang="en-US" sz="1000" dirty="0"/>
           </a:p>
@@ -2624,14 +2268,16 @@
         </p:nvSpPr>
         <p:spPr>
           <a:xfrm>
-            <a:off x="685800" y="4206240"/>
-            <a:ext cx="7772400" cy="0"/>
-          </a:xfrm>
-          <a:prstGeom prst="line">
-            <a:avLst/>
-          </a:prstGeom>
-          <a:noFill/>
-          <a:ln w="12700">
+            <a:off x="2011680" y="1234440"/>
+            <a:ext cx="5120640" cy="3108960"/>
+          </a:xfrm>
+          <a:prstGeom prst="rect">
+            <a:avLst/>
+          </a:prstGeom>
+          <a:solidFill>
+            <a:srgbClr val="FFFFFF"/>
+          </a:solidFill>
+          <a:ln w="15240">
             <a:solidFill>
               <a:srgbClr val="1C1917"/>
             </a:solidFill>
@@ -2647,28 +2293,78 @@
         </p:nvSpPr>
         <p:spPr>
           <a:xfrm>
-            <a:off x="1371600" y="1280160"/>
-            <a:ext cx="777240" cy="2926080"/>
-          </a:xfrm>
-          <a:prstGeom prst="rect">
-            <a:avLst/>
+            <a:off x="4572000" y="1234440"/>
+            <a:ext cx="0" cy="3108960"/>
+          </a:xfrm>
+          <a:prstGeom prst="line">
+            <a:avLst/>
+          </a:prstGeom>
+          <a:noFill/>
+          <a:ln w="11430">
+            <a:solidFill>
+              <a:srgbClr val="1C1917"/>
+            </a:solidFill>
+            <a:prstDash val="solid"/>
+          </a:ln>
+        </p:spPr>
+      </p:sp>
+      <p:sp>
+        <p:nvSpPr>
+          <p:cNvPr id="8" name="Shape 6"/>
+          <p:cNvSpPr/>
+          <p:nvPr/>
+        </p:nvSpPr>
+        <p:spPr>
+          <a:xfrm>
+            <a:off x="2011680" y="2788920"/>
+            <a:ext cx="5120640" cy="0"/>
+          </a:xfrm>
+          <a:prstGeom prst="line">
+            <a:avLst/>
+          </a:prstGeom>
+          <a:noFill/>
+          <a:ln w="11430">
+            <a:solidFill>
+              <a:srgbClr val="1C1917"/>
+            </a:solidFill>
+            <a:prstDash val="solid"/>
+          </a:ln>
+        </p:spPr>
+      </p:sp>
+      <p:sp>
+        <p:nvSpPr>
+          <p:cNvPr id="9" name="Shape 7"/>
+          <p:cNvSpPr/>
+          <p:nvPr/>
+        </p:nvSpPr>
+        <p:spPr>
+          <a:xfrm>
+            <a:off x="2240280" y="1600200"/>
+            <a:ext cx="2103120" cy="822960"/>
+          </a:xfrm>
+          <a:prstGeom prst="roundRect">
+            <a:avLst>
+              <a:gd name="adj" fmla="val 11111"/>
+            </a:avLst>
           </a:prstGeom>
           <a:solidFill>
-            <a:srgbClr val="B45309"/>
+            <a:srgbClr val="B45309">
+              <a:alpha val="15000"/>
+            </a:srgbClr>
           </a:solidFill>
           <a:ln/>
         </p:spPr>
       </p:sp>
       <p:sp>
         <p:nvSpPr>
-          <p:cNvPr id="8" name="Text 6"/>
-          <p:cNvSpPr/>
-          <p:nvPr/>
-        </p:nvSpPr>
-        <p:spPr>
-          <a:xfrm>
-            <a:off x="1188720" y="1005840"/>
-            <a:ext cx="1143000" cy="237744"/>
+          <p:cNvPr id="10" name="Text 8"/>
+          <p:cNvSpPr/>
+          <p:nvPr/>
+        </p:nvSpPr>
+        <p:spPr>
+          <a:xfrm>
+            <a:off x="2240280" y="1600200"/>
+            <a:ext cx="2103120" cy="822960"/>
           </a:xfrm>
           <a:prstGeom prst="rect">
             <a:avLst/>
@@ -2684,7 +2380,7 @@
               <a:buNone/>
             </a:pPr>
             <a:r>
-              <a:rPr lang="en-US" sz="950" b="1" dirty="0">
+              <a:rPr lang="en-US" sz="1200" b="1" dirty="0">
                 <a:solidFill>
                   <a:srgbClr val="1C1917"/>
                 </a:solidFill>
@@ -2692,7 +2388,303 @@
                 <a:ea typeface="Arial" pitchFamily="34" charset="-122"/>
                 <a:cs typeface="Arial" pitchFamily="34" charset="-120"/>
               </a:rPr>
-              <a:t>40000</a:t>
+              <a:t>Bull: High Growth</a:t>
+            </a:r>
+            <a:endParaRPr lang="en-US" sz="1200" dirty="0"/>
+          </a:p>
+          <a:p>
+            <a:pPr algn="ctr" indent="0" marL="0">
+              <a:buNone/>
+            </a:pPr>
+            <a:r>
+              <a:rPr lang="en-US" sz="900" dirty="0">
+                <a:solidFill>
+                  <a:srgbClr val="78716C"/>
+                </a:solidFill>
+                <a:latin typeface="Arial" pitchFamily="34" charset="0"/>
+                <a:ea typeface="Arial" pitchFamily="34" charset="-122"/>
+                <a:cs typeface="Arial" pitchFamily="34" charset="-120"/>
+              </a:rPr>
+              <a:t>25% CAGR; needs 10% capex, 8% WACC reward</a:t>
+            </a:r>
+            <a:endParaRPr lang="en-US" sz="1200" dirty="0"/>
+          </a:p>
+        </p:txBody>
+      </p:sp>
+      <p:sp>
+        <p:nvSpPr>
+          <p:cNvPr id="11" name="Shape 9"/>
+          <p:cNvSpPr/>
+          <p:nvPr/>
+        </p:nvSpPr>
+        <p:spPr>
+          <a:xfrm>
+            <a:off x="4800600" y="1600200"/>
+            <a:ext cx="2103120" cy="822960"/>
+          </a:xfrm>
+          <a:prstGeom prst="roundRect">
+            <a:avLst>
+              <a:gd name="adj" fmla="val 11111"/>
+            </a:avLst>
+          </a:prstGeom>
+          <a:solidFill>
+            <a:srgbClr val="B45309">
+              <a:alpha val="15000"/>
+            </a:srgbClr>
+          </a:solidFill>
+          <a:ln/>
+        </p:spPr>
+      </p:sp>
+      <p:sp>
+        <p:nvSpPr>
+          <p:cNvPr id="12" name="Text 10"/>
+          <p:cNvSpPr/>
+          <p:nvPr/>
+        </p:nvSpPr>
+        <p:spPr>
+          <a:xfrm>
+            <a:off x="4800600" y="1600200"/>
+            <a:ext cx="2103120" cy="822960"/>
+          </a:xfrm>
+          <a:prstGeom prst="rect">
+            <a:avLst/>
+          </a:prstGeom>
+          <a:noFill/>
+          <a:ln/>
+        </p:spPr>
+        <p:txBody>
+          <a:bodyPr wrap="square" rtlCol="0" anchor="ctr"/>
+          <a:lstStyle/>
+          <a:p>
+            <a:pPr algn="ctr" indent="0" marL="0">
+              <a:buNone/>
+            </a:pPr>
+            <a:r>
+              <a:rPr lang="en-US" sz="1200" b="1" dirty="0">
+                <a:solidFill>
+                  <a:srgbClr val="1C1917"/>
+                </a:solidFill>
+                <a:latin typeface="Arial" pitchFamily="34" charset="0"/>
+                <a:ea typeface="Arial" pitchFamily="34" charset="-122"/>
+                <a:cs typeface="Arial" pitchFamily="34" charset="-120"/>
+              </a:rPr>
+              <a:t>Bull: High Investment</a:t>
+            </a:r>
+            <a:endParaRPr lang="en-US" sz="1200" dirty="0"/>
+          </a:p>
+          <a:p>
+            <a:pPr algn="ctr" indent="0" marL="0">
+              <a:buNone/>
+            </a:pPr>
+            <a:r>
+              <a:rPr lang="en-US" sz="900" dirty="0">
+                <a:solidFill>
+                  <a:srgbClr val="78716C"/>
+                </a:solidFill>
+                <a:latin typeface="Arial" pitchFamily="34" charset="0"/>
+                <a:ea typeface="Arial" pitchFamily="34" charset="-122"/>
+                <a:cs typeface="Arial" pitchFamily="34" charset="-120"/>
+              </a:rPr>
+              <a:t>More capex and working capital required</a:t>
+            </a:r>
+            <a:endParaRPr lang="en-US" sz="1200" dirty="0"/>
+          </a:p>
+        </p:txBody>
+      </p:sp>
+      <p:sp>
+        <p:nvSpPr>
+          <p:cNvPr id="13" name="Shape 11"/>
+          <p:cNvSpPr/>
+          <p:nvPr/>
+        </p:nvSpPr>
+        <p:spPr>
+          <a:xfrm>
+            <a:off x="2240280" y="3154680"/>
+            <a:ext cx="2103120" cy="822960"/>
+          </a:xfrm>
+          <a:prstGeom prst="roundRect">
+            <a:avLst>
+              <a:gd name="adj" fmla="val 11111"/>
+            </a:avLst>
+          </a:prstGeom>
+          <a:solidFill>
+            <a:srgbClr val="B45309">
+              <a:alpha val="15000"/>
+            </a:srgbClr>
+          </a:solidFill>
+          <a:ln/>
+        </p:spPr>
+      </p:sp>
+      <p:sp>
+        <p:nvSpPr>
+          <p:cNvPr id="14" name="Text 12"/>
+          <p:cNvSpPr/>
+          <p:nvPr/>
+        </p:nvSpPr>
+        <p:spPr>
+          <a:xfrm>
+            <a:off x="2240280" y="3154680"/>
+            <a:ext cx="2103120" cy="822960"/>
+          </a:xfrm>
+          <a:prstGeom prst="rect">
+            <a:avLst/>
+          </a:prstGeom>
+          <a:noFill/>
+          <a:ln/>
+        </p:spPr>
+        <p:txBody>
+          <a:bodyPr wrap="square" rtlCol="0" anchor="ctr"/>
+          <a:lstStyle/>
+          <a:p>
+            <a:pPr algn="ctr" indent="0" marL="0">
+              <a:buNone/>
+            </a:pPr>
+            <a:r>
+              <a:rPr lang="en-US" sz="1200" b="1" dirty="0">
+                <a:solidFill>
+                  <a:srgbClr val="1C1917"/>
+                </a:solidFill>
+                <a:latin typeface="Arial" pitchFamily="34" charset="0"/>
+                <a:ea typeface="Arial" pitchFamily="34" charset="-122"/>
+                <a:cs typeface="Arial" pitchFamily="34" charset="-120"/>
+              </a:rPr>
+              <a:t>Bear: Low Growth</a:t>
+            </a:r>
+            <a:endParaRPr lang="en-US" sz="1200" dirty="0"/>
+          </a:p>
+          <a:p>
+            <a:pPr algn="ctr" indent="0" marL="0">
+              <a:buNone/>
+            </a:pPr>
+            <a:r>
+              <a:rPr lang="en-US" sz="900" dirty="0">
+                <a:solidFill>
+                  <a:srgbClr val="78716C"/>
+                </a:solidFill>
+                <a:latin typeface="Arial" pitchFamily="34" charset="0"/>
+                <a:ea typeface="Arial" pitchFamily="34" charset="-122"/>
+                <a:cs typeface="Arial" pitchFamily="34" charset="-120"/>
+              </a:rPr>
+              <a:t>5% CAGR; lower capex but fixed costs persist</a:t>
+            </a:r>
+            <a:endParaRPr lang="en-US" sz="1200" dirty="0"/>
+          </a:p>
+        </p:txBody>
+      </p:sp>
+      <p:sp>
+        <p:nvSpPr>
+          <p:cNvPr id="15" name="Shape 13"/>
+          <p:cNvSpPr/>
+          <p:nvPr/>
+        </p:nvSpPr>
+        <p:spPr>
+          <a:xfrm>
+            <a:off x="4800600" y="3154680"/>
+            <a:ext cx="2103120" cy="822960"/>
+          </a:xfrm>
+          <a:prstGeom prst="roundRect">
+            <a:avLst>
+              <a:gd name="adj" fmla="val 11111"/>
+            </a:avLst>
+          </a:prstGeom>
+          <a:solidFill>
+            <a:srgbClr val="B45309">
+              <a:alpha val="15000"/>
+            </a:srgbClr>
+          </a:solidFill>
+          <a:ln/>
+        </p:spPr>
+      </p:sp>
+      <p:sp>
+        <p:nvSpPr>
+          <p:cNvPr id="16" name="Text 14"/>
+          <p:cNvSpPr/>
+          <p:nvPr/>
+        </p:nvSpPr>
+        <p:spPr>
+          <a:xfrm>
+            <a:off x="4800600" y="3154680"/>
+            <a:ext cx="2103120" cy="822960"/>
+          </a:xfrm>
+          <a:prstGeom prst="rect">
+            <a:avLst/>
+          </a:prstGeom>
+          <a:noFill/>
+          <a:ln/>
+        </p:spPr>
+        <p:txBody>
+          <a:bodyPr wrap="square" rtlCol="0" anchor="ctr"/>
+          <a:lstStyle/>
+          <a:p>
+            <a:pPr algn="ctr" indent="0" marL="0">
+              <a:buNone/>
+            </a:pPr>
+            <a:r>
+              <a:rPr lang="en-US" sz="1200" b="1" dirty="0">
+                <a:solidFill>
+                  <a:srgbClr val="1C1917"/>
+                </a:solidFill>
+                <a:latin typeface="Arial" pitchFamily="34" charset="0"/>
+                <a:ea typeface="Arial" pitchFamily="34" charset="-122"/>
+                <a:cs typeface="Arial" pitchFamily="34" charset="-120"/>
+              </a:rPr>
+              <a:t>Bear: Margin Squeeze</a:t>
+            </a:r>
+            <a:endParaRPr lang="en-US" sz="1200" dirty="0"/>
+          </a:p>
+          <a:p>
+            <a:pPr algn="ctr" indent="0" marL="0">
+              <a:buNone/>
+            </a:pPr>
+            <a:r>
+              <a:rPr lang="en-US" sz="900" dirty="0">
+                <a:solidFill>
+                  <a:srgbClr val="78716C"/>
+                </a:solidFill>
+                <a:latin typeface="Arial" pitchFamily="34" charset="0"/>
+                <a:ea typeface="Arial" pitchFamily="34" charset="-122"/>
+                <a:cs typeface="Arial" pitchFamily="34" charset="-120"/>
+              </a:rPr>
+              <a:t>12% EBITDA margin; 12% WACC penalizes risk</a:t>
+            </a:r>
+            <a:endParaRPr lang="en-US" sz="1200" dirty="0"/>
+          </a:p>
+        </p:txBody>
+      </p:sp>
+      <p:sp>
+        <p:nvSpPr>
+          <p:cNvPr id="17" name="Text 15"/>
+          <p:cNvSpPr/>
+          <p:nvPr/>
+        </p:nvSpPr>
+        <p:spPr>
+          <a:xfrm>
+            <a:off x="1920240" y="4398264"/>
+            <a:ext cx="2194560" cy="274320"/>
+          </a:xfrm>
+          <a:prstGeom prst="rect">
+            <a:avLst/>
+          </a:prstGeom>
+          <a:noFill/>
+          <a:ln/>
+        </p:spPr>
+        <p:txBody>
+          <a:bodyPr wrap="square" rtlCol="0" anchor="ctr"/>
+          <a:lstStyle/>
+          <a:p>
+            <a:pPr indent="0" marL="0">
+              <a:buNone/>
+            </a:pPr>
+            <a:r>
+              <a:rPr lang="en-US" sz="950" dirty="0">
+                <a:solidFill>
+                  <a:srgbClr val="78716C"/>
+                </a:solidFill>
+                <a:latin typeface="Arial" pitchFamily="34" charset="0"/>
+                <a:ea typeface="Arial" pitchFamily="34" charset="-122"/>
+                <a:cs typeface="Arial" pitchFamily="34" charset="-120"/>
+              </a:rPr>
+              <a:t>Low Revenue Growth</a:t>
             </a:r>
             <a:endParaRPr lang="en-US" sz="950" dirty="0"/>
           </a:p>
@@ -2700,14 +2692,14 @@
       </p:sp>
       <p:sp>
         <p:nvSpPr>
-          <p:cNvPr id="9" name="Text 7"/>
-          <p:cNvSpPr/>
-          <p:nvPr/>
-        </p:nvSpPr>
-        <p:spPr>
-          <a:xfrm>
-            <a:off x="1143000" y="4315968"/>
-            <a:ext cx="1234440" cy="502920"/>
+          <p:cNvPr id="18" name="Text 16"/>
+          <p:cNvSpPr/>
+          <p:nvPr/>
+        </p:nvSpPr>
+        <p:spPr>
+          <a:xfrm>
+            <a:off x="5029200" y="4398264"/>
+            <a:ext cx="2194560" cy="274320"/>
           </a:xfrm>
           <a:prstGeom prst="rect">
             <a:avLst/>
@@ -2719,11 +2711,11 @@
           <a:bodyPr wrap="square" rtlCol="0" anchor="ctr"/>
           <a:lstStyle/>
           <a:p>
-            <a:pPr algn="ctr" indent="0" marL="0">
-              <a:buNone/>
-            </a:pPr>
-            <a:r>
-              <a:rPr lang="en-US" sz="850" dirty="0">
+            <a:pPr algn="r" indent="0" marL="0">
+              <a:buNone/>
+            </a:pPr>
+            <a:r>
+              <a:rPr lang="en-US" sz="950" dirty="0">
                 <a:solidFill>
                   <a:srgbClr val="78716C"/>
                 </a:solidFill>
@@ -2731,42 +2723,22 @@
                 <a:ea typeface="Arial" pitchFamily="34" charset="-122"/>
                 <a:cs typeface="Arial" pitchFamily="34" charset="-120"/>
               </a:rPr>
-              <a:t>Base Profit</a:t>
-            </a:r>
-            <a:endParaRPr lang="en-US" sz="850" dirty="0"/>
-          </a:p>
-        </p:txBody>
-      </p:sp>
-      <p:sp>
-        <p:nvSpPr>
-          <p:cNvPr id="10" name="Shape 8"/>
-          <p:cNvSpPr/>
-          <p:nvPr/>
-        </p:nvSpPr>
-        <p:spPr>
-          <a:xfrm>
-            <a:off x="3246120" y="3123590"/>
-            <a:ext cx="777240" cy="1082650"/>
-          </a:xfrm>
-          <a:prstGeom prst="rect">
-            <a:avLst/>
-          </a:prstGeom>
-          <a:solidFill>
-            <a:srgbClr val="B45309"/>
-          </a:solidFill>
-          <a:ln/>
-        </p:spPr>
-      </p:sp>
-      <p:sp>
-        <p:nvSpPr>
-          <p:cNvPr id="11" name="Text 9"/>
-          <p:cNvSpPr/>
-          <p:nvPr/>
-        </p:nvSpPr>
-        <p:spPr>
-          <a:xfrm>
-            <a:off x="3063240" y="2849270"/>
-            <a:ext cx="1143000" cy="237744"/>
+              <a:t>High Revenue Growth</a:t>
+            </a:r>
+            <a:endParaRPr lang="en-US" sz="950" dirty="0"/>
+          </a:p>
+        </p:txBody>
+      </p:sp>
+      <p:sp>
+        <p:nvSpPr>
+          <p:cNvPr id="19" name="Text 17"/>
+          <p:cNvSpPr/>
+          <p:nvPr/>
+        </p:nvSpPr>
+        <p:spPr>
+          <a:xfrm>
+            <a:off x="45720" y="1280160"/>
+            <a:ext cx="1828800" cy="274320"/>
           </a:xfrm>
           <a:prstGeom prst="rect">
             <a:avLst/>
@@ -2778,19 +2750,19 @@
           <a:bodyPr wrap="square" rtlCol="0" anchor="ctr"/>
           <a:lstStyle/>
           <a:p>
-            <a:pPr algn="ctr" indent="0" marL="0">
-              <a:buNone/>
-            </a:pPr>
-            <a:r>
-              <a:rPr lang="en-US" sz="950" b="1" dirty="0">
-                <a:solidFill>
-                  <a:srgbClr val="1C1917"/>
-                </a:solidFill>
-                <a:latin typeface="Arial" pitchFamily="34" charset="0"/>
-                <a:ea typeface="Arial" pitchFamily="34" charset="-122"/>
-                <a:cs typeface="Arial" pitchFamily="34" charset="-120"/>
-              </a:rPr>
-              <a:t>14800</a:t>
+            <a:pPr algn="r" indent="0" marL="0">
+              <a:buNone/>
+            </a:pPr>
+            <a:r>
+              <a:rPr lang="en-US" sz="950" dirty="0">
+                <a:solidFill>
+                  <a:srgbClr val="78716C"/>
+                </a:solidFill>
+                <a:latin typeface="Arial" pitchFamily="34" charset="0"/>
+                <a:ea typeface="Arial" pitchFamily="34" charset="-122"/>
+                <a:cs typeface="Arial" pitchFamily="34" charset="-120"/>
+              </a:rPr>
+              <a:t>High Capital Intensity</a:t>
             </a:r>
             <a:endParaRPr lang="en-US" sz="950" dirty="0"/>
           </a:p>
@@ -2798,14 +2770,14 @@
       </p:sp>
       <p:sp>
         <p:nvSpPr>
-          <p:cNvPr id="12" name="Text 10"/>
-          <p:cNvSpPr/>
-          <p:nvPr/>
-        </p:nvSpPr>
-        <p:spPr>
-          <a:xfrm>
-            <a:off x="3017520" y="4315968"/>
-            <a:ext cx="1234440" cy="502920"/>
+          <p:cNvPr id="20" name="Text 18"/>
+          <p:cNvSpPr/>
+          <p:nvPr/>
+        </p:nvSpPr>
+        <p:spPr>
+          <a:xfrm>
+            <a:off x="45720" y="4023360"/>
+            <a:ext cx="1828800" cy="274320"/>
           </a:xfrm>
           <a:prstGeom prst="rect">
             <a:avLst/>
@@ -2817,11 +2789,11 @@
           <a:bodyPr wrap="square" rtlCol="0" anchor="ctr"/>
           <a:lstStyle/>
           <a:p>
-            <a:pPr algn="ctr" indent="0" marL="0">
-              <a:buNone/>
-            </a:pPr>
-            <a:r>
-              <a:rPr lang="en-US" sz="850" dirty="0">
+            <a:pPr algn="r" indent="0" marL="0">
+              <a:buNone/>
+            </a:pPr>
+            <a:r>
+              <a:rPr lang="en-US" sz="950" dirty="0">
                 <a:solidFill>
                   <a:srgbClr val="78716C"/>
                 </a:solidFill>
@@ -2829,205 +2801,9 @@
                 <a:ea typeface="Arial" pitchFamily="34" charset="-122"/>
                 <a:cs typeface="Arial" pitchFamily="34" charset="-120"/>
               </a:rPr>
-              <a:t>Downside Scenario</a:t>
-            </a:r>
-            <a:endParaRPr lang="en-US" sz="850" dirty="0"/>
-          </a:p>
-        </p:txBody>
-      </p:sp>
-      <p:sp>
-        <p:nvSpPr>
-          <p:cNvPr id="13" name="Shape 11"/>
-          <p:cNvSpPr/>
-          <p:nvPr/>
-        </p:nvSpPr>
-        <p:spPr>
-          <a:xfrm>
-            <a:off x="5120640" y="2011680"/>
-            <a:ext cx="777240" cy="2194560"/>
-          </a:xfrm>
-          <a:prstGeom prst="rect">
-            <a:avLst/>
-          </a:prstGeom>
-          <a:solidFill>
-            <a:srgbClr val="B45309"/>
-          </a:solidFill>
-          <a:ln/>
-        </p:spPr>
-      </p:sp>
-      <p:sp>
-        <p:nvSpPr>
-          <p:cNvPr id="14" name="Text 12"/>
-          <p:cNvSpPr/>
-          <p:nvPr/>
-        </p:nvSpPr>
-        <p:spPr>
-          <a:xfrm>
-            <a:off x="4937760" y="1737360"/>
-            <a:ext cx="1143000" cy="237744"/>
-          </a:xfrm>
-          <a:prstGeom prst="rect">
-            <a:avLst/>
-          </a:prstGeom>
-          <a:noFill/>
-          <a:ln/>
-        </p:spPr>
-        <p:txBody>
-          <a:bodyPr wrap="square" rtlCol="0" anchor="ctr"/>
-          <a:lstStyle/>
-          <a:p>
-            <a:pPr algn="ctr" indent="0" marL="0">
-              <a:buNone/>
-            </a:pPr>
-            <a:r>
-              <a:rPr lang="en-US" sz="950" b="1" dirty="0">
-                <a:solidFill>
-                  <a:srgbClr val="1C1917"/>
-                </a:solidFill>
-                <a:latin typeface="Arial" pitchFamily="34" charset="0"/>
-                <a:ea typeface="Arial" pitchFamily="34" charset="-122"/>
-                <a:cs typeface="Arial" pitchFamily="34" charset="-120"/>
-              </a:rPr>
-              <a:t>30000</a:t>
+              <a:t>Low Capital Intensity</a:t>
             </a:r>
             <a:endParaRPr lang="en-US" sz="950" dirty="0"/>
-          </a:p>
-        </p:txBody>
-      </p:sp>
-      <p:sp>
-        <p:nvSpPr>
-          <p:cNvPr id="15" name="Text 13"/>
-          <p:cNvSpPr/>
-          <p:nvPr/>
-        </p:nvSpPr>
-        <p:spPr>
-          <a:xfrm>
-            <a:off x="4892040" y="4315968"/>
-            <a:ext cx="1234440" cy="502920"/>
-          </a:xfrm>
-          <a:prstGeom prst="rect">
-            <a:avLst/>
-          </a:prstGeom>
-          <a:noFill/>
-          <a:ln/>
-        </p:spPr>
-        <p:txBody>
-          <a:bodyPr wrap="square" rtlCol="0" anchor="ctr"/>
-          <a:lstStyle/>
-          <a:p>
-            <a:pPr algn="ctr" indent="0" marL="0">
-              <a:buNone/>
-            </a:pPr>
-            <a:r>
-              <a:rPr lang="en-US" sz="850" dirty="0">
-                <a:solidFill>
-                  <a:srgbClr val="78716C"/>
-                </a:solidFill>
-                <a:latin typeface="Arial" pitchFamily="34" charset="0"/>
-                <a:ea typeface="Arial" pitchFamily="34" charset="-122"/>
-                <a:cs typeface="Arial" pitchFamily="34" charset="-120"/>
-              </a:rPr>
-              <a:t>Price −$5 Only</a:t>
-            </a:r>
-            <a:endParaRPr lang="en-US" sz="850" dirty="0"/>
-          </a:p>
-        </p:txBody>
-      </p:sp>
-      <p:sp>
-        <p:nvSpPr>
-          <p:cNvPr id="16" name="Shape 14"/>
-          <p:cNvSpPr/>
-          <p:nvPr/>
-        </p:nvSpPr>
-        <p:spPr>
-          <a:xfrm>
-            <a:off x="6995160" y="4187952"/>
-            <a:ext cx="777240" cy="27432"/>
-          </a:xfrm>
-          <a:prstGeom prst="rect">
-            <a:avLst/>
-          </a:prstGeom>
-          <a:solidFill>
-            <a:srgbClr val="B45309"/>
-          </a:solidFill>
-          <a:ln/>
-        </p:spPr>
-      </p:sp>
-      <p:sp>
-        <p:nvSpPr>
-          <p:cNvPr id="17" name="Text 15"/>
-          <p:cNvSpPr/>
-          <p:nvPr/>
-        </p:nvSpPr>
-        <p:spPr>
-          <a:xfrm>
-            <a:off x="6812280" y="3913632"/>
-            <a:ext cx="1143000" cy="237744"/>
-          </a:xfrm>
-          <a:prstGeom prst="rect">
-            <a:avLst/>
-          </a:prstGeom>
-          <a:noFill/>
-          <a:ln/>
-        </p:spPr>
-        <p:txBody>
-          <a:bodyPr wrap="square" rtlCol="0" anchor="ctr"/>
-          <a:lstStyle/>
-          <a:p>
-            <a:pPr algn="ctr" indent="0" marL="0">
-              <a:buNone/>
-            </a:pPr>
-            <a:r>
-              <a:rPr lang="en-US" sz="950" b="1" dirty="0">
-                <a:solidFill>
-                  <a:srgbClr val="1C1917"/>
-                </a:solidFill>
-                <a:latin typeface="Arial" pitchFamily="34" charset="0"/>
-                <a:ea typeface="Arial" pitchFamily="34" charset="-122"/>
-                <a:cs typeface="Arial" pitchFamily="34" charset="-120"/>
-              </a:rPr>
-              <a:t>250</a:t>
-            </a:r>
-            <a:endParaRPr lang="en-US" sz="950" dirty="0"/>
-          </a:p>
-        </p:txBody>
-      </p:sp>
-      <p:sp>
-        <p:nvSpPr>
-          <p:cNvPr id="18" name="Text 16"/>
-          <p:cNvSpPr/>
-          <p:nvPr/>
-        </p:nvSpPr>
-        <p:spPr>
-          <a:xfrm>
-            <a:off x="6766560" y="4315968"/>
-            <a:ext cx="1234440" cy="502920"/>
-          </a:xfrm>
-          <a:prstGeom prst="rect">
-            <a:avLst/>
-          </a:prstGeom>
-          <a:noFill/>
-          <a:ln/>
-        </p:spPr>
-        <p:txBody>
-          <a:bodyPr wrap="square" rtlCol="0" anchor="ctr"/>
-          <a:lstStyle/>
-          <a:p>
-            <a:pPr algn="ctr" indent="0" marL="0">
-              <a:buNone/>
-            </a:pPr>
-            <a:r>
-              <a:rPr lang="en-US" sz="850" dirty="0">
-                <a:solidFill>
-                  <a:srgbClr val="78716C"/>
-                </a:solidFill>
-                <a:latin typeface="Arial" pitchFamily="34" charset="0"/>
-                <a:ea typeface="Arial" pitchFamily="34" charset="-122"/>
-                <a:cs typeface="Arial" pitchFamily="34" charset="-120"/>
-              </a:rPr>
-              <a:t>Price Sensitivity Coeff</a:t>
-            </a:r>
-            <a:endParaRPr lang="en-US" sz="850" dirty="0"/>
           </a:p>
         </p:txBody>
       </p:sp>
@@ -3116,7 +2892,7 @@
                 <a:ea typeface="Arial" pitchFamily="34" charset="-122"/>
                 <a:cs typeface="Arial" pitchFamily="34" charset="-120"/>
               </a:rPr>
-              <a:t>Applications and Pitfalls</a:t>
+              <a:t>Building Interactive Scenario Dashboards in Excel</a:t>
             </a:r>
             <a:endParaRPr lang="en-US" sz="2100" dirty="0"/>
           </a:p>
@@ -3221,7 +2997,7 @@
                 <a:ea typeface="Arial" pitchFamily="34" charset="-122"/>
                 <a:cs typeface="Arial" pitchFamily="34" charset="-120"/>
               </a:rPr>
-              <a:t>Scenario and sensitivity analysis apply wherever uncertainty is high and stakes are significant.</a:t>
+              <a:t>Scenario Manager stores named input sets for Base, Bull, and Bear cases.</a:t>
             </a:r>
             <a:endParaRPr lang="en-US" sz="1500" dirty="0"/>
           </a:p>
@@ -3242,7 +3018,7 @@
                 <a:ea typeface="Arial" pitchFamily="34" charset="-122"/>
                 <a:cs typeface="Arial" pitchFamily="34" charset="-120"/>
               </a:rPr>
-              <a:t>Common uses: DCF valuation, FP&amp;A budgeting, capital budgeting, credit stress-testing, M&amp;A modeling.</a:t>
+              <a:t>Designate the same changing cells across all three scenarios for consistency.</a:t>
             </a:r>
             <a:endParaRPr lang="en-US" sz="1500" dirty="0"/>
           </a:p>
@@ -3263,7 +3039,7 @@
                 <a:ea typeface="Arial" pitchFamily="34" charset="-122"/>
                 <a:cs typeface="Arial" pitchFamily="34" charset="-120"/>
               </a:rPr>
-              <a:t>Mechanics alone are insufficient—knowing where to apply them distinguishes excellent analysts.</a:t>
+              <a:t>Summary table creates a permanent side-by-side assumption audit trail.</a:t>
             </a:r>
             <a:endParaRPr lang="en-US" sz="1500" dirty="0"/>
           </a:p>
@@ -3284,7 +3060,28 @@
                 <a:ea typeface="Arial" pitchFamily="34" charset="-122"/>
                 <a:cs typeface="Arial" pitchFamily="34" charset="-120"/>
               </a:rPr>
-              <a:t>Pitfalls emerge when tools are misapplied or results are presented without context.</a:t>
+              <a:t>A single dropdown drives every chart, KPI, and output on the page.</a:t>
+            </a:r>
+            <a:endParaRPr lang="en-US" sz="1500" dirty="0"/>
+          </a:p>
+          <a:p>
+            <a:pPr marL="152400" indent="-152400">
+              <a:spcAft>
+                <a:spcPts val="800"/>
+              </a:spcAft>
+              <a:buSzPct val="100000"/>
+              <a:buChar char="•"/>
+            </a:pPr>
+            <a:r>
+              <a:rPr lang="en-US" sz="1500" dirty="0">
+                <a:solidFill>
+                  <a:srgbClr val="1C1917"/>
+                </a:solidFill>
+                <a:latin typeface="Arial" pitchFamily="34" charset="0"/>
+                <a:ea typeface="Arial" pitchFamily="34" charset="-122"/>
+                <a:cs typeface="Arial" pitchFamily="34" charset="-120"/>
+              </a:rPr>
+              <a:t>One controlled environment eliminates separate spreadsheets and manual swaps.</a:t>
             </a:r>
             <a:endParaRPr lang="en-US" sz="1500" dirty="0"/>
           </a:p>
@@ -3366,7 +3163,7 @@
                 <a:ea typeface="Arial" pitchFamily="34" charset="-122"/>
                 <a:cs typeface="Arial" pitchFamily="34" charset="-120"/>
               </a:rPr>
-              <a:t>Broad applicability makes these tools essential, but context determines whether they drive real decisions.</a:t>
+              <a:t>An interactive dashboard turns a static DCF into a living, single-source decision-support tool.</a:t>
             </a:r>
             <a:endParaRPr lang="en-US" sz="1100" dirty="0"/>
           </a:p>
@@ -3412,1745 +3209,6 @@
         </p:nvSpPr>
         <p:spPr>
           <a:xfrm>
-            <a:off x="411480" y="402336"/>
-            <a:ext cx="82296" cy="329184"/>
-          </a:xfrm>
-          <a:prstGeom prst="rect">
-            <a:avLst/>
-          </a:prstGeom>
-          <a:solidFill>
-            <a:srgbClr val="B45309"/>
-          </a:solidFill>
-          <a:ln/>
-        </p:spPr>
-      </p:sp>
-      <p:sp>
-        <p:nvSpPr>
-          <p:cNvPr id="3" name="Text 1"/>
-          <p:cNvSpPr/>
-          <p:nvPr/>
-        </p:nvSpPr>
-        <p:spPr>
-          <a:xfrm>
-            <a:off x="566928" y="292608"/>
-            <a:ext cx="8138160" cy="548640"/>
-          </a:xfrm>
-          <a:prstGeom prst="rect">
-            <a:avLst/>
-          </a:prstGeom>
-          <a:noFill/>
-          <a:ln/>
-        </p:spPr>
-        <p:txBody>
-          <a:bodyPr wrap="square" rtlCol="0" anchor="ctr"/>
-          <a:lstStyle/>
-          <a:p>
-            <a:pPr indent="0" marL="0">
-              <a:buNone/>
-            </a:pPr>
-            <a:r>
-              <a:rPr lang="en-US" sz="2100" b="1" dirty="0">
-                <a:solidFill>
-                  <a:srgbClr val="1C1917"/>
-                </a:solidFill>
-                <a:latin typeface="Arial" pitchFamily="34" charset="0"/>
-                <a:ea typeface="Arial" pitchFamily="34" charset="-122"/>
-                <a:cs typeface="Arial" pitchFamily="34" charset="-120"/>
-              </a:rPr>
-              <a:t>Common Mistakes</a:t>
-            </a:r>
-            <a:endParaRPr lang="en-US" sz="2100" dirty="0"/>
-          </a:p>
-        </p:txBody>
-      </p:sp>
-      <p:sp>
-        <p:nvSpPr>
-          <p:cNvPr id="4" name="Shape 2"/>
-          <p:cNvSpPr/>
-          <p:nvPr/>
-        </p:nvSpPr>
-        <p:spPr>
-          <a:xfrm>
-            <a:off x="411480" y="960120"/>
-            <a:ext cx="8321040" cy="0"/>
-          </a:xfrm>
-          <a:prstGeom prst="line">
-            <a:avLst/>
-          </a:prstGeom>
-          <a:noFill/>
-          <a:ln w="12700">
-            <a:solidFill>
-              <a:srgbClr val="E7E5E4"/>
-            </a:solidFill>
-            <a:prstDash val="solid"/>
-          </a:ln>
-        </p:spPr>
-      </p:sp>
-      <p:sp>
-        <p:nvSpPr>
-          <p:cNvPr id="5" name="Text 3"/>
-          <p:cNvSpPr/>
-          <p:nvPr/>
-        </p:nvSpPr>
-        <p:spPr>
-          <a:xfrm>
-            <a:off x="411480" y="4864608"/>
-            <a:ext cx="8321040" cy="237744"/>
-          </a:xfrm>
-          <a:prstGeom prst="rect">
-            <a:avLst/>
-          </a:prstGeom>
-          <a:noFill/>
-          <a:ln/>
-        </p:spPr>
-        <p:txBody>
-          <a:bodyPr wrap="square" rtlCol="0" anchor="ctr"/>
-          <a:lstStyle/>
-          <a:p>
-            <a:pPr indent="0" marL="0">
-              <a:buNone/>
-            </a:pPr>
-            <a:r>
-              <a:rPr lang="en-US" sz="750" dirty="0">
-                <a:solidFill>
-                  <a:srgbClr val="AAAAAA"/>
-                </a:solidFill>
-                <a:latin typeface="Arial" pitchFamily="34" charset="0"/>
-                <a:ea typeface="Arial" pitchFamily="34" charset="-122"/>
-                <a:cs typeface="Arial" pitchFamily="34" charset="-120"/>
-              </a:rPr>
-              <a:t>Lesson Forge Pro (owner) — This content is educational material only and does not constitute financial, investment, or trading advice.</a:t>
-            </a:r>
-            <a:endParaRPr lang="en-US" sz="750" dirty="0"/>
-          </a:p>
-        </p:txBody>
-      </p:sp>
-      <p:sp>
-        <p:nvSpPr>
-          <p:cNvPr id="6" name="Text 4"/>
-          <p:cNvSpPr/>
-          <p:nvPr/>
-        </p:nvSpPr>
-        <p:spPr>
-          <a:xfrm>
-            <a:off x="731520" y="1188720"/>
-            <a:ext cx="7680960" cy="2743200"/>
-          </a:xfrm>
-          <a:prstGeom prst="rect">
-            <a:avLst/>
-          </a:prstGeom>
-          <a:noFill/>
-          <a:ln/>
-        </p:spPr>
-        <p:txBody>
-          <a:bodyPr wrap="square" rtlCol="0" anchor="t"/>
-          <a:lstStyle/>
-          <a:p>
-            <a:pPr marL="152400" indent="-152400">
-              <a:spcAft>
-                <a:spcPts val="800"/>
-              </a:spcAft>
-              <a:buSzPct val="100000"/>
-              <a:buChar char="•"/>
-            </a:pPr>
-            <a:r>
-              <a:rPr lang="en-US" sz="1500" dirty="0">
-                <a:solidFill>
-                  <a:srgbClr val="1C1917"/>
-                </a:solidFill>
-                <a:latin typeface="Arial" pitchFamily="34" charset="0"/>
-                <a:ea typeface="Arial" pitchFamily="34" charset="-122"/>
-                <a:cs typeface="Arial" pitchFamily="34" charset="-120"/>
-              </a:rPr>
-              <a:t>Flexing revenue without adjusting correlated variable costs inflates margins unrealistically.</a:t>
-            </a:r>
-            <a:endParaRPr lang="en-US" sz="1500" dirty="0"/>
-          </a:p>
-          <a:p>
-            <a:pPr marL="152400" indent="-152400">
-              <a:spcAft>
-                <a:spcPts val="800"/>
-              </a:spcAft>
-              <a:buSzPct val="100000"/>
-              <a:buChar char="•"/>
-            </a:pPr>
-            <a:r>
-              <a:rPr lang="en-US" sz="1500" dirty="0">
-                <a:solidFill>
-                  <a:srgbClr val="1C1917"/>
-                </a:solidFill>
-                <a:latin typeface="Arial" pitchFamily="34" charset="0"/>
-                <a:ea typeface="Arial" pitchFamily="34" charset="-122"/>
-                <a:cs typeface="Arial" pitchFamily="34" charset="-120"/>
-              </a:rPr>
-              <a:t>Arbitrary ±10% shocks ignore historical volatility, guidance ranges, and contractual bounds.</a:t>
-            </a:r>
-            <a:endParaRPr lang="en-US" sz="1500" dirty="0"/>
-          </a:p>
-          <a:p>
-            <a:pPr marL="152400" indent="-152400">
-              <a:spcAft>
-                <a:spcPts val="800"/>
-              </a:spcAft>
-              <a:buSzPct val="100000"/>
-              <a:buChar char="•"/>
-            </a:pPr>
-            <a:r>
-              <a:rPr lang="en-US" sz="1500" dirty="0">
-                <a:solidFill>
-                  <a:srgbClr val="1C1917"/>
-                </a:solidFill>
-                <a:latin typeface="Arial" pitchFamily="34" charset="0"/>
-                <a:ea typeface="Arial" pitchFamily="34" charset="-122"/>
-                <a:cs typeface="Arial" pitchFamily="34" charset="-120"/>
-              </a:rPr>
-              <a:t>Mixing sensitivity and scenario analysis produces outputs that are hard to interpret.</a:t>
-            </a:r>
-            <a:endParaRPr lang="en-US" sz="1500" dirty="0"/>
-          </a:p>
-          <a:p>
-            <a:pPr marL="152400" indent="-152400">
-              <a:spcAft>
-                <a:spcPts val="800"/>
-              </a:spcAft>
-              <a:buSzPct val="100000"/>
-              <a:buChar char="•"/>
-            </a:pPr>
-            <a:r>
-              <a:rPr lang="en-US" sz="1500" dirty="0">
-                <a:solidFill>
-                  <a:srgbClr val="1C1917"/>
-                </a:solidFill>
-                <a:latin typeface="Arial" pitchFamily="34" charset="0"/>
-                <a:ea typeface="Arial" pitchFamily="34" charset="-122"/>
-                <a:cs typeface="Arial" pitchFamily="34" charset="-120"/>
-              </a:rPr>
-              <a:t>Anchoring on the base case without seriously questioning its assumptions distorts conclusions.</a:t>
-            </a:r>
-            <a:endParaRPr lang="en-US" sz="1500" dirty="0"/>
-          </a:p>
-        </p:txBody>
-      </p:sp>
-      <p:sp>
-        <p:nvSpPr>
-          <p:cNvPr id="7" name="Shape 5"/>
-          <p:cNvSpPr/>
-          <p:nvPr/>
-        </p:nvSpPr>
-        <p:spPr>
-          <a:xfrm>
-            <a:off x="731520" y="4041648"/>
-            <a:ext cx="7680960" cy="566928"/>
-          </a:xfrm>
-          <a:prstGeom prst="roundRect">
-            <a:avLst>
-              <a:gd name="adj" fmla="val 12903"/>
-            </a:avLst>
-          </a:prstGeom>
-          <a:solidFill>
-            <a:srgbClr val="B45309">
-              <a:alpha val="12000"/>
-            </a:srgbClr>
-          </a:solidFill>
-          <a:ln w="12700">
-            <a:solidFill>
-              <a:srgbClr val="B45309"/>
-            </a:solidFill>
-            <a:prstDash val="solid"/>
-          </a:ln>
-        </p:spPr>
-      </p:sp>
-      <p:sp>
-        <p:nvSpPr>
-          <p:cNvPr id="8" name="Text 6"/>
-          <p:cNvSpPr/>
-          <p:nvPr/>
-        </p:nvSpPr>
-        <p:spPr>
-          <a:xfrm>
-            <a:off x="868680" y="4087368"/>
-            <a:ext cx="7406640" cy="475488"/>
-          </a:xfrm>
-          <a:prstGeom prst="rect">
-            <a:avLst/>
-          </a:prstGeom>
-          <a:noFill/>
-          <a:ln/>
-        </p:spPr>
-        <p:txBody>
-          <a:bodyPr wrap="square" rtlCol="0" anchor="ctr"/>
-          <a:lstStyle/>
-          <a:p>
-            <a:pPr indent="0" marL="0">
-              <a:buNone/>
-            </a:pPr>
-            <a:r>
-              <a:rPr lang="en-US" sz="1100" b="1" dirty="0">
-                <a:solidFill>
-                  <a:srgbClr val="B45309"/>
-                </a:solidFill>
-                <a:latin typeface="Arial" pitchFamily="34" charset="0"/>
-                <a:ea typeface="Arial" pitchFamily="34" charset="-122"/>
-                <a:cs typeface="Arial" pitchFamily="34" charset="-120"/>
-              </a:rPr>
-              <a:t>Takeaway  </a:t>
-            </a:r>
-            <a:pPr indent="0" marL="0">
-              <a:buNone/>
-            </a:pPr>
-            <a:r>
-              <a:rPr lang="en-US" sz="1150" dirty="0">
-                <a:solidFill>
-                  <a:srgbClr val="1C1917"/>
-                </a:solidFill>
-                <a:latin typeface="Arial" pitchFamily="34" charset="0"/>
-                <a:ea typeface="Arial" pitchFamily="34" charset="-122"/>
-                <a:cs typeface="Arial" pitchFamily="34" charset="-120"/>
-              </a:rPr>
-              <a:t>The most dangerous errors come from ignoring input correlations and conflating two distinct analytical methods.</a:t>
-            </a:r>
-            <a:endParaRPr lang="en-US" sz="1100" dirty="0"/>
-          </a:p>
-        </p:txBody>
-      </p:sp>
-    </p:spTree>
-  </p:cSld>
-  <p:clrMapOvr>
-    <a:masterClrMapping/>
-  </p:clrMapOvr>
-</p:sld>
-</file>
-
-<file path=ppt/slides/slide13.xml><?xml version="1.0" encoding="utf-8"?>
-<p:sld xmlns:a="http://schemas.openxmlformats.org/drawingml/2006/main" xmlns:r="http://schemas.openxmlformats.org/officeDocument/2006/relationships" xmlns:p="http://schemas.openxmlformats.org/presentationml/2006/main">
-  <p:cSld name="Slide 13">
-    <p:bg>
-      <p:bgPr>
-        <a:solidFill>
-          <a:srgbClr val="FFFFFF"/>
-        </a:solidFill>
-      </p:bgPr>
-    </p:bg>
-    <p:spTree>
-      <p:nvGrpSpPr>
-        <p:cNvPr id="1" name=""/>
-        <p:cNvGrpSpPr/>
-        <p:nvPr/>
-      </p:nvGrpSpPr>
-      <p:grpSpPr>
-        <a:xfrm>
-          <a:off x="0" y="0"/>
-          <a:ext cx="0" cy="0"/>
-          <a:chOff x="0" y="0"/>
-          <a:chExt cx="0" cy="0"/>
-        </a:xfrm>
-      </p:grpSpPr>
-      <p:sp>
-        <p:nvSpPr>
-          <p:cNvPr id="2" name="Shape 0"/>
-          <p:cNvSpPr/>
-          <p:nvPr/>
-        </p:nvSpPr>
-        <p:spPr>
-          <a:xfrm>
-            <a:off x="411480" y="384048"/>
-            <a:ext cx="82296" cy="310896"/>
-          </a:xfrm>
-          <a:prstGeom prst="rect">
-            <a:avLst/>
-          </a:prstGeom>
-          <a:solidFill>
-            <a:srgbClr val="B45309"/>
-          </a:solidFill>
-          <a:ln/>
-        </p:spPr>
-      </p:sp>
-      <p:sp>
-        <p:nvSpPr>
-          <p:cNvPr id="3" name="Text 1"/>
-          <p:cNvSpPr/>
-          <p:nvPr/>
-        </p:nvSpPr>
-        <p:spPr>
-          <a:xfrm>
-            <a:off x="566928" y="292608"/>
-            <a:ext cx="8138160" cy="502920"/>
-          </a:xfrm>
-          <a:prstGeom prst="rect">
-            <a:avLst/>
-          </a:prstGeom>
-          <a:noFill/>
-          <a:ln/>
-        </p:spPr>
-        <p:txBody>
-          <a:bodyPr wrap="square" rtlCol="0" anchor="ctr"/>
-          <a:lstStyle/>
-          <a:p>
-            <a:pPr indent="0" marL="0">
-              <a:buNone/>
-            </a:pPr>
-            <a:r>
-              <a:rPr lang="en-US" sz="2000" b="1" dirty="0">
-                <a:solidFill>
-                  <a:srgbClr val="1C1917"/>
-                </a:solidFill>
-                <a:latin typeface="Arial" pitchFamily="34" charset="0"/>
-                <a:ea typeface="Arial" pitchFamily="34" charset="-122"/>
-                <a:cs typeface="Arial" pitchFamily="34" charset="-120"/>
-              </a:rPr>
-              <a:t>Scenario vs. Sensitivity: When to Use</a:t>
-            </a:r>
-            <a:endParaRPr lang="en-US" sz="2000" dirty="0"/>
-          </a:p>
-        </p:txBody>
-      </p:sp>
-      <p:sp>
-        <p:nvSpPr>
-          <p:cNvPr id="4" name="Text 2"/>
-          <p:cNvSpPr/>
-          <p:nvPr/>
-        </p:nvSpPr>
-        <p:spPr>
-          <a:xfrm>
-            <a:off x="566928" y="4681728"/>
-            <a:ext cx="8138160" cy="320040"/>
-          </a:xfrm>
-          <a:prstGeom prst="rect">
-            <a:avLst/>
-          </a:prstGeom>
-          <a:noFill/>
-          <a:ln/>
-        </p:spPr>
-        <p:txBody>
-          <a:bodyPr wrap="square" rtlCol="0" anchor="ctr"/>
-          <a:lstStyle/>
-          <a:p>
-            <a:pPr indent="0" marL="0">
-              <a:buNone/>
-            </a:pPr>
-            <a:r>
-              <a:rPr lang="en-US" sz="1000" i="1" dirty="0">
-                <a:solidFill>
-                  <a:srgbClr val="78716C"/>
-                </a:solidFill>
-                <a:latin typeface="Arial" pitchFamily="34" charset="0"/>
-                <a:ea typeface="Arial" pitchFamily="34" charset="-122"/>
-                <a:cs typeface="Arial" pitchFamily="34" charset="-120"/>
-              </a:rPr>
-              <a:t>Choose technique based on whether you need driver isolation or a consistent narrative</a:t>
-            </a:r>
-            <a:endParaRPr lang="en-US" sz="1000" dirty="0"/>
-          </a:p>
-        </p:txBody>
-      </p:sp>
-      <p:sp>
-        <p:nvSpPr>
-          <p:cNvPr id="5" name="Text 3"/>
-          <p:cNvSpPr/>
-          <p:nvPr/>
-        </p:nvSpPr>
-        <p:spPr>
-          <a:xfrm>
-            <a:off x="411480" y="4919472"/>
-            <a:ext cx="8321040" cy="219456"/>
-          </a:xfrm>
-          <a:prstGeom prst="rect">
-            <a:avLst/>
-          </a:prstGeom>
-          <a:noFill/>
-          <a:ln/>
-        </p:spPr>
-        <p:txBody>
-          <a:bodyPr wrap="square" rtlCol="0" anchor="ctr"/>
-          <a:lstStyle/>
-          <a:p>
-            <a:pPr indent="0" marL="0">
-              <a:buNone/>
-            </a:pPr>
-            <a:r>
-              <a:rPr lang="en-US" sz="750" dirty="0">
-                <a:solidFill>
-                  <a:srgbClr val="AAAAAA"/>
-                </a:solidFill>
-                <a:latin typeface="Arial" pitchFamily="34" charset="0"/>
-                <a:ea typeface="Arial" pitchFamily="34" charset="-122"/>
-                <a:cs typeface="Arial" pitchFamily="34" charset="-120"/>
-              </a:rPr>
-              <a:t>Lesson Forge Pro (owner) — This content is educational material only and does not constitute financial, investment, or trading advice.</a:t>
-            </a:r>
-            <a:endParaRPr lang="en-US" sz="750" dirty="0"/>
-          </a:p>
-        </p:txBody>
-      </p:sp>
-      <p:sp>
-        <p:nvSpPr>
-          <p:cNvPr id="6" name="Shape 4"/>
-          <p:cNvSpPr/>
-          <p:nvPr/>
-        </p:nvSpPr>
-        <p:spPr>
-          <a:xfrm>
-            <a:off x="2011680" y="1234440"/>
-            <a:ext cx="5120640" cy="3108960"/>
-          </a:xfrm>
-          <a:prstGeom prst="rect">
-            <a:avLst/>
-          </a:prstGeom>
-          <a:solidFill>
-            <a:srgbClr val="FFFFFF"/>
-          </a:solidFill>
-          <a:ln w="15240">
-            <a:solidFill>
-              <a:srgbClr val="1C1917"/>
-            </a:solidFill>
-            <a:prstDash val="solid"/>
-          </a:ln>
-        </p:spPr>
-      </p:sp>
-      <p:sp>
-        <p:nvSpPr>
-          <p:cNvPr id="7" name="Shape 5"/>
-          <p:cNvSpPr/>
-          <p:nvPr/>
-        </p:nvSpPr>
-        <p:spPr>
-          <a:xfrm>
-            <a:off x="4572000" y="1234440"/>
-            <a:ext cx="0" cy="3108960"/>
-          </a:xfrm>
-          <a:prstGeom prst="line">
-            <a:avLst/>
-          </a:prstGeom>
-          <a:noFill/>
-          <a:ln w="11430">
-            <a:solidFill>
-              <a:srgbClr val="1C1917"/>
-            </a:solidFill>
-            <a:prstDash val="solid"/>
-          </a:ln>
-        </p:spPr>
-      </p:sp>
-      <p:sp>
-        <p:nvSpPr>
-          <p:cNvPr id="8" name="Shape 6"/>
-          <p:cNvSpPr/>
-          <p:nvPr/>
-        </p:nvSpPr>
-        <p:spPr>
-          <a:xfrm>
-            <a:off x="2011680" y="2788920"/>
-            <a:ext cx="5120640" cy="0"/>
-          </a:xfrm>
-          <a:prstGeom prst="line">
-            <a:avLst/>
-          </a:prstGeom>
-          <a:noFill/>
-          <a:ln w="11430">
-            <a:solidFill>
-              <a:srgbClr val="1C1917"/>
-            </a:solidFill>
-            <a:prstDash val="solid"/>
-          </a:ln>
-        </p:spPr>
-      </p:sp>
-      <p:sp>
-        <p:nvSpPr>
-          <p:cNvPr id="9" name="Shape 7"/>
-          <p:cNvSpPr/>
-          <p:nvPr/>
-        </p:nvSpPr>
-        <p:spPr>
-          <a:xfrm>
-            <a:off x="2240280" y="1600200"/>
-            <a:ext cx="2103120" cy="822960"/>
-          </a:xfrm>
-          <a:prstGeom prst="roundRect">
-            <a:avLst>
-              <a:gd name="adj" fmla="val 11111"/>
-            </a:avLst>
-          </a:prstGeom>
-          <a:solidFill>
-            <a:srgbClr val="B45309">
-              <a:alpha val="15000"/>
-            </a:srgbClr>
-          </a:solidFill>
-          <a:ln/>
-        </p:spPr>
-      </p:sp>
-      <p:sp>
-        <p:nvSpPr>
-          <p:cNvPr id="10" name="Text 8"/>
-          <p:cNvSpPr/>
-          <p:nvPr/>
-        </p:nvSpPr>
-        <p:spPr>
-          <a:xfrm>
-            <a:off x="2240280" y="1600200"/>
-            <a:ext cx="2103120" cy="822960"/>
-          </a:xfrm>
-          <a:prstGeom prst="rect">
-            <a:avLst/>
-          </a:prstGeom>
-          <a:noFill/>
-          <a:ln/>
-        </p:spPr>
-        <p:txBody>
-          <a:bodyPr wrap="square" rtlCol="0" anchor="ctr"/>
-          <a:lstStyle/>
-          <a:p>
-            <a:pPr algn="ctr" indent="0" marL="0">
-              <a:buNone/>
-            </a:pPr>
-            <a:r>
-              <a:rPr lang="en-US" sz="1200" b="1" dirty="0">
-                <a:solidFill>
-                  <a:srgbClr val="1C1917"/>
-                </a:solidFill>
-                <a:latin typeface="Arial" pitchFamily="34" charset="0"/>
-                <a:ea typeface="Arial" pitchFamily="34" charset="-122"/>
-                <a:cs typeface="Arial" pitchFamily="34" charset="-120"/>
-              </a:rPr>
-              <a:t>Scenario Planning</a:t>
-            </a:r>
-            <a:endParaRPr lang="en-US" sz="1200" dirty="0"/>
-          </a:p>
-          <a:p>
-            <a:pPr algn="ctr" indent="0" marL="0">
-              <a:buNone/>
-            </a:pPr>
-            <a:r>
-              <a:rPr lang="en-US" sz="900" dirty="0">
-                <a:solidFill>
-                  <a:srgbClr val="78716C"/>
-                </a:solidFill>
-                <a:latin typeface="Arial" pitchFamily="34" charset="0"/>
-                <a:ea typeface="Arial" pitchFamily="34" charset="-122"/>
-                <a:cs typeface="Arial" pitchFamily="34" charset="-120"/>
-              </a:rPr>
-              <a:t>Multiple inputs change in one coherent story</a:t>
-            </a:r>
-            <a:endParaRPr lang="en-US" sz="1200" dirty="0"/>
-          </a:p>
-        </p:txBody>
-      </p:sp>
-      <p:sp>
-        <p:nvSpPr>
-          <p:cNvPr id="11" name="Shape 9"/>
-          <p:cNvSpPr/>
-          <p:nvPr/>
-        </p:nvSpPr>
-        <p:spPr>
-          <a:xfrm>
-            <a:off x="4800600" y="1600200"/>
-            <a:ext cx="2103120" cy="822960"/>
-          </a:xfrm>
-          <a:prstGeom prst="roundRect">
-            <a:avLst>
-              <a:gd name="adj" fmla="val 11111"/>
-            </a:avLst>
-          </a:prstGeom>
-          <a:solidFill>
-            <a:srgbClr val="B45309">
-              <a:alpha val="15000"/>
-            </a:srgbClr>
-          </a:solidFill>
-          <a:ln/>
-        </p:spPr>
-      </p:sp>
-      <p:sp>
-        <p:nvSpPr>
-          <p:cNvPr id="12" name="Text 10"/>
-          <p:cNvSpPr/>
-          <p:nvPr/>
-        </p:nvSpPr>
-        <p:spPr>
-          <a:xfrm>
-            <a:off x="4800600" y="1600200"/>
-            <a:ext cx="2103120" cy="822960"/>
-          </a:xfrm>
-          <a:prstGeom prst="rect">
-            <a:avLst/>
-          </a:prstGeom>
-          <a:noFill/>
-          <a:ln/>
-        </p:spPr>
-        <p:txBody>
-          <a:bodyPr wrap="square" rtlCol="0" anchor="ctr"/>
-          <a:lstStyle/>
-          <a:p>
-            <a:pPr algn="ctr" indent="0" marL="0">
-              <a:buNone/>
-            </a:pPr>
-            <a:r>
-              <a:rPr lang="en-US" sz="1200" b="1" dirty="0">
-                <a:solidFill>
-                  <a:srgbClr val="1C1917"/>
-                </a:solidFill>
-                <a:latin typeface="Arial" pitchFamily="34" charset="0"/>
-                <a:ea typeface="Arial" pitchFamily="34" charset="-122"/>
-                <a:cs typeface="Arial" pitchFamily="34" charset="-120"/>
-              </a:rPr>
-              <a:t>Sensitivity Analysis</a:t>
-            </a:r>
-            <a:endParaRPr lang="en-US" sz="1200" dirty="0"/>
-          </a:p>
-          <a:p>
-            <a:pPr algn="ctr" indent="0" marL="0">
-              <a:buNone/>
-            </a:pPr>
-            <a:r>
-              <a:rPr lang="en-US" sz="900" dirty="0">
-                <a:solidFill>
-                  <a:srgbClr val="78716C"/>
-                </a:solidFill>
-                <a:latin typeface="Arial" pitchFamily="34" charset="0"/>
-                <a:ea typeface="Arial" pitchFamily="34" charset="-122"/>
-                <a:cs typeface="Arial" pitchFamily="34" charset="-120"/>
-              </a:rPr>
-              <a:t>One input moves; all others held constant</a:t>
-            </a:r>
-            <a:endParaRPr lang="en-US" sz="1200" dirty="0"/>
-          </a:p>
-        </p:txBody>
-      </p:sp>
-      <p:sp>
-        <p:nvSpPr>
-          <p:cNvPr id="13" name="Shape 11"/>
-          <p:cNvSpPr/>
-          <p:nvPr/>
-        </p:nvSpPr>
-        <p:spPr>
-          <a:xfrm>
-            <a:off x="2240280" y="3154680"/>
-            <a:ext cx="2103120" cy="822960"/>
-          </a:xfrm>
-          <a:prstGeom prst="roundRect">
-            <a:avLst>
-              <a:gd name="adj" fmla="val 11111"/>
-            </a:avLst>
-          </a:prstGeom>
-          <a:solidFill>
-            <a:srgbClr val="B45309">
-              <a:alpha val="15000"/>
-            </a:srgbClr>
-          </a:solidFill>
-          <a:ln/>
-        </p:spPr>
-      </p:sp>
-      <p:sp>
-        <p:nvSpPr>
-          <p:cNvPr id="14" name="Text 12"/>
-          <p:cNvSpPr/>
-          <p:nvPr/>
-        </p:nvSpPr>
-        <p:spPr>
-          <a:xfrm>
-            <a:off x="2240280" y="3154680"/>
-            <a:ext cx="2103120" cy="822960"/>
-          </a:xfrm>
-          <a:prstGeom prst="rect">
-            <a:avLst/>
-          </a:prstGeom>
-          <a:noFill/>
-          <a:ln/>
-        </p:spPr>
-        <p:txBody>
-          <a:bodyPr wrap="square" rtlCol="0" anchor="ctr"/>
-          <a:lstStyle/>
-          <a:p>
-            <a:pPr algn="ctr" indent="0" marL="0">
-              <a:buNone/>
-            </a:pPr>
-            <a:r>
-              <a:rPr lang="en-US" sz="1200" b="1" dirty="0">
-                <a:solidFill>
-                  <a:srgbClr val="1C1917"/>
-                </a:solidFill>
-                <a:latin typeface="Arial" pitchFamily="34" charset="0"/>
-                <a:ea typeface="Arial" pitchFamily="34" charset="-122"/>
-                <a:cs typeface="Arial" pitchFamily="34" charset="-120"/>
-              </a:rPr>
-              <a:t>High Coherence Need</a:t>
-            </a:r>
-            <a:endParaRPr lang="en-US" sz="1200" dirty="0"/>
-          </a:p>
-          <a:p>
-            <a:pPr algn="ctr" indent="0" marL="0">
-              <a:buNone/>
-            </a:pPr>
-            <a:r>
-              <a:rPr lang="en-US" sz="900" dirty="0">
-                <a:solidFill>
-                  <a:srgbClr val="78716C"/>
-                </a:solidFill>
-                <a:latin typeface="Arial" pitchFamily="34" charset="0"/>
-                <a:ea typeface="Arial" pitchFamily="34" charset="-122"/>
-                <a:cs typeface="Arial" pitchFamily="34" charset="-120"/>
-              </a:rPr>
-              <a:t>Use scenario when drivers are logically linked</a:t>
-            </a:r>
-            <a:endParaRPr lang="en-US" sz="1200" dirty="0"/>
-          </a:p>
-        </p:txBody>
-      </p:sp>
-      <p:sp>
-        <p:nvSpPr>
-          <p:cNvPr id="15" name="Shape 13"/>
-          <p:cNvSpPr/>
-          <p:nvPr/>
-        </p:nvSpPr>
-        <p:spPr>
-          <a:xfrm>
-            <a:off x="4800600" y="3154680"/>
-            <a:ext cx="2103120" cy="822960"/>
-          </a:xfrm>
-          <a:prstGeom prst="roundRect">
-            <a:avLst>
-              <a:gd name="adj" fmla="val 11111"/>
-            </a:avLst>
-          </a:prstGeom>
-          <a:solidFill>
-            <a:srgbClr val="B45309">
-              <a:alpha val="15000"/>
-            </a:srgbClr>
-          </a:solidFill>
-          <a:ln/>
-        </p:spPr>
-      </p:sp>
-      <p:sp>
-        <p:nvSpPr>
-          <p:cNvPr id="16" name="Text 14"/>
-          <p:cNvSpPr/>
-          <p:nvPr/>
-        </p:nvSpPr>
-        <p:spPr>
-          <a:xfrm>
-            <a:off x="4800600" y="3154680"/>
-            <a:ext cx="2103120" cy="822960"/>
-          </a:xfrm>
-          <a:prstGeom prst="rect">
-            <a:avLst/>
-          </a:prstGeom>
-          <a:noFill/>
-          <a:ln/>
-        </p:spPr>
-        <p:txBody>
-          <a:bodyPr wrap="square" rtlCol="0" anchor="ctr"/>
-          <a:lstStyle/>
-          <a:p>
-            <a:pPr algn="ctr" indent="0" marL="0">
-              <a:buNone/>
-            </a:pPr>
-            <a:r>
-              <a:rPr lang="en-US" sz="1200" b="1" dirty="0">
-                <a:solidFill>
-                  <a:srgbClr val="1C1917"/>
-                </a:solidFill>
-                <a:latin typeface="Arial" pitchFamily="34" charset="0"/>
-                <a:ea typeface="Arial" pitchFamily="34" charset="-122"/>
-                <a:cs typeface="Arial" pitchFamily="34" charset="-120"/>
-              </a:rPr>
-              <a:t>Driver Isolation Need</a:t>
-            </a:r>
-            <a:endParaRPr lang="en-US" sz="1200" dirty="0"/>
-          </a:p>
-          <a:p>
-            <a:pPr algn="ctr" indent="0" marL="0">
-              <a:buNone/>
-            </a:pPr>
-            <a:r>
-              <a:rPr lang="en-US" sz="900" dirty="0">
-                <a:solidFill>
-                  <a:srgbClr val="78716C"/>
-                </a:solidFill>
-                <a:latin typeface="Arial" pitchFamily="34" charset="0"/>
-                <a:ea typeface="Arial" pitchFamily="34" charset="-122"/>
-                <a:cs typeface="Arial" pitchFamily="34" charset="-120"/>
-              </a:rPr>
-              <a:t>Use sensitivity to rank individual driver impact</a:t>
-            </a:r>
-            <a:endParaRPr lang="en-US" sz="1200" dirty="0"/>
-          </a:p>
-        </p:txBody>
-      </p:sp>
-      <p:sp>
-        <p:nvSpPr>
-          <p:cNvPr id="17" name="Text 15"/>
-          <p:cNvSpPr/>
-          <p:nvPr/>
-        </p:nvSpPr>
-        <p:spPr>
-          <a:xfrm>
-            <a:off x="1920240" y="4398264"/>
-            <a:ext cx="2194560" cy="274320"/>
-          </a:xfrm>
-          <a:prstGeom prst="rect">
-            <a:avLst/>
-          </a:prstGeom>
-          <a:noFill/>
-          <a:ln/>
-        </p:spPr>
-        <p:txBody>
-          <a:bodyPr wrap="square" rtlCol="0" anchor="ctr"/>
-          <a:lstStyle/>
-          <a:p>
-            <a:pPr indent="0" marL="0">
-              <a:buNone/>
-            </a:pPr>
-            <a:r>
-              <a:rPr lang="en-US" sz="950" dirty="0">
-                <a:solidFill>
-                  <a:srgbClr val="78716C"/>
-                </a:solidFill>
-                <a:latin typeface="Arial" pitchFamily="34" charset="0"/>
-                <a:ea typeface="Arial" pitchFamily="34" charset="-122"/>
-                <a:cs typeface="Arial" pitchFamily="34" charset="-120"/>
-              </a:rPr>
-              <a:t>Single Driver</a:t>
-            </a:r>
-            <a:endParaRPr lang="en-US" sz="950" dirty="0"/>
-          </a:p>
-        </p:txBody>
-      </p:sp>
-      <p:sp>
-        <p:nvSpPr>
-          <p:cNvPr id="18" name="Text 16"/>
-          <p:cNvSpPr/>
-          <p:nvPr/>
-        </p:nvSpPr>
-        <p:spPr>
-          <a:xfrm>
-            <a:off x="5029200" y="4398264"/>
-            <a:ext cx="2194560" cy="274320"/>
-          </a:xfrm>
-          <a:prstGeom prst="rect">
-            <a:avLst/>
-          </a:prstGeom>
-          <a:noFill/>
-          <a:ln/>
-        </p:spPr>
-        <p:txBody>
-          <a:bodyPr wrap="square" rtlCol="0" anchor="ctr"/>
-          <a:lstStyle/>
-          <a:p>
-            <a:pPr algn="r" indent="0" marL="0">
-              <a:buNone/>
-            </a:pPr>
-            <a:r>
-              <a:rPr lang="en-US" sz="950" dirty="0">
-                <a:solidFill>
-                  <a:srgbClr val="78716C"/>
-                </a:solidFill>
-                <a:latin typeface="Arial" pitchFamily="34" charset="0"/>
-                <a:ea typeface="Arial" pitchFamily="34" charset="-122"/>
-                <a:cs typeface="Arial" pitchFamily="34" charset="-120"/>
-              </a:rPr>
-              <a:t>Multiple Drivers</a:t>
-            </a:r>
-            <a:endParaRPr lang="en-US" sz="950" dirty="0"/>
-          </a:p>
-        </p:txBody>
-      </p:sp>
-      <p:sp>
-        <p:nvSpPr>
-          <p:cNvPr id="19" name="Text 17"/>
-          <p:cNvSpPr/>
-          <p:nvPr/>
-        </p:nvSpPr>
-        <p:spPr>
-          <a:xfrm>
-            <a:off x="45720" y="1280160"/>
-            <a:ext cx="1828800" cy="274320"/>
-          </a:xfrm>
-          <a:prstGeom prst="rect">
-            <a:avLst/>
-          </a:prstGeom>
-          <a:noFill/>
-          <a:ln/>
-        </p:spPr>
-        <p:txBody>
-          <a:bodyPr wrap="square" rtlCol="0" anchor="ctr"/>
-          <a:lstStyle/>
-          <a:p>
-            <a:pPr algn="r" indent="0" marL="0">
-              <a:buNone/>
-            </a:pPr>
-            <a:r>
-              <a:rPr lang="en-US" sz="950" dirty="0">
-                <a:solidFill>
-                  <a:srgbClr val="78716C"/>
-                </a:solidFill>
-                <a:latin typeface="Arial" pitchFamily="34" charset="0"/>
-                <a:ea typeface="Arial" pitchFamily="34" charset="-122"/>
-                <a:cs typeface="Arial" pitchFamily="34" charset="-120"/>
-              </a:rPr>
-              <a:t>Coherent Story</a:t>
-            </a:r>
-            <a:endParaRPr lang="en-US" sz="950" dirty="0"/>
-          </a:p>
-        </p:txBody>
-      </p:sp>
-      <p:sp>
-        <p:nvSpPr>
-          <p:cNvPr id="20" name="Text 18"/>
-          <p:cNvSpPr/>
-          <p:nvPr/>
-        </p:nvSpPr>
-        <p:spPr>
-          <a:xfrm>
-            <a:off x="45720" y="4023360"/>
-            <a:ext cx="1828800" cy="274320"/>
-          </a:xfrm>
-          <a:prstGeom prst="rect">
-            <a:avLst/>
-          </a:prstGeom>
-          <a:noFill/>
-          <a:ln/>
-        </p:spPr>
-        <p:txBody>
-          <a:bodyPr wrap="square" rtlCol="0" anchor="ctr"/>
-          <a:lstStyle/>
-          <a:p>
-            <a:pPr algn="r" indent="0" marL="0">
-              <a:buNone/>
-            </a:pPr>
-            <a:r>
-              <a:rPr lang="en-US" sz="950" dirty="0">
-                <a:solidFill>
-                  <a:srgbClr val="78716C"/>
-                </a:solidFill>
-                <a:latin typeface="Arial" pitchFamily="34" charset="0"/>
-                <a:ea typeface="Arial" pitchFamily="34" charset="-122"/>
-                <a:cs typeface="Arial" pitchFamily="34" charset="-120"/>
-              </a:rPr>
-              <a:t>Isolated Effect</a:t>
-            </a:r>
-            <a:endParaRPr lang="en-US" sz="950" dirty="0"/>
-          </a:p>
-        </p:txBody>
-      </p:sp>
-    </p:spTree>
-  </p:cSld>
-  <p:clrMapOvr>
-    <a:masterClrMapping/>
-  </p:clrMapOvr>
-</p:sld>
-</file>
-
-<file path=ppt/slides/slide14.xml><?xml version="1.0" encoding="utf-8"?>
-<p:sld xmlns:a="http://schemas.openxmlformats.org/drawingml/2006/main" xmlns:r="http://schemas.openxmlformats.org/officeDocument/2006/relationships" xmlns:p="http://schemas.openxmlformats.org/presentationml/2006/main">
-  <p:cSld name="Slide 14">
-    <p:bg>
-      <p:bgPr>
-        <a:solidFill>
-          <a:srgbClr val="FFFFFF"/>
-        </a:solidFill>
-      </p:bgPr>
-    </p:bg>
-    <p:spTree>
-      <p:nvGrpSpPr>
-        <p:cNvPr id="1" name=""/>
-        <p:cNvGrpSpPr/>
-        <p:nvPr/>
-      </p:nvGrpSpPr>
-      <p:grpSpPr>
-        <a:xfrm>
-          <a:off x="0" y="0"/>
-          <a:ext cx="0" cy="0"/>
-          <a:chOff x="0" y="0"/>
-          <a:chExt cx="0" cy="0"/>
-        </a:xfrm>
-      </p:grpSpPr>
-      <p:sp>
-        <p:nvSpPr>
-          <p:cNvPr id="2" name="Shape 0"/>
-          <p:cNvSpPr/>
-          <p:nvPr/>
-        </p:nvSpPr>
-        <p:spPr>
-          <a:xfrm>
-            <a:off x="411480" y="402336"/>
-            <a:ext cx="82296" cy="329184"/>
-          </a:xfrm>
-          <a:prstGeom prst="rect">
-            <a:avLst/>
-          </a:prstGeom>
-          <a:solidFill>
-            <a:srgbClr val="B45309"/>
-          </a:solidFill>
-          <a:ln/>
-        </p:spPr>
-      </p:sp>
-      <p:sp>
-        <p:nvSpPr>
-          <p:cNvPr id="3" name="Text 1"/>
-          <p:cNvSpPr/>
-          <p:nvPr/>
-        </p:nvSpPr>
-        <p:spPr>
-          <a:xfrm>
-            <a:off x="566928" y="292608"/>
-            <a:ext cx="8138160" cy="548640"/>
-          </a:xfrm>
-          <a:prstGeom prst="rect">
-            <a:avLst/>
-          </a:prstGeom>
-          <a:noFill/>
-          <a:ln/>
-        </p:spPr>
-        <p:txBody>
-          <a:bodyPr wrap="square" rtlCol="0" anchor="ctr"/>
-          <a:lstStyle/>
-          <a:p>
-            <a:pPr indent="0" marL="0">
-              <a:buNone/>
-            </a:pPr>
-            <a:r>
-              <a:rPr lang="en-US" sz="2100" b="1" dirty="0">
-                <a:solidFill>
-                  <a:srgbClr val="1C1917"/>
-                </a:solidFill>
-                <a:latin typeface="Arial" pitchFamily="34" charset="0"/>
-                <a:ea typeface="Arial" pitchFamily="34" charset="-122"/>
-                <a:cs typeface="Arial" pitchFamily="34" charset="-120"/>
-              </a:rPr>
-              <a:t>Sanity Checks</a:t>
-            </a:r>
-            <a:endParaRPr lang="en-US" sz="2100" dirty="0"/>
-          </a:p>
-        </p:txBody>
-      </p:sp>
-      <p:sp>
-        <p:nvSpPr>
-          <p:cNvPr id="4" name="Shape 2"/>
-          <p:cNvSpPr/>
-          <p:nvPr/>
-        </p:nvSpPr>
-        <p:spPr>
-          <a:xfrm>
-            <a:off x="411480" y="960120"/>
-            <a:ext cx="8321040" cy="0"/>
-          </a:xfrm>
-          <a:prstGeom prst="line">
-            <a:avLst/>
-          </a:prstGeom>
-          <a:noFill/>
-          <a:ln w="12700">
-            <a:solidFill>
-              <a:srgbClr val="E7E5E4"/>
-            </a:solidFill>
-            <a:prstDash val="solid"/>
-          </a:ln>
-        </p:spPr>
-      </p:sp>
-      <p:sp>
-        <p:nvSpPr>
-          <p:cNvPr id="5" name="Text 3"/>
-          <p:cNvSpPr/>
-          <p:nvPr/>
-        </p:nvSpPr>
-        <p:spPr>
-          <a:xfrm>
-            <a:off x="411480" y="4864608"/>
-            <a:ext cx="8321040" cy="237744"/>
-          </a:xfrm>
-          <a:prstGeom prst="rect">
-            <a:avLst/>
-          </a:prstGeom>
-          <a:noFill/>
-          <a:ln/>
-        </p:spPr>
-        <p:txBody>
-          <a:bodyPr wrap="square" rtlCol="0" anchor="ctr"/>
-          <a:lstStyle/>
-          <a:p>
-            <a:pPr indent="0" marL="0">
-              <a:buNone/>
-            </a:pPr>
-            <a:r>
-              <a:rPr lang="en-US" sz="750" dirty="0">
-                <a:solidFill>
-                  <a:srgbClr val="AAAAAA"/>
-                </a:solidFill>
-                <a:latin typeface="Arial" pitchFamily="34" charset="0"/>
-                <a:ea typeface="Arial" pitchFamily="34" charset="-122"/>
-                <a:cs typeface="Arial" pitchFamily="34" charset="-120"/>
-              </a:rPr>
-              <a:t>Lesson Forge Pro (owner) — This content is educational material only and does not constitute financial, investment, or trading advice.</a:t>
-            </a:r>
-            <a:endParaRPr lang="en-US" sz="750" dirty="0"/>
-          </a:p>
-        </p:txBody>
-      </p:sp>
-      <p:sp>
-        <p:nvSpPr>
-          <p:cNvPr id="6" name="Text 4"/>
-          <p:cNvSpPr/>
-          <p:nvPr/>
-        </p:nvSpPr>
-        <p:spPr>
-          <a:xfrm>
-            <a:off x="731520" y="1188720"/>
-            <a:ext cx="7680960" cy="2743200"/>
-          </a:xfrm>
-          <a:prstGeom prst="rect">
-            <a:avLst/>
-          </a:prstGeom>
-          <a:noFill/>
-          <a:ln/>
-        </p:spPr>
-        <p:txBody>
-          <a:bodyPr wrap="square" rtlCol="0" anchor="t"/>
-          <a:lstStyle/>
-          <a:p>
-            <a:pPr marL="152400" indent="-152400">
-              <a:spcAft>
-                <a:spcPts val="800"/>
-              </a:spcAft>
-              <a:buSzPct val="100000"/>
-              <a:buChar char="•"/>
-            </a:pPr>
-            <a:r>
-              <a:rPr lang="en-US" sz="1500" dirty="0">
-                <a:solidFill>
-                  <a:srgbClr val="1C1917"/>
-                </a:solidFill>
-                <a:latin typeface="Arial" pitchFamily="34" charset="0"/>
-                <a:ea typeface="Arial" pitchFamily="34" charset="-122"/>
-                <a:cs typeface="Arial" pitchFamily="34" charset="-120"/>
-              </a:rPr>
-              <a:t>Direction test: NPV must fall when discount rate rises—flag any reversal immediately.</a:t>
-            </a:r>
-            <a:endParaRPr lang="en-US" sz="1500" dirty="0"/>
-          </a:p>
-          <a:p>
-            <a:pPr marL="152400" indent="-152400">
-              <a:spcAft>
-                <a:spcPts val="800"/>
-              </a:spcAft>
-              <a:buSzPct val="100000"/>
-              <a:buChar char="•"/>
-            </a:pPr>
-            <a:r>
-              <a:rPr lang="en-US" sz="1500" dirty="0">
-                <a:solidFill>
-                  <a:srgbClr val="1C1917"/>
-                </a:solidFill>
-                <a:latin typeface="Arial" pitchFamily="34" charset="0"/>
-                <a:ea typeface="Arial" pitchFamily="34" charset="-122"/>
-                <a:cs typeface="Arial" pitchFamily="34" charset="-120"/>
-              </a:rPr>
-              <a:t>Magnitude test: a ±1% revenue change should not swing NPV by 300%.</a:t>
-            </a:r>
-            <a:endParaRPr lang="en-US" sz="1500" dirty="0"/>
-          </a:p>
-          <a:p>
-            <a:pPr marL="152400" indent="-152400">
-              <a:spcAft>
-                <a:spcPts val="800"/>
-              </a:spcAft>
-              <a:buSzPct val="100000"/>
-              <a:buChar char="•"/>
-            </a:pPr>
-            <a:r>
-              <a:rPr lang="en-US" sz="1500" dirty="0">
-                <a:solidFill>
-                  <a:srgbClr val="1C1917"/>
-                </a:solidFill>
-                <a:latin typeface="Arial" pitchFamily="34" charset="0"/>
-                <a:ea typeface="Arial" pitchFamily="34" charset="-122"/>
-                <a:cs typeface="Arial" pitchFamily="34" charset="-120"/>
-              </a:rPr>
-              <a:t>Limiting case test: zero revenue must produce a large negative NPV, not a positive one.</a:t>
-            </a:r>
-            <a:endParaRPr lang="en-US" sz="1500" dirty="0"/>
-          </a:p>
-          <a:p>
-            <a:pPr marL="152400" indent="-152400">
-              <a:spcAft>
-                <a:spcPts val="800"/>
-              </a:spcAft>
-              <a:buSzPct val="100000"/>
-              <a:buChar char="•"/>
-            </a:pPr>
-            <a:r>
-              <a:rPr lang="en-US" sz="1500" dirty="0">
-                <a:solidFill>
-                  <a:srgbClr val="1C1917"/>
-                </a:solidFill>
-                <a:latin typeface="Arial" pitchFamily="34" charset="0"/>
-                <a:ea typeface="Arial" pitchFamily="34" charset="-122"/>
-                <a:cs typeface="Arial" pitchFamily="34" charset="-120"/>
-              </a:rPr>
-              <a:t>Sum-of-parts check: individual sensitivity swings should roughly explain total scenario variance.</a:t>
-            </a:r>
-            <a:endParaRPr lang="en-US" sz="1500" dirty="0"/>
-          </a:p>
-        </p:txBody>
-      </p:sp>
-      <p:sp>
-        <p:nvSpPr>
-          <p:cNvPr id="7" name="Shape 5"/>
-          <p:cNvSpPr/>
-          <p:nvPr/>
-        </p:nvSpPr>
-        <p:spPr>
-          <a:xfrm>
-            <a:off x="731520" y="4041648"/>
-            <a:ext cx="7680960" cy="566928"/>
-          </a:xfrm>
-          <a:prstGeom prst="roundRect">
-            <a:avLst>
-              <a:gd name="adj" fmla="val 12903"/>
-            </a:avLst>
-          </a:prstGeom>
-          <a:solidFill>
-            <a:srgbClr val="B45309">
-              <a:alpha val="12000"/>
-            </a:srgbClr>
-          </a:solidFill>
-          <a:ln w="12700">
-            <a:solidFill>
-              <a:srgbClr val="B45309"/>
-            </a:solidFill>
-            <a:prstDash val="solid"/>
-          </a:ln>
-        </p:spPr>
-      </p:sp>
-      <p:sp>
-        <p:nvSpPr>
-          <p:cNvPr id="8" name="Text 6"/>
-          <p:cNvSpPr/>
-          <p:nvPr/>
-        </p:nvSpPr>
-        <p:spPr>
-          <a:xfrm>
-            <a:off x="868680" y="4087368"/>
-            <a:ext cx="7406640" cy="475488"/>
-          </a:xfrm>
-          <a:prstGeom prst="rect">
-            <a:avLst/>
-          </a:prstGeom>
-          <a:noFill/>
-          <a:ln/>
-        </p:spPr>
-        <p:txBody>
-          <a:bodyPr wrap="square" rtlCol="0" anchor="ctr"/>
-          <a:lstStyle/>
-          <a:p>
-            <a:pPr indent="0" marL="0">
-              <a:buNone/>
-            </a:pPr>
-            <a:r>
-              <a:rPr lang="en-US" sz="1100" b="1" dirty="0">
-                <a:solidFill>
-                  <a:srgbClr val="B45309"/>
-                </a:solidFill>
-                <a:latin typeface="Arial" pitchFamily="34" charset="0"/>
-                <a:ea typeface="Arial" pitchFamily="34" charset="-122"/>
-                <a:cs typeface="Arial" pitchFamily="34" charset="-120"/>
-              </a:rPr>
-              <a:t>Takeaway  </a:t>
-            </a:r>
-            <a:pPr indent="0" marL="0">
-              <a:buNone/>
-            </a:pPr>
-            <a:r>
-              <a:rPr lang="en-US" sz="1150" dirty="0">
-                <a:solidFill>
-                  <a:srgbClr val="1C1917"/>
-                </a:solidFill>
-                <a:latin typeface="Arial" pitchFamily="34" charset="0"/>
-                <a:ea typeface="Arial" pitchFamily="34" charset="-122"/>
-                <a:cs typeface="Arial" pitchFamily="34" charset="-120"/>
-              </a:rPr>
-              <a:t>Four targeted sanity checks catch formula errors before flawed results reach decision-makers.</a:t>
-            </a:r>
-            <a:endParaRPr lang="en-US" sz="1100" dirty="0"/>
-          </a:p>
-        </p:txBody>
-      </p:sp>
-    </p:spTree>
-  </p:cSld>
-  <p:clrMapOvr>
-    <a:masterClrMapping/>
-  </p:clrMapOvr>
-</p:sld>
-</file>
-
-<file path=ppt/slides/slide15.xml><?xml version="1.0" encoding="utf-8"?>
-<p:sld xmlns:a="http://schemas.openxmlformats.org/drawingml/2006/main" xmlns:r="http://schemas.openxmlformats.org/officeDocument/2006/relationships" xmlns:p="http://schemas.openxmlformats.org/presentationml/2006/main">
-  <p:cSld name="Slide 15">
-    <p:bg>
-      <p:bgPr>
-        <a:solidFill>
-          <a:srgbClr val="FFFFFF"/>
-        </a:solidFill>
-      </p:bgPr>
-    </p:bg>
-    <p:spTree>
-      <p:nvGrpSpPr>
-        <p:cNvPr id="1" name=""/>
-        <p:cNvGrpSpPr/>
-        <p:nvPr/>
-      </p:nvGrpSpPr>
-      <p:grpSpPr>
-        <a:xfrm>
-          <a:off x="0" y="0"/>
-          <a:ext cx="0" cy="0"/>
-          <a:chOff x="0" y="0"/>
-          <a:chExt cx="0" cy="0"/>
-        </a:xfrm>
-      </p:grpSpPr>
-      <p:sp>
-        <p:nvSpPr>
-          <p:cNvPr id="2" name="Shape 0"/>
-          <p:cNvSpPr/>
-          <p:nvPr/>
-        </p:nvSpPr>
-        <p:spPr>
-          <a:xfrm>
-            <a:off x="411480" y="402336"/>
-            <a:ext cx="82296" cy="329184"/>
-          </a:xfrm>
-          <a:prstGeom prst="rect">
-            <a:avLst/>
-          </a:prstGeom>
-          <a:solidFill>
-            <a:srgbClr val="B45309"/>
-          </a:solidFill>
-          <a:ln/>
-        </p:spPr>
-      </p:sp>
-      <p:sp>
-        <p:nvSpPr>
-          <p:cNvPr id="3" name="Text 1"/>
-          <p:cNvSpPr/>
-          <p:nvPr/>
-        </p:nvSpPr>
-        <p:spPr>
-          <a:xfrm>
-            <a:off x="566928" y="292608"/>
-            <a:ext cx="8138160" cy="548640"/>
-          </a:xfrm>
-          <a:prstGeom prst="rect">
-            <a:avLst/>
-          </a:prstGeom>
-          <a:noFill/>
-          <a:ln/>
-        </p:spPr>
-        <p:txBody>
-          <a:bodyPr wrap="square" rtlCol="0" anchor="ctr"/>
-          <a:lstStyle/>
-          <a:p>
-            <a:pPr indent="0" marL="0">
-              <a:buNone/>
-            </a:pPr>
-            <a:r>
-              <a:rPr lang="en-US" sz="2100" b="1" dirty="0">
-                <a:solidFill>
-                  <a:srgbClr val="1C1917"/>
-                </a:solidFill>
-                <a:latin typeface="Arial" pitchFamily="34" charset="0"/>
-                <a:ea typeface="Arial" pitchFamily="34" charset="-122"/>
-                <a:cs typeface="Arial" pitchFamily="34" charset="-120"/>
-              </a:rPr>
-              <a:t>Worked Example: A Flawed Attempt, Corrected</a:t>
-            </a:r>
-            <a:endParaRPr lang="en-US" sz="2100" dirty="0"/>
-          </a:p>
-        </p:txBody>
-      </p:sp>
-      <p:sp>
-        <p:nvSpPr>
-          <p:cNvPr id="4" name="Shape 2"/>
-          <p:cNvSpPr/>
-          <p:nvPr/>
-        </p:nvSpPr>
-        <p:spPr>
-          <a:xfrm>
-            <a:off x="411480" y="960120"/>
-            <a:ext cx="8321040" cy="0"/>
-          </a:xfrm>
-          <a:prstGeom prst="line">
-            <a:avLst/>
-          </a:prstGeom>
-          <a:noFill/>
-          <a:ln w="12700">
-            <a:solidFill>
-              <a:srgbClr val="E7E5E4"/>
-            </a:solidFill>
-            <a:prstDash val="solid"/>
-          </a:ln>
-        </p:spPr>
-      </p:sp>
-      <p:sp>
-        <p:nvSpPr>
-          <p:cNvPr id="5" name="Text 3"/>
-          <p:cNvSpPr/>
-          <p:nvPr/>
-        </p:nvSpPr>
-        <p:spPr>
-          <a:xfrm>
-            <a:off x="411480" y="4864608"/>
-            <a:ext cx="8321040" cy="237744"/>
-          </a:xfrm>
-          <a:prstGeom prst="rect">
-            <a:avLst/>
-          </a:prstGeom>
-          <a:noFill/>
-          <a:ln/>
-        </p:spPr>
-        <p:txBody>
-          <a:bodyPr wrap="square" rtlCol="0" anchor="ctr"/>
-          <a:lstStyle/>
-          <a:p>
-            <a:pPr indent="0" marL="0">
-              <a:buNone/>
-            </a:pPr>
-            <a:r>
-              <a:rPr lang="en-US" sz="750" dirty="0">
-                <a:solidFill>
-                  <a:srgbClr val="AAAAAA"/>
-                </a:solidFill>
-                <a:latin typeface="Arial" pitchFamily="34" charset="0"/>
-                <a:ea typeface="Arial" pitchFamily="34" charset="-122"/>
-                <a:cs typeface="Arial" pitchFamily="34" charset="-120"/>
-              </a:rPr>
-              <a:t>Lesson Forge Pro (owner) — This content is educational material only and does not constitute financial, investment, or trading advice.</a:t>
-            </a:r>
-            <a:endParaRPr lang="en-US" sz="750" dirty="0"/>
-          </a:p>
-        </p:txBody>
-      </p:sp>
-      <p:sp>
-        <p:nvSpPr>
-          <p:cNvPr id="6" name="Text 4"/>
-          <p:cNvSpPr/>
-          <p:nvPr/>
-        </p:nvSpPr>
-        <p:spPr>
-          <a:xfrm>
-            <a:off x="731520" y="1188720"/>
-            <a:ext cx="7680960" cy="2743200"/>
-          </a:xfrm>
-          <a:prstGeom prst="rect">
-            <a:avLst/>
-          </a:prstGeom>
-          <a:noFill/>
-          <a:ln/>
-        </p:spPr>
-        <p:txBody>
-          <a:bodyPr wrap="square" rtlCol="0" anchor="t"/>
-          <a:lstStyle/>
-          <a:p>
-            <a:pPr marL="152400" indent="-152400">
-              <a:spcAft>
-                <a:spcPts val="800"/>
-              </a:spcAft>
-              <a:buSzPct val="100000"/>
-              <a:buChar char="•"/>
-            </a:pPr>
-            <a:r>
-              <a:rPr lang="en-US" sz="1500" dirty="0">
-                <a:solidFill>
-                  <a:srgbClr val="1C1917"/>
-                </a:solidFill>
-                <a:latin typeface="Arial" pitchFamily="34" charset="0"/>
-                <a:ea typeface="Arial" pitchFamily="34" charset="-122"/>
-                <a:cs typeface="Arial" pitchFamily="34" charset="-120"/>
-              </a:rPr>
-              <a:t>Base-case NPV: –$600k outlay plus three discounted cash flows equals +$13.82k.</a:t>
-            </a:r>
-            <a:endParaRPr lang="en-US" sz="1500" dirty="0"/>
-          </a:p>
-          <a:p>
-            <a:pPr marL="152400" indent="-152400">
-              <a:spcAft>
-                <a:spcPts val="800"/>
-              </a:spcAft>
-              <a:buSzPct val="100000"/>
-              <a:buChar char="•"/>
-            </a:pPr>
-            <a:r>
-              <a:rPr lang="en-US" sz="1500" dirty="0">
-                <a:solidFill>
-                  <a:srgbClr val="1C1917"/>
-                </a:solidFill>
-                <a:latin typeface="Arial" pitchFamily="34" charset="0"/>
-                <a:ea typeface="Arial" pitchFamily="34" charset="-122"/>
-                <a:cs typeface="Arial" pitchFamily="34" charset="-120"/>
-              </a:rPr>
-              <a:t>Flaw: analyst varied discount rate and Year 3 cash flow simultaneously, calling it sensitivity analysis.</a:t>
-            </a:r>
-            <a:endParaRPr lang="en-US" sz="1500" dirty="0"/>
-          </a:p>
-          <a:p>
-            <a:pPr marL="152400" indent="-152400">
-              <a:spcAft>
-                <a:spcPts val="800"/>
-              </a:spcAft>
-              <a:buSzPct val="100000"/>
-              <a:buChar char="•"/>
-            </a:pPr>
-            <a:r>
-              <a:rPr lang="en-US" sz="1500" dirty="0">
-                <a:solidFill>
-                  <a:srgbClr val="1C1917"/>
-                </a:solidFill>
-                <a:latin typeface="Arial" pitchFamily="34" charset="0"/>
-                <a:ea typeface="Arial" pitchFamily="34" charset="-122"/>
-                <a:cs typeface="Arial" pitchFamily="34" charset="-120"/>
-              </a:rPr>
-              <a:t>Correct approach: isolate each variable separately to measure its true marginal impact.</a:t>
-            </a:r>
-            <a:endParaRPr lang="en-US" sz="1500" dirty="0"/>
-          </a:p>
-          <a:p>
-            <a:pPr marL="152400" indent="-152400">
-              <a:spcAft>
-                <a:spcPts val="800"/>
-              </a:spcAft>
-              <a:buSzPct val="100000"/>
-              <a:buChar char="•"/>
-            </a:pPr>
-            <a:r>
-              <a:rPr lang="en-US" sz="1500" dirty="0">
-                <a:solidFill>
-                  <a:srgbClr val="1C1917"/>
-                </a:solidFill>
-                <a:latin typeface="Arial" pitchFamily="34" charset="0"/>
-                <a:ea typeface="Arial" pitchFamily="34" charset="-122"/>
-                <a:cs typeface="Arial" pitchFamily="34" charset="-120"/>
-              </a:rPr>
-              <a:t>Two-variable grids are valid scenario tools but must never be labeled one-way sensitivity.</a:t>
-            </a:r>
-            <a:endParaRPr lang="en-US" sz="1500" dirty="0"/>
-          </a:p>
-        </p:txBody>
-      </p:sp>
-      <p:sp>
-        <p:nvSpPr>
-          <p:cNvPr id="7" name="Shape 5"/>
-          <p:cNvSpPr/>
-          <p:nvPr/>
-        </p:nvSpPr>
-        <p:spPr>
-          <a:xfrm>
-            <a:off x="731520" y="4041648"/>
-            <a:ext cx="7680960" cy="566928"/>
-          </a:xfrm>
-          <a:prstGeom prst="roundRect">
-            <a:avLst>
-              <a:gd name="adj" fmla="val 12903"/>
-            </a:avLst>
-          </a:prstGeom>
-          <a:solidFill>
-            <a:srgbClr val="B45309">
-              <a:alpha val="12000"/>
-            </a:srgbClr>
-          </a:solidFill>
-          <a:ln w="12700">
-            <a:solidFill>
-              <a:srgbClr val="B45309"/>
-            </a:solidFill>
-            <a:prstDash val="solid"/>
-          </a:ln>
-        </p:spPr>
-      </p:sp>
-      <p:sp>
-        <p:nvSpPr>
-          <p:cNvPr id="8" name="Text 6"/>
-          <p:cNvSpPr/>
-          <p:nvPr/>
-        </p:nvSpPr>
-        <p:spPr>
-          <a:xfrm>
-            <a:off x="868680" y="4087368"/>
-            <a:ext cx="7406640" cy="475488"/>
-          </a:xfrm>
-          <a:prstGeom prst="rect">
-            <a:avLst/>
-          </a:prstGeom>
-          <a:noFill/>
-          <a:ln/>
-        </p:spPr>
-        <p:txBody>
-          <a:bodyPr wrap="square" rtlCol="0" anchor="ctr"/>
-          <a:lstStyle/>
-          <a:p>
-            <a:pPr indent="0" marL="0">
-              <a:buNone/>
-            </a:pPr>
-            <a:r>
-              <a:rPr lang="en-US" sz="1100" b="1" dirty="0">
-                <a:solidFill>
-                  <a:srgbClr val="B45309"/>
-                </a:solidFill>
-                <a:latin typeface="Arial" pitchFamily="34" charset="0"/>
-                <a:ea typeface="Arial" pitchFamily="34" charset="-122"/>
-                <a:cs typeface="Arial" pitchFamily="34" charset="-120"/>
-              </a:rPr>
-              <a:t>Takeaway  </a:t>
-            </a:r>
-            <a:pPr indent="0" marL="0">
-              <a:buNone/>
-            </a:pPr>
-            <a:r>
-              <a:rPr lang="en-US" sz="1150" dirty="0">
-                <a:solidFill>
-                  <a:srgbClr val="1C1917"/>
-                </a:solidFill>
-                <a:latin typeface="Arial" pitchFamily="34" charset="0"/>
-                <a:ea typeface="Arial" pitchFamily="34" charset="-122"/>
-                <a:cs typeface="Arial" pitchFamily="34" charset="-120"/>
-              </a:rPr>
-              <a:t>Isolating one variable at a time is the defining discipline that makes sensitivity analysis interpretable.</a:t>
-            </a:r>
-            <a:endParaRPr lang="en-US" sz="1100" dirty="0"/>
-          </a:p>
-        </p:txBody>
-      </p:sp>
-    </p:spTree>
-  </p:cSld>
-  <p:clrMapOvr>
-    <a:masterClrMapping/>
-  </p:clrMapOvr>
-</p:sld>
-</file>
-
-<file path=ppt/slides/slide16.xml><?xml version="1.0" encoding="utf-8"?>
-<p:sld xmlns:a="http://schemas.openxmlformats.org/drawingml/2006/main" xmlns:r="http://schemas.openxmlformats.org/officeDocument/2006/relationships" xmlns:p="http://schemas.openxmlformats.org/presentationml/2006/main">
-  <p:cSld name="Slide 16">
-    <p:bg>
-      <p:bgPr>
-        <a:solidFill>
-          <a:srgbClr val="FFFFFF"/>
-        </a:solidFill>
-      </p:bgPr>
-    </p:bg>
-    <p:spTree>
-      <p:nvGrpSpPr>
-        <p:cNvPr id="1" name=""/>
-        <p:cNvGrpSpPr/>
-        <p:nvPr/>
-      </p:nvGrpSpPr>
-      <p:grpSpPr>
-        <a:xfrm>
-          <a:off x="0" y="0"/>
-          <a:ext cx="0" cy="0"/>
-          <a:chOff x="0" y="0"/>
-          <a:chExt cx="0" cy="0"/>
-        </a:xfrm>
-      </p:grpSpPr>
-      <p:sp>
-        <p:nvSpPr>
-          <p:cNvPr id="2" name="Shape 0"/>
-          <p:cNvSpPr/>
-          <p:nvPr/>
-        </p:nvSpPr>
-        <p:spPr>
-          <a:xfrm>
             <a:off x="0" y="4480560"/>
             <a:ext cx="9144000" cy="667512"/>
           </a:xfrm>
@@ -5431,7 +3489,7 @@
                 <a:ea typeface="Arial" pitchFamily="34" charset="-122"/>
                 <a:cs typeface="Arial" pitchFamily="34" charset="-120"/>
               </a:rPr>
-              <a:t>Concepts and Vocabulary</a:t>
+              <a:t>Scenario Planning Frameworks: Base, Bull, and Bear Cases</a:t>
             </a:r>
             <a:endParaRPr lang="en-US" sz="1600" dirty="0"/>
           </a:p>
@@ -5452,7 +3510,7 @@
                 <a:ea typeface="Arial" pitchFamily="34" charset="-122"/>
                 <a:cs typeface="Arial" pitchFamily="34" charset="-120"/>
               </a:rPr>
-              <a:t>The Standard Procedure</a:t>
+              <a:t>One-Variable Sensitivity Analysis and Tornado Charts</a:t>
             </a:r>
             <a:endParaRPr lang="en-US" sz="1600" dirty="0"/>
           </a:p>
@@ -5473,7 +3531,7 @@
                 <a:ea typeface="Arial" pitchFamily="34" charset="-122"/>
                 <a:cs typeface="Arial" pitchFamily="34" charset="-120"/>
               </a:rPr>
-              <a:t>Inputs</a:t>
+              <a:t>Two-Variable Data Tables and Heat Maps</a:t>
             </a:r>
             <a:endParaRPr lang="en-US" sz="1600" dirty="0"/>
           </a:p>
@@ -5494,7 +3552,7 @@
                 <a:ea typeface="Arial" pitchFamily="34" charset="-122"/>
                 <a:cs typeface="Arial" pitchFamily="34" charset="-120"/>
               </a:rPr>
-              <a:t>The Step-by-Step Procedure</a:t>
+              <a:t>Break-Even and Goal-Seek Analysis</a:t>
             </a:r>
             <a:endParaRPr lang="en-US" sz="1600" dirty="0"/>
           </a:p>
@@ -5515,7 +3573,7 @@
                 <a:ea typeface="Arial" pitchFamily="34" charset="-122"/>
                 <a:cs typeface="Arial" pitchFamily="34" charset="-120"/>
               </a:rPr>
-              <a:t>Worked Example</a:t>
+              <a:t>Variance-Based and Global Sensitivity Methods</a:t>
             </a:r>
             <a:endParaRPr lang="en-US" sz="1600" dirty="0"/>
           </a:p>
@@ -5536,91 +3594,7 @@
                 <a:ea typeface="Arial" pitchFamily="34" charset="-122"/>
                 <a:cs typeface="Arial" pitchFamily="34" charset="-120"/>
               </a:rPr>
-              <a:t>Outputs and Checks</a:t>
-            </a:r>
-            <a:endParaRPr lang="en-US" sz="1600" dirty="0"/>
-          </a:p>
-          <a:p>
-            <a:pPr marL="177800" indent="-177800">
-              <a:spcAft>
-                <a:spcPts val="1000"/>
-              </a:spcAft>
-              <a:buSzPct val="100000"/>
-              <a:buChar char="▪"/>
-            </a:pPr>
-            <a:r>
-              <a:rPr lang="en-US" sz="1600" dirty="0">
-                <a:solidFill>
-                  <a:srgbClr val="1C1917"/>
-                </a:solidFill>
-                <a:latin typeface="Arial" pitchFamily="34" charset="0"/>
-                <a:ea typeface="Arial" pitchFamily="34" charset="-122"/>
-                <a:cs typeface="Arial" pitchFamily="34" charset="-120"/>
-              </a:rPr>
-              <a:t>Applications and Pitfalls</a:t>
-            </a:r>
-            <a:endParaRPr lang="en-US" sz="1600" dirty="0"/>
-          </a:p>
-          <a:p>
-            <a:pPr marL="177800" indent="-177800">
-              <a:spcAft>
-                <a:spcPts val="1000"/>
-              </a:spcAft>
-              <a:buSzPct val="100000"/>
-              <a:buChar char="▪"/>
-            </a:pPr>
-            <a:r>
-              <a:rPr lang="en-US" sz="1600" dirty="0">
-                <a:solidFill>
-                  <a:srgbClr val="1C1917"/>
-                </a:solidFill>
-                <a:latin typeface="Arial" pitchFamily="34" charset="0"/>
-                <a:ea typeface="Arial" pitchFamily="34" charset="-122"/>
-                <a:cs typeface="Arial" pitchFamily="34" charset="-120"/>
-              </a:rPr>
-              <a:t>Common Mistakes</a:t>
-            </a:r>
-            <a:endParaRPr lang="en-US" sz="1600" dirty="0"/>
-          </a:p>
-          <a:p>
-            <a:pPr marL="177800" indent="-177800">
-              <a:spcAft>
-                <a:spcPts val="1000"/>
-              </a:spcAft>
-              <a:buSzPct val="100000"/>
-              <a:buChar char="▪"/>
-            </a:pPr>
-            <a:r>
-              <a:rPr lang="en-US" sz="1600" dirty="0">
-                <a:solidFill>
-                  <a:srgbClr val="1C1917"/>
-                </a:solidFill>
-                <a:latin typeface="Arial" pitchFamily="34" charset="0"/>
-                <a:ea typeface="Arial" pitchFamily="34" charset="-122"/>
-                <a:cs typeface="Arial" pitchFamily="34" charset="-120"/>
-              </a:rPr>
-              <a:t>Sanity Checks</a:t>
-            </a:r>
-            <a:endParaRPr lang="en-US" sz="1600" dirty="0"/>
-          </a:p>
-          <a:p>
-            <a:pPr marL="177800" indent="-177800">
-              <a:spcAft>
-                <a:spcPts val="1000"/>
-              </a:spcAft>
-              <a:buSzPct val="100000"/>
-              <a:buChar char="▪"/>
-            </a:pPr>
-            <a:r>
-              <a:rPr lang="en-US" sz="1600" dirty="0">
-                <a:solidFill>
-                  <a:srgbClr val="1C1917"/>
-                </a:solidFill>
-                <a:latin typeface="Arial" pitchFamily="34" charset="0"/>
-                <a:ea typeface="Arial" pitchFamily="34" charset="-122"/>
-                <a:cs typeface="Arial" pitchFamily="34" charset="-120"/>
-              </a:rPr>
-              <a:t>Worked Example: A Flawed Attempt, Corrected</a:t>
+              <a:t>Building Interactive Scenario Dashboards in Excel</a:t>
             </a:r>
             <a:endParaRPr lang="en-US" sz="1600" dirty="0"/>
           </a:p>
@@ -5711,7 +3685,7 @@
                 <a:ea typeface="Arial" pitchFamily="34" charset="-122"/>
                 <a:cs typeface="Arial" pitchFamily="34" charset="-120"/>
               </a:rPr>
-              <a:t>Concepts and Vocabulary</a:t>
+              <a:t>Scenario Planning Frameworks: Base, Bull, and Bear Cases</a:t>
             </a:r>
             <a:endParaRPr lang="en-US" sz="2100" dirty="0"/>
           </a:p>
@@ -5816,7 +3790,7 @@
                 <a:ea typeface="Arial" pitchFamily="34" charset="-122"/>
                 <a:cs typeface="Arial" pitchFamily="34" charset="-120"/>
               </a:rPr>
-              <a:t>A model maps inputs through relationships to a decision-relevant output.</a:t>
+              <a:t>A scenario bundles every assumption that moves together logically.</a:t>
             </a:r>
             <a:endParaRPr lang="en-US" sz="1500" dirty="0"/>
           </a:p>
@@ -5837,7 +3811,7 @@
                 <a:ea typeface="Arial" pitchFamily="34" charset="-122"/>
                 <a:cs typeface="Arial" pitchFamily="34" charset="-120"/>
               </a:rPr>
-              <a:t>Input variables (drivers) include growth rate, margin, and discount rate.</a:t>
+              <a:t>Changing one input while freezing others creates internally inconsistent models.</a:t>
             </a:r>
             <a:endParaRPr lang="en-US" sz="1500" dirty="0"/>
           </a:p>
@@ -5858,7 +3832,7 @@
                 <a:ea typeface="Arial" pitchFamily="34" charset="-122"/>
                 <a:cs typeface="Arial" pitchFamily="34" charset="-120"/>
               </a:rPr>
-              <a:t>Output variables are metrics like NPV, EPS, or free cash flow.</a:t>
+              <a:t>Accelerating growth drives headcount, infrastructure, working capital simultaneously.</a:t>
             </a:r>
             <a:endParaRPr lang="en-US" sz="1500" dirty="0"/>
           </a:p>
@@ -5879,7 +3853,28 @@
                 <a:ea typeface="Arial" pitchFamily="34" charset="-122"/>
                 <a:cs typeface="Arial" pitchFamily="34" charset="-120"/>
               </a:rPr>
-              <a:t>Precise vocabulary is essential for client, colleague, and examiner credibility.</a:t>
+              <a:t>Base case anchors to management guidance and consensus estimates.</a:t>
+            </a:r>
+            <a:endParaRPr lang="en-US" sz="1500" dirty="0"/>
+          </a:p>
+          <a:p>
+            <a:pPr marL="152400" indent="-152400">
+              <a:spcAft>
+                <a:spcPts val="800"/>
+              </a:spcAft>
+              <a:buSzPct val="100000"/>
+              <a:buChar char="•"/>
+            </a:pPr>
+            <a:r>
+              <a:rPr lang="en-US" sz="1500" dirty="0">
+                <a:solidFill>
+                  <a:srgbClr val="1C1917"/>
+                </a:solidFill>
+                <a:latin typeface="Arial" pitchFamily="34" charset="0"/>
+                <a:ea typeface="Arial" pitchFamily="34" charset="-122"/>
+                <a:cs typeface="Arial" pitchFamily="34" charset="-120"/>
+              </a:rPr>
+              <a:t>Bull and bear cases reflect coherent real-world condition sets, not single toggles.</a:t>
             </a:r>
             <a:endParaRPr lang="en-US" sz="1500" dirty="0"/>
           </a:p>
@@ -5961,7 +3956,7 @@
                 <a:ea typeface="Arial" pitchFamily="34" charset="-122"/>
                 <a:cs typeface="Arial" pitchFamily="34" charset="-120"/>
               </a:rPr>
-              <a:t>Mastering core definitions is the prerequisite for every scenario and sensitivity conversation.</a:t>
+              <a:t>Valid scenarios are internally consistent assumption bundles, not single-cell toggles.</a:t>
             </a:r>
             <a:endParaRPr lang="en-US" sz="1100" dirty="0"/>
           </a:p>
@@ -6052,7 +4047,7 @@
                 <a:ea typeface="Arial" pitchFamily="34" charset="-122"/>
                 <a:cs typeface="Arial" pitchFamily="34" charset="-120"/>
               </a:rPr>
-              <a:t>The Standard Procedure</a:t>
+              <a:t>One-Variable Sensitivity Analysis and Tornado Charts</a:t>
             </a:r>
             <a:endParaRPr lang="en-US" sz="2100" dirty="0"/>
           </a:p>
@@ -6157,7 +4152,7 @@
                 <a:ea typeface="Arial" pitchFamily="34" charset="-122"/>
                 <a:cs typeface="Arial" pitchFamily="34" charset="-120"/>
               </a:rPr>
-              <a:t>A structured, repeatable procedure converts assumptions into trustworthy outputs.</a:t>
+              <a:t>Isolate one input, hold all others fixed, record output across a range.</a:t>
             </a:r>
             <a:endParaRPr lang="en-US" sz="1500" dirty="0"/>
           </a:p>
@@ -6178,7 +4173,7 @@
                 <a:ea typeface="Arial" pitchFamily="34" charset="-122"/>
                 <a:cs typeface="Arial" pitchFamily="34" charset="-120"/>
               </a:rPr>
-              <a:t>Actionable insight requires discipline—not just impressive-looking spreadsheets.</a:t>
+              <a:t>Standard convention: vary each input ±10–20% from base case.</a:t>
             </a:r>
             <a:endParaRPr lang="en-US" sz="1500" dirty="0"/>
           </a:p>
@@ -6199,7 +4194,7 @@
                 <a:ea typeface="Arial" pitchFamily="34" charset="-122"/>
                 <a:cs typeface="Arial" pitchFamily="34" charset="-120"/>
               </a:rPr>
-              <a:t>Every step moves from clearly defined inputs through the model to interrogable results.</a:t>
+              <a:t>Calculate output swing to measure each input's valuation impact.</a:t>
             </a:r>
             <a:endParaRPr lang="en-US" sz="1500" dirty="0"/>
           </a:p>
@@ -6220,7 +4215,28 @@
                 <a:ea typeface="Arial" pitchFamily="34" charset="-122"/>
                 <a:cs typeface="Arial" pitchFamily="34" charset="-120"/>
               </a:rPr>
-              <a:t>Repeatability ensures results can be audited, challenged, and updated.</a:t>
+              <a:t>Tornado chart ranks inputs by swing size, largest bar on top.</a:t>
+            </a:r>
+            <a:endParaRPr lang="en-US" sz="1500" dirty="0"/>
+          </a:p>
+          <a:p>
+            <a:pPr marL="152400" indent="-152400">
+              <a:spcAft>
+                <a:spcPts val="800"/>
+              </a:spcAft>
+              <a:buSzPct val="100000"/>
+              <a:buChar char="•"/>
+            </a:pPr>
+            <a:r>
+              <a:rPr lang="en-US" sz="1500" dirty="0">
+                <a:solidFill>
+                  <a:srgbClr val="1C1917"/>
+                </a:solidFill>
+                <a:latin typeface="Arial" pitchFamily="34" charset="0"/>
+                <a:ea typeface="Arial" pitchFamily="34" charset="-122"/>
+                <a:cs typeface="Arial" pitchFamily="34" charset="-120"/>
+              </a:rPr>
+              <a:t>The chart reveals where model risk actually lives.</a:t>
             </a:r>
             <a:endParaRPr lang="en-US" sz="1500" dirty="0"/>
           </a:p>
@@ -6302,7 +4318,7 @@
                 <a:ea typeface="Arial" pitchFamily="34" charset="-122"/>
                 <a:cs typeface="Arial" pitchFamily="34" charset="-120"/>
               </a:rPr>
-              <a:t>A rigorous shared procedure separates analysts who drive decisions from those who produce noise.</a:t>
+              <a:t>Tornado charts honestly map which single inputs drive the most valuation uncertainty.</a:t>
             </a:r>
             <a:endParaRPr lang="en-US" sz="1100" dirty="0"/>
           </a:p>
@@ -6348,8 +4364,8 @@
         </p:nvSpPr>
         <p:spPr>
           <a:xfrm>
-            <a:off x="411480" y="402336"/>
-            <a:ext cx="82296" cy="329184"/>
+            <a:off x="411480" y="384048"/>
+            <a:ext cx="82296" cy="310896"/>
           </a:xfrm>
           <a:prstGeom prst="rect">
             <a:avLst/>
@@ -6369,7 +4385,7 @@
         <p:spPr>
           <a:xfrm>
             <a:off x="566928" y="292608"/>
-            <a:ext cx="8138160" cy="548640"/>
+            <a:ext cx="8138160" cy="502920"/>
           </a:xfrm>
           <a:prstGeom prst="rect">
             <a:avLst/>
@@ -6385,7 +4401,7 @@
               <a:buNone/>
             </a:pPr>
             <a:r>
-              <a:rPr lang="en-US" sz="2100" b="1" dirty="0">
+              <a:rPr lang="en-US" sz="2000" b="1" dirty="0">
                 <a:solidFill>
                   <a:srgbClr val="1C1917"/>
                 </a:solidFill>
@@ -6393,34 +4409,50 @@
                 <a:ea typeface="Arial" pitchFamily="34" charset="-122"/>
                 <a:cs typeface="Arial" pitchFamily="34" charset="-120"/>
               </a:rPr>
-              <a:t>Inputs</a:t>
-            </a:r>
-            <a:endParaRPr lang="en-US" sz="2100" dirty="0"/>
-          </a:p>
-        </p:txBody>
-      </p:sp>
-      <p:sp>
-        <p:nvSpPr>
-          <p:cNvPr id="4" name="Shape 2"/>
-          <p:cNvSpPr/>
-          <p:nvPr/>
-        </p:nvSpPr>
-        <p:spPr>
-          <a:xfrm>
-            <a:off x="411480" y="960120"/>
-            <a:ext cx="8321040" cy="0"/>
-          </a:xfrm>
-          <a:prstGeom prst="line">
-            <a:avLst/>
-          </a:prstGeom>
-          <a:noFill/>
-          <a:ln w="12700">
-            <a:solidFill>
-              <a:srgbClr val="E7E5E4"/>
-            </a:solidFill>
-            <a:prstDash val="solid"/>
-          </a:ln>
-        </p:spPr>
+              <a:t>Scenario Planning Build Order</a:t>
+            </a:r>
+            <a:endParaRPr lang="en-US" sz="2000" dirty="0"/>
+          </a:p>
+        </p:txBody>
+      </p:sp>
+      <p:sp>
+        <p:nvSpPr>
+          <p:cNvPr id="4" name="Text 2"/>
+          <p:cNvSpPr/>
+          <p:nvPr/>
+        </p:nvSpPr>
+        <p:spPr>
+          <a:xfrm>
+            <a:off x="566928" y="4681728"/>
+            <a:ext cx="8138160" cy="320040"/>
+          </a:xfrm>
+          <a:prstGeom prst="rect">
+            <a:avLst/>
+          </a:prstGeom>
+          <a:noFill/>
+          <a:ln/>
+        </p:spPr>
+        <p:txBody>
+          <a:bodyPr wrap="square" rtlCol="0" anchor="ctr"/>
+          <a:lstStyle/>
+          <a:p>
+            <a:pPr indent="0" marL="0">
+              <a:buNone/>
+            </a:pPr>
+            <a:r>
+              <a:rPr lang="en-US" sz="1000" i="1" dirty="0">
+                <a:solidFill>
+                  <a:srgbClr val="78716C"/>
+                </a:solidFill>
+                <a:latin typeface="Arial" pitchFamily="34" charset="0"/>
+                <a:ea typeface="Arial" pitchFamily="34" charset="-122"/>
+                <a:cs typeface="Arial" pitchFamily="34" charset="-120"/>
+              </a:rPr>
+              <a:t>Build bear case first to avoid anchoring bull and base to optimism</a:t>
+            </a:r>
+            <a:endParaRPr lang="en-US" sz="1000" dirty="0"/>
+          </a:p>
+        </p:txBody>
       </p:sp>
       <p:sp>
         <p:nvSpPr>
@@ -6430,8 +4462,8 @@
         </p:nvSpPr>
         <p:spPr>
           <a:xfrm>
-            <a:off x="411480" y="4864608"/>
-            <a:ext cx="8321040" cy="237744"/>
+            <a:off x="411480" y="4919472"/>
+            <a:ext cx="8321040" cy="219456"/>
           </a:xfrm>
           <a:prstGeom prst="rect">
             <a:avLst/>
@@ -6463,132 +4495,24 @@
       </p:sp>
       <p:sp>
         <p:nvSpPr>
-          <p:cNvPr id="6" name="Text 4"/>
-          <p:cNvSpPr/>
-          <p:nvPr/>
-        </p:nvSpPr>
-        <p:spPr>
-          <a:xfrm>
-            <a:off x="731520" y="1188720"/>
-            <a:ext cx="7680960" cy="2743200"/>
-          </a:xfrm>
-          <a:prstGeom prst="rect">
-            <a:avLst/>
-          </a:prstGeom>
-          <a:noFill/>
-          <a:ln/>
-        </p:spPr>
-        <p:txBody>
-          <a:bodyPr wrap="square" rtlCol="0" anchor="t"/>
-          <a:lstStyle/>
-          <a:p>
-            <a:pPr marL="152400" indent="-152400">
-              <a:spcAft>
-                <a:spcPts val="800"/>
-              </a:spcAft>
-              <a:buSzPct val="100000"/>
-              <a:buChar char="•"/>
-            </a:pPr>
-            <a:r>
-              <a:rPr lang="en-US" sz="1500" dirty="0">
-                <a:solidFill>
-                  <a:srgbClr val="1C1917"/>
-                </a:solidFill>
-                <a:latin typeface="Arial" pitchFamily="34" charset="0"/>
-                <a:ea typeface="Arial" pitchFamily="34" charset="-122"/>
-                <a:cs typeface="Arial" pitchFamily="34" charset="-120"/>
-              </a:rPr>
-              <a:t>Document base-case assumptions: the single most-likely value per driver.</a:t>
-            </a:r>
-            <a:endParaRPr lang="en-US" sz="1500" dirty="0"/>
-          </a:p>
-          <a:p>
-            <a:pPr marL="152400" indent="-152400">
-              <a:spcAft>
-                <a:spcPts val="800"/>
-              </a:spcAft>
-              <a:buSzPct val="100000"/>
-              <a:buChar char="•"/>
-            </a:pPr>
-            <a:r>
-              <a:rPr lang="en-US" sz="1500" dirty="0">
-                <a:solidFill>
-                  <a:srgbClr val="1C1917"/>
-                </a:solidFill>
-                <a:latin typeface="Arial" pitchFamily="34" charset="0"/>
-                <a:ea typeface="Arial" pitchFamily="34" charset="-122"/>
-                <a:cs typeface="Arial" pitchFamily="34" charset="-120"/>
-              </a:rPr>
-              <a:t>Define driver ranges using historical data, benchmarks, or expert judgment.</a:t>
-            </a:r>
-            <a:endParaRPr lang="en-US" sz="1500" dirty="0"/>
-          </a:p>
-          <a:p>
-            <a:pPr marL="152400" indent="-152400">
-              <a:spcAft>
-                <a:spcPts val="800"/>
-              </a:spcAft>
-              <a:buSzPct val="100000"/>
-              <a:buChar char="•"/>
-            </a:pPr>
-            <a:r>
-              <a:rPr lang="en-US" sz="1500" dirty="0">
-                <a:solidFill>
-                  <a:srgbClr val="1C1917"/>
-                </a:solidFill>
-                <a:latin typeface="Arial" pitchFamily="34" charset="0"/>
-                <a:ea typeface="Arial" pitchFamily="34" charset="-122"/>
-                <a:cs typeface="Arial" pitchFamily="34" charset="-120"/>
-              </a:rPr>
-              <a:t>Use a working model with explicit, auditable formulas linking inputs to outputs.</a:t>
-            </a:r>
-            <a:endParaRPr lang="en-US" sz="1500" dirty="0"/>
-          </a:p>
-          <a:p>
-            <a:pPr marL="152400" indent="-152400">
-              <a:spcAft>
-                <a:spcPts val="800"/>
-              </a:spcAft>
-              <a:buSzPct val="100000"/>
-              <a:buChar char="•"/>
-            </a:pPr>
-            <a:r>
-              <a:rPr lang="en-US" sz="1500" dirty="0">
-                <a:solidFill>
-                  <a:srgbClr val="1C1917"/>
-                </a:solidFill>
-                <a:latin typeface="Arial" pitchFamily="34" charset="0"/>
-                <a:ea typeface="Arial" pitchFamily="34" charset="-122"/>
-                <a:cs typeface="Arial" pitchFamily="34" charset="-120"/>
-              </a:rPr>
-              <a:t>Select decision-relevant output metrics: NPV, EBITDA, or free cash flow.</a:t>
-            </a:r>
-            <a:endParaRPr lang="en-US" sz="1500" dirty="0"/>
-          </a:p>
-        </p:txBody>
-      </p:sp>
-      <p:sp>
-        <p:nvSpPr>
-          <p:cNvPr id="7" name="Shape 5"/>
-          <p:cNvSpPr/>
-          <p:nvPr/>
-        </p:nvSpPr>
-        <p:spPr>
-          <a:xfrm>
-            <a:off x="731520" y="4041648"/>
-            <a:ext cx="7680960" cy="566928"/>
+          <p:cNvPr id="6" name="Shape 4"/>
+          <p:cNvSpPr/>
+          <p:nvPr/>
+        </p:nvSpPr>
+        <p:spPr>
+          <a:xfrm>
+            <a:off x="411480" y="1463040"/>
+            <a:ext cx="2011680" cy="960120"/>
           </a:xfrm>
           <a:prstGeom prst="roundRect">
             <a:avLst>
-              <a:gd name="adj" fmla="val 12903"/>
+              <a:gd name="adj" fmla="val 7619"/>
             </a:avLst>
           </a:prstGeom>
           <a:solidFill>
-            <a:srgbClr val="B45309">
-              <a:alpha val="12000"/>
-            </a:srgbClr>
+            <a:srgbClr val="F5F5F4"/>
           </a:solidFill>
-          <a:ln w="12700">
+          <a:ln w="15240">
             <a:solidFill>
               <a:srgbClr val="B45309"/>
             </a:solidFill>
@@ -6598,14 +4522,55 @@
       </p:sp>
       <p:sp>
         <p:nvSpPr>
+          <p:cNvPr id="7" name="Text 5"/>
+          <p:cNvSpPr/>
+          <p:nvPr/>
+        </p:nvSpPr>
+        <p:spPr>
+          <a:xfrm>
+            <a:off x="484632" y="1536192"/>
+            <a:ext cx="310896" cy="274320"/>
+          </a:xfrm>
+          <a:prstGeom prst="rect">
+            <a:avLst/>
+          </a:prstGeom>
+          <a:solidFill>
+            <a:srgbClr val="B45309"/>
+          </a:solidFill>
+          <a:ln/>
+        </p:spPr>
+        <p:txBody>
+          <a:bodyPr wrap="square" rtlCol="0" anchor="ctr"/>
+          <a:lstStyle/>
+          <a:p>
+            <a:pPr algn="ctr" indent="0" marL="0">
+              <a:buNone/>
+            </a:pPr>
+            <a:r>
+              <a:rPr lang="en-US" sz="1000" b="1" dirty="0">
+                <a:solidFill>
+                  <a:srgbClr val="FFFFFF"/>
+                </a:solidFill>
+                <a:latin typeface="Arial" pitchFamily="34" charset="0"/>
+                <a:ea typeface="Arial" pitchFamily="34" charset="-122"/>
+                <a:cs typeface="Arial" pitchFamily="34" charset="-120"/>
+              </a:rPr>
+              <a:t>1</a:t>
+            </a:r>
+            <a:endParaRPr lang="en-US" sz="1000" dirty="0"/>
+          </a:p>
+        </p:txBody>
+      </p:sp>
+      <p:sp>
+        <p:nvSpPr>
           <p:cNvPr id="8" name="Text 6"/>
           <p:cNvSpPr/>
           <p:nvPr/>
         </p:nvSpPr>
         <p:spPr>
           <a:xfrm>
-            <a:off x="868680" y="4087368"/>
-            <a:ext cx="7406640" cy="475488"/>
+            <a:off x="411480" y="1737360"/>
+            <a:ext cx="2011680" cy="384048"/>
           </a:xfrm>
           <a:prstGeom prst="rect">
             <a:avLst/>
@@ -6617,25 +4582,11 @@
           <a:bodyPr wrap="square" rtlCol="0" anchor="ctr"/>
           <a:lstStyle/>
           <a:p>
-            <a:pPr indent="0" marL="0">
-              <a:buNone/>
-            </a:pPr>
-            <a:r>
-              <a:rPr lang="en-US" sz="1100" b="1" dirty="0">
-                <a:solidFill>
-                  <a:srgbClr val="B45309"/>
-                </a:solidFill>
-                <a:latin typeface="Arial" pitchFamily="34" charset="0"/>
-                <a:ea typeface="Arial" pitchFamily="34" charset="-122"/>
-                <a:cs typeface="Arial" pitchFamily="34" charset="-120"/>
-              </a:rPr>
-              <a:t>Takeaway  </a:t>
-            </a:r>
-            <a:pPr indent="0" marL="0">
-              <a:buNone/>
-            </a:pPr>
-            <a:r>
-              <a:rPr lang="en-US" sz="1150" dirty="0">
+            <a:pPr algn="ctr" indent="0" marL="0">
+              <a:buNone/>
+            </a:pPr>
+            <a:r>
+              <a:rPr lang="en-US" sz="1200" b="1" dirty="0">
                 <a:solidFill>
                   <a:srgbClr val="1C1917"/>
                 </a:solidFill>
@@ -6643,9 +4594,878 @@
                 <a:ea typeface="Arial" pitchFamily="34" charset="-122"/>
                 <a:cs typeface="Arial" pitchFamily="34" charset="-120"/>
               </a:rPr>
-              <a:t>Gathering and documenting all four input categories before modeling prevents downstream errors.</a:t>
-            </a:r>
-            <a:endParaRPr lang="en-US" sz="1100" dirty="0"/>
+              <a:t>Write Bear Narrative</a:t>
+            </a:r>
+            <a:endParaRPr lang="en-US" sz="1200" dirty="0"/>
+          </a:p>
+        </p:txBody>
+      </p:sp>
+      <p:sp>
+        <p:nvSpPr>
+          <p:cNvPr id="9" name="Text 7"/>
+          <p:cNvSpPr/>
+          <p:nvPr/>
+        </p:nvSpPr>
+        <p:spPr>
+          <a:xfrm>
+            <a:off x="411480" y="2084832"/>
+            <a:ext cx="2011680" cy="310896"/>
+          </a:xfrm>
+          <a:prstGeom prst="rect">
+            <a:avLst/>
+          </a:prstGeom>
+          <a:noFill/>
+          <a:ln/>
+        </p:spPr>
+        <p:txBody>
+          <a:bodyPr wrap="square" rtlCol="0" anchor="ctr"/>
+          <a:lstStyle/>
+          <a:p>
+            <a:pPr algn="ctr" indent="0" marL="0">
+              <a:buNone/>
+            </a:pPr>
+            <a:r>
+              <a:rPr lang="en-US" sz="900" dirty="0">
+                <a:solidFill>
+                  <a:srgbClr val="78716C"/>
+                </a:solidFill>
+                <a:latin typeface="Arial" pitchFamily="34" charset="0"/>
+                <a:ea typeface="Arial" pitchFamily="34" charset="-122"/>
+                <a:cs typeface="Arial" pitchFamily="34" charset="-120"/>
+              </a:rPr>
+              <a:t>Identify specific risks before touching numbers</a:t>
+            </a:r>
+            <a:endParaRPr lang="en-US" sz="900" dirty="0"/>
+          </a:p>
+        </p:txBody>
+      </p:sp>
+      <p:sp>
+        <p:nvSpPr>
+          <p:cNvPr id="10" name="Shape 8"/>
+          <p:cNvSpPr/>
+          <p:nvPr/>
+        </p:nvSpPr>
+        <p:spPr>
+          <a:xfrm>
+            <a:off x="2478024" y="1842516"/>
+            <a:ext cx="301752" cy="201168"/>
+          </a:xfrm>
+          <a:prstGeom prst="rightArrow">
+            <a:avLst/>
+          </a:prstGeom>
+          <a:solidFill>
+            <a:srgbClr val="B45309"/>
+          </a:solidFill>
+          <a:ln/>
+        </p:spPr>
+      </p:sp>
+      <p:sp>
+        <p:nvSpPr>
+          <p:cNvPr id="11" name="Shape 9"/>
+          <p:cNvSpPr/>
+          <p:nvPr/>
+        </p:nvSpPr>
+        <p:spPr>
+          <a:xfrm>
+            <a:off x="2834640" y="1463040"/>
+            <a:ext cx="2011680" cy="960120"/>
+          </a:xfrm>
+          <a:prstGeom prst="roundRect">
+            <a:avLst>
+              <a:gd name="adj" fmla="val 7619"/>
+            </a:avLst>
+          </a:prstGeom>
+          <a:solidFill>
+            <a:srgbClr val="F5F5F4"/>
+          </a:solidFill>
+          <a:ln w="15240">
+            <a:solidFill>
+              <a:srgbClr val="B45309"/>
+            </a:solidFill>
+            <a:prstDash val="solid"/>
+          </a:ln>
+        </p:spPr>
+      </p:sp>
+      <p:sp>
+        <p:nvSpPr>
+          <p:cNvPr id="12" name="Text 10"/>
+          <p:cNvSpPr/>
+          <p:nvPr/>
+        </p:nvSpPr>
+        <p:spPr>
+          <a:xfrm>
+            <a:off x="2907792" y="1536192"/>
+            <a:ext cx="310896" cy="274320"/>
+          </a:xfrm>
+          <a:prstGeom prst="rect">
+            <a:avLst/>
+          </a:prstGeom>
+          <a:solidFill>
+            <a:srgbClr val="B45309"/>
+          </a:solidFill>
+          <a:ln/>
+        </p:spPr>
+        <p:txBody>
+          <a:bodyPr wrap="square" rtlCol="0" anchor="ctr"/>
+          <a:lstStyle/>
+          <a:p>
+            <a:pPr algn="ctr" indent="0" marL="0">
+              <a:buNone/>
+            </a:pPr>
+            <a:r>
+              <a:rPr lang="en-US" sz="1000" b="1" dirty="0">
+                <a:solidFill>
+                  <a:srgbClr val="FFFFFF"/>
+                </a:solidFill>
+                <a:latin typeface="Arial" pitchFamily="34" charset="0"/>
+                <a:ea typeface="Arial" pitchFamily="34" charset="-122"/>
+                <a:cs typeface="Arial" pitchFamily="34" charset="-120"/>
+              </a:rPr>
+              <a:t>2</a:t>
+            </a:r>
+            <a:endParaRPr lang="en-US" sz="1000" dirty="0"/>
+          </a:p>
+        </p:txBody>
+      </p:sp>
+      <p:sp>
+        <p:nvSpPr>
+          <p:cNvPr id="13" name="Text 11"/>
+          <p:cNvSpPr/>
+          <p:nvPr/>
+        </p:nvSpPr>
+        <p:spPr>
+          <a:xfrm>
+            <a:off x="2834640" y="1737360"/>
+            <a:ext cx="2011680" cy="384048"/>
+          </a:xfrm>
+          <a:prstGeom prst="rect">
+            <a:avLst/>
+          </a:prstGeom>
+          <a:noFill/>
+          <a:ln/>
+        </p:spPr>
+        <p:txBody>
+          <a:bodyPr wrap="square" rtlCol="0" anchor="ctr"/>
+          <a:lstStyle/>
+          <a:p>
+            <a:pPr algn="ctr" indent="0" marL="0">
+              <a:buNone/>
+            </a:pPr>
+            <a:r>
+              <a:rPr lang="en-US" sz="1200" b="1" dirty="0">
+                <a:solidFill>
+                  <a:srgbClr val="1C1917"/>
+                </a:solidFill>
+                <a:latin typeface="Arial" pitchFamily="34" charset="0"/>
+                <a:ea typeface="Arial" pitchFamily="34" charset="-122"/>
+                <a:cs typeface="Arial" pitchFamily="34" charset="-120"/>
+              </a:rPr>
+              <a:t>Write Bull Narrative</a:t>
+            </a:r>
+            <a:endParaRPr lang="en-US" sz="1200" dirty="0"/>
+          </a:p>
+        </p:txBody>
+      </p:sp>
+      <p:sp>
+        <p:nvSpPr>
+          <p:cNvPr id="14" name="Text 12"/>
+          <p:cNvSpPr/>
+          <p:nvPr/>
+        </p:nvSpPr>
+        <p:spPr>
+          <a:xfrm>
+            <a:off x="2834640" y="2084832"/>
+            <a:ext cx="2011680" cy="310896"/>
+          </a:xfrm>
+          <a:prstGeom prst="rect">
+            <a:avLst/>
+          </a:prstGeom>
+          <a:noFill/>
+          <a:ln/>
+        </p:spPr>
+        <p:txBody>
+          <a:bodyPr wrap="square" rtlCol="0" anchor="ctr"/>
+          <a:lstStyle/>
+          <a:p>
+            <a:pPr algn="ctr" indent="0" marL="0">
+              <a:buNone/>
+            </a:pPr>
+            <a:r>
+              <a:rPr lang="en-US" sz="900" dirty="0">
+                <a:solidFill>
+                  <a:srgbClr val="78716C"/>
+                </a:solidFill>
+                <a:latin typeface="Arial" pitchFamily="34" charset="0"/>
+                <a:ea typeface="Arial" pitchFamily="34" charset="-122"/>
+                <a:cs typeface="Arial" pitchFamily="34" charset="-120"/>
+              </a:rPr>
+              <a:t>Define catalysts; confirm growth-capex linkage</a:t>
+            </a:r>
+            <a:endParaRPr lang="en-US" sz="900" dirty="0"/>
+          </a:p>
+        </p:txBody>
+      </p:sp>
+      <p:sp>
+        <p:nvSpPr>
+          <p:cNvPr id="15" name="Shape 13"/>
+          <p:cNvSpPr/>
+          <p:nvPr/>
+        </p:nvSpPr>
+        <p:spPr>
+          <a:xfrm>
+            <a:off x="4901184" y="1842516"/>
+            <a:ext cx="301752" cy="201168"/>
+          </a:xfrm>
+          <a:prstGeom prst="rightArrow">
+            <a:avLst/>
+          </a:prstGeom>
+          <a:solidFill>
+            <a:srgbClr val="B45309"/>
+          </a:solidFill>
+          <a:ln/>
+        </p:spPr>
+      </p:sp>
+      <p:sp>
+        <p:nvSpPr>
+          <p:cNvPr id="16" name="Shape 14"/>
+          <p:cNvSpPr/>
+          <p:nvPr/>
+        </p:nvSpPr>
+        <p:spPr>
+          <a:xfrm>
+            <a:off x="5257800" y="1463040"/>
+            <a:ext cx="2011680" cy="960120"/>
+          </a:xfrm>
+          <a:prstGeom prst="roundRect">
+            <a:avLst>
+              <a:gd name="adj" fmla="val 7619"/>
+            </a:avLst>
+          </a:prstGeom>
+          <a:solidFill>
+            <a:srgbClr val="F5F5F4"/>
+          </a:solidFill>
+          <a:ln w="15240">
+            <a:solidFill>
+              <a:srgbClr val="B45309"/>
+            </a:solidFill>
+            <a:prstDash val="solid"/>
+          </a:ln>
+        </p:spPr>
+      </p:sp>
+      <p:sp>
+        <p:nvSpPr>
+          <p:cNvPr id="17" name="Text 15"/>
+          <p:cNvSpPr/>
+          <p:nvPr/>
+        </p:nvSpPr>
+        <p:spPr>
+          <a:xfrm>
+            <a:off x="5330952" y="1536192"/>
+            <a:ext cx="310896" cy="274320"/>
+          </a:xfrm>
+          <a:prstGeom prst="rect">
+            <a:avLst/>
+          </a:prstGeom>
+          <a:solidFill>
+            <a:srgbClr val="B45309"/>
+          </a:solidFill>
+          <a:ln/>
+        </p:spPr>
+        <p:txBody>
+          <a:bodyPr wrap="square" rtlCol="0" anchor="ctr"/>
+          <a:lstStyle/>
+          <a:p>
+            <a:pPr algn="ctr" indent="0" marL="0">
+              <a:buNone/>
+            </a:pPr>
+            <a:r>
+              <a:rPr lang="en-US" sz="1000" b="1" dirty="0">
+                <a:solidFill>
+                  <a:srgbClr val="FFFFFF"/>
+                </a:solidFill>
+                <a:latin typeface="Arial" pitchFamily="34" charset="0"/>
+                <a:ea typeface="Arial" pitchFamily="34" charset="-122"/>
+                <a:cs typeface="Arial" pitchFamily="34" charset="-120"/>
+              </a:rPr>
+              <a:t>3</a:t>
+            </a:r>
+            <a:endParaRPr lang="en-US" sz="1000" dirty="0"/>
+          </a:p>
+        </p:txBody>
+      </p:sp>
+      <p:sp>
+        <p:nvSpPr>
+          <p:cNvPr id="18" name="Text 16"/>
+          <p:cNvSpPr/>
+          <p:nvPr/>
+        </p:nvSpPr>
+        <p:spPr>
+          <a:xfrm>
+            <a:off x="5257800" y="1737360"/>
+            <a:ext cx="2011680" cy="384048"/>
+          </a:xfrm>
+          <a:prstGeom prst="rect">
+            <a:avLst/>
+          </a:prstGeom>
+          <a:noFill/>
+          <a:ln/>
+        </p:spPr>
+        <p:txBody>
+          <a:bodyPr wrap="square" rtlCol="0" anchor="ctr"/>
+          <a:lstStyle/>
+          <a:p>
+            <a:pPr algn="ctr" indent="0" marL="0">
+              <a:buNone/>
+            </a:pPr>
+            <a:r>
+              <a:rPr lang="en-US" sz="1200" b="1" dirty="0">
+                <a:solidFill>
+                  <a:srgbClr val="1C1917"/>
+                </a:solidFill>
+                <a:latin typeface="Arial" pitchFamily="34" charset="0"/>
+                <a:ea typeface="Arial" pitchFamily="34" charset="-122"/>
+                <a:cs typeface="Arial" pitchFamily="34" charset="-120"/>
+              </a:rPr>
+              <a:t>Write Base Narrative</a:t>
+            </a:r>
+            <a:endParaRPr lang="en-US" sz="1200" dirty="0"/>
+          </a:p>
+        </p:txBody>
+      </p:sp>
+      <p:sp>
+        <p:nvSpPr>
+          <p:cNvPr id="19" name="Text 17"/>
+          <p:cNvSpPr/>
+          <p:nvPr/>
+        </p:nvSpPr>
+        <p:spPr>
+          <a:xfrm>
+            <a:off x="5257800" y="2084832"/>
+            <a:ext cx="2011680" cy="310896"/>
+          </a:xfrm>
+          <a:prstGeom prst="rect">
+            <a:avLst/>
+          </a:prstGeom>
+          <a:noFill/>
+          <a:ln/>
+        </p:spPr>
+        <p:txBody>
+          <a:bodyPr wrap="square" rtlCol="0" anchor="ctr"/>
+          <a:lstStyle/>
+          <a:p>
+            <a:pPr algn="ctr" indent="0" marL="0">
+              <a:buNone/>
+            </a:pPr>
+            <a:r>
+              <a:rPr lang="en-US" sz="900" dirty="0">
+                <a:solidFill>
+                  <a:srgbClr val="78716C"/>
+                </a:solidFill>
+                <a:latin typeface="Arial" pitchFamily="34" charset="0"/>
+                <a:ea typeface="Arial" pitchFamily="34" charset="-122"/>
+                <a:cs typeface="Arial" pitchFamily="34" charset="-120"/>
+              </a:rPr>
+              <a:t>Anchor to guidance and consensus estimates</a:t>
+            </a:r>
+            <a:endParaRPr lang="en-US" sz="900" dirty="0"/>
+          </a:p>
+        </p:txBody>
+      </p:sp>
+      <p:sp>
+        <p:nvSpPr>
+          <p:cNvPr id="20" name="Shape 18"/>
+          <p:cNvSpPr/>
+          <p:nvPr/>
+        </p:nvSpPr>
+        <p:spPr>
+          <a:xfrm>
+            <a:off x="6163056" y="2496312"/>
+            <a:ext cx="201168" cy="548640"/>
+          </a:xfrm>
+          <a:prstGeom prst="downArrow">
+            <a:avLst/>
+          </a:prstGeom>
+          <a:solidFill>
+            <a:srgbClr val="B45309"/>
+          </a:solidFill>
+          <a:ln/>
+        </p:spPr>
+      </p:sp>
+      <p:sp>
+        <p:nvSpPr>
+          <p:cNvPr id="21" name="Shape 19"/>
+          <p:cNvSpPr/>
+          <p:nvPr/>
+        </p:nvSpPr>
+        <p:spPr>
+          <a:xfrm>
+            <a:off x="5257800" y="3108960"/>
+            <a:ext cx="2011680" cy="960120"/>
+          </a:xfrm>
+          <a:prstGeom prst="roundRect">
+            <a:avLst>
+              <a:gd name="adj" fmla="val 7619"/>
+            </a:avLst>
+          </a:prstGeom>
+          <a:solidFill>
+            <a:srgbClr val="F5F5F4"/>
+          </a:solidFill>
+          <a:ln w="15240">
+            <a:solidFill>
+              <a:srgbClr val="B45309"/>
+            </a:solidFill>
+            <a:prstDash val="solid"/>
+          </a:ln>
+        </p:spPr>
+      </p:sp>
+      <p:sp>
+        <p:nvSpPr>
+          <p:cNvPr id="22" name="Text 20"/>
+          <p:cNvSpPr/>
+          <p:nvPr/>
+        </p:nvSpPr>
+        <p:spPr>
+          <a:xfrm>
+            <a:off x="5330952" y="3182112"/>
+            <a:ext cx="310896" cy="274320"/>
+          </a:xfrm>
+          <a:prstGeom prst="rect">
+            <a:avLst/>
+          </a:prstGeom>
+          <a:solidFill>
+            <a:srgbClr val="B45309"/>
+          </a:solidFill>
+          <a:ln/>
+        </p:spPr>
+        <p:txBody>
+          <a:bodyPr wrap="square" rtlCol="0" anchor="ctr"/>
+          <a:lstStyle/>
+          <a:p>
+            <a:pPr algn="ctr" indent="0" marL="0">
+              <a:buNone/>
+            </a:pPr>
+            <a:r>
+              <a:rPr lang="en-US" sz="1000" b="1" dirty="0">
+                <a:solidFill>
+                  <a:srgbClr val="FFFFFF"/>
+                </a:solidFill>
+                <a:latin typeface="Arial" pitchFamily="34" charset="0"/>
+                <a:ea typeface="Arial" pitchFamily="34" charset="-122"/>
+                <a:cs typeface="Arial" pitchFamily="34" charset="-120"/>
+              </a:rPr>
+              <a:t>4</a:t>
+            </a:r>
+            <a:endParaRPr lang="en-US" sz="1000" dirty="0"/>
+          </a:p>
+        </p:txBody>
+      </p:sp>
+      <p:sp>
+        <p:nvSpPr>
+          <p:cNvPr id="23" name="Text 21"/>
+          <p:cNvSpPr/>
+          <p:nvPr/>
+        </p:nvSpPr>
+        <p:spPr>
+          <a:xfrm>
+            <a:off x="5257800" y="3383280"/>
+            <a:ext cx="2011680" cy="384048"/>
+          </a:xfrm>
+          <a:prstGeom prst="rect">
+            <a:avLst/>
+          </a:prstGeom>
+          <a:noFill/>
+          <a:ln/>
+        </p:spPr>
+        <p:txBody>
+          <a:bodyPr wrap="square" rtlCol="0" anchor="ctr"/>
+          <a:lstStyle/>
+          <a:p>
+            <a:pPr algn="ctr" indent="0" marL="0">
+              <a:buNone/>
+            </a:pPr>
+            <a:r>
+              <a:rPr lang="en-US" sz="1200" b="1" dirty="0">
+                <a:solidFill>
+                  <a:srgbClr val="1C1917"/>
+                </a:solidFill>
+                <a:latin typeface="Arial" pitchFamily="34" charset="0"/>
+                <a:ea typeface="Arial" pitchFamily="34" charset="-122"/>
+                <a:cs typeface="Arial" pitchFamily="34" charset="-120"/>
+              </a:rPr>
+              <a:t>Populate All Assumptions</a:t>
+            </a:r>
+            <a:endParaRPr lang="en-US" sz="1200" dirty="0"/>
+          </a:p>
+        </p:txBody>
+      </p:sp>
+      <p:sp>
+        <p:nvSpPr>
+          <p:cNvPr id="24" name="Text 22"/>
+          <p:cNvSpPr/>
+          <p:nvPr/>
+        </p:nvSpPr>
+        <p:spPr>
+          <a:xfrm>
+            <a:off x="5257800" y="3730752"/>
+            <a:ext cx="2011680" cy="310896"/>
+          </a:xfrm>
+          <a:prstGeom prst="rect">
+            <a:avLst/>
+          </a:prstGeom>
+          <a:noFill/>
+          <a:ln/>
+        </p:spPr>
+        <p:txBody>
+          <a:bodyPr wrap="square" rtlCol="0" anchor="ctr"/>
+          <a:lstStyle/>
+          <a:p>
+            <a:pPr algn="ctr" indent="0" marL="0">
+              <a:buNone/>
+            </a:pPr>
+            <a:r>
+              <a:rPr lang="en-US" sz="900" dirty="0">
+                <a:solidFill>
+                  <a:srgbClr val="78716C"/>
+                </a:solidFill>
+                <a:latin typeface="Arial" pitchFamily="34" charset="0"/>
+                <a:ea typeface="Arial" pitchFamily="34" charset="-122"/>
+                <a:cs typeface="Arial" pitchFamily="34" charset="-120"/>
+              </a:rPr>
+              <a:t>Link all three cases simultaneously, never copy-paste</a:t>
+            </a:r>
+            <a:endParaRPr lang="en-US" sz="900" dirty="0"/>
+          </a:p>
+        </p:txBody>
+      </p:sp>
+      <p:sp>
+        <p:nvSpPr>
+          <p:cNvPr id="25" name="Shape 23"/>
+          <p:cNvSpPr/>
+          <p:nvPr/>
+        </p:nvSpPr>
+        <p:spPr>
+          <a:xfrm>
+            <a:off x="4901184" y="3488436"/>
+            <a:ext cx="301752" cy="201168"/>
+          </a:xfrm>
+          <a:prstGeom prst="leftArrow">
+            <a:avLst/>
+          </a:prstGeom>
+          <a:solidFill>
+            <a:srgbClr val="B45309"/>
+          </a:solidFill>
+          <a:ln/>
+        </p:spPr>
+      </p:sp>
+      <p:sp>
+        <p:nvSpPr>
+          <p:cNvPr id="26" name="Shape 24"/>
+          <p:cNvSpPr/>
+          <p:nvPr/>
+        </p:nvSpPr>
+        <p:spPr>
+          <a:xfrm>
+            <a:off x="2834640" y="3108960"/>
+            <a:ext cx="2011680" cy="960120"/>
+          </a:xfrm>
+          <a:prstGeom prst="roundRect">
+            <a:avLst>
+              <a:gd name="adj" fmla="val 7619"/>
+            </a:avLst>
+          </a:prstGeom>
+          <a:solidFill>
+            <a:srgbClr val="F5F5F4"/>
+          </a:solidFill>
+          <a:ln w="15240">
+            <a:solidFill>
+              <a:srgbClr val="B45309"/>
+            </a:solidFill>
+            <a:prstDash val="solid"/>
+          </a:ln>
+        </p:spPr>
+      </p:sp>
+      <p:sp>
+        <p:nvSpPr>
+          <p:cNvPr id="27" name="Text 25"/>
+          <p:cNvSpPr/>
+          <p:nvPr/>
+        </p:nvSpPr>
+        <p:spPr>
+          <a:xfrm>
+            <a:off x="2907792" y="3182112"/>
+            <a:ext cx="310896" cy="274320"/>
+          </a:xfrm>
+          <a:prstGeom prst="rect">
+            <a:avLst/>
+          </a:prstGeom>
+          <a:solidFill>
+            <a:srgbClr val="B45309"/>
+          </a:solidFill>
+          <a:ln/>
+        </p:spPr>
+        <p:txBody>
+          <a:bodyPr wrap="square" rtlCol="0" anchor="ctr"/>
+          <a:lstStyle/>
+          <a:p>
+            <a:pPr algn="ctr" indent="0" marL="0">
+              <a:buNone/>
+            </a:pPr>
+            <a:r>
+              <a:rPr lang="en-US" sz="1000" b="1" dirty="0">
+                <a:solidFill>
+                  <a:srgbClr val="FFFFFF"/>
+                </a:solidFill>
+                <a:latin typeface="Arial" pitchFamily="34" charset="0"/>
+                <a:ea typeface="Arial" pitchFamily="34" charset="-122"/>
+                <a:cs typeface="Arial" pitchFamily="34" charset="-120"/>
+              </a:rPr>
+              <a:t>5</a:t>
+            </a:r>
+            <a:endParaRPr lang="en-US" sz="1000" dirty="0"/>
+          </a:p>
+        </p:txBody>
+      </p:sp>
+      <p:sp>
+        <p:nvSpPr>
+          <p:cNvPr id="28" name="Text 26"/>
+          <p:cNvSpPr/>
+          <p:nvPr/>
+        </p:nvSpPr>
+        <p:spPr>
+          <a:xfrm>
+            <a:off x="2834640" y="3383280"/>
+            <a:ext cx="2011680" cy="384048"/>
+          </a:xfrm>
+          <a:prstGeom prst="rect">
+            <a:avLst/>
+          </a:prstGeom>
+          <a:noFill/>
+          <a:ln/>
+        </p:spPr>
+        <p:txBody>
+          <a:bodyPr wrap="square" rtlCol="0" anchor="ctr"/>
+          <a:lstStyle/>
+          <a:p>
+            <a:pPr algn="ctr" indent="0" marL="0">
+              <a:buNone/>
+            </a:pPr>
+            <a:r>
+              <a:rPr lang="en-US" sz="1200" b="1" dirty="0">
+                <a:solidFill>
+                  <a:srgbClr val="1C1917"/>
+                </a:solidFill>
+                <a:latin typeface="Arial" pitchFamily="34" charset="0"/>
+                <a:ea typeface="Arial" pitchFamily="34" charset="-122"/>
+                <a:cs typeface="Arial" pitchFamily="34" charset="-120"/>
+              </a:rPr>
+              <a:t>Verify Internal Consistency</a:t>
+            </a:r>
+            <a:endParaRPr lang="en-US" sz="1200" dirty="0"/>
+          </a:p>
+        </p:txBody>
+      </p:sp>
+      <p:sp>
+        <p:nvSpPr>
+          <p:cNvPr id="29" name="Text 27"/>
+          <p:cNvSpPr/>
+          <p:nvPr/>
+        </p:nvSpPr>
+        <p:spPr>
+          <a:xfrm>
+            <a:off x="2834640" y="3730752"/>
+            <a:ext cx="2011680" cy="310896"/>
+          </a:xfrm>
+          <a:prstGeom prst="rect">
+            <a:avLst/>
+          </a:prstGeom>
+          <a:noFill/>
+          <a:ln/>
+        </p:spPr>
+        <p:txBody>
+          <a:bodyPr wrap="square" rtlCol="0" anchor="ctr"/>
+          <a:lstStyle/>
+          <a:p>
+            <a:pPr algn="ctr" indent="0" marL="0">
+              <a:buNone/>
+            </a:pPr>
+            <a:r>
+              <a:rPr lang="en-US" sz="900" dirty="0">
+                <a:solidFill>
+                  <a:srgbClr val="78716C"/>
+                </a:solidFill>
+                <a:latin typeface="Arial" pitchFamily="34" charset="0"/>
+                <a:ea typeface="Arial" pitchFamily="34" charset="-122"/>
+                <a:cs typeface="Arial" pitchFamily="34" charset="-120"/>
+              </a:rPr>
+              <a:t>Margin, capex, working capital move together</a:t>
+            </a:r>
+            <a:endParaRPr lang="en-US" sz="900" dirty="0"/>
+          </a:p>
+        </p:txBody>
+      </p:sp>
+      <p:sp>
+        <p:nvSpPr>
+          <p:cNvPr id="30" name="Shape 28"/>
+          <p:cNvSpPr/>
+          <p:nvPr/>
+        </p:nvSpPr>
+        <p:spPr>
+          <a:xfrm>
+            <a:off x="2478024" y="3488436"/>
+            <a:ext cx="301752" cy="201168"/>
+          </a:xfrm>
+          <a:prstGeom prst="leftArrow">
+            <a:avLst/>
+          </a:prstGeom>
+          <a:solidFill>
+            <a:srgbClr val="B45309"/>
+          </a:solidFill>
+          <a:ln/>
+        </p:spPr>
+      </p:sp>
+      <p:sp>
+        <p:nvSpPr>
+          <p:cNvPr id="31" name="Shape 29"/>
+          <p:cNvSpPr/>
+          <p:nvPr/>
+        </p:nvSpPr>
+        <p:spPr>
+          <a:xfrm>
+            <a:off x="411480" y="3108960"/>
+            <a:ext cx="2011680" cy="960120"/>
+          </a:xfrm>
+          <a:prstGeom prst="roundRect">
+            <a:avLst>
+              <a:gd name="adj" fmla="val 7619"/>
+            </a:avLst>
+          </a:prstGeom>
+          <a:solidFill>
+            <a:srgbClr val="F5F5F4"/>
+          </a:solidFill>
+          <a:ln w="15240">
+            <a:solidFill>
+              <a:srgbClr val="B45309"/>
+            </a:solidFill>
+            <a:prstDash val="solid"/>
+          </a:ln>
+        </p:spPr>
+      </p:sp>
+      <p:sp>
+        <p:nvSpPr>
+          <p:cNvPr id="32" name="Text 30"/>
+          <p:cNvSpPr/>
+          <p:nvPr/>
+        </p:nvSpPr>
+        <p:spPr>
+          <a:xfrm>
+            <a:off x="484632" y="3182112"/>
+            <a:ext cx="310896" cy="274320"/>
+          </a:xfrm>
+          <a:prstGeom prst="rect">
+            <a:avLst/>
+          </a:prstGeom>
+          <a:solidFill>
+            <a:srgbClr val="B45309"/>
+          </a:solidFill>
+          <a:ln/>
+        </p:spPr>
+        <p:txBody>
+          <a:bodyPr wrap="square" rtlCol="0" anchor="ctr"/>
+          <a:lstStyle/>
+          <a:p>
+            <a:pPr algn="ctr" indent="0" marL="0">
+              <a:buNone/>
+            </a:pPr>
+            <a:r>
+              <a:rPr lang="en-US" sz="1000" b="1" dirty="0">
+                <a:solidFill>
+                  <a:srgbClr val="FFFFFF"/>
+                </a:solidFill>
+                <a:latin typeface="Arial" pitchFamily="34" charset="0"/>
+                <a:ea typeface="Arial" pitchFamily="34" charset="-122"/>
+                <a:cs typeface="Arial" pitchFamily="34" charset="-120"/>
+              </a:rPr>
+              <a:t>6</a:t>
+            </a:r>
+            <a:endParaRPr lang="en-US" sz="1000" dirty="0"/>
+          </a:p>
+        </p:txBody>
+      </p:sp>
+      <p:sp>
+        <p:nvSpPr>
+          <p:cNvPr id="33" name="Text 31"/>
+          <p:cNvSpPr/>
+          <p:nvPr/>
+        </p:nvSpPr>
+        <p:spPr>
+          <a:xfrm>
+            <a:off x="411480" y="3383280"/>
+            <a:ext cx="2011680" cy="384048"/>
+          </a:xfrm>
+          <a:prstGeom prst="rect">
+            <a:avLst/>
+          </a:prstGeom>
+          <a:noFill/>
+          <a:ln/>
+        </p:spPr>
+        <p:txBody>
+          <a:bodyPr wrap="square" rtlCol="0" anchor="ctr"/>
+          <a:lstStyle/>
+          <a:p>
+            <a:pPr algn="ctr" indent="0" marL="0">
+              <a:buNone/>
+            </a:pPr>
+            <a:r>
+              <a:rPr lang="en-US" sz="1200" b="1" dirty="0">
+                <a:solidFill>
+                  <a:srgbClr val="1C1917"/>
+                </a:solidFill>
+                <a:latin typeface="Arial" pitchFamily="34" charset="0"/>
+                <a:ea typeface="Arial" pitchFamily="34" charset="-122"/>
+                <a:cs typeface="Arial" pitchFamily="34" charset="-120"/>
+              </a:rPr>
+              <a:t>Compute Weighted Value</a:t>
+            </a:r>
+            <a:endParaRPr lang="en-US" sz="1200" dirty="0"/>
+          </a:p>
+        </p:txBody>
+      </p:sp>
+      <p:sp>
+        <p:nvSpPr>
+          <p:cNvPr id="34" name="Text 32"/>
+          <p:cNvSpPr/>
+          <p:nvPr/>
+        </p:nvSpPr>
+        <p:spPr>
+          <a:xfrm>
+            <a:off x="411480" y="3730752"/>
+            <a:ext cx="2011680" cy="310896"/>
+          </a:xfrm>
+          <a:prstGeom prst="rect">
+            <a:avLst/>
+          </a:prstGeom>
+          <a:noFill/>
+          <a:ln/>
+        </p:spPr>
+        <p:txBody>
+          <a:bodyPr wrap="square" rtlCol="0" anchor="ctr"/>
+          <a:lstStyle/>
+          <a:p>
+            <a:pPr algn="ctr" indent="0" marL="0">
+              <a:buNone/>
+            </a:pPr>
+            <a:r>
+              <a:rPr lang="en-US" sz="900" dirty="0">
+                <a:solidFill>
+                  <a:srgbClr val="78716C"/>
+                </a:solidFill>
+                <a:latin typeface="Arial" pitchFamily="34" charset="0"/>
+                <a:ea typeface="Arial" pitchFamily="34" charset="-122"/>
+                <a:cs typeface="Arial" pitchFamily="34" charset="-120"/>
+              </a:rPr>
+              <a:t>Apply probabilities; stress-test probability mix</a:t>
+            </a:r>
+            <a:endParaRPr lang="en-US" sz="900" dirty="0"/>
           </a:p>
         </p:txBody>
       </p:sp>
@@ -6689,8 +5509,8 @@
         </p:nvSpPr>
         <p:spPr>
           <a:xfrm>
-            <a:off x="411480" y="384048"/>
-            <a:ext cx="82296" cy="310896"/>
+            <a:off x="411480" y="402336"/>
+            <a:ext cx="82296" cy="329184"/>
           </a:xfrm>
           <a:prstGeom prst="rect">
             <a:avLst/>
@@ -6710,7 +5530,7 @@
         <p:spPr>
           <a:xfrm>
             <a:off x="566928" y="292608"/>
-            <a:ext cx="8138160" cy="502920"/>
+            <a:ext cx="8138160" cy="548640"/>
           </a:xfrm>
           <a:prstGeom prst="rect">
             <a:avLst/>
@@ -6726,7 +5546,7 @@
               <a:buNone/>
             </a:pPr>
             <a:r>
-              <a:rPr lang="en-US" sz="2000" b="1" dirty="0">
+              <a:rPr lang="en-US" sz="2100" b="1" dirty="0">
                 <a:solidFill>
                   <a:srgbClr val="1C1917"/>
                 </a:solidFill>
@@ -6734,22 +5554,45 @@
                 <a:ea typeface="Arial" pitchFamily="34" charset="-122"/>
                 <a:cs typeface="Arial" pitchFamily="34" charset="-120"/>
               </a:rPr>
-              <a:t>Standard Scenario &amp; Sensitivity Procedure</a:t>
-            </a:r>
-            <a:endParaRPr lang="en-US" sz="2000" dirty="0"/>
-          </a:p>
-        </p:txBody>
-      </p:sp>
-      <p:sp>
-        <p:nvSpPr>
-          <p:cNvPr id="4" name="Text 2"/>
-          <p:cNvSpPr/>
-          <p:nvPr/>
-        </p:nvSpPr>
-        <p:spPr>
-          <a:xfrm>
-            <a:off x="566928" y="4681728"/>
-            <a:ext cx="8138160" cy="320040"/>
+              <a:t>Two-Variable Data Tables and Heat Maps</a:t>
+            </a:r>
+            <a:endParaRPr lang="en-US" sz="2100" dirty="0"/>
+          </a:p>
+        </p:txBody>
+      </p:sp>
+      <p:sp>
+        <p:nvSpPr>
+          <p:cNvPr id="4" name="Shape 2"/>
+          <p:cNvSpPr/>
+          <p:nvPr/>
+        </p:nvSpPr>
+        <p:spPr>
+          <a:xfrm>
+            <a:off x="411480" y="960120"/>
+            <a:ext cx="8321040" cy="0"/>
+          </a:xfrm>
+          <a:prstGeom prst="line">
+            <a:avLst/>
+          </a:prstGeom>
+          <a:noFill/>
+          <a:ln w="12700">
+            <a:solidFill>
+              <a:srgbClr val="E7E5E4"/>
+            </a:solidFill>
+            <a:prstDash val="solid"/>
+          </a:ln>
+        </p:spPr>
+      </p:sp>
+      <p:sp>
+        <p:nvSpPr>
+          <p:cNvPr id="5" name="Text 3"/>
+          <p:cNvSpPr/>
+          <p:nvPr/>
+        </p:nvSpPr>
+        <p:spPr>
+          <a:xfrm>
+            <a:off x="411480" y="4864608"/>
+            <a:ext cx="8321040" cy="237744"/>
           </a:xfrm>
           <a:prstGeom prst="rect">
             <a:avLst/>
@@ -6765,45 +5608,6 @@
               <a:buNone/>
             </a:pPr>
             <a:r>
-              <a:rPr lang="en-US" sz="1000" i="1" dirty="0">
-                <a:solidFill>
-                  <a:srgbClr val="78716C"/>
-                </a:solidFill>
-                <a:latin typeface="Arial" pitchFamily="34" charset="0"/>
-                <a:ea typeface="Arial" pitchFamily="34" charset="-122"/>
-                <a:cs typeface="Arial" pitchFamily="34" charset="-120"/>
-              </a:rPr>
-              <a:t>Six repeatable steps from assumption gathering to actionable scenario output</a:t>
-            </a:r>
-            <a:endParaRPr lang="en-US" sz="1000" dirty="0"/>
-          </a:p>
-        </p:txBody>
-      </p:sp>
-      <p:sp>
-        <p:nvSpPr>
-          <p:cNvPr id="5" name="Text 3"/>
-          <p:cNvSpPr/>
-          <p:nvPr/>
-        </p:nvSpPr>
-        <p:spPr>
-          <a:xfrm>
-            <a:off x="411480" y="4919472"/>
-            <a:ext cx="8321040" cy="219456"/>
-          </a:xfrm>
-          <a:prstGeom prst="rect">
-            <a:avLst/>
-          </a:prstGeom>
-          <a:noFill/>
-          <a:ln/>
-        </p:spPr>
-        <p:txBody>
-          <a:bodyPr wrap="square" rtlCol="0" anchor="ctr"/>
-          <a:lstStyle/>
-          <a:p>
-            <a:pPr indent="0" marL="0">
-              <a:buNone/>
-            </a:pPr>
-            <a:r>
               <a:rPr lang="en-US" sz="750" dirty="0">
                 <a:solidFill>
                   <a:srgbClr val="AAAAAA"/>
@@ -6820,24 +5624,153 @@
       </p:sp>
       <p:sp>
         <p:nvSpPr>
-          <p:cNvPr id="6" name="Shape 4"/>
-          <p:cNvSpPr/>
-          <p:nvPr/>
-        </p:nvSpPr>
-        <p:spPr>
-          <a:xfrm>
-            <a:off x="411480" y="1463040"/>
-            <a:ext cx="2011680" cy="960120"/>
+          <p:cNvPr id="6" name="Text 4"/>
+          <p:cNvSpPr/>
+          <p:nvPr/>
+        </p:nvSpPr>
+        <p:spPr>
+          <a:xfrm>
+            <a:off x="731520" y="1188720"/>
+            <a:ext cx="7680960" cy="2743200"/>
+          </a:xfrm>
+          <a:prstGeom prst="rect">
+            <a:avLst/>
+          </a:prstGeom>
+          <a:noFill/>
+          <a:ln/>
+        </p:spPr>
+        <p:txBody>
+          <a:bodyPr wrap="square" rtlCol="0" anchor="t"/>
+          <a:lstStyle/>
+          <a:p>
+            <a:pPr marL="152400" indent="-152400">
+              <a:spcAft>
+                <a:spcPts val="800"/>
+              </a:spcAft>
+              <a:buSzPct val="100000"/>
+              <a:buChar char="•"/>
+            </a:pPr>
+            <a:r>
+              <a:rPr lang="en-US" sz="1500" dirty="0">
+                <a:solidFill>
+                  <a:srgbClr val="1C1917"/>
+                </a:solidFill>
+                <a:latin typeface="Arial" pitchFamily="34" charset="0"/>
+                <a:ea typeface="Arial" pitchFamily="34" charset="-122"/>
+                <a:cs typeface="Arial" pitchFamily="34" charset="-120"/>
+              </a:rPr>
+              <a:t>Excel's Data Table stresses two inputs across a full grid simultaneously.</a:t>
+            </a:r>
+            <a:endParaRPr lang="en-US" sz="1500" dirty="0"/>
+          </a:p>
+          <a:p>
+            <a:pPr marL="152400" indent="-152400">
+              <a:spcAft>
+                <a:spcPts val="800"/>
+              </a:spcAft>
+              <a:buSzPct val="100000"/>
+              <a:buChar char="•"/>
+            </a:pPr>
+            <a:r>
+              <a:rPr lang="en-US" sz="1500" dirty="0">
+                <a:solidFill>
+                  <a:srgbClr val="1C1917"/>
+                </a:solidFill>
+                <a:latin typeface="Arial" pitchFamily="34" charset="0"/>
+                <a:ea typeface="Arial" pitchFamily="34" charset="-122"/>
+                <a:cs typeface="Arial" pitchFamily="34" charset="-120"/>
+              </a:rPr>
+              <a:t>Requires a row input cell, column input cell, and one formula output cell.</a:t>
+            </a:r>
+            <a:endParaRPr lang="en-US" sz="1500" dirty="0"/>
+          </a:p>
+          <a:p>
+            <a:pPr marL="152400" indent="-152400">
+              <a:spcAft>
+                <a:spcPts val="800"/>
+              </a:spcAft>
+              <a:buSzPct val="100000"/>
+              <a:buChar char="•"/>
+            </a:pPr>
+            <a:r>
+              <a:rPr lang="en-US" sz="1500" dirty="0">
+                <a:solidFill>
+                  <a:srgbClr val="1C1917"/>
+                </a:solidFill>
+                <a:latin typeface="Arial" pitchFamily="34" charset="0"/>
+                <a:ea typeface="Arial" pitchFamily="34" charset="-122"/>
+                <a:cs typeface="Arial" pitchFamily="34" charset="-120"/>
+              </a:rPr>
+              <a:t>Excel substitutes every combination and recalculates the entire workbook automatically.</a:t>
+            </a:r>
+            <a:endParaRPr lang="en-US" sz="1500" dirty="0"/>
+          </a:p>
+          <a:p>
+            <a:pPr marL="152400" indent="-152400">
+              <a:spcAft>
+                <a:spcPts val="800"/>
+              </a:spcAft>
+              <a:buSzPct val="100000"/>
+              <a:buChar char="•"/>
+            </a:pPr>
+            <a:r>
+              <a:rPr lang="en-US" sz="1500" dirty="0">
+                <a:solidFill>
+                  <a:srgbClr val="1C1917"/>
+                </a:solidFill>
+                <a:latin typeface="Arial" pitchFamily="34" charset="0"/>
+                <a:ea typeface="Arial" pitchFamily="34" charset="-122"/>
+                <a:cs typeface="Arial" pitchFamily="34" charset="-120"/>
+              </a:rPr>
+              <a:t>No macros, helper columns, or manual copy-pasting needed.</a:t>
+            </a:r>
+            <a:endParaRPr lang="en-US" sz="1500" dirty="0"/>
+          </a:p>
+          <a:p>
+            <a:pPr marL="152400" indent="-152400">
+              <a:spcAft>
+                <a:spcPts val="800"/>
+              </a:spcAft>
+              <a:buSzPct val="100000"/>
+              <a:buChar char="•"/>
+            </a:pPr>
+            <a:r>
+              <a:rPr lang="en-US" sz="1500" dirty="0">
+                <a:solidFill>
+                  <a:srgbClr val="1C1917"/>
+                </a:solidFill>
+                <a:latin typeface="Arial" pitchFamily="34" charset="0"/>
+                <a:ea typeface="Arial" pitchFamily="34" charset="-122"/>
+                <a:cs typeface="Arial" pitchFamily="34" charset="-120"/>
+              </a:rPr>
+              <a:t>Conditional formatting converts the output matrix into an instant heat map.</a:t>
+            </a:r>
+            <a:endParaRPr lang="en-US" sz="1500" dirty="0"/>
+          </a:p>
+        </p:txBody>
+      </p:sp>
+      <p:sp>
+        <p:nvSpPr>
+          <p:cNvPr id="7" name="Shape 5"/>
+          <p:cNvSpPr/>
+          <p:nvPr/>
+        </p:nvSpPr>
+        <p:spPr>
+          <a:xfrm>
+            <a:off x="731520" y="4041648"/>
+            <a:ext cx="7680960" cy="566928"/>
           </a:xfrm>
           <a:prstGeom prst="roundRect">
             <a:avLst>
-              <a:gd name="adj" fmla="val 7619"/>
+              <a:gd name="adj" fmla="val 12903"/>
             </a:avLst>
           </a:prstGeom>
           <a:solidFill>
-            <a:srgbClr val="F5F5F4"/>
+            <a:srgbClr val="B45309">
+              <a:alpha val="12000"/>
+            </a:srgbClr>
           </a:solidFill>
-          <a:ln w="15240">
+          <a:ln w="12700">
             <a:solidFill>
               <a:srgbClr val="B45309"/>
             </a:solidFill>
@@ -6847,71 +5780,44 @@
       </p:sp>
       <p:sp>
         <p:nvSpPr>
-          <p:cNvPr id="7" name="Text 5"/>
-          <p:cNvSpPr/>
-          <p:nvPr/>
-        </p:nvSpPr>
-        <p:spPr>
-          <a:xfrm>
-            <a:off x="484632" y="1536192"/>
-            <a:ext cx="310896" cy="274320"/>
-          </a:xfrm>
-          <a:prstGeom prst="rect">
-            <a:avLst/>
-          </a:prstGeom>
-          <a:solidFill>
-            <a:srgbClr val="B45309"/>
-          </a:solidFill>
+          <p:cNvPr id="8" name="Text 6"/>
+          <p:cNvSpPr/>
+          <p:nvPr/>
+        </p:nvSpPr>
+        <p:spPr>
+          <a:xfrm>
+            <a:off x="868680" y="4087368"/>
+            <a:ext cx="7406640" cy="475488"/>
+          </a:xfrm>
+          <a:prstGeom prst="rect">
+            <a:avLst/>
+          </a:prstGeom>
+          <a:noFill/>
           <a:ln/>
         </p:spPr>
         <p:txBody>
           <a:bodyPr wrap="square" rtlCol="0" anchor="ctr"/>
           <a:lstStyle/>
           <a:p>
-            <a:pPr algn="ctr" indent="0" marL="0">
-              <a:buNone/>
-            </a:pPr>
-            <a:r>
-              <a:rPr lang="en-US" sz="1000" b="1" dirty="0">
-                <a:solidFill>
-                  <a:srgbClr val="FFFFFF"/>
-                </a:solidFill>
-                <a:latin typeface="Arial" pitchFamily="34" charset="0"/>
-                <a:ea typeface="Arial" pitchFamily="34" charset="-122"/>
-                <a:cs typeface="Arial" pitchFamily="34" charset="-120"/>
-              </a:rPr>
-              <a:t>1</a:t>
-            </a:r>
-            <a:endParaRPr lang="en-US" sz="1000" dirty="0"/>
-          </a:p>
-        </p:txBody>
-      </p:sp>
-      <p:sp>
-        <p:nvSpPr>
-          <p:cNvPr id="8" name="Text 6"/>
-          <p:cNvSpPr/>
-          <p:nvPr/>
-        </p:nvSpPr>
-        <p:spPr>
-          <a:xfrm>
-            <a:off x="411480" y="1737360"/>
-            <a:ext cx="2011680" cy="384048"/>
-          </a:xfrm>
-          <a:prstGeom prst="rect">
-            <a:avLst/>
-          </a:prstGeom>
-          <a:noFill/>
-          <a:ln/>
-        </p:spPr>
-        <p:txBody>
-          <a:bodyPr wrap="square" rtlCol="0" anchor="ctr"/>
-          <a:lstStyle/>
-          <a:p>
-            <a:pPr algn="ctr" indent="0" marL="0">
-              <a:buNone/>
-            </a:pPr>
-            <a:r>
-              <a:rPr lang="en-US" sz="1200" b="1" dirty="0">
+            <a:pPr indent="0" marL="0">
+              <a:buNone/>
+            </a:pPr>
+            <a:r>
+              <a:rPr lang="en-US" sz="1100" b="1" dirty="0">
+                <a:solidFill>
+                  <a:srgbClr val="B45309"/>
+                </a:solidFill>
+                <a:latin typeface="Arial" pitchFamily="34" charset="0"/>
+                <a:ea typeface="Arial" pitchFamily="34" charset="-122"/>
+                <a:cs typeface="Arial" pitchFamily="34" charset="-120"/>
+              </a:rPr>
+              <a:t>Takeaway  </a:t>
+            </a:r>
+            <a:pPr indent="0" marL="0">
+              <a:buNone/>
+            </a:pPr>
+            <a:r>
+              <a:rPr lang="en-US" sz="1150" dirty="0">
                 <a:solidFill>
                   <a:srgbClr val="1C1917"/>
                 </a:solidFill>
@@ -6919,878 +5825,9 @@
                 <a:ea typeface="Arial" pitchFamily="34" charset="-122"/>
                 <a:cs typeface="Arial" pitchFamily="34" charset="-120"/>
               </a:rPr>
-              <a:t>Base Case</a:t>
-            </a:r>
-            <a:endParaRPr lang="en-US" sz="1200" dirty="0"/>
-          </a:p>
-        </p:txBody>
-      </p:sp>
-      <p:sp>
-        <p:nvSpPr>
-          <p:cNvPr id="9" name="Text 7"/>
-          <p:cNvSpPr/>
-          <p:nvPr/>
-        </p:nvSpPr>
-        <p:spPr>
-          <a:xfrm>
-            <a:off x="411480" y="2084832"/>
-            <a:ext cx="2011680" cy="310896"/>
-          </a:xfrm>
-          <a:prstGeom prst="rect">
-            <a:avLst/>
-          </a:prstGeom>
-          <a:noFill/>
-          <a:ln/>
-        </p:spPr>
-        <p:txBody>
-          <a:bodyPr wrap="square" rtlCol="0" anchor="ctr"/>
-          <a:lstStyle/>
-          <a:p>
-            <a:pPr algn="ctr" indent="0" marL="0">
-              <a:buNone/>
-            </a:pPr>
-            <a:r>
-              <a:rPr lang="en-US" sz="900" dirty="0">
-                <a:solidFill>
-                  <a:srgbClr val="78716C"/>
-                </a:solidFill>
-                <a:latin typeface="Arial" pitchFamily="34" charset="0"/>
-                <a:ea typeface="Arial" pitchFamily="34" charset="-122"/>
-                <a:cs typeface="Arial" pitchFamily="34" charset="-120"/>
-              </a:rPr>
-              <a:t>Record anchor output with all base assumptions</a:t>
-            </a:r>
-            <a:endParaRPr lang="en-US" sz="900" dirty="0"/>
-          </a:p>
-        </p:txBody>
-      </p:sp>
-      <p:sp>
-        <p:nvSpPr>
-          <p:cNvPr id="10" name="Shape 8"/>
-          <p:cNvSpPr/>
-          <p:nvPr/>
-        </p:nvSpPr>
-        <p:spPr>
-          <a:xfrm>
-            <a:off x="2478024" y="1842516"/>
-            <a:ext cx="301752" cy="201168"/>
-          </a:xfrm>
-          <a:prstGeom prst="rightArrow">
-            <a:avLst/>
-          </a:prstGeom>
-          <a:solidFill>
-            <a:srgbClr val="B45309"/>
-          </a:solidFill>
-          <a:ln/>
-        </p:spPr>
-      </p:sp>
-      <p:sp>
-        <p:nvSpPr>
-          <p:cNvPr id="11" name="Shape 9"/>
-          <p:cNvSpPr/>
-          <p:nvPr/>
-        </p:nvSpPr>
-        <p:spPr>
-          <a:xfrm>
-            <a:off x="2834640" y="1463040"/>
-            <a:ext cx="2011680" cy="960120"/>
-          </a:xfrm>
-          <a:prstGeom prst="roundRect">
-            <a:avLst>
-              <a:gd name="adj" fmla="val 7619"/>
-            </a:avLst>
-          </a:prstGeom>
-          <a:solidFill>
-            <a:srgbClr val="F5F5F4"/>
-          </a:solidFill>
-          <a:ln w="15240">
-            <a:solidFill>
-              <a:srgbClr val="B45309"/>
-            </a:solidFill>
-            <a:prstDash val="solid"/>
-          </a:ln>
-        </p:spPr>
-      </p:sp>
-      <p:sp>
-        <p:nvSpPr>
-          <p:cNvPr id="12" name="Text 10"/>
-          <p:cNvSpPr/>
-          <p:nvPr/>
-        </p:nvSpPr>
-        <p:spPr>
-          <a:xfrm>
-            <a:off x="2907792" y="1536192"/>
-            <a:ext cx="310896" cy="274320"/>
-          </a:xfrm>
-          <a:prstGeom prst="rect">
-            <a:avLst/>
-          </a:prstGeom>
-          <a:solidFill>
-            <a:srgbClr val="B45309"/>
-          </a:solidFill>
-          <a:ln/>
-        </p:spPr>
-        <p:txBody>
-          <a:bodyPr wrap="square" rtlCol="0" anchor="ctr"/>
-          <a:lstStyle/>
-          <a:p>
-            <a:pPr algn="ctr" indent="0" marL="0">
-              <a:buNone/>
-            </a:pPr>
-            <a:r>
-              <a:rPr lang="en-US" sz="1000" b="1" dirty="0">
-                <a:solidFill>
-                  <a:srgbClr val="FFFFFF"/>
-                </a:solidFill>
-                <a:latin typeface="Arial" pitchFamily="34" charset="0"/>
-                <a:ea typeface="Arial" pitchFamily="34" charset="-122"/>
-                <a:cs typeface="Arial" pitchFamily="34" charset="-120"/>
-              </a:rPr>
-              <a:t>2</a:t>
-            </a:r>
-            <a:endParaRPr lang="en-US" sz="1000" dirty="0"/>
-          </a:p>
-        </p:txBody>
-      </p:sp>
-      <p:sp>
-        <p:nvSpPr>
-          <p:cNvPr id="13" name="Text 11"/>
-          <p:cNvSpPr/>
-          <p:nvPr/>
-        </p:nvSpPr>
-        <p:spPr>
-          <a:xfrm>
-            <a:off x="2834640" y="1737360"/>
-            <a:ext cx="2011680" cy="384048"/>
-          </a:xfrm>
-          <a:prstGeom prst="rect">
-            <a:avLst/>
-          </a:prstGeom>
-          <a:noFill/>
-          <a:ln/>
-        </p:spPr>
-        <p:txBody>
-          <a:bodyPr wrap="square" rtlCol="0" anchor="ctr"/>
-          <a:lstStyle/>
-          <a:p>
-            <a:pPr algn="ctr" indent="0" marL="0">
-              <a:buNone/>
-            </a:pPr>
-            <a:r>
-              <a:rPr lang="en-US" sz="1200" b="1" dirty="0">
-                <a:solidFill>
-                  <a:srgbClr val="1C1917"/>
-                </a:solidFill>
-                <a:latin typeface="Arial" pitchFamily="34" charset="0"/>
-                <a:ea typeface="Arial" pitchFamily="34" charset="-122"/>
-                <a:cs typeface="Arial" pitchFamily="34" charset="-120"/>
-              </a:rPr>
-              <a:t>Identify Drivers</a:t>
-            </a:r>
-            <a:endParaRPr lang="en-US" sz="1200" dirty="0"/>
-          </a:p>
-        </p:txBody>
-      </p:sp>
-      <p:sp>
-        <p:nvSpPr>
-          <p:cNvPr id="14" name="Text 12"/>
-          <p:cNvSpPr/>
-          <p:nvPr/>
-        </p:nvSpPr>
-        <p:spPr>
-          <a:xfrm>
-            <a:off x="2834640" y="2084832"/>
-            <a:ext cx="2011680" cy="310896"/>
-          </a:xfrm>
-          <a:prstGeom prst="rect">
-            <a:avLst/>
-          </a:prstGeom>
-          <a:noFill/>
-          <a:ln/>
-        </p:spPr>
-        <p:txBody>
-          <a:bodyPr wrap="square" rtlCol="0" anchor="ctr"/>
-          <a:lstStyle/>
-          <a:p>
-            <a:pPr algn="ctr" indent="0" marL="0">
-              <a:buNone/>
-            </a:pPr>
-            <a:r>
-              <a:rPr lang="en-US" sz="900" dirty="0">
-                <a:solidFill>
-                  <a:srgbClr val="78716C"/>
-                </a:solidFill>
-                <a:latin typeface="Arial" pitchFamily="34" charset="0"/>
-                <a:ea typeface="Arial" pitchFamily="34" charset="-122"/>
-                <a:cs typeface="Arial" pitchFamily="34" charset="-120"/>
-              </a:rPr>
-              <a:t>List and rank all input assumptions by importance</a:t>
-            </a:r>
-            <a:endParaRPr lang="en-US" sz="900" dirty="0"/>
-          </a:p>
-        </p:txBody>
-      </p:sp>
-      <p:sp>
-        <p:nvSpPr>
-          <p:cNvPr id="15" name="Shape 13"/>
-          <p:cNvSpPr/>
-          <p:nvPr/>
-        </p:nvSpPr>
-        <p:spPr>
-          <a:xfrm>
-            <a:off x="4901184" y="1842516"/>
-            <a:ext cx="301752" cy="201168"/>
-          </a:xfrm>
-          <a:prstGeom prst="rightArrow">
-            <a:avLst/>
-          </a:prstGeom>
-          <a:solidFill>
-            <a:srgbClr val="B45309"/>
-          </a:solidFill>
-          <a:ln/>
-        </p:spPr>
-      </p:sp>
-      <p:sp>
-        <p:nvSpPr>
-          <p:cNvPr id="16" name="Shape 14"/>
-          <p:cNvSpPr/>
-          <p:nvPr/>
-        </p:nvSpPr>
-        <p:spPr>
-          <a:xfrm>
-            <a:off x="5257800" y="1463040"/>
-            <a:ext cx="2011680" cy="960120"/>
-          </a:xfrm>
-          <a:prstGeom prst="roundRect">
-            <a:avLst>
-              <a:gd name="adj" fmla="val 7619"/>
-            </a:avLst>
-          </a:prstGeom>
-          <a:solidFill>
-            <a:srgbClr val="F5F5F4"/>
-          </a:solidFill>
-          <a:ln w="15240">
-            <a:solidFill>
-              <a:srgbClr val="B45309"/>
-            </a:solidFill>
-            <a:prstDash val="solid"/>
-          </a:ln>
-        </p:spPr>
-      </p:sp>
-      <p:sp>
-        <p:nvSpPr>
-          <p:cNvPr id="17" name="Text 15"/>
-          <p:cNvSpPr/>
-          <p:nvPr/>
-        </p:nvSpPr>
-        <p:spPr>
-          <a:xfrm>
-            <a:off x="5330952" y="1536192"/>
-            <a:ext cx="310896" cy="274320"/>
-          </a:xfrm>
-          <a:prstGeom prst="rect">
-            <a:avLst/>
-          </a:prstGeom>
-          <a:solidFill>
-            <a:srgbClr val="B45309"/>
-          </a:solidFill>
-          <a:ln/>
-        </p:spPr>
-        <p:txBody>
-          <a:bodyPr wrap="square" rtlCol="0" anchor="ctr"/>
-          <a:lstStyle/>
-          <a:p>
-            <a:pPr algn="ctr" indent="0" marL="0">
-              <a:buNone/>
-            </a:pPr>
-            <a:r>
-              <a:rPr lang="en-US" sz="1000" b="1" dirty="0">
-                <a:solidFill>
-                  <a:srgbClr val="FFFFFF"/>
-                </a:solidFill>
-                <a:latin typeface="Arial" pitchFamily="34" charset="0"/>
-                <a:ea typeface="Arial" pitchFamily="34" charset="-122"/>
-                <a:cs typeface="Arial" pitchFamily="34" charset="-120"/>
-              </a:rPr>
-              <a:t>3</a:t>
-            </a:r>
-            <a:endParaRPr lang="en-US" sz="1000" dirty="0"/>
-          </a:p>
-        </p:txBody>
-      </p:sp>
-      <p:sp>
-        <p:nvSpPr>
-          <p:cNvPr id="18" name="Text 16"/>
-          <p:cNvSpPr/>
-          <p:nvPr/>
-        </p:nvSpPr>
-        <p:spPr>
-          <a:xfrm>
-            <a:off x="5257800" y="1737360"/>
-            <a:ext cx="2011680" cy="384048"/>
-          </a:xfrm>
-          <a:prstGeom prst="rect">
-            <a:avLst/>
-          </a:prstGeom>
-          <a:noFill/>
-          <a:ln/>
-        </p:spPr>
-        <p:txBody>
-          <a:bodyPr wrap="square" rtlCol="0" anchor="ctr"/>
-          <a:lstStyle/>
-          <a:p>
-            <a:pPr algn="ctr" indent="0" marL="0">
-              <a:buNone/>
-            </a:pPr>
-            <a:r>
-              <a:rPr lang="en-US" sz="1200" b="1" dirty="0">
-                <a:solidFill>
-                  <a:srgbClr val="1C1917"/>
-                </a:solidFill>
-                <a:latin typeface="Arial" pitchFamily="34" charset="0"/>
-                <a:ea typeface="Arial" pitchFamily="34" charset="-122"/>
-                <a:cs typeface="Arial" pitchFamily="34" charset="-120"/>
-              </a:rPr>
-              <a:t>Define Scenarios</a:t>
-            </a:r>
-            <a:endParaRPr lang="en-US" sz="1200" dirty="0"/>
-          </a:p>
-        </p:txBody>
-      </p:sp>
-      <p:sp>
-        <p:nvSpPr>
-          <p:cNvPr id="19" name="Text 17"/>
-          <p:cNvSpPr/>
-          <p:nvPr/>
-        </p:nvSpPr>
-        <p:spPr>
-          <a:xfrm>
-            <a:off x="5257800" y="2084832"/>
-            <a:ext cx="2011680" cy="310896"/>
-          </a:xfrm>
-          <a:prstGeom prst="rect">
-            <a:avLst/>
-          </a:prstGeom>
-          <a:noFill/>
-          <a:ln/>
-        </p:spPr>
-        <p:txBody>
-          <a:bodyPr wrap="square" rtlCol="0" anchor="ctr"/>
-          <a:lstStyle/>
-          <a:p>
-            <a:pPr algn="ctr" indent="0" marL="0">
-              <a:buNone/>
-            </a:pPr>
-            <a:r>
-              <a:rPr lang="en-US" sz="900" dirty="0">
-                <a:solidFill>
-                  <a:srgbClr val="78716C"/>
-                </a:solidFill>
-                <a:latin typeface="Arial" pitchFamily="34" charset="0"/>
-                <a:ea typeface="Arial" pitchFamily="34" charset="-122"/>
-                <a:cs typeface="Arial" pitchFamily="34" charset="-120"/>
-              </a:rPr>
-              <a:t>Assign coherent input sets to Base, Up, Down</a:t>
-            </a:r>
-            <a:endParaRPr lang="en-US" sz="900" dirty="0"/>
-          </a:p>
-        </p:txBody>
-      </p:sp>
-      <p:sp>
-        <p:nvSpPr>
-          <p:cNvPr id="20" name="Shape 18"/>
-          <p:cNvSpPr/>
-          <p:nvPr/>
-        </p:nvSpPr>
-        <p:spPr>
-          <a:xfrm>
-            <a:off x="6163056" y="2496312"/>
-            <a:ext cx="201168" cy="548640"/>
-          </a:xfrm>
-          <a:prstGeom prst="downArrow">
-            <a:avLst/>
-          </a:prstGeom>
-          <a:solidFill>
-            <a:srgbClr val="B45309"/>
-          </a:solidFill>
-          <a:ln/>
-        </p:spPr>
-      </p:sp>
-      <p:sp>
-        <p:nvSpPr>
-          <p:cNvPr id="21" name="Shape 19"/>
-          <p:cNvSpPr/>
-          <p:nvPr/>
-        </p:nvSpPr>
-        <p:spPr>
-          <a:xfrm>
-            <a:off x="5257800" y="3108960"/>
-            <a:ext cx="2011680" cy="960120"/>
-          </a:xfrm>
-          <a:prstGeom prst="roundRect">
-            <a:avLst>
-              <a:gd name="adj" fmla="val 7619"/>
-            </a:avLst>
-          </a:prstGeom>
-          <a:solidFill>
-            <a:srgbClr val="F5F5F4"/>
-          </a:solidFill>
-          <a:ln w="15240">
-            <a:solidFill>
-              <a:srgbClr val="B45309"/>
-            </a:solidFill>
-            <a:prstDash val="solid"/>
-          </a:ln>
-        </p:spPr>
-      </p:sp>
-      <p:sp>
-        <p:nvSpPr>
-          <p:cNvPr id="22" name="Text 20"/>
-          <p:cNvSpPr/>
-          <p:nvPr/>
-        </p:nvSpPr>
-        <p:spPr>
-          <a:xfrm>
-            <a:off x="5330952" y="3182112"/>
-            <a:ext cx="310896" cy="274320"/>
-          </a:xfrm>
-          <a:prstGeom prst="rect">
-            <a:avLst/>
-          </a:prstGeom>
-          <a:solidFill>
-            <a:srgbClr val="B45309"/>
-          </a:solidFill>
-          <a:ln/>
-        </p:spPr>
-        <p:txBody>
-          <a:bodyPr wrap="square" rtlCol="0" anchor="ctr"/>
-          <a:lstStyle/>
-          <a:p>
-            <a:pPr algn="ctr" indent="0" marL="0">
-              <a:buNone/>
-            </a:pPr>
-            <a:r>
-              <a:rPr lang="en-US" sz="1000" b="1" dirty="0">
-                <a:solidFill>
-                  <a:srgbClr val="FFFFFF"/>
-                </a:solidFill>
-                <a:latin typeface="Arial" pitchFamily="34" charset="0"/>
-                <a:ea typeface="Arial" pitchFamily="34" charset="-122"/>
-                <a:cs typeface="Arial" pitchFamily="34" charset="-120"/>
-              </a:rPr>
-              <a:t>4</a:t>
-            </a:r>
-            <a:endParaRPr lang="en-US" sz="1000" dirty="0"/>
-          </a:p>
-        </p:txBody>
-      </p:sp>
-      <p:sp>
-        <p:nvSpPr>
-          <p:cNvPr id="23" name="Text 21"/>
-          <p:cNvSpPr/>
-          <p:nvPr/>
-        </p:nvSpPr>
-        <p:spPr>
-          <a:xfrm>
-            <a:off x="5257800" y="3383280"/>
-            <a:ext cx="2011680" cy="384048"/>
-          </a:xfrm>
-          <a:prstGeom prst="rect">
-            <a:avLst/>
-          </a:prstGeom>
-          <a:noFill/>
-          <a:ln/>
-        </p:spPr>
-        <p:txBody>
-          <a:bodyPr wrap="square" rtlCol="0" anchor="ctr"/>
-          <a:lstStyle/>
-          <a:p>
-            <a:pPr algn="ctr" indent="0" marL="0">
-              <a:buNone/>
-            </a:pPr>
-            <a:r>
-              <a:rPr lang="en-US" sz="1200" b="1" dirty="0">
-                <a:solidFill>
-                  <a:srgbClr val="1C1917"/>
-                </a:solidFill>
-                <a:latin typeface="Arial" pitchFamily="34" charset="0"/>
-                <a:ea typeface="Arial" pitchFamily="34" charset="-122"/>
-                <a:cs typeface="Arial" pitchFamily="34" charset="-120"/>
-              </a:rPr>
-              <a:t>One-Way Sensitivity</a:t>
-            </a:r>
-            <a:endParaRPr lang="en-US" sz="1200" dirty="0"/>
-          </a:p>
-        </p:txBody>
-      </p:sp>
-      <p:sp>
-        <p:nvSpPr>
-          <p:cNvPr id="24" name="Text 22"/>
-          <p:cNvSpPr/>
-          <p:nvPr/>
-        </p:nvSpPr>
-        <p:spPr>
-          <a:xfrm>
-            <a:off x="5257800" y="3730752"/>
-            <a:ext cx="2011680" cy="310896"/>
-          </a:xfrm>
-          <a:prstGeom prst="rect">
-            <a:avLst/>
-          </a:prstGeom>
-          <a:noFill/>
-          <a:ln/>
-        </p:spPr>
-        <p:txBody>
-          <a:bodyPr wrap="square" rtlCol="0" anchor="ctr"/>
-          <a:lstStyle/>
-          <a:p>
-            <a:pPr algn="ctr" indent="0" marL="0">
-              <a:buNone/>
-            </a:pPr>
-            <a:r>
-              <a:rPr lang="en-US" sz="900" dirty="0">
-                <a:solidFill>
-                  <a:srgbClr val="78716C"/>
-                </a:solidFill>
-                <a:latin typeface="Arial" pitchFamily="34" charset="0"/>
-                <a:ea typeface="Arial" pitchFamily="34" charset="-122"/>
-                <a:cs typeface="Arial" pitchFamily="34" charset="-120"/>
-              </a:rPr>
-              <a:t>Move one driver at a time, hold others constant</a:t>
-            </a:r>
-            <a:endParaRPr lang="en-US" sz="900" dirty="0"/>
-          </a:p>
-        </p:txBody>
-      </p:sp>
-      <p:sp>
-        <p:nvSpPr>
-          <p:cNvPr id="25" name="Shape 23"/>
-          <p:cNvSpPr/>
-          <p:nvPr/>
-        </p:nvSpPr>
-        <p:spPr>
-          <a:xfrm>
-            <a:off x="4901184" y="3488436"/>
-            <a:ext cx="301752" cy="201168"/>
-          </a:xfrm>
-          <a:prstGeom prst="leftArrow">
-            <a:avLst/>
-          </a:prstGeom>
-          <a:solidFill>
-            <a:srgbClr val="B45309"/>
-          </a:solidFill>
-          <a:ln/>
-        </p:spPr>
-      </p:sp>
-      <p:sp>
-        <p:nvSpPr>
-          <p:cNvPr id="26" name="Shape 24"/>
-          <p:cNvSpPr/>
-          <p:nvPr/>
-        </p:nvSpPr>
-        <p:spPr>
-          <a:xfrm>
-            <a:off x="2834640" y="3108960"/>
-            <a:ext cx="2011680" cy="960120"/>
-          </a:xfrm>
-          <a:prstGeom prst="roundRect">
-            <a:avLst>
-              <a:gd name="adj" fmla="val 7619"/>
-            </a:avLst>
-          </a:prstGeom>
-          <a:solidFill>
-            <a:srgbClr val="F5F5F4"/>
-          </a:solidFill>
-          <a:ln w="15240">
-            <a:solidFill>
-              <a:srgbClr val="B45309"/>
-            </a:solidFill>
-            <a:prstDash val="solid"/>
-          </a:ln>
-        </p:spPr>
-      </p:sp>
-      <p:sp>
-        <p:nvSpPr>
-          <p:cNvPr id="27" name="Text 25"/>
-          <p:cNvSpPr/>
-          <p:nvPr/>
-        </p:nvSpPr>
-        <p:spPr>
-          <a:xfrm>
-            <a:off x="2907792" y="3182112"/>
-            <a:ext cx="310896" cy="274320"/>
-          </a:xfrm>
-          <a:prstGeom prst="rect">
-            <a:avLst/>
-          </a:prstGeom>
-          <a:solidFill>
-            <a:srgbClr val="B45309"/>
-          </a:solidFill>
-          <a:ln/>
-        </p:spPr>
-        <p:txBody>
-          <a:bodyPr wrap="square" rtlCol="0" anchor="ctr"/>
-          <a:lstStyle/>
-          <a:p>
-            <a:pPr algn="ctr" indent="0" marL="0">
-              <a:buNone/>
-            </a:pPr>
-            <a:r>
-              <a:rPr lang="en-US" sz="1000" b="1" dirty="0">
-                <a:solidFill>
-                  <a:srgbClr val="FFFFFF"/>
-                </a:solidFill>
-                <a:latin typeface="Arial" pitchFamily="34" charset="0"/>
-                <a:ea typeface="Arial" pitchFamily="34" charset="-122"/>
-                <a:cs typeface="Arial" pitchFamily="34" charset="-120"/>
-              </a:rPr>
-              <a:t>5</a:t>
-            </a:r>
-            <a:endParaRPr lang="en-US" sz="1000" dirty="0"/>
-          </a:p>
-        </p:txBody>
-      </p:sp>
-      <p:sp>
-        <p:nvSpPr>
-          <p:cNvPr id="28" name="Text 26"/>
-          <p:cNvSpPr/>
-          <p:nvPr/>
-        </p:nvSpPr>
-        <p:spPr>
-          <a:xfrm>
-            <a:off x="2834640" y="3383280"/>
-            <a:ext cx="2011680" cy="384048"/>
-          </a:xfrm>
-          <a:prstGeom prst="rect">
-            <a:avLst/>
-          </a:prstGeom>
-          <a:noFill/>
-          <a:ln/>
-        </p:spPr>
-        <p:txBody>
-          <a:bodyPr wrap="square" rtlCol="0" anchor="ctr"/>
-          <a:lstStyle/>
-          <a:p>
-            <a:pPr algn="ctr" indent="0" marL="0">
-              <a:buNone/>
-            </a:pPr>
-            <a:r>
-              <a:rPr lang="en-US" sz="1200" b="1" dirty="0">
-                <a:solidFill>
-                  <a:srgbClr val="1C1917"/>
-                </a:solidFill>
-                <a:latin typeface="Arial" pitchFamily="34" charset="0"/>
-                <a:ea typeface="Arial" pitchFamily="34" charset="-122"/>
-                <a:cs typeface="Arial" pitchFamily="34" charset="-120"/>
-              </a:rPr>
-              <a:t>Tornado Chart</a:t>
-            </a:r>
-            <a:endParaRPr lang="en-US" sz="1200" dirty="0"/>
-          </a:p>
-        </p:txBody>
-      </p:sp>
-      <p:sp>
-        <p:nvSpPr>
-          <p:cNvPr id="29" name="Text 27"/>
-          <p:cNvSpPr/>
-          <p:nvPr/>
-        </p:nvSpPr>
-        <p:spPr>
-          <a:xfrm>
-            <a:off x="2834640" y="3730752"/>
-            <a:ext cx="2011680" cy="310896"/>
-          </a:xfrm>
-          <a:prstGeom prst="rect">
-            <a:avLst/>
-          </a:prstGeom>
-          <a:noFill/>
-          <a:ln/>
-        </p:spPr>
-        <p:txBody>
-          <a:bodyPr wrap="square" rtlCol="0" anchor="ctr"/>
-          <a:lstStyle/>
-          <a:p>
-            <a:pPr algn="ctr" indent="0" marL="0">
-              <a:buNone/>
-            </a:pPr>
-            <a:r>
-              <a:rPr lang="en-US" sz="900" dirty="0">
-                <a:solidFill>
-                  <a:srgbClr val="78716C"/>
-                </a:solidFill>
-                <a:latin typeface="Arial" pitchFamily="34" charset="0"/>
-                <a:ea typeface="Arial" pitchFamily="34" charset="-122"/>
-                <a:cs typeface="Arial" pitchFamily="34" charset="-120"/>
-              </a:rPr>
-              <a:t>Rank drivers by largest to smallest output swing</a:t>
-            </a:r>
-            <a:endParaRPr lang="en-US" sz="900" dirty="0"/>
-          </a:p>
-        </p:txBody>
-      </p:sp>
-      <p:sp>
-        <p:nvSpPr>
-          <p:cNvPr id="30" name="Shape 28"/>
-          <p:cNvSpPr/>
-          <p:nvPr/>
-        </p:nvSpPr>
-        <p:spPr>
-          <a:xfrm>
-            <a:off x="2478024" y="3488436"/>
-            <a:ext cx="301752" cy="201168"/>
-          </a:xfrm>
-          <a:prstGeom prst="leftArrow">
-            <a:avLst/>
-          </a:prstGeom>
-          <a:solidFill>
-            <a:srgbClr val="B45309"/>
-          </a:solidFill>
-          <a:ln/>
-        </p:spPr>
-      </p:sp>
-      <p:sp>
-        <p:nvSpPr>
-          <p:cNvPr id="31" name="Shape 29"/>
-          <p:cNvSpPr/>
-          <p:nvPr/>
-        </p:nvSpPr>
-        <p:spPr>
-          <a:xfrm>
-            <a:off x="411480" y="3108960"/>
-            <a:ext cx="2011680" cy="960120"/>
-          </a:xfrm>
-          <a:prstGeom prst="roundRect">
-            <a:avLst>
-              <a:gd name="adj" fmla="val 7619"/>
-            </a:avLst>
-          </a:prstGeom>
-          <a:solidFill>
-            <a:srgbClr val="F5F5F4"/>
-          </a:solidFill>
-          <a:ln w="15240">
-            <a:solidFill>
-              <a:srgbClr val="B45309"/>
-            </a:solidFill>
-            <a:prstDash val="solid"/>
-          </a:ln>
-        </p:spPr>
-      </p:sp>
-      <p:sp>
-        <p:nvSpPr>
-          <p:cNvPr id="32" name="Text 30"/>
-          <p:cNvSpPr/>
-          <p:nvPr/>
-        </p:nvSpPr>
-        <p:spPr>
-          <a:xfrm>
-            <a:off x="484632" y="3182112"/>
-            <a:ext cx="310896" cy="274320"/>
-          </a:xfrm>
-          <a:prstGeom prst="rect">
-            <a:avLst/>
-          </a:prstGeom>
-          <a:solidFill>
-            <a:srgbClr val="B45309"/>
-          </a:solidFill>
-          <a:ln/>
-        </p:spPr>
-        <p:txBody>
-          <a:bodyPr wrap="square" rtlCol="0" anchor="ctr"/>
-          <a:lstStyle/>
-          <a:p>
-            <a:pPr algn="ctr" indent="0" marL="0">
-              <a:buNone/>
-            </a:pPr>
-            <a:r>
-              <a:rPr lang="en-US" sz="1000" b="1" dirty="0">
-                <a:solidFill>
-                  <a:srgbClr val="FFFFFF"/>
-                </a:solidFill>
-                <a:latin typeface="Arial" pitchFamily="34" charset="0"/>
-                <a:ea typeface="Arial" pitchFamily="34" charset="-122"/>
-                <a:cs typeface="Arial" pitchFamily="34" charset="-120"/>
-              </a:rPr>
-              <a:t>6</a:t>
-            </a:r>
-            <a:endParaRPr lang="en-US" sz="1000" dirty="0"/>
-          </a:p>
-        </p:txBody>
-      </p:sp>
-      <p:sp>
-        <p:nvSpPr>
-          <p:cNvPr id="33" name="Text 31"/>
-          <p:cNvSpPr/>
-          <p:nvPr/>
-        </p:nvSpPr>
-        <p:spPr>
-          <a:xfrm>
-            <a:off x="411480" y="3383280"/>
-            <a:ext cx="2011680" cy="384048"/>
-          </a:xfrm>
-          <a:prstGeom prst="rect">
-            <a:avLst/>
-          </a:prstGeom>
-          <a:noFill/>
-          <a:ln/>
-        </p:spPr>
-        <p:txBody>
-          <a:bodyPr wrap="square" rtlCol="0" anchor="ctr"/>
-          <a:lstStyle/>
-          <a:p>
-            <a:pPr algn="ctr" indent="0" marL="0">
-              <a:buNone/>
-            </a:pPr>
-            <a:r>
-              <a:rPr lang="en-US" sz="1200" b="1" dirty="0">
-                <a:solidFill>
-                  <a:srgbClr val="1C1917"/>
-                </a:solidFill>
-                <a:latin typeface="Arial" pitchFamily="34" charset="0"/>
-                <a:ea typeface="Arial" pitchFamily="34" charset="-122"/>
-                <a:cs typeface="Arial" pitchFamily="34" charset="-120"/>
-              </a:rPr>
-              <a:t>Full Scenario Run</a:t>
-            </a:r>
-            <a:endParaRPr lang="en-US" sz="1200" dirty="0"/>
-          </a:p>
-        </p:txBody>
-      </p:sp>
-      <p:sp>
-        <p:nvSpPr>
-          <p:cNvPr id="34" name="Text 32"/>
-          <p:cNvSpPr/>
-          <p:nvPr/>
-        </p:nvSpPr>
-        <p:spPr>
-          <a:xfrm>
-            <a:off x="411480" y="3730752"/>
-            <a:ext cx="2011680" cy="310896"/>
-          </a:xfrm>
-          <a:prstGeom prst="rect">
-            <a:avLst/>
-          </a:prstGeom>
-          <a:noFill/>
-          <a:ln/>
-        </p:spPr>
-        <p:txBody>
-          <a:bodyPr wrap="square" rtlCol="0" anchor="ctr"/>
-          <a:lstStyle/>
-          <a:p>
-            <a:pPr algn="ctr" indent="0" marL="0">
-              <a:buNone/>
-            </a:pPr>
-            <a:r>
-              <a:rPr lang="en-US" sz="900" dirty="0">
-                <a:solidFill>
-                  <a:srgbClr val="78716C"/>
-                </a:solidFill>
-                <a:latin typeface="Arial" pitchFamily="34" charset="0"/>
-                <a:ea typeface="Arial" pitchFamily="34" charset="-122"/>
-                <a:cs typeface="Arial" pitchFamily="34" charset="-120"/>
-              </a:rPr>
-              <a:t>Apply all scenario sets, compare output results</a:t>
-            </a:r>
-            <a:endParaRPr lang="en-US" sz="900" dirty="0"/>
+              <a:t>Two-variable data tables expose the full interaction between two key drivers in one operation.</a:t>
+            </a:r>
+            <a:endParaRPr lang="en-US" sz="1100" dirty="0"/>
           </a:p>
         </p:txBody>
       </p:sp>
@@ -7879,7 +5916,7 @@
                 <a:ea typeface="Arial" pitchFamily="34" charset="-122"/>
                 <a:cs typeface="Arial" pitchFamily="34" charset="-120"/>
               </a:rPr>
-              <a:t>The Step-by-Step Procedure</a:t>
+              <a:t>Break-Even and Goal-Seek Analysis</a:t>
             </a:r>
             <a:endParaRPr lang="en-US" sz="2100" dirty="0"/>
           </a:p>
@@ -7984,7 +6021,7 @@
                 <a:ea typeface="Arial" pitchFamily="34" charset="-122"/>
                 <a:cs typeface="Arial" pitchFamily="34" charset="-120"/>
               </a:rPr>
-              <a:t>Step 1: Run the base case to establish your anchor output.</a:t>
+              <a:t>Goal Seek back-solves for the exact input that hits a target output.</a:t>
             </a:r>
             <a:endParaRPr lang="en-US" sz="1500" dirty="0"/>
           </a:p>
@@ -8005,7 +6042,7 @@
                 <a:ea typeface="Arial" pitchFamily="34" charset="-122"/>
                 <a:cs typeface="Arial" pitchFamily="34" charset="-120"/>
               </a:rPr>
-              <a:t>Step 2: List and rank all drivers; focus narrative on the top three to five.</a:t>
+              <a:t>Inputs required: output cell, target value, and one changeable input cell.</a:t>
             </a:r>
             <a:endParaRPr lang="en-US" sz="1500" dirty="0"/>
           </a:p>
@@ -8026,7 +6063,7 @@
                 <a:ea typeface="Arial" pitchFamily="34" charset="-122"/>
                 <a:cs typeface="Arial" pitchFamily="34" charset="-120"/>
               </a:rPr>
-              <a:t>Step 3: Build coherent named scenarios—Base, Upside, Downside—with consistent driver sets.</a:t>
+              <a:t>Excel iterates via Newton's method, converging in milliseconds.</a:t>
             </a:r>
             <a:endParaRPr lang="en-US" sz="1500" dirty="0"/>
           </a:p>
@@ -8047,7 +6084,7 @@
                 <a:ea typeface="Arial" pitchFamily="34" charset="-122"/>
                 <a:cs typeface="Arial" pitchFamily="34" charset="-120"/>
               </a:rPr>
-              <a:t>Step 4: Run one-way sensitivity, isolating each driver while holding others at base.</a:t>
+              <a:t>Identifies the knife-edge between value creation and value destruction.</a:t>
             </a:r>
             <a:endParaRPr lang="en-US" sz="1500" dirty="0"/>
           </a:p>
@@ -8068,7 +6105,7 @@
                 <a:ea typeface="Arial" pitchFamily="34" charset="-122"/>
                 <a:cs typeface="Arial" pitchFamily="34" charset="-120"/>
               </a:rPr>
-              <a:t>Step 5: Rank drivers by output swing to build a tornado chart.</a:t>
+              <a:t>Produces a precise break-even figure, not an interpolated range.</a:t>
             </a:r>
             <a:endParaRPr lang="en-US" sz="1500" dirty="0"/>
           </a:p>
@@ -8150,7 +6187,7 @@
                 <a:ea typeface="Arial" pitchFamily="34" charset="-122"/>
                 <a:cs typeface="Arial" pitchFamily="34" charset="-120"/>
               </a:rPr>
-              <a:t>Following each step in sequence ensures every driver's impact is isolated and comparable.</a:t>
+              <a:t>Goal Seek transforms you from a passive model reader into an active decision-maker.</a:t>
             </a:r>
             <a:endParaRPr lang="en-US" sz="1100" dirty="0"/>
           </a:p>
@@ -8196,8 +6233,8 @@
         </p:nvSpPr>
         <p:spPr>
           <a:xfrm>
-            <a:off x="411480" y="402336"/>
-            <a:ext cx="82296" cy="329184"/>
+            <a:off x="411480" y="384048"/>
+            <a:ext cx="82296" cy="310896"/>
           </a:xfrm>
           <a:prstGeom prst="rect">
             <a:avLst/>
@@ -8217,7 +6254,7 @@
         <p:spPr>
           <a:xfrm>
             <a:off x="566928" y="292608"/>
-            <a:ext cx="8138160" cy="548640"/>
+            <a:ext cx="8138160" cy="502920"/>
           </a:xfrm>
           <a:prstGeom prst="rect">
             <a:avLst/>
@@ -8233,7 +6270,7 @@
               <a:buNone/>
             </a:pPr>
             <a:r>
-              <a:rPr lang="en-US" sz="2100" b="1" dirty="0">
+              <a:rPr lang="en-US" sz="2000" b="1" dirty="0">
                 <a:solidFill>
                   <a:srgbClr val="1C1917"/>
                 </a:solidFill>
@@ -8241,22 +6278,100 @@
                 <a:ea typeface="Arial" pitchFamily="34" charset="-122"/>
                 <a:cs typeface="Arial" pitchFamily="34" charset="-120"/>
               </a:rPr>
-              <a:t>Worked Example</a:t>
-            </a:r>
-            <a:endParaRPr lang="en-US" sz="2100" dirty="0"/>
-          </a:p>
-        </p:txBody>
-      </p:sp>
-      <p:sp>
-        <p:nvSpPr>
-          <p:cNvPr id="4" name="Shape 2"/>
-          <p:cNvSpPr/>
-          <p:nvPr/>
-        </p:nvSpPr>
-        <p:spPr>
-          <a:xfrm>
-            <a:off x="411480" y="960120"/>
-            <a:ext cx="8321040" cy="0"/>
+              <a:t>Scenario Equity Values vs. Weighted</a:t>
+            </a:r>
+            <a:endParaRPr lang="en-US" sz="2000" dirty="0"/>
+          </a:p>
+        </p:txBody>
+      </p:sp>
+      <p:sp>
+        <p:nvSpPr>
+          <p:cNvPr id="4" name="Text 2"/>
+          <p:cNvSpPr/>
+          <p:nvPr/>
+        </p:nvSpPr>
+        <p:spPr>
+          <a:xfrm>
+            <a:off x="566928" y="4681728"/>
+            <a:ext cx="8138160" cy="320040"/>
+          </a:xfrm>
+          <a:prstGeom prst="rect">
+            <a:avLst/>
+          </a:prstGeom>
+          <a:noFill/>
+          <a:ln/>
+        </p:spPr>
+        <p:txBody>
+          <a:bodyPr wrap="square" rtlCol="0" anchor="ctr"/>
+          <a:lstStyle/>
+          <a:p>
+            <a:pPr indent="0" marL="0">
+              <a:buNone/>
+            </a:pPr>
+            <a:r>
+              <a:rPr lang="en-US" sz="1000" i="1" dirty="0">
+                <a:solidFill>
+                  <a:srgbClr val="78716C"/>
+                </a:solidFill>
+                <a:latin typeface="Arial" pitchFamily="34" charset="0"/>
+                <a:ea typeface="Arial" pitchFamily="34" charset="-122"/>
+                <a:cs typeface="Arial" pitchFamily="34" charset="-120"/>
+              </a:rPr>
+              <a:t>Wide $0.42–$4.85 spread signals scenario selection drives conclusion more than WACC precision</a:t>
+            </a:r>
+            <a:endParaRPr lang="en-US" sz="1000" dirty="0"/>
+          </a:p>
+        </p:txBody>
+      </p:sp>
+      <p:sp>
+        <p:nvSpPr>
+          <p:cNvPr id="5" name="Text 3"/>
+          <p:cNvSpPr/>
+          <p:nvPr/>
+        </p:nvSpPr>
+        <p:spPr>
+          <a:xfrm>
+            <a:off x="411480" y="4919472"/>
+            <a:ext cx="8321040" cy="219456"/>
+          </a:xfrm>
+          <a:prstGeom prst="rect">
+            <a:avLst/>
+          </a:prstGeom>
+          <a:noFill/>
+          <a:ln/>
+        </p:spPr>
+        <p:txBody>
+          <a:bodyPr wrap="square" rtlCol="0" anchor="ctr"/>
+          <a:lstStyle/>
+          <a:p>
+            <a:pPr indent="0" marL="0">
+              <a:buNone/>
+            </a:pPr>
+            <a:r>
+              <a:rPr lang="en-US" sz="750" dirty="0">
+                <a:solidFill>
+                  <a:srgbClr val="AAAAAA"/>
+                </a:solidFill>
+                <a:latin typeface="Arial" pitchFamily="34" charset="0"/>
+                <a:ea typeface="Arial" pitchFamily="34" charset="-122"/>
+                <a:cs typeface="Arial" pitchFamily="34" charset="-120"/>
+              </a:rPr>
+              <a:t>Lesson Forge Pro (owner) — This content is educational material only and does not constitute financial, investment, or trading advice.</a:t>
+            </a:r>
+            <a:endParaRPr lang="en-US" sz="750" dirty="0"/>
+          </a:p>
+        </p:txBody>
+      </p:sp>
+      <p:sp>
+        <p:nvSpPr>
+          <p:cNvPr id="6" name="Shape 4"/>
+          <p:cNvSpPr/>
+          <p:nvPr/>
+        </p:nvSpPr>
+        <p:spPr>
+          <a:xfrm>
+            <a:off x="685800" y="4206240"/>
+            <a:ext cx="7772400" cy="0"/>
           </a:xfrm>
           <a:prstGeom prst="line">
             <a:avLst/>
@@ -8264,7 +6379,7 @@
           <a:noFill/>
           <a:ln w="12700">
             <a:solidFill>
-              <a:srgbClr val="E7E5E4"/>
+              <a:srgbClr val="1C1917"/>
             </a:solidFill>
             <a:prstDash val="solid"/>
           </a:ln>
@@ -8272,14 +6387,34 @@
       </p:sp>
       <p:sp>
         <p:nvSpPr>
-          <p:cNvPr id="5" name="Text 3"/>
-          <p:cNvSpPr/>
-          <p:nvPr/>
-        </p:nvSpPr>
-        <p:spPr>
-          <a:xfrm>
-            <a:off x="411480" y="4864608"/>
-            <a:ext cx="8321040" cy="237744"/>
+          <p:cNvPr id="7" name="Shape 5"/>
+          <p:cNvSpPr/>
+          <p:nvPr/>
+        </p:nvSpPr>
+        <p:spPr>
+          <a:xfrm>
+            <a:off x="1371600" y="3952848"/>
+            <a:ext cx="777240" cy="253392"/>
+          </a:xfrm>
+          <a:prstGeom prst="rect">
+            <a:avLst/>
+          </a:prstGeom>
+          <a:solidFill>
+            <a:srgbClr val="B45309"/>
+          </a:solidFill>
+          <a:ln/>
+        </p:spPr>
+      </p:sp>
+      <p:sp>
+        <p:nvSpPr>
+          <p:cNvPr id="8" name="Text 6"/>
+          <p:cNvSpPr/>
+          <p:nvPr/>
+        </p:nvSpPr>
+        <p:spPr>
+          <a:xfrm>
+            <a:off x="1188720" y="3678528"/>
+            <a:ext cx="1143000" cy="237744"/>
           </a:xfrm>
           <a:prstGeom prst="rect">
             <a:avLst/>
@@ -8291,54 +6426,11 @@
           <a:bodyPr wrap="square" rtlCol="0" anchor="ctr"/>
           <a:lstStyle/>
           <a:p>
-            <a:pPr indent="0" marL="0">
-              <a:buNone/>
-            </a:pPr>
-            <a:r>
-              <a:rPr lang="en-US" sz="750" dirty="0">
-                <a:solidFill>
-                  <a:srgbClr val="AAAAAA"/>
-                </a:solidFill>
-                <a:latin typeface="Arial" pitchFamily="34" charset="0"/>
-                <a:ea typeface="Arial" pitchFamily="34" charset="-122"/>
-                <a:cs typeface="Arial" pitchFamily="34" charset="-120"/>
-              </a:rPr>
-              <a:t>Lesson Forge Pro (owner) — This content is educational material only and does not constitute financial, investment, or trading advice.</a:t>
-            </a:r>
-            <a:endParaRPr lang="en-US" sz="750" dirty="0"/>
-          </a:p>
-        </p:txBody>
-      </p:sp>
-      <p:sp>
-        <p:nvSpPr>
-          <p:cNvPr id="6" name="Text 4"/>
-          <p:cNvSpPr/>
-          <p:nvPr/>
-        </p:nvSpPr>
-        <p:spPr>
-          <a:xfrm>
-            <a:off x="731520" y="1188720"/>
-            <a:ext cx="7680960" cy="2743200"/>
-          </a:xfrm>
-          <a:prstGeom prst="rect">
-            <a:avLst/>
-          </a:prstGeom>
-          <a:noFill/>
-          <a:ln/>
-        </p:spPr>
-        <p:txBody>
-          <a:bodyPr wrap="square" rtlCol="0" anchor="t"/>
-          <a:lstStyle/>
-          <a:p>
-            <a:pPr marL="152400" indent="-152400">
-              <a:spcAft>
-                <a:spcPts val="800"/>
-              </a:spcAft>
-              <a:buSzPct val="100000"/>
-              <a:buChar char="•"/>
-            </a:pPr>
-            <a:r>
-              <a:rPr lang="en-US" sz="1500" dirty="0">
+            <a:pPr algn="ctr" indent="0" marL="0">
+              <a:buNone/>
+            </a:pPr>
+            <a:r>
+              <a:rPr lang="en-US" sz="950" b="1" dirty="0">
                 <a:solidFill>
                   <a:srgbClr val="1C1917"/>
                 </a:solidFill>
@@ -8346,20 +6438,97 @@
                 <a:ea typeface="Arial" pitchFamily="34" charset="-122"/>
                 <a:cs typeface="Arial" pitchFamily="34" charset="-120"/>
               </a:rPr>
-              <a:t>Base-case NPV: $10M revenue × 22% margin, 10% discount rate = $0.818M.</a:t>
-            </a:r>
-            <a:endParaRPr lang="en-US" sz="1500" dirty="0"/>
-          </a:p>
-          <a:p>
-            <a:pPr marL="152400" indent="-152400">
-              <a:spcAft>
-                <a:spcPts val="800"/>
-              </a:spcAft>
-              <a:buSzPct val="100000"/>
-              <a:buChar char="•"/>
-            </a:pPr>
-            <a:r>
-              <a:rPr lang="en-US" sz="1500" dirty="0">
+              <a:t>0.42</a:t>
+            </a:r>
+            <a:endParaRPr lang="en-US" sz="950" dirty="0"/>
+          </a:p>
+        </p:txBody>
+      </p:sp>
+      <p:sp>
+        <p:nvSpPr>
+          <p:cNvPr id="9" name="Text 7"/>
+          <p:cNvSpPr/>
+          <p:nvPr/>
+        </p:nvSpPr>
+        <p:spPr>
+          <a:xfrm>
+            <a:off x="1143000" y="4315968"/>
+            <a:ext cx="1234440" cy="502920"/>
+          </a:xfrm>
+          <a:prstGeom prst="rect">
+            <a:avLst/>
+          </a:prstGeom>
+          <a:noFill/>
+          <a:ln/>
+        </p:spPr>
+        <p:txBody>
+          <a:bodyPr wrap="square" rtlCol="0" anchor="ctr"/>
+          <a:lstStyle/>
+          <a:p>
+            <a:pPr algn="ctr" indent="0" marL="0">
+              <a:buNone/>
+            </a:pPr>
+            <a:r>
+              <a:rPr lang="en-US" sz="850" dirty="0">
+                <a:solidFill>
+                  <a:srgbClr val="78716C"/>
+                </a:solidFill>
+                <a:latin typeface="Arial" pitchFamily="34" charset="0"/>
+                <a:ea typeface="Arial" pitchFamily="34" charset="-122"/>
+                <a:cs typeface="Arial" pitchFamily="34" charset="-120"/>
+              </a:rPr>
+              <a:t>Bear Case</a:t>
+            </a:r>
+            <a:endParaRPr lang="en-US" sz="850" dirty="0"/>
+          </a:p>
+        </p:txBody>
+      </p:sp>
+      <p:sp>
+        <p:nvSpPr>
+          <p:cNvPr id="10" name="Shape 8"/>
+          <p:cNvSpPr/>
+          <p:nvPr/>
+        </p:nvSpPr>
+        <p:spPr>
+          <a:xfrm>
+            <a:off x="3246120" y="3421930"/>
+            <a:ext cx="777240" cy="784310"/>
+          </a:xfrm>
+          <a:prstGeom prst="rect">
+            <a:avLst/>
+          </a:prstGeom>
+          <a:solidFill>
+            <a:srgbClr val="B45309"/>
+          </a:solidFill>
+          <a:ln/>
+        </p:spPr>
+      </p:sp>
+      <p:sp>
+        <p:nvSpPr>
+          <p:cNvPr id="11" name="Text 9"/>
+          <p:cNvSpPr/>
+          <p:nvPr/>
+        </p:nvSpPr>
+        <p:spPr>
+          <a:xfrm>
+            <a:off x="3063240" y="3147610"/>
+            <a:ext cx="1143000" cy="237744"/>
+          </a:xfrm>
+          <a:prstGeom prst="rect">
+            <a:avLst/>
+          </a:prstGeom>
+          <a:noFill/>
+          <a:ln/>
+        </p:spPr>
+        <p:txBody>
+          <a:bodyPr wrap="square" rtlCol="0" anchor="ctr"/>
+          <a:lstStyle/>
+          <a:p>
+            <a:pPr algn="ctr" indent="0" marL="0">
+              <a:buNone/>
+            </a:pPr>
+            <a:r>
+              <a:rPr lang="en-US" sz="950" b="1" dirty="0">
                 <a:solidFill>
                   <a:srgbClr val="1C1917"/>
                 </a:solidFill>
@@ -8367,20 +6536,97 @@
                 <a:ea typeface="Arial" pitchFamily="34" charset="-122"/>
                 <a:cs typeface="Arial" pitchFamily="34" charset="-120"/>
               </a:rPr>
-              <a:t>Revenue swing (low to high): NPV moves from $0.055M to $1.582M—a $1.527M range.</a:t>
-            </a:r>
-            <a:endParaRPr lang="en-US" sz="1500" dirty="0"/>
-          </a:p>
-          <a:p>
-            <a:pPr marL="152400" indent="-152400">
-              <a:spcAft>
-                <a:spcPts val="800"/>
-              </a:spcAft>
-              <a:buSzPct val="100000"/>
-              <a:buChar char="•"/>
-            </a:pPr>
-            <a:r>
-              <a:rPr lang="en-US" sz="1500" dirty="0">
+              <a:t>1.3</a:t>
+            </a:r>
+            <a:endParaRPr lang="en-US" sz="950" dirty="0"/>
+          </a:p>
+        </p:txBody>
+      </p:sp>
+      <p:sp>
+        <p:nvSpPr>
+          <p:cNvPr id="12" name="Text 10"/>
+          <p:cNvSpPr/>
+          <p:nvPr/>
+        </p:nvSpPr>
+        <p:spPr>
+          <a:xfrm>
+            <a:off x="3017520" y="4315968"/>
+            <a:ext cx="1234440" cy="502920"/>
+          </a:xfrm>
+          <a:prstGeom prst="rect">
+            <a:avLst/>
+          </a:prstGeom>
+          <a:noFill/>
+          <a:ln/>
+        </p:spPr>
+        <p:txBody>
+          <a:bodyPr wrap="square" rtlCol="0" anchor="ctr"/>
+          <a:lstStyle/>
+          <a:p>
+            <a:pPr algn="ctr" indent="0" marL="0">
+              <a:buNone/>
+            </a:pPr>
+            <a:r>
+              <a:rPr lang="en-US" sz="850" dirty="0">
+                <a:solidFill>
+                  <a:srgbClr val="78716C"/>
+                </a:solidFill>
+                <a:latin typeface="Arial" pitchFamily="34" charset="0"/>
+                <a:ea typeface="Arial" pitchFamily="34" charset="-122"/>
+                <a:cs typeface="Arial" pitchFamily="34" charset="-120"/>
+              </a:rPr>
+              <a:t>Base Case</a:t>
+            </a:r>
+            <a:endParaRPr lang="en-US" sz="850" dirty="0"/>
+          </a:p>
+        </p:txBody>
+      </p:sp>
+      <p:sp>
+        <p:nvSpPr>
+          <p:cNvPr id="13" name="Shape 11"/>
+          <p:cNvSpPr/>
+          <p:nvPr/>
+        </p:nvSpPr>
+        <p:spPr>
+          <a:xfrm>
+            <a:off x="5120640" y="1280160"/>
+            <a:ext cx="777240" cy="2926080"/>
+          </a:xfrm>
+          <a:prstGeom prst="rect">
+            <a:avLst/>
+          </a:prstGeom>
+          <a:solidFill>
+            <a:srgbClr val="B45309"/>
+          </a:solidFill>
+          <a:ln/>
+        </p:spPr>
+      </p:sp>
+      <p:sp>
+        <p:nvSpPr>
+          <p:cNvPr id="14" name="Text 12"/>
+          <p:cNvSpPr/>
+          <p:nvPr/>
+        </p:nvSpPr>
+        <p:spPr>
+          <a:xfrm>
+            <a:off x="4937760" y="1005840"/>
+            <a:ext cx="1143000" cy="237744"/>
+          </a:xfrm>
+          <a:prstGeom prst="rect">
+            <a:avLst/>
+          </a:prstGeom>
+          <a:noFill/>
+          <a:ln/>
+        </p:spPr>
+        <p:txBody>
+          <a:bodyPr wrap="square" rtlCol="0" anchor="ctr"/>
+          <a:lstStyle/>
+          <a:p>
+            <a:pPr algn="ctr" indent="0" marL="0">
+              <a:buNone/>
+            </a:pPr>
+            <a:r>
+              <a:rPr lang="en-US" sz="950" b="1" dirty="0">
                 <a:solidFill>
                   <a:srgbClr val="1C1917"/>
                 </a:solidFill>
@@ -8388,20 +6634,97 @@
                 <a:ea typeface="Arial" pitchFamily="34" charset="-122"/>
                 <a:cs typeface="Arial" pitchFamily="34" charset="-120"/>
               </a:rPr>
-              <a:t>Discount rate swing (8% to 12%) also shifts NPV, isolating rate's independent impact.</a:t>
-            </a:r>
-            <a:endParaRPr lang="en-US" sz="1500" dirty="0"/>
-          </a:p>
-          <a:p>
-            <a:pPr marL="152400" indent="-152400">
-              <a:spcAft>
-                <a:spcPts val="800"/>
-              </a:spcAft>
-              <a:buSzPct val="100000"/>
-              <a:buChar char="•"/>
-            </a:pPr>
-            <a:r>
-              <a:rPr lang="en-US" sz="1500" dirty="0">
+              <a:t>4.85</a:t>
+            </a:r>
+            <a:endParaRPr lang="en-US" sz="950" dirty="0"/>
+          </a:p>
+        </p:txBody>
+      </p:sp>
+      <p:sp>
+        <p:nvSpPr>
+          <p:cNvPr id="15" name="Text 13"/>
+          <p:cNvSpPr/>
+          <p:nvPr/>
+        </p:nvSpPr>
+        <p:spPr>
+          <a:xfrm>
+            <a:off x="4892040" y="4315968"/>
+            <a:ext cx="1234440" cy="502920"/>
+          </a:xfrm>
+          <a:prstGeom prst="rect">
+            <a:avLst/>
+          </a:prstGeom>
+          <a:noFill/>
+          <a:ln/>
+        </p:spPr>
+        <p:txBody>
+          <a:bodyPr wrap="square" rtlCol="0" anchor="ctr"/>
+          <a:lstStyle/>
+          <a:p>
+            <a:pPr algn="ctr" indent="0" marL="0">
+              <a:buNone/>
+            </a:pPr>
+            <a:r>
+              <a:rPr lang="en-US" sz="850" dirty="0">
+                <a:solidFill>
+                  <a:srgbClr val="78716C"/>
+                </a:solidFill>
+                <a:latin typeface="Arial" pitchFamily="34" charset="0"/>
+                <a:ea typeface="Arial" pitchFamily="34" charset="-122"/>
+                <a:cs typeface="Arial" pitchFamily="34" charset="-120"/>
+              </a:rPr>
+              <a:t>Bull Case</a:t>
+            </a:r>
+            <a:endParaRPr lang="en-US" sz="850" dirty="0"/>
+          </a:p>
+        </p:txBody>
+      </p:sp>
+      <p:sp>
+        <p:nvSpPr>
+          <p:cNvPr id="16" name="Shape 14"/>
+          <p:cNvSpPr/>
+          <p:nvPr/>
+        </p:nvSpPr>
+        <p:spPr>
+          <a:xfrm>
+            <a:off x="6995160" y="3017709"/>
+            <a:ext cx="777240" cy="1188531"/>
+          </a:xfrm>
+          <a:prstGeom prst="rect">
+            <a:avLst/>
+          </a:prstGeom>
+          <a:solidFill>
+            <a:srgbClr val="B45309"/>
+          </a:solidFill>
+          <a:ln/>
+        </p:spPr>
+      </p:sp>
+      <p:sp>
+        <p:nvSpPr>
+          <p:cNvPr id="17" name="Text 15"/>
+          <p:cNvSpPr/>
+          <p:nvPr/>
+        </p:nvSpPr>
+        <p:spPr>
+          <a:xfrm>
+            <a:off x="6812280" y="2743389"/>
+            <a:ext cx="1143000" cy="237744"/>
+          </a:xfrm>
+          <a:prstGeom prst="rect">
+            <a:avLst/>
+          </a:prstGeom>
+          <a:noFill/>
+          <a:ln/>
+        </p:spPr>
+        <p:txBody>
+          <a:bodyPr wrap="square" rtlCol="0" anchor="ctr"/>
+          <a:lstStyle/>
+          <a:p>
+            <a:pPr algn="ctr" indent="0" marL="0">
+              <a:buNone/>
+            </a:pPr>
+            <a:r>
+              <a:rPr lang="en-US" sz="950" b="1" dirty="0">
                 <a:solidFill>
                   <a:srgbClr val="1C1917"/>
                 </a:solidFill>
@@ -8409,51 +6732,22 @@
                 <a:ea typeface="Arial" pitchFamily="34" charset="-122"/>
                 <a:cs typeface="Arial" pitchFamily="34" charset="-120"/>
               </a:rPr>
-              <a:t>Each driver is tested separately; results feed directly into the tornado ranking.</a:t>
-            </a:r>
-            <a:endParaRPr lang="en-US" sz="1500" dirty="0"/>
-          </a:p>
-        </p:txBody>
-      </p:sp>
-      <p:sp>
-        <p:nvSpPr>
-          <p:cNvPr id="7" name="Shape 5"/>
-          <p:cNvSpPr/>
-          <p:nvPr/>
-        </p:nvSpPr>
-        <p:spPr>
-          <a:xfrm>
-            <a:off x="731520" y="4041648"/>
-            <a:ext cx="7680960" cy="566928"/>
-          </a:xfrm>
-          <a:prstGeom prst="roundRect">
-            <a:avLst>
-              <a:gd name="adj" fmla="val 12903"/>
-            </a:avLst>
-          </a:prstGeom>
-          <a:solidFill>
-            <a:srgbClr val="B45309">
-              <a:alpha val="12000"/>
-            </a:srgbClr>
-          </a:solidFill>
-          <a:ln w="12700">
-            <a:solidFill>
-              <a:srgbClr val="B45309"/>
-            </a:solidFill>
-            <a:prstDash val="solid"/>
-          </a:ln>
-        </p:spPr>
-      </p:sp>
-      <p:sp>
-        <p:nvSpPr>
-          <p:cNvPr id="8" name="Text 6"/>
-          <p:cNvSpPr/>
-          <p:nvPr/>
-        </p:nvSpPr>
-        <p:spPr>
-          <a:xfrm>
-            <a:off x="868680" y="4087368"/>
-            <a:ext cx="7406640" cy="475488"/>
+              <a:t>1.97</a:t>
+            </a:r>
+            <a:endParaRPr lang="en-US" sz="950" dirty="0"/>
+          </a:p>
+        </p:txBody>
+      </p:sp>
+      <p:sp>
+        <p:nvSpPr>
+          <p:cNvPr id="18" name="Text 16"/>
+          <p:cNvSpPr/>
+          <p:nvPr/>
+        </p:nvSpPr>
+        <p:spPr>
+          <a:xfrm>
+            <a:off x="6766560" y="4315968"/>
+            <a:ext cx="1234440" cy="502920"/>
           </a:xfrm>
           <a:prstGeom prst="rect">
             <a:avLst/>
@@ -8465,35 +6759,21 @@
           <a:bodyPr wrap="square" rtlCol="0" anchor="ctr"/>
           <a:lstStyle/>
           <a:p>
-            <a:pPr indent="0" marL="0">
-              <a:buNone/>
-            </a:pPr>
-            <a:r>
-              <a:rPr lang="en-US" sz="1100" b="1" dirty="0">
-                <a:solidFill>
-                  <a:srgbClr val="B45309"/>
-                </a:solidFill>
-                <a:latin typeface="Arial" pitchFamily="34" charset="0"/>
-                <a:ea typeface="Arial" pitchFamily="34" charset="-122"/>
-                <a:cs typeface="Arial" pitchFamily="34" charset="-120"/>
-              </a:rPr>
-              <a:t>Takeaway  </a:t>
-            </a:r>
-            <a:pPr indent="0" marL="0">
-              <a:buNone/>
-            </a:pPr>
-            <a:r>
-              <a:rPr lang="en-US" sz="1150" dirty="0">
-                <a:solidFill>
-                  <a:srgbClr val="1C1917"/>
-                </a:solidFill>
-                <a:latin typeface="Arial" pitchFamily="34" charset="0"/>
-                <a:ea typeface="Arial" pitchFamily="34" charset="-122"/>
-                <a:cs typeface="Arial" pitchFamily="34" charset="-120"/>
-              </a:rPr>
-              <a:t>A concrete two-year example shows exactly how one-way sensitivity quantifies each driver's leverage.</a:t>
-            </a:r>
-            <a:endParaRPr lang="en-US" sz="1100" dirty="0"/>
+            <a:pPr algn="ctr" indent="0" marL="0">
+              <a:buNone/>
+            </a:pPr>
+            <a:r>
+              <a:rPr lang="en-US" sz="850" dirty="0">
+                <a:solidFill>
+                  <a:srgbClr val="78716C"/>
+                </a:solidFill>
+                <a:latin typeface="Arial" pitchFamily="34" charset="0"/>
+                <a:ea typeface="Arial" pitchFamily="34" charset="-122"/>
+                <a:cs typeface="Arial" pitchFamily="34" charset="-120"/>
+              </a:rPr>
+              <a:t>Prob-Weighted Value</a:t>
+            </a:r>
+            <a:endParaRPr lang="en-US" sz="850" dirty="0"/>
           </a:p>
         </p:txBody>
       </p:sp>
@@ -8582,7 +6862,7 @@
                 <a:ea typeface="Arial" pitchFamily="34" charset="-122"/>
                 <a:cs typeface="Arial" pitchFamily="34" charset="-120"/>
               </a:rPr>
-              <a:t>Outputs and Checks</a:t>
+              <a:t>Variance-Based and Global Sensitivity Methods</a:t>
             </a:r>
             <a:endParaRPr lang="en-US" sz="2100" dirty="0"/>
           </a:p>
@@ -8687,7 +6967,7 @@
                 <a:ea typeface="Arial" pitchFamily="34" charset="-122"/>
                 <a:cs typeface="Arial" pitchFamily="34" charset="-120"/>
               </a:rPr>
-              <a:t>Deliverables: base-case output, tornado table, and named-scenario summary table.</a:t>
+              <a:t>One-at-a-time (OAT) analysis cannot detect interactions between inputs.</a:t>
             </a:r>
             <a:endParaRPr lang="en-US" sz="1500" dirty="0"/>
           </a:p>
@@ -8708,7 +6988,7 @@
                 <a:ea typeface="Arial" pitchFamily="34" charset="-122"/>
                 <a:cs typeface="Arial" pitchFamily="34" charset="-120"/>
               </a:rPr>
-              <a:t>Sign check: confirm each driver moves output in the expected direction.</a:t>
+              <a:t>High growth and margin compression often move together, not independently.</a:t>
             </a:r>
             <a:endParaRPr lang="en-US" sz="1500" dirty="0"/>
           </a:p>
@@ -8729,7 +7009,7 @@
                 <a:ea typeface="Arial" pitchFamily="34" charset="-122"/>
                 <a:cs typeface="Arial" pitchFamily="34" charset="-120"/>
               </a:rPr>
-              <a:t>Consistency check: base case must sit between downside and upside outputs.</a:t>
+              <a:t>Combined input effects are not simply the sum of individual effects.</a:t>
             </a:r>
             <a:endParaRPr lang="en-US" sz="1500" dirty="0"/>
           </a:p>
@@ -8750,7 +7030,28 @@
                 <a:ea typeface="Arial" pitchFamily="34" charset="-122"/>
                 <a:cs typeface="Arial" pitchFamily="34" charset="-120"/>
               </a:rPr>
-              <a:t>Limit tornado charts to top three to five drivers—more rows add noise, not insight.</a:t>
+              <a:t>Variance-based methods attribute output variance to inputs and their interactions.</a:t>
+            </a:r>
+            <a:endParaRPr lang="en-US" sz="1500" dirty="0"/>
+          </a:p>
+          <a:p>
+            <a:pPr marL="152400" indent="-152400">
+              <a:spcAft>
+                <a:spcPts val="800"/>
+              </a:spcAft>
+              <a:buSzPct val="100000"/>
+              <a:buChar char="•"/>
+            </a:pPr>
+            <a:r>
+              <a:rPr lang="en-US" sz="1500" dirty="0">
+                <a:solidFill>
+                  <a:srgbClr val="1C1917"/>
+                </a:solidFill>
+                <a:latin typeface="Arial" pitchFamily="34" charset="0"/>
+                <a:ea typeface="Arial" pitchFamily="34" charset="-122"/>
+                <a:cs typeface="Arial" pitchFamily="34" charset="-120"/>
+              </a:rPr>
+              <a:t>Global sensitivity methods give a more accurate picture of true model risk.</a:t>
             </a:r>
             <a:endParaRPr lang="en-US" sz="1500" dirty="0"/>
           </a:p>
@@ -8832,7 +7133,7 @@
                 <a:ea typeface="Arial" pitchFamily="34" charset="-122"/>
                 <a:cs typeface="Arial" pitchFamily="34" charset="-120"/>
               </a:rPr>
-              <a:t>Running systematic checks before presenting catches formula errors and keeps the narrative focused.</a:t>
+              <a:t>Variance-based methods reveal interaction effects that OAT analysis systematically misses.</a:t>
             </a:r>
             <a:endParaRPr lang="en-US" sz="1100" dirty="0"/>
           </a:p>
